--- a/slides/Retrain_or_teach.pptx
+++ b/slides/Retrain_or_teach.pptx
@@ -18,9 +18,10 @@
     <p:sldId id="266" r:id="rId12"/>
     <p:sldId id="267" r:id="rId13"/>
     <p:sldId id="268" r:id="rId14"/>
+    <p:sldId id="269" r:id="rId15"/>
   </p:sldIdLst>
   <p:notesMasterIdLst>
-    <p:notesMasterId r:id="rId15"/>
+    <p:notesMasterId r:id="rId16"/>
   </p:notesMasterIdLst>
   <p:sldSz cx="12192000" cy="6858000"/>
   <p:notesSz cx="6858000" cy="12192000"/>
@@ -119,7 +120,7 @@
   <p:extLst>
     <p:ext uri="{521415D9-36F7-43E2-AB2F-B90AF26B5E84}">
       <p14:sectionLst xmlns:p14="http://schemas.microsoft.com/office/powerpoint/2010/main">
-        <p14:section name="Part 1: It already knows more than it says" id="{66b3dc1e-e2ec-3876-cb43-5119ee88c72f}">
+        <p14:section name="Part 1: It already knows more than it says" id="{e80d6549-61f7-4b41-be94-c88098532136}">
           <p14:sldIdLst>
             <p14:sldId id="256"/>
             <p14:sldId id="257"/>
@@ -127,7 +128,7 @@
             <p14:sldId id="259"/>
           </p14:sldIdLst>
         </p14:section>
-        <p14:section name="Part 2: It needs knowledge it never had" id="{b02fff27-f0b5-669f-2b14-b2812e3b7258}">
+        <p14:section name="Part 2: It needs knowledge it never had" id="{b880f0b8-97d7-53b9-ca19-3ce921404b00}">
           <p14:sldIdLst>
             <p14:sldId id="260"/>
             <p14:sldId id="261"/>
@@ -136,12 +137,13 @@
             <p14:sldId id="264"/>
           </p14:sldIdLst>
         </p14:section>
-        <p14:section name="Train separately, average, and why it works" id="{8987a468-eac9-66f3-39cc-0f5e36ea4d56}">
+        <p14:section name="Train separately, average, and why it works" id="{164f90f1-dfaa-cdb7-7946-0c3624ab7ab6}">
           <p14:sldIdLst>
             <p14:sldId id="265"/>
             <p14:sldId id="266"/>
             <p14:sldId id="267"/>
             <p14:sldId id="268"/>
+            <p14:sldId id="269"/>
           </p14:sldIdLst>
         </p14:section>
       </p14:sectionLst>
@@ -900,7 +902,7 @@
           <a:p>
             <a:r>
               <a:rPr lang="en-US" dirty="0"/>
-              <a:t>Retrain or teach? Teach. Does the language matter? Less than you'd think. The question I'm chasing: if new knowledge is a direction we can add, average, and steer, do we ever need to retrain a model from scratch? Thanks.</a:t>
+              <a:t>Part two in one picture. Right means more new facts learned; up means general skills kept. Each single-language update learns but forgets. The mixture learns the most and forgets less. The average of the three single-language models, no extra training, sits top right: as many facts as the mixture and nothing lost.</a:t>
             </a:r>
             <a:endParaRPr lang="en-US" dirty="0"/>
           </a:p>
@@ -924,6 +926,94 @@
             <a:fld id="{F7021451-1387-4CA6-816F-3879F97B5CBC}" type="slidenum">
               <a:rPr lang="en-US"/>
               <a:t>13</a:t>
+            </a:fld>
+            <a:endParaRPr lang="en-US"/>
+          </a:p>
+        </p:txBody>
+      </p:sp>
+    </p:spTree>
+    <p:extLst>
+      <p:ext uri="{BB962C8B-B14F-4D97-AF65-F5344CB8AC3E}">
+        <p14:creationId xmlns:p14="http://schemas.microsoft.com/office/powerpoint/2010/main" val="1024086991"/>
+      </p:ext>
+    </p:extLst>
+  </p:cSld>
+  <p:clrMapOvr>
+    <a:masterClrMapping/>
+  </p:clrMapOvr>
+</p:notes>
+</file>
+
+<file path=ppt/notesSlides/notesSlide14.xml><?xml version="1.0" encoding="utf-8"?>
+<p:notes xmlns:a="http://schemas.openxmlformats.org/drawingml/2006/main" xmlns:r="http://schemas.openxmlformats.org/officeDocument/2006/relationships" xmlns:p="http://schemas.openxmlformats.org/presentationml/2006/main">
+  <p:cSld>
+    <p:spTree>
+      <p:nvGrpSpPr>
+        <p:cNvPr id="1" name=""/>
+        <p:cNvGrpSpPr/>
+        <p:nvPr/>
+      </p:nvGrpSpPr>
+      <p:grpSpPr>
+        <a:xfrm>
+          <a:off x="0" y="0"/>
+          <a:ext cx="0" cy="0"/>
+          <a:chOff x="0" y="0"/>
+          <a:chExt cx="0" cy="0"/>
+        </a:xfrm>
+      </p:grpSpPr>
+      <p:sp>
+        <p:nvSpPr>
+          <p:cNvPr id="2" name="Slide Image Placeholder 1"/>
+          <p:cNvSpPr>
+            <a:spLocks noGrp="1" noRot="1" noChangeAspect="1"/>
+          </p:cNvSpPr>
+          <p:nvPr>
+            <p:ph type="sldImg"/>
+          </p:nvPr>
+        </p:nvSpPr>
+        <p:spPr/>
+      </p:sp>
+      <p:sp>
+        <p:nvSpPr>
+          <p:cNvPr id="3" name="Notes Placeholder 2"/>
+          <p:cNvSpPr>
+            <a:spLocks noGrp="1"/>
+          </p:cNvSpPr>
+          <p:nvPr>
+            <p:ph type="body" idx="1"/>
+          </p:nvPr>
+        </p:nvSpPr>
+        <p:spPr/>
+        <p:txBody>
+          <a:bodyPr/>
+          <a:lstStyle/>
+          <a:p>
+            <a:r>
+              <a:rPr lang="en-US" dirty="0"/>
+              <a:t>Retrain or teach? Teach. Does the language matter? Less than you'd think. The question I'm chasing: if new knowledge is a direction we can add, average, and steer, do we ever need to retrain a model from scratch? Thanks.</a:t>
+            </a:r>
+            <a:endParaRPr lang="en-US" dirty="0"/>
+          </a:p>
+        </p:txBody>
+      </p:sp>
+      <p:sp>
+        <p:nvSpPr>
+          <p:cNvPr id="4" name="Slide Number Placeholder 3"/>
+          <p:cNvSpPr>
+            <a:spLocks noGrp="1"/>
+          </p:cNvSpPr>
+          <p:nvPr>
+            <p:ph type="sldNum" sz="quarter" idx="10"/>
+          </p:nvPr>
+        </p:nvSpPr>
+        <p:spPr/>
+        <p:txBody>
+          <a:bodyPr/>
+          <a:lstStyle/>
+          <a:p>
+            <a:fld id="{F7021451-1387-4CA6-816F-3879F97B5CBC}" type="slidenum">
+              <a:rPr lang="en-US"/>
+              <a:t>14</a:t>
             </a:fld>
             <a:endParaRPr lang="en-US"/>
           </a:p>
@@ -2607,6 +2697,9 @@
   <p:clrMapOvr>
     <a:masterClrMapping/>
   </p:clrMapOvr>
+  <p:transition spd="med">
+    <p:fade/>
+  </p:transition>
 </p:sld>
 </file>
 
@@ -3707,6 +3800,9 @@
   <p:clrMapOvr>
     <a:masterClrMapping/>
   </p:clrMapOvr>
+  <p:transition spd="med">
+    <p:fade/>
+  </p:transition>
 </p:sld>
 </file>
 
@@ -4478,6 +4574,9 @@
   <p:clrMapOvr>
     <a:masterClrMapping/>
   </p:clrMapOvr>
+  <p:transition spd="med">
+    <p:fade/>
+  </p:transition>
 </p:sld>
 </file>
 
@@ -5210,6 +5309,9 @@
   <p:clrMapOvr>
     <a:masterClrMapping/>
   </p:clrMapOvr>
+  <p:transition spd="med">
+    <p:fade/>
+  </p:transition>
 </p:sld>
 </file>
 
@@ -5262,6 +5364,239 @@
                   <a:schemeClr val="accent1"/>
                 </a:solidFill>
               </a:rPr>
+              <a:t>PART 2 · IN ONE PICTURE</a:t>
+            </a:r>
+            <a:endParaRPr lang="en-US" sz="1200" dirty="0"/>
+          </a:p>
+        </p:txBody>
+      </p:sp>
+      <p:sp>
+        <p:nvSpPr>
+          <p:cNvPr id="3" name="Text 0"/>
+          <p:cNvSpPr/>
+          <p:nvPr>
+            <p:ph idx="101" type="title" hasCustomPrompt="1"/>
+          </p:nvPr>
+        </p:nvSpPr>
+        <p:spPr>
+          <a:xfrm>
+            <a:off x="640080" y="731520"/>
+            <a:ext cx="10908792" cy="1097280"/>
+          </a:xfrm>
+          <a:prstGeom prst="rect">
+            <a:avLst/>
+          </a:prstGeom>
+          <a:noFill/>
+          <a:ln/>
+        </p:spPr>
+        <p:txBody>
+          <a:bodyPr wrap="square" lIns="0" tIns="0" rIns="0" bIns="0" rtlCol="0" anchor="t"/>
+          <a:lstStyle/>
+          <a:p>
+            <a:pPr algn="l" indent="0" marL="0">
+              <a:buNone/>
+            </a:pPr>
+            <a:r>
+              <a:rPr lang="en-US" sz="3200" b="1" dirty="0">
+                <a:solidFill>
+                  <a:schemeClr val="tx1"/>
+                </a:solidFill>
+              </a:rPr>
+              <a:t>Every update learns. </a:t>
+            </a:r>
+            <a:pPr algn="l" indent="0" marL="0">
+              <a:buNone/>
+            </a:pPr>
+            <a:r>
+              <a:rPr lang="en-US" sz="3200" b="1" i="1" dirty="0">
+                <a:solidFill>
+                  <a:srgbClr val="6B7280"/>
+                </a:solidFill>
+              </a:rPr>
+              <a:t>Only the average learns without losing.</a:t>
+            </a:r>
+            <a:endParaRPr lang="en-US" sz="3200" dirty="0"/>
+          </a:p>
+        </p:txBody>
+      </p:sp>
+      <p:pic>
+        <p:nvPicPr>
+          <p:cNvPr id="4" name="Image 0" descr="/tmp/claude-0/-home-user-Claude-expo-repo-36501/d3d88de1-f67d-5aa6-8097-3ece5ccf8bcb/scratchpad/build/summary_part2.png">    </p:cNvPr>
+          <p:cNvPicPr>
+            <a:picLocks noChangeAspect="1"/>
+          </p:cNvPicPr>
+          <p:nvPr/>
+        </p:nvPicPr>
+        <p:blipFill>
+          <a:blip r:embed="rId1"/>
+          <a:stretch>
+            <a:fillRect/>
+          </a:stretch>
+        </p:blipFill>
+        <p:spPr>
+          <a:xfrm>
+            <a:off x="2331720" y="1965960"/>
+            <a:ext cx="7498080" cy="3994831"/>
+          </a:xfrm>
+          <a:prstGeom prst="rect">
+            <a:avLst/>
+          </a:prstGeom>
+        </p:spPr>
+      </p:pic>
+      <p:sp>
+        <p:nvSpPr>
+          <p:cNvPr id="5" name="Text 0"/>
+          <p:cNvSpPr/>
+          <p:nvPr>
+            <p:ph idx="102" type="body" hasCustomPrompt="1"/>
+          </p:nvPr>
+        </p:nvSpPr>
+        <p:spPr>
+          <a:xfrm>
+            <a:off x="640080" y="5989320"/>
+            <a:ext cx="10908792" cy="548640"/>
+          </a:xfrm>
+          <a:prstGeom prst="rect">
+            <a:avLst/>
+          </a:prstGeom>
+          <a:noFill/>
+          <a:ln/>
+        </p:spPr>
+        <p:txBody>
+          <a:bodyPr wrap="square" lIns="0" tIns="0" rIns="0" bIns="0" rtlCol="0" anchor="ctr"/>
+          <a:lstStyle/>
+          <a:p>
+            <a:pPr indent="0" marL="0">
+              <a:buNone/>
+            </a:pPr>
+            <a:r>
+              <a:rPr lang="en-US" sz="1800" b="1" dirty="0">
+                <a:solidFill>
+                  <a:schemeClr val="tx1"/>
+                </a:solidFill>
+              </a:rPr>
+              <a:t>Right = more new facts. Up = nothing forgotten. </a:t>
+            </a:r>
+            <a:pPr indent="0" marL="0">
+              <a:buNone/>
+            </a:pPr>
+            <a:r>
+              <a:rPr lang="en-US" sz="1800" b="1" i="1" dirty="0">
+                <a:solidFill>
+                  <a:srgbClr val="6B7280"/>
+                </a:solidFill>
+              </a:rPr>
+              <a:t>Top right is where we want to be.</a:t>
+            </a:r>
+            <a:endParaRPr lang="en-US" sz="1800" dirty="0"/>
+          </a:p>
+        </p:txBody>
+      </p:sp>
+      <p:sp>
+        <p:nvSpPr>
+          <p:cNvPr id="25" name="Slide Number Placeholder 0"/>
+          <p:cNvSpPr>
+            <a:spLocks noGrp="1"/>
+          </p:cNvSpPr>
+          <p:nvPr>
+            <p:ph type="sldNum" sz="quarter" idx="4294967295"/>
+          </p:nvPr>
+        </p:nvSpPr>
+        <p:spPr>
+          <a:xfrm>
+            <a:off x="11247120" y="6446520"/>
+            <a:ext cx="548640" cy="274320"/>
+          </a:xfrm>
+          <a:prstGeom prst="rect">
+            <a:avLst/>
+          </a:prstGeom>
+          <a:extLst>
+            <a:ext uri="{C572A759-6A51-4108-AA02-DFA0A04FC94B}">
+              <ma14:wrappingTextBoxFlag xmlns:ma14="http://schemas.microsoft.com/office/mac/drawingml/2011/main" val="0"/>
+            </a:ext>
+          </a:extLst>
+        </p:spPr>
+        <p:txBody>
+          <a:bodyPr/>
+          <a:lstStyle>
+            <a:lvl1pPr>
+              <a:defRPr sz="1000">
+                <a:solidFill>
+                  <a:srgbClr val="9CA3AF"/>
+                </a:solidFill>
+              </a:defRPr>
+            </a:lvl1pPr>
+          </a:lstStyle>
+          <a:p>
+            <a:pPr algn="l"/>
+            <a:fld id="{F7021451-1387-4CA6-816F-3879F97B5CBC}" type="slidenum">
+              <a:rPr b="0" lang="en-US"/>
+              <a:t>13</a:t>
+            </a:fld>
+            <a:endParaRPr lang="en-US"/>
+          </a:p>
+        </p:txBody>
+      </p:sp>
+    </p:spTree>
+  </p:cSld>
+  <p:clrMapOvr>
+    <a:masterClrMapping/>
+  </p:clrMapOvr>
+  <p:transition spd="med">
+    <p:fade/>
+  </p:transition>
+</p:sld>
+</file>
+
+<file path=ppt/slides/slide14.xml><?xml version="1.0" encoding="utf-8"?>
+<p:sld xmlns:a="http://schemas.openxmlformats.org/drawingml/2006/main" xmlns:r="http://schemas.openxmlformats.org/officeDocument/2006/relationships" xmlns:p="http://schemas.openxmlformats.org/presentationml/2006/main">
+  <p:cSld name="Slide 14">
+    <p:spTree>
+      <p:nvGrpSpPr>
+        <p:cNvPr id="1" name=""/>
+        <p:cNvGrpSpPr/>
+        <p:nvPr/>
+      </p:nvGrpSpPr>
+      <p:grpSpPr>
+        <a:xfrm>
+          <a:off x="0" y="0"/>
+          <a:ext cx="0" cy="0"/>
+          <a:chOff x="0" y="0"/>
+          <a:chExt cx="0" cy="0"/>
+        </a:xfrm>
+      </p:grpSpPr>
+      <p:sp>
+        <p:nvSpPr>
+          <p:cNvPr id="2" name="Text 0"/>
+          <p:cNvSpPr/>
+          <p:nvPr>
+            <p:ph idx="100" type="body" hasCustomPrompt="1"/>
+          </p:nvPr>
+        </p:nvSpPr>
+        <p:spPr>
+          <a:xfrm>
+            <a:off x="640080" y="411480"/>
+            <a:ext cx="10908792" cy="320040"/>
+          </a:xfrm>
+          <a:prstGeom prst="rect">
+            <a:avLst/>
+          </a:prstGeom>
+          <a:noFill/>
+          <a:ln/>
+        </p:spPr>
+        <p:txBody>
+          <a:bodyPr wrap="square" lIns="0" tIns="0" rIns="0" bIns="0" rtlCol="0"/>
+          <a:lstStyle/>
+          <a:p>
+            <a:pPr indent="0" marL="0">
+              <a:buNone/>
+            </a:pPr>
+            <a:r>
+              <a:rPr lang="en-US" sz="1200" b="1" spc="300" kern="0" dirty="0">
+                <a:solidFill>
+                  <a:schemeClr val="accent1"/>
+                </a:solidFill>
+              </a:rPr>
               <a:t>SUMMARY</a:t>
             </a:r>
             <a:endParaRPr lang="en-US" sz="1200" dirty="0"/>
@@ -5681,7 +6016,7 @@
             <a:pPr algn="l"/>
             <a:fld id="{F7021451-1387-4CA6-816F-3879F97B5CBC}" type="slidenum">
               <a:rPr b="0" lang="en-US"/>
-              <a:t>13</a:t>
+              <a:t>14</a:t>
             </a:fld>
             <a:endParaRPr lang="en-US"/>
           </a:p>
@@ -5692,6 +6027,9 @@
   <p:clrMapOvr>
     <a:masterClrMapping/>
   </p:clrMapOvr>
+  <p:transition spd="med">
+    <p:fade/>
+  </p:transition>
 </p:sld>
 </file>
 
@@ -6640,6 +6978,9 @@
   <p:clrMapOvr>
     <a:masterClrMapping/>
   </p:clrMapOvr>
+  <p:transition spd="med">
+    <p:fade/>
+  </p:transition>
 </p:sld>
 </file>
 
@@ -7711,6 +8052,9 @@
   <p:clrMapOvr>
     <a:masterClrMapping/>
   </p:clrMapOvr>
+  <p:transition spd="med">
+    <p:fade/>
+  </p:transition>
 </p:sld>
 </file>
 
@@ -8452,6 +8796,9 @@
   <p:clrMapOvr>
     <a:masterClrMapping/>
   </p:clrMapOvr>
+  <p:transition spd="med">
+    <p:fade/>
+  </p:transition>
 </p:sld>
 </file>
 
@@ -9481,6 +9828,9 @@
   <p:clrMapOvr>
     <a:masterClrMapping/>
   </p:clrMapOvr>
+  <p:transition spd="med">
+    <p:fade/>
+  </p:transition>
 </p:sld>
 </file>
 
@@ -10259,6 +10609,9 @@
   <p:clrMapOvr>
     <a:masterClrMapping/>
   </p:clrMapOvr>
+  <p:transition spd="med">
+    <p:fade/>
+  </p:transition>
 </p:sld>
 </file>
 
@@ -10630,6 +10983,9 @@
   <p:clrMapOvr>
     <a:masterClrMapping/>
   </p:clrMapOvr>
+  <p:transition spd="med">
+    <p:fade/>
+  </p:transition>
 </p:sld>
 </file>
 
@@ -11320,6 +11676,9 @@
   <p:clrMapOvr>
     <a:masterClrMapping/>
   </p:clrMapOvr>
+  <p:transition spd="med">
+    <p:fade/>
+  </p:transition>
 </p:sld>
 </file>
 
@@ -11849,6 +12208,9 @@
   <p:clrMapOvr>
     <a:masterClrMapping/>
   </p:clrMapOvr>
+  <p:transition spd="med">
+    <p:fade/>
+  </p:transition>
 </p:sld>
 </file>
 

--- a/slides/Retrain_or_teach.pptx
+++ b/slides/Retrain_or_teach.pptx
@@ -121,7 +121,7 @@
   <p:extLst>
     <p:ext uri="{521415D9-36F7-43E2-AB2F-B90AF26B5E84}">
       <p14:sectionLst xmlns:p14="http://schemas.microsoft.com/office/powerpoint/2010/main">
-        <p14:section name="Part 1: It already knows more than it says" id="{4797ed7c-0820-0846-37ee-545e47683eea}">
+        <p14:section name="Part 1: It already knows more than it says" id="{6e0d703e-c2cf-01b8-cb05-7ab8dc35ccc6}">
           <p14:sldIdLst>
             <p14:sldId id="256"/>
             <p14:sldId id="257"/>
@@ -130,7 +130,7 @@
             <p14:sldId id="260"/>
           </p14:sldIdLst>
         </p14:section>
-        <p14:section name="Part 2: It needs knowledge it never had" id="{0c8f4e89-8e6f-f847-a948-5fcc20e29426}">
+        <p14:section name="Part 2: It needs knowledge it never had" id="{da8542b0-9e2d-f6d6-a841-609692f5f24f}">
           <p14:sldIdLst>
             <p14:sldId id="261"/>
             <p14:sldId id="262"/>
@@ -139,7 +139,7 @@
             <p14:sldId id="265"/>
           </p14:sldIdLst>
         </p14:section>
-        <p14:section name="Train separately, average, and why it works" id="{ac5ed8ae-c788-4b0e-af99-7557b9a7fd25}">
+        <p14:section name="Train separately, average, and why it works" id="{4c545d9e-82b1-0cea-13e3-9eb080c2bc2c}">
           <p14:sldIdLst>
             <p14:sldId id="266"/>
             <p14:sldId id="267"/>
@@ -7255,146 +7255,133 @@
         </p:nvSpPr>
         <p:spPr>
           <a:xfrm>
-            <a:off x="914400" y="2331720"/>
-            <a:ext cx="4754880" cy="274320"/>
-          </a:xfrm>
-          <a:prstGeom prst="rect">
-            <a:avLst/>
-          </a:prstGeom>
-          <a:noFill/>
-          <a:ln/>
-        </p:spPr>
-        <p:txBody>
-          <a:bodyPr wrap="square" lIns="0" tIns="0" rIns="0" bIns="0" rtlCol="0" anchor="ctr"/>
-          <a:lstStyle/>
-          <a:p>
-            <a:pPr indent="0" marL="0">
-              <a:buNone/>
-            </a:pPr>
-            <a:r>
-              <a:rPr lang="en-US" sz="1100" b="1" spc="200" kern="0" dirty="0">
+            <a:off x="640080" y="2514600"/>
+            <a:ext cx="5257800" cy="274320"/>
+          </a:xfrm>
+          <a:prstGeom prst="rect">
+            <a:avLst/>
+          </a:prstGeom>
+          <a:noFill/>
+          <a:ln/>
+        </p:spPr>
+        <p:txBody>
+          <a:bodyPr wrap="square" lIns="0" tIns="0" rIns="0" bIns="0" rtlCol="0" anchor="ctr"/>
+          <a:lstStyle/>
+          <a:p>
+            <a:pPr algn="ctr" indent="0" marL="0">
+              <a:buNone/>
+            </a:pPr>
+            <a:r>
+              <a:rPr lang="en-US" sz="1200" b="1" spc="300" kern="0" dirty="0">
                 <a:solidFill>
                   <a:srgbClr val="C2410C"/>
                 </a:solidFill>
               </a:rPr>
-              <a:t>WAY 1 · IT ALREADY KNOWS IT</a:t>
-            </a:r>
-            <a:endParaRPr lang="en-US" sz="1100" dirty="0"/>
-          </a:p>
-        </p:txBody>
-      </p:sp>
-      <p:sp>
-        <p:nvSpPr>
-          <p:cNvPr id="6" name="Text 4"/>
-          <p:cNvSpPr txBox="1"/>
-          <p:nvPr/>
-        </p:nvSpPr>
-        <p:spPr>
-          <a:xfrm>
-            <a:off x="914400" y="2651760"/>
-            <a:ext cx="4754880" cy="731520"/>
-          </a:xfrm>
-          <a:prstGeom prst="rect">
-            <a:avLst/>
-          </a:prstGeom>
-          <a:noFill/>
-          <a:ln/>
-        </p:spPr>
-        <p:txBody>
-          <a:bodyPr wrap="square" lIns="0" tIns="0" rIns="0" bIns="0" rtlCol="0" anchor="t"/>
-          <a:lstStyle/>
-          <a:p>
-            <a:pPr indent="0" marL="0">
-              <a:buNone/>
-            </a:pPr>
-            <a:r>
-              <a:rPr lang="en-US" sz="1900" b="1" dirty="0">
+              <a:t>WAY 1</a:t>
+            </a:r>
+            <a:endParaRPr lang="en-US" sz="1200" dirty="0"/>
+          </a:p>
+        </p:txBody>
+      </p:sp>
+      <p:pic>
+        <p:nvPicPr>
+          <p:cNvPr id="6" name="Image 0" descr="preencoded.png">    </p:cNvPr>
+          <p:cNvPicPr>
+            <a:picLocks noChangeAspect="1"/>
+          </p:cNvPicPr>
+          <p:nvPr/>
+        </p:nvPicPr>
+        <p:blipFill>
+          <a:blip r:embed="rId1"/>
+          <a:stretch>
+            <a:fillRect/>
+          </a:stretch>
+        </p:blipFill>
+        <p:spPr>
+          <a:xfrm>
+            <a:off x="2720340" y="2926080"/>
+            <a:ext cx="1097280" cy="1097280"/>
+          </a:xfrm>
+          <a:prstGeom prst="rect">
+            <a:avLst/>
+          </a:prstGeom>
+        </p:spPr>
+      </p:pic>
+      <p:sp>
+        <p:nvSpPr>
+          <p:cNvPr id="7" name="Text 4"/>
+          <p:cNvSpPr txBox="1"/>
+          <p:nvPr/>
+        </p:nvSpPr>
+        <p:spPr>
+          <a:xfrm>
+            <a:off x="640080" y="4206240"/>
+            <a:ext cx="5257800" cy="548640"/>
+          </a:xfrm>
+          <a:prstGeom prst="rect">
+            <a:avLst/>
+          </a:prstGeom>
+          <a:noFill/>
+          <a:ln/>
+        </p:spPr>
+        <p:txBody>
+          <a:bodyPr wrap="square" lIns="0" tIns="0" rIns="0" bIns="0" rtlCol="0" anchor="ctr"/>
+          <a:lstStyle/>
+          <a:p>
+            <a:pPr algn="ctr" indent="0" marL="0">
+              <a:buNone/>
+            </a:pPr>
+            <a:r>
+              <a:rPr lang="en-US" sz="2600" b="1" dirty="0">
                 <a:solidFill>
                   <a:srgbClr val="111827"/>
                 </a:solidFill>
               </a:rPr>
-              <a:t>The knowledge is in there, it just doesn't come out</a:t>
-            </a:r>
-            <a:endParaRPr lang="en-US" sz="1900" dirty="0"/>
-          </a:p>
-        </p:txBody>
-      </p:sp>
-      <p:sp>
-        <p:nvSpPr>
-          <p:cNvPr id="7" name="Text 5"/>
-          <p:cNvSpPr txBox="1"/>
-          <p:nvPr/>
-        </p:nvSpPr>
-        <p:spPr>
-          <a:xfrm>
-            <a:off x="914400" y="3429000"/>
-            <a:ext cx="4754880" cy="2286000"/>
-          </a:xfrm>
-          <a:prstGeom prst="rect">
-            <a:avLst/>
-          </a:prstGeom>
-          <a:noFill/>
-          <a:ln/>
-        </p:spPr>
-        <p:txBody>
-          <a:bodyPr wrap="square" lIns="0" tIns="0" rIns="0" bIns="0" rtlCol="0" anchor="t"/>
-          <a:lstStyle/>
-          <a:p>
-            <a:pPr indent="0" marL="0">
-              <a:spcAft>
-                <a:spcPts val="600"/>
-              </a:spcAft>
-              <a:buNone/>
-            </a:pPr>
-            <a:r>
-              <a:rPr lang="en-US" sz="1400" dirty="0">
-                <a:solidFill>
-                  <a:srgbClr val="374151"/>
-                </a:solidFill>
-              </a:rPr>
-              <a:t>1   Does the model know more than it says?</a:t>
-            </a:r>
-            <a:endParaRPr lang="en-US" sz="1400" dirty="0"/>
-          </a:p>
-          <a:p>
-            <a:pPr indent="0" marL="0">
-              <a:spcAft>
-                <a:spcPts val="600"/>
-              </a:spcAft>
-              <a:buNone/>
-            </a:pPr>
-            <a:r>
-              <a:rPr lang="en-US" sz="1400" dirty="0">
-                <a:solidFill>
-                  <a:srgbClr val="374151"/>
-                </a:solidFill>
-              </a:rPr>
-              <a:t>2   Can we get it out without training?</a:t>
-            </a:r>
-            <a:endParaRPr lang="en-US" sz="1400" dirty="0"/>
-          </a:p>
-          <a:p>
-            <a:pPr indent="0" marL="0">
-              <a:spcAft>
-                <a:spcPts val="600"/>
-              </a:spcAft>
-              <a:buNone/>
-            </a:pPr>
-            <a:r>
-              <a:rPr lang="en-US" sz="1400" dirty="0">
-                <a:solidFill>
-                  <a:srgbClr val="374151"/>
-                </a:solidFill>
-              </a:rPr>
-              <a:t>3   Where should we nudge?</a:t>
-            </a:r>
-            <a:endParaRPr lang="en-US" sz="1400" dirty="0"/>
-          </a:p>
-        </p:txBody>
-      </p:sp>
-      <p:sp>
-        <p:nvSpPr>
-          <p:cNvPr id="8" name="Shape 6"/>
+              <a:t>It already knows it</a:t>
+            </a:r>
+            <a:endParaRPr lang="en-US" sz="2600" dirty="0"/>
+          </a:p>
+        </p:txBody>
+      </p:sp>
+      <p:sp>
+        <p:nvSpPr>
+          <p:cNvPr id="8" name="Text 5"/>
+          <p:cNvSpPr txBox="1"/>
+          <p:nvPr/>
+        </p:nvSpPr>
+        <p:spPr>
+          <a:xfrm>
+            <a:off x="640080" y="4800600"/>
+            <a:ext cx="5257800" cy="365760"/>
+          </a:xfrm>
+          <a:prstGeom prst="rect">
+            <a:avLst/>
+          </a:prstGeom>
+          <a:noFill/>
+          <a:ln/>
+        </p:spPr>
+        <p:txBody>
+          <a:bodyPr wrap="square" lIns="0" tIns="0" rIns="0" bIns="0" rtlCol="0" anchor="ctr"/>
+          <a:lstStyle/>
+          <a:p>
+            <a:pPr algn="ctr" indent="0" marL="0">
+              <a:buNone/>
+            </a:pPr>
+            <a:r>
+              <a:rPr lang="en-US" sz="1600" dirty="0">
+                <a:solidFill>
+                  <a:srgbClr val="6B7280"/>
+                </a:solidFill>
+              </a:rPr>
+              <a:t>3 questions</a:t>
+            </a:r>
+            <a:endParaRPr lang="en-US" sz="1600" dirty="0"/>
+          </a:p>
+        </p:txBody>
+      </p:sp>
+      <p:sp>
+        <p:nvSpPr>
+          <p:cNvPr id="9" name="Shape 6"/>
           <p:cNvSpPr/>
           <p:nvPr/>
         </p:nvSpPr>
@@ -7421,203 +7408,139 @@
       </p:sp>
       <p:sp>
         <p:nvSpPr>
-          <p:cNvPr id="9" name="Text 7"/>
-          <p:cNvSpPr txBox="1"/>
-          <p:nvPr/>
-        </p:nvSpPr>
-        <p:spPr>
-          <a:xfrm>
-            <a:off x="6537960" y="2331720"/>
-            <a:ext cx="4754880" cy="274320"/>
-          </a:xfrm>
-          <a:prstGeom prst="rect">
-            <a:avLst/>
-          </a:prstGeom>
-          <a:noFill/>
-          <a:ln/>
-        </p:spPr>
-        <p:txBody>
-          <a:bodyPr wrap="square" lIns="0" tIns="0" rIns="0" bIns="0" rtlCol="0" anchor="ctr"/>
-          <a:lstStyle/>
-          <a:p>
-            <a:pPr indent="0" marL="0">
-              <a:buNone/>
-            </a:pPr>
-            <a:r>
-              <a:rPr lang="en-US" sz="1100" b="1" spc="200" kern="0" dirty="0">
+          <p:cNvPr id="10" name="Text 7"/>
+          <p:cNvSpPr txBox="1"/>
+          <p:nvPr/>
+        </p:nvSpPr>
+        <p:spPr>
+          <a:xfrm>
+            <a:off x="6263640" y="2514600"/>
+            <a:ext cx="5257800" cy="274320"/>
+          </a:xfrm>
+          <a:prstGeom prst="rect">
+            <a:avLst/>
+          </a:prstGeom>
+          <a:noFill/>
+          <a:ln/>
+        </p:spPr>
+        <p:txBody>
+          <a:bodyPr wrap="square" lIns="0" tIns="0" rIns="0" bIns="0" rtlCol="0" anchor="ctr"/>
+          <a:lstStyle/>
+          <a:p>
+            <a:pPr algn="ctr" indent="0" marL="0">
+              <a:buNone/>
+            </a:pPr>
+            <a:r>
+              <a:rPr lang="en-US" sz="1200" b="1" spc="300" kern="0" dirty="0">
                 <a:solidFill>
                   <a:srgbClr val="C2410C"/>
                 </a:solidFill>
               </a:rPr>
-              <a:t>WAY 2 · IT NEVER READ IT</a:t>
-            </a:r>
-            <a:endParaRPr lang="en-US" sz="1100" dirty="0"/>
-          </a:p>
-        </p:txBody>
-      </p:sp>
-      <p:sp>
-        <p:nvSpPr>
-          <p:cNvPr id="10" name="Text 8"/>
-          <p:cNvSpPr txBox="1"/>
-          <p:nvPr/>
-        </p:nvSpPr>
-        <p:spPr>
-          <a:xfrm>
-            <a:off x="6537960" y="2651760"/>
-            <a:ext cx="4754880" cy="731520"/>
-          </a:xfrm>
-          <a:prstGeom prst="rect">
-            <a:avLst/>
-          </a:prstGeom>
-          <a:noFill/>
-          <a:ln/>
-        </p:spPr>
-        <p:txBody>
-          <a:bodyPr wrap="square" lIns="0" tIns="0" rIns="0" bIns="0" rtlCol="0" anchor="t"/>
-          <a:lstStyle/>
-          <a:p>
-            <a:pPr indent="0" marL="0">
-              <a:buNone/>
-            </a:pPr>
-            <a:r>
-              <a:rPr lang="en-US" sz="1900" b="1" dirty="0">
+              <a:t>WAY 2</a:t>
+            </a:r>
+            <a:endParaRPr lang="en-US" sz="1200" dirty="0"/>
+          </a:p>
+        </p:txBody>
+      </p:sp>
+      <p:pic>
+        <p:nvPicPr>
+          <p:cNvPr id="11" name="Image 1" descr="preencoded.png">    </p:cNvPr>
+          <p:cNvPicPr>
+            <a:picLocks noChangeAspect="1"/>
+          </p:cNvPicPr>
+          <p:nvPr/>
+        </p:nvPicPr>
+        <p:blipFill>
+          <a:blip r:embed="rId2"/>
+          <a:stretch>
+            <a:fillRect/>
+          </a:stretch>
+        </p:blipFill>
+        <p:spPr>
+          <a:xfrm>
+            <a:off x="8343900" y="2926080"/>
+            <a:ext cx="1097280" cy="1097280"/>
+          </a:xfrm>
+          <a:prstGeom prst="rect">
+            <a:avLst/>
+          </a:prstGeom>
+        </p:spPr>
+      </p:pic>
+      <p:sp>
+        <p:nvSpPr>
+          <p:cNvPr id="12" name="Text 8"/>
+          <p:cNvSpPr txBox="1"/>
+          <p:nvPr/>
+        </p:nvSpPr>
+        <p:spPr>
+          <a:xfrm>
+            <a:off x="6263640" y="4206240"/>
+            <a:ext cx="5257800" cy="548640"/>
+          </a:xfrm>
+          <a:prstGeom prst="rect">
+            <a:avLst/>
+          </a:prstGeom>
+          <a:noFill/>
+          <a:ln/>
+        </p:spPr>
+        <p:txBody>
+          <a:bodyPr wrap="square" lIns="0" tIns="0" rIns="0" bIns="0" rtlCol="0" anchor="ctr"/>
+          <a:lstStyle/>
+          <a:p>
+            <a:pPr algn="ctr" indent="0" marL="0">
+              <a:buNone/>
+            </a:pPr>
+            <a:r>
+              <a:rPr lang="en-US" sz="2600" b="1" dirty="0">
                 <a:solidFill>
                   <a:srgbClr val="111827"/>
                 </a:solidFill>
               </a:rPr>
-              <a:t>Yesterday's news: now it has to learn</a:t>
-            </a:r>
-            <a:endParaRPr lang="en-US" sz="1900" dirty="0"/>
-          </a:p>
-        </p:txBody>
-      </p:sp>
-      <p:sp>
-        <p:nvSpPr>
-          <p:cNvPr id="11" name="Text 9"/>
-          <p:cNvSpPr txBox="1"/>
-          <p:nvPr/>
-        </p:nvSpPr>
-        <p:spPr>
-          <a:xfrm>
-            <a:off x="6537960" y="3429000"/>
-            <a:ext cx="4754880" cy="2286000"/>
-          </a:xfrm>
-          <a:prstGeom prst="rect">
-            <a:avLst/>
-          </a:prstGeom>
-          <a:noFill/>
-          <a:ln/>
-        </p:spPr>
-        <p:txBody>
-          <a:bodyPr wrap="square" lIns="0" tIns="0" rIns="0" bIns="0" rtlCol="0" anchor="t"/>
-          <a:lstStyle/>
-          <a:p>
-            <a:pPr indent="0" marL="0">
-              <a:spcAft>
-                <a:spcPts val="600"/>
-              </a:spcAft>
-              <a:buNone/>
-            </a:pPr>
-            <a:r>
-              <a:rPr lang="en-US" sz="1400" dirty="0">
-                <a:solidFill>
-                  <a:srgbClr val="374151"/>
-                </a:solidFill>
-              </a:rPr>
-              <a:t>4   How do we teach it, cheaply?</a:t>
-            </a:r>
-            <a:endParaRPr lang="en-US" sz="1400" dirty="0"/>
-          </a:p>
-          <a:p>
-            <a:pPr indent="0" marL="0">
-              <a:spcAft>
-                <a:spcPts val="600"/>
-              </a:spcAft>
-              <a:buNone/>
-            </a:pPr>
-            <a:r>
-              <a:rPr lang="en-US" sz="1400" dirty="0">
-                <a:solidFill>
-                  <a:srgbClr val="374151"/>
-                </a:solidFill>
-              </a:rPr>
-              <a:t>5   Taught in English, does it know it in German?</a:t>
-            </a:r>
-            <a:endParaRPr lang="en-US" sz="1400" dirty="0"/>
-          </a:p>
-          <a:p>
-            <a:pPr indent="0" marL="0">
-              <a:spcAft>
-                <a:spcPts val="600"/>
-              </a:spcAft>
-              <a:buNone/>
-            </a:pPr>
-            <a:r>
-              <a:rPr lang="en-US" sz="1400" dirty="0">
-                <a:solidFill>
-                  <a:srgbClr val="374151"/>
-                </a:solidFill>
-              </a:rPr>
-              <a:t>6   What decides how much it learns?</a:t>
-            </a:r>
-            <a:endParaRPr lang="en-US" sz="1400" dirty="0"/>
-          </a:p>
-          <a:p>
-            <a:pPr indent="0" marL="0">
-              <a:spcAft>
-                <a:spcPts val="600"/>
-              </a:spcAft>
-              <a:buNone/>
-            </a:pPr>
-            <a:r>
-              <a:rPr lang="en-US" sz="1400" dirty="0">
-                <a:solidFill>
-                  <a:srgbClr val="374151"/>
-                </a:solidFill>
-              </a:rPr>
-              <a:t>7   What does it cost?</a:t>
-            </a:r>
-            <a:endParaRPr lang="en-US" sz="1400" dirty="0"/>
-          </a:p>
-          <a:p>
-            <a:pPr indent="0" marL="0">
-              <a:spcAft>
-                <a:spcPts val="600"/>
-              </a:spcAft>
-              <a:buNone/>
-            </a:pPr>
-            <a:r>
-              <a:rPr lang="en-US" sz="1400" dirty="0">
-                <a:solidFill>
-                  <a:srgbClr val="374151"/>
-                </a:solidFill>
-              </a:rPr>
-              <a:t>8   Can we keep the facts without the cost?</a:t>
-            </a:r>
-            <a:endParaRPr lang="en-US" sz="1400" dirty="0"/>
-          </a:p>
-          <a:p>
-            <a:pPr indent="0" marL="0">
-              <a:spcAft>
-                <a:spcPts val="600"/>
-              </a:spcAft>
-              <a:buNone/>
-            </a:pPr>
-            <a:r>
-              <a:rPr lang="en-US" sz="1400" dirty="0">
-                <a:solidFill>
-                  <a:srgbClr val="374151"/>
-                </a:solidFill>
-              </a:rPr>
-              <a:t>9   Why does that work?</a:t>
-            </a:r>
-            <a:endParaRPr lang="en-US" sz="1400" dirty="0"/>
-          </a:p>
-        </p:txBody>
-      </p:sp>
-      <p:sp>
-        <p:nvSpPr>
-          <p:cNvPr id="12" name="Text 0"/>
+              <a:t>It never read it</a:t>
+            </a:r>
+            <a:endParaRPr lang="en-US" sz="2600" dirty="0"/>
+          </a:p>
+        </p:txBody>
+      </p:sp>
+      <p:sp>
+        <p:nvSpPr>
+          <p:cNvPr id="13" name="Text 9"/>
+          <p:cNvSpPr txBox="1"/>
+          <p:nvPr/>
+        </p:nvSpPr>
+        <p:spPr>
+          <a:xfrm>
+            <a:off x="6263640" y="4800600"/>
+            <a:ext cx="5257800" cy="365760"/>
+          </a:xfrm>
+          <a:prstGeom prst="rect">
+            <a:avLst/>
+          </a:prstGeom>
+          <a:noFill/>
+          <a:ln/>
+        </p:spPr>
+        <p:txBody>
+          <a:bodyPr wrap="square" lIns="0" tIns="0" rIns="0" bIns="0" rtlCol="0" anchor="ctr"/>
+          <a:lstStyle/>
+          <a:p>
+            <a:pPr algn="ctr" indent="0" marL="0">
+              <a:buNone/>
+            </a:pPr>
+            <a:r>
+              <a:rPr lang="en-US" sz="1600" dirty="0">
+                <a:solidFill>
+                  <a:srgbClr val="6B7280"/>
+                </a:solidFill>
+              </a:rPr>
+              <a:t>6 questions</a:t>
+            </a:r>
+            <a:endParaRPr lang="en-US" sz="1600" dirty="0"/>
+          </a:p>
+        </p:txBody>
+      </p:sp>
+      <p:sp>
+        <p:nvSpPr>
+          <p:cNvPr id="14" name="Text 0"/>
           <p:cNvSpPr/>
           <p:nvPr>
             <p:ph idx="102" type="body" hasCustomPrompt="1"/>
@@ -7647,7 +7570,7 @@
                   <a:schemeClr val="tx1"/>
                 </a:solidFill>
               </a:rPr>
-              <a:t>Nine small questions. </a:t>
+              <a:t>Nine questions. </a:t>
             </a:r>
             <a:pPr indent="0" marL="0">
               <a:buNone/>

--- a/slides/Retrain_or_teach.pptx
+++ b/slides/Retrain_or_teach.pptx
@@ -18,11 +18,9 @@
     <p:sldId id="266" r:id="rId12"/>
     <p:sldId id="267" r:id="rId13"/>
     <p:sldId id="268" r:id="rId14"/>
-    <p:sldId id="269" r:id="rId15"/>
-    <p:sldId id="270" r:id="rId16"/>
   </p:sldIdLst>
   <p:notesMasterIdLst>
-    <p:notesMasterId r:id="rId17"/>
+    <p:notesMasterId r:id="rId15"/>
   </p:notesMasterIdLst>
   <p:sldSz cx="12192000" cy="6858000"/>
   <p:notesSz cx="6858000" cy="12192000"/>
@@ -121,7 +119,7 @@
   <p:extLst>
     <p:ext uri="{521415D9-36F7-43E2-AB2F-B90AF26B5E84}">
       <p14:sectionLst xmlns:p14="http://schemas.microsoft.com/office/powerpoint/2010/main">
-        <p14:section name="Part 1: It already knows more than it says" id="{6e0d703e-c2cf-01b8-cb05-7ab8dc35ccc6}">
+        <p14:section name="Part 1: It already knows more than it says" id="{7e6aec92-26ae-cfa2-9c8e-31f7dac9bb10}">
           <p14:sldIdLst>
             <p14:sldId id="256"/>
             <p14:sldId id="257"/>
@@ -130,22 +128,20 @@
             <p14:sldId id="260"/>
           </p14:sldIdLst>
         </p14:section>
-        <p14:section name="Part 2: It needs knowledge it never had" id="{da8542b0-9e2d-f6d6-a841-609692f5f24f}">
+        <p14:section name="Part 2: It needs knowledge it never had" id="{494eed78-a698-5c6d-709d-b4c400dc676c}">
           <p14:sldIdLst>
             <p14:sldId id="261"/>
             <p14:sldId id="262"/>
             <p14:sldId id="263"/>
             <p14:sldId id="264"/>
-            <p14:sldId id="265"/>
           </p14:sldIdLst>
         </p14:section>
-        <p14:section name="Train separately, average, and why it works" id="{4c545d9e-82b1-0cea-13e3-9eb080c2bc2c}">
+        <p14:section name="Train separately, average, and why it works" id="{ed4eb2d3-e00f-4847-66e0-de31c32f3f6b}">
           <p14:sldIdLst>
+            <p14:sldId id="265"/>
             <p14:sldId id="266"/>
             <p14:sldId id="267"/>
             <p14:sldId id="268"/>
-            <p14:sldId id="269"/>
-            <p14:sldId id="270"/>
           </p14:sldIdLst>
         </p14:section>
       </p14:sectionLst>
@@ -640,7 +636,7 @@
           <a:p>
             <a:r>
               <a:rPr lang="en-US" dirty="0"/>
-              <a:t>Old facts from before 2023: kept, slightly up. General skills on twenty tests in three languages: they slip. French-only loses 1.2, German 1.3, English 0.5. Test the French model only in French and it looks fine. Catastrophic forgetting in a new disguise, and the multilingual lens makes it visible.</a:t>
+              <a:t>Take the three single-language models and average their weights: add the numbers, divide by three. No training. Model soups, Wortsman et al. 2022. As many new facts as the mixture, plus 5.1, and zero skill loss. It beats every single-language model on both axes. Language-specific updates can be trained separately and merged.</a:t>
             </a:r>
             <a:endParaRPr lang="en-US" dirty="0"/>
           </a:p>
@@ -728,7 +724,7 @@
           <a:p>
             <a:r>
               <a:rPr lang="en-US" dirty="0"/>
-              <a:t>The obvious fix: mix all three newspapers. A balanced mix learns more facts than any single language, plus 5 points, and loses only 0.3. But can we do better, without training anything new?</a:t>
+              <a:t>Preliminary. Each language update moves the model in a different direction; similarity only about 0.15. Averaging cancels most of each language-specific part and keeps what all three share: about 65% as far from base as a single update. Keep only the MLP changes and 92 to 100% of the new facts survive, the same place steering found. Running now: is averaging a shorter, safer step or a better direction? And can we walk further along it?</a:t>
             </a:r>
             <a:endParaRPr lang="en-US" dirty="0"/>
           </a:p>
@@ -816,7 +812,7 @@
           <a:p>
             <a:r>
               <a:rPr lang="en-US" dirty="0"/>
-              <a:t>Take the three single-language models and average their weights: add the numbers, divide by three. No training. Model soups, Wortsman et al. 2022. As many new facts as the mixture, plus 5.1, and zero skill loss. It beats every single-language model on both axes. Language-specific updates can be trained separately and merged.</a:t>
+              <a:t>Part two in one picture. Right means more new facts learned; up means general skills kept. Each single-language update learns but forgets. The mixture learns the most and forgets less. The average of the three single-language models, no extra training, sits top right: as many facts as the mixture and nothing lost.</a:t>
             </a:r>
             <a:endParaRPr lang="en-US" dirty="0"/>
           </a:p>
@@ -904,7 +900,7 @@
           <a:p>
             <a:r>
               <a:rPr lang="en-US" dirty="0"/>
-              <a:t>Preliminary. Each language update moves the model in a different direction; similarity only about 0.15. Averaging cancels most of each language-specific part and keeps what all three share: about 65% as far from base as a single update. Keep only the MLP changes and 92 to 100% of the new facts survive, the same place steering found. Running now: is averaging a shorter, safer step or a better direction? And can we walk further along it?</a:t>
+              <a:t>The answers. Retrain or teach? Teach. If it already knows it, steer it. If it never read it, let it read, then average. Does the language matter? Less than you'd think. And the question I'm chasing: if new knowledge is a direction we can add, average and steer, do we ever need to retrain from scratch? Thank you.</a:t>
             </a:r>
             <a:endParaRPr lang="en-US" dirty="0"/>
           </a:p>
@@ -928,182 +924,6 @@
             <a:fld id="{F7021451-1387-4CA6-816F-3879F97B5CBC}" type="slidenum">
               <a:rPr lang="en-US"/>
               <a:t>13</a:t>
-            </a:fld>
-            <a:endParaRPr lang="en-US"/>
-          </a:p>
-        </p:txBody>
-      </p:sp>
-    </p:spTree>
-    <p:extLst>
-      <p:ext uri="{BB962C8B-B14F-4D97-AF65-F5344CB8AC3E}">
-        <p14:creationId xmlns:p14="http://schemas.microsoft.com/office/powerpoint/2010/main" val="1024086991"/>
-      </p:ext>
-    </p:extLst>
-  </p:cSld>
-  <p:clrMapOvr>
-    <a:masterClrMapping/>
-  </p:clrMapOvr>
-</p:notes>
-</file>
-
-<file path=ppt/notesSlides/notesSlide14.xml><?xml version="1.0" encoding="utf-8"?>
-<p:notes xmlns:a="http://schemas.openxmlformats.org/drawingml/2006/main" xmlns:r="http://schemas.openxmlformats.org/officeDocument/2006/relationships" xmlns:p="http://schemas.openxmlformats.org/presentationml/2006/main">
-  <p:cSld>
-    <p:spTree>
-      <p:nvGrpSpPr>
-        <p:cNvPr id="1" name=""/>
-        <p:cNvGrpSpPr/>
-        <p:nvPr/>
-      </p:nvGrpSpPr>
-      <p:grpSpPr>
-        <a:xfrm>
-          <a:off x="0" y="0"/>
-          <a:ext cx="0" cy="0"/>
-          <a:chOff x="0" y="0"/>
-          <a:chExt cx="0" cy="0"/>
-        </a:xfrm>
-      </p:grpSpPr>
-      <p:sp>
-        <p:nvSpPr>
-          <p:cNvPr id="2" name="Slide Image Placeholder 1"/>
-          <p:cNvSpPr>
-            <a:spLocks noGrp="1" noRot="1" noChangeAspect="1"/>
-          </p:cNvSpPr>
-          <p:nvPr>
-            <p:ph type="sldImg"/>
-          </p:nvPr>
-        </p:nvSpPr>
-        <p:spPr/>
-      </p:sp>
-      <p:sp>
-        <p:nvSpPr>
-          <p:cNvPr id="3" name="Notes Placeholder 2"/>
-          <p:cNvSpPr>
-            <a:spLocks noGrp="1"/>
-          </p:cNvSpPr>
-          <p:nvPr>
-            <p:ph type="body" idx="1"/>
-          </p:nvPr>
-        </p:nvSpPr>
-        <p:spPr/>
-        <p:txBody>
-          <a:bodyPr/>
-          <a:lstStyle/>
-          <a:p>
-            <a:r>
-              <a:rPr lang="en-US" dirty="0"/>
-              <a:t>Part two in one picture. Right means more new facts learned; up means general skills kept. Each single-language update learns but forgets. The mixture learns the most and forgets less. The average of the three single-language models, no extra training, sits top right: as many facts as the mixture and nothing lost.</a:t>
-            </a:r>
-            <a:endParaRPr lang="en-US" dirty="0"/>
-          </a:p>
-        </p:txBody>
-      </p:sp>
-      <p:sp>
-        <p:nvSpPr>
-          <p:cNvPr id="4" name="Slide Number Placeholder 3"/>
-          <p:cNvSpPr>
-            <a:spLocks noGrp="1"/>
-          </p:cNvSpPr>
-          <p:nvPr>
-            <p:ph type="sldNum" sz="quarter" idx="10"/>
-          </p:nvPr>
-        </p:nvSpPr>
-        <p:spPr/>
-        <p:txBody>
-          <a:bodyPr/>
-          <a:lstStyle/>
-          <a:p>
-            <a:fld id="{F7021451-1387-4CA6-816F-3879F97B5CBC}" type="slidenum">
-              <a:rPr lang="en-US"/>
-              <a:t>14</a:t>
-            </a:fld>
-            <a:endParaRPr lang="en-US"/>
-          </a:p>
-        </p:txBody>
-      </p:sp>
-    </p:spTree>
-    <p:extLst>
-      <p:ext uri="{BB962C8B-B14F-4D97-AF65-F5344CB8AC3E}">
-        <p14:creationId xmlns:p14="http://schemas.microsoft.com/office/powerpoint/2010/main" val="1024086991"/>
-      </p:ext>
-    </p:extLst>
-  </p:cSld>
-  <p:clrMapOvr>
-    <a:masterClrMapping/>
-  </p:clrMapOvr>
-</p:notes>
-</file>
-
-<file path=ppt/notesSlides/notesSlide15.xml><?xml version="1.0" encoding="utf-8"?>
-<p:notes xmlns:a="http://schemas.openxmlformats.org/drawingml/2006/main" xmlns:r="http://schemas.openxmlformats.org/officeDocument/2006/relationships" xmlns:p="http://schemas.openxmlformats.org/presentationml/2006/main">
-  <p:cSld>
-    <p:spTree>
-      <p:nvGrpSpPr>
-        <p:cNvPr id="1" name=""/>
-        <p:cNvGrpSpPr/>
-        <p:nvPr/>
-      </p:nvGrpSpPr>
-      <p:grpSpPr>
-        <a:xfrm>
-          <a:off x="0" y="0"/>
-          <a:ext cx="0" cy="0"/>
-          <a:chOff x="0" y="0"/>
-          <a:chExt cx="0" cy="0"/>
-        </a:xfrm>
-      </p:grpSpPr>
-      <p:sp>
-        <p:nvSpPr>
-          <p:cNvPr id="2" name="Slide Image Placeholder 1"/>
-          <p:cNvSpPr>
-            <a:spLocks noGrp="1" noRot="1" noChangeAspect="1"/>
-          </p:cNvSpPr>
-          <p:nvPr>
-            <p:ph type="sldImg"/>
-          </p:nvPr>
-        </p:nvSpPr>
-        <p:spPr/>
-      </p:sp>
-      <p:sp>
-        <p:nvSpPr>
-          <p:cNvPr id="3" name="Notes Placeholder 2"/>
-          <p:cNvSpPr>
-            <a:spLocks noGrp="1"/>
-          </p:cNvSpPr>
-          <p:nvPr>
-            <p:ph type="body" idx="1"/>
-          </p:nvPr>
-        </p:nvSpPr>
-        <p:spPr/>
-        <p:txBody>
-          <a:bodyPr/>
-          <a:lstStyle/>
-          <a:p>
-            <a:r>
-              <a:rPr lang="en-US" dirty="0"/>
-              <a:t>The answers. Retrain or teach? Teach. If it already knows it, steer it. If it never read it, let it read, then average. Does the language matter? Less than you'd think. And the question I'm chasing: if new knowledge is a direction we can add, average and steer, do we ever need to retrain from scratch? Thank you.</a:t>
-            </a:r>
-            <a:endParaRPr lang="en-US" dirty="0"/>
-          </a:p>
-        </p:txBody>
-      </p:sp>
-      <p:sp>
-        <p:nvSpPr>
-          <p:cNvPr id="4" name="Slide Number Placeholder 3"/>
-          <p:cNvSpPr>
-            <a:spLocks noGrp="1"/>
-          </p:cNvSpPr>
-          <p:nvPr>
-            <p:ph type="sldNum" sz="quarter" idx="10"/>
-          </p:nvPr>
-        </p:nvSpPr>
-        <p:spPr/>
-        <p:txBody>
-          <a:bodyPr/>
-          <a:lstStyle/>
-          <a:p>
-            <a:fld id="{F7021451-1387-4CA6-816F-3879F97B5CBC}" type="slidenum">
-              <a:rPr lang="en-US"/>
-              <a:t>15</a:t>
             </a:fld>
             <a:endParaRPr lang="en-US"/>
           </a:p>
@@ -1784,7 +1604,7 @@
           <a:p>
             <a:r>
               <a:rPr lang="en-US" dirty="0"/>
-              <a:t>Facts mentioned a few times gain about two points; facts mentioned 200 or more times gain 10 to 14 points in the training language and 8 to 11 in the others. Each model learns its own newspaper's events best: what it read matters about twice as much as which language you ask in.</a:t>
+              <a:t>Old facts from before 2023: kept, slightly up. General skills on twenty tests in three languages: they slip. French-only loses 1.2, German 1.3, English 0.5. Test the French model only in French and it looks fine. Catastrophic forgetting in a new disguise, and the multilingual lens makes it visible.</a:t>
             </a:r>
             <a:endParaRPr lang="en-US" dirty="0"/>
           </a:p>
@@ -2995,9 +2815,6 @@
   <p:clrMapOvr>
     <a:masterClrMapping/>
   </p:clrMapOvr>
-  <p:transition spd="med">
-    <p:fade/>
-  </p:transition>
 </p:sld>
 </file>
 
@@ -3088,7 +2905,7 @@
                   <a:schemeClr val="tx1"/>
                 </a:solidFill>
               </a:rPr>
-              <a:t>What does it cost?</a:t>
+              <a:t>Can we keep the facts without the cost?</a:t>
             </a:r>
             <a:endParaRPr lang="en-US" sz="3200" dirty="0"/>
           </a:p>
@@ -3102,20 +2919,18 @@
         </p:nvSpPr>
         <p:spPr>
           <a:xfrm>
-            <a:off x="640080" y="2286000"/>
-            <a:ext cx="5212080" cy="3108960"/>
-          </a:xfrm>
-          <a:prstGeom prst="roundRect">
-            <a:avLst>
-              <a:gd name="adj" fmla="val 3529"/>
-            </a:avLst>
+            <a:off x="1280160" y="2743200"/>
+            <a:ext cx="1005840" cy="1005840"/>
+          </a:xfrm>
+          <a:prstGeom prst="ellipse">
+            <a:avLst/>
           </a:prstGeom>
           <a:solidFill>
-            <a:srgbClr val="F9FAFB"/>
+            <a:srgbClr val="2563EB"/>
           </a:solidFill>
           <a:ln w="12700">
             <a:solidFill>
-              <a:srgbClr val="E5E7EB"/>
+              <a:srgbClr val="2563EB"/>
             </a:solidFill>
             <a:prstDash val="solid"/>
           </a:ln>
@@ -3129,8 +2944,8 @@
         </p:nvSpPr>
         <p:spPr>
           <a:xfrm>
-            <a:off x="640080" y="2514600"/>
-            <a:ext cx="5212080" cy="320040"/>
+            <a:off x="1280160" y="2743200"/>
+            <a:ext cx="1005840" cy="1005840"/>
           </a:xfrm>
           <a:prstGeom prst="rect">
             <a:avLst/>
@@ -3146,14 +2961,14 @@
               <a:buNone/>
             </a:pPr>
             <a:r>
-              <a:rPr lang="en-US" sz="1200" b="1" spc="200" kern="0" dirty="0">
-                <a:solidFill>
-                  <a:srgbClr val="6B7280"/>
-                </a:solidFill>
-              </a:rPr>
-              <a:t>FACTS FROM BEFORE 2023</a:t>
-            </a:r>
-            <a:endParaRPr lang="en-US" sz="1200" dirty="0"/>
+              <a:rPr lang="en-US" sz="2600" b="1" dirty="0">
+                <a:solidFill>
+                  <a:srgbClr val="FFFFFF"/>
+                </a:solidFill>
+              </a:rPr>
+              <a:t>EN</a:t>
+            </a:r>
+            <a:endParaRPr lang="en-US" sz="2600" dirty="0"/>
           </a:p>
         </p:txBody>
       </p:sp>
@@ -3165,8 +2980,8 @@
         </p:nvSpPr>
         <p:spPr>
           <a:xfrm>
-            <a:off x="640080" y="2926080"/>
-            <a:ext cx="5212080" cy="1463040"/>
+            <a:off x="2377440" y="2743200"/>
+            <a:ext cx="457200" cy="1005840"/>
           </a:xfrm>
           <a:prstGeom prst="rect">
             <a:avLst/>
@@ -3182,78 +2997,37 @@
               <a:buNone/>
             </a:pPr>
             <a:r>
-              <a:rPr lang="en-US" sz="8400" b="1" dirty="0">
-                <a:solidFill>
-                  <a:srgbClr val="111827"/>
-                </a:solidFill>
-                <a:latin typeface="Cambria" pitchFamily="34" charset="0"/>
-                <a:ea typeface="Cambria" pitchFamily="34" charset="-122"/>
-                <a:cs typeface="Cambria" pitchFamily="34" charset="-120"/>
-              </a:rPr>
-              <a:t>+0.3</a:t>
-            </a:r>
-            <a:endParaRPr lang="en-US" sz="8400" dirty="0"/>
-          </a:p>
-        </p:txBody>
-      </p:sp>
-      <p:sp>
-        <p:nvSpPr>
-          <p:cNvPr id="7" name="Text 5"/>
-          <p:cNvSpPr txBox="1"/>
-          <p:nvPr/>
-        </p:nvSpPr>
-        <p:spPr>
-          <a:xfrm>
-            <a:off x="640080" y="4572000"/>
-            <a:ext cx="5212080" cy="365760"/>
-          </a:xfrm>
-          <a:prstGeom prst="rect">
-            <a:avLst/>
-          </a:prstGeom>
-          <a:noFill/>
-          <a:ln/>
-        </p:spPr>
-        <p:txBody>
-          <a:bodyPr wrap="square" lIns="0" tIns="0" rIns="0" bIns="0" rtlCol="0" anchor="ctr"/>
-          <a:lstStyle/>
-          <a:p>
-            <a:pPr algn="ctr" indent="0" marL="0">
-              <a:buNone/>
-            </a:pPr>
-            <a:r>
-              <a:rPr lang="en-US" sz="1600" dirty="0">
-                <a:solidFill>
-                  <a:srgbClr val="374151"/>
-                </a:solidFill>
-              </a:rPr>
-              <a:t>nothing forgotten</a:t>
-            </a:r>
-            <a:endParaRPr lang="en-US" sz="1600" dirty="0"/>
-          </a:p>
-        </p:txBody>
-      </p:sp>
-      <p:sp>
-        <p:nvSpPr>
-          <p:cNvPr id="8" name="Shape 6"/>
-          <p:cNvSpPr/>
-          <p:nvPr/>
-        </p:nvSpPr>
-        <p:spPr>
-          <a:xfrm>
-            <a:off x="6355080" y="2286000"/>
-            <a:ext cx="5212080" cy="3108960"/>
-          </a:xfrm>
-          <a:prstGeom prst="roundRect">
-            <a:avLst>
-              <a:gd name="adj" fmla="val 3529"/>
-            </a:avLst>
+              <a:rPr lang="en-US" sz="3600" b="1" dirty="0">
+                <a:solidFill>
+                  <a:srgbClr val="9CA3AF"/>
+                </a:solidFill>
+              </a:rPr>
+              <a:t>+</a:t>
+            </a:r>
+            <a:endParaRPr lang="en-US" sz="3600" dirty="0"/>
+          </a:p>
+        </p:txBody>
+      </p:sp>
+      <p:sp>
+        <p:nvSpPr>
+          <p:cNvPr id="7" name="Shape 5"/>
+          <p:cNvSpPr/>
+          <p:nvPr/>
+        </p:nvSpPr>
+        <p:spPr>
+          <a:xfrm>
+            <a:off x="2926080" y="2743200"/>
+            <a:ext cx="1005840" cy="1005840"/>
+          </a:xfrm>
+          <a:prstGeom prst="ellipse">
+            <a:avLst/>
           </a:prstGeom>
           <a:solidFill>
-            <a:srgbClr val="FFF7ED"/>
+            <a:srgbClr val="D97706"/>
           </a:solidFill>
           <a:ln w="12700">
             <a:solidFill>
-              <a:srgbClr val="FDBA74"/>
+              <a:srgbClr val="D97706"/>
             </a:solidFill>
             <a:prstDash val="solid"/>
           </a:ln>
@@ -3261,14 +3035,50 @@
       </p:sp>
       <p:sp>
         <p:nvSpPr>
+          <p:cNvPr id="8" name="Text 6"/>
+          <p:cNvSpPr txBox="1"/>
+          <p:nvPr/>
+        </p:nvSpPr>
+        <p:spPr>
+          <a:xfrm>
+            <a:off x="2926080" y="2743200"/>
+            <a:ext cx="1005840" cy="1005840"/>
+          </a:xfrm>
+          <a:prstGeom prst="rect">
+            <a:avLst/>
+          </a:prstGeom>
+          <a:noFill/>
+          <a:ln/>
+        </p:spPr>
+        <p:txBody>
+          <a:bodyPr wrap="square" lIns="0" tIns="0" rIns="0" bIns="0" rtlCol="0" anchor="ctr"/>
+          <a:lstStyle/>
+          <a:p>
+            <a:pPr algn="ctr" indent="0" marL="0">
+              <a:buNone/>
+            </a:pPr>
+            <a:r>
+              <a:rPr lang="en-US" sz="2600" b="1" dirty="0">
+                <a:solidFill>
+                  <a:srgbClr val="FFFFFF"/>
+                </a:solidFill>
+              </a:rPr>
+              <a:t>DE</a:t>
+            </a:r>
+            <a:endParaRPr lang="en-US" sz="2600" dirty="0"/>
+          </a:p>
+        </p:txBody>
+      </p:sp>
+      <p:sp>
+        <p:nvSpPr>
           <p:cNvPr id="9" name="Text 7"/>
           <p:cNvSpPr txBox="1"/>
           <p:nvPr/>
         </p:nvSpPr>
         <p:spPr>
           <a:xfrm>
-            <a:off x="6355080" y="2514600"/>
-            <a:ext cx="5212080" cy="320040"/>
+            <a:off x="4023360" y="2743200"/>
+            <a:ext cx="457200" cy="1005840"/>
           </a:xfrm>
           <a:prstGeom prst="rect">
             <a:avLst/>
@@ -3284,55 +3094,41 @@
               <a:buNone/>
             </a:pPr>
             <a:r>
-              <a:rPr lang="en-US" sz="1200" b="1" spc="200" kern="0" dirty="0">
-                <a:solidFill>
-                  <a:srgbClr val="C2410C"/>
-                </a:solidFill>
-              </a:rPr>
-              <a:t>GENERAL SKILLS · 20 TESTS</a:t>
-            </a:r>
-            <a:endParaRPr lang="en-US" sz="1200" dirty="0"/>
-          </a:p>
-        </p:txBody>
-      </p:sp>
-      <p:sp>
-        <p:nvSpPr>
-          <p:cNvPr id="10" name="Text 8"/>
-          <p:cNvSpPr txBox="1"/>
-          <p:nvPr/>
-        </p:nvSpPr>
-        <p:spPr>
-          <a:xfrm>
-            <a:off x="6355080" y="2926080"/>
-            <a:ext cx="5212080" cy="1463040"/>
-          </a:xfrm>
-          <a:prstGeom prst="rect">
-            <a:avLst/>
-          </a:prstGeom>
-          <a:noFill/>
-          <a:ln/>
-        </p:spPr>
-        <p:txBody>
-          <a:bodyPr wrap="square" lIns="0" tIns="0" rIns="0" bIns="0" rtlCol="0" anchor="ctr"/>
-          <a:lstStyle/>
-          <a:p>
-            <a:pPr algn="ctr" indent="0" marL="0">
-              <a:buNone/>
-            </a:pPr>
-            <a:r>
-              <a:rPr lang="en-US" sz="8400" b="1" dirty="0">
-                <a:solidFill>
-                  <a:srgbClr val="C2410C"/>
-                </a:solidFill>
-                <a:latin typeface="Cambria" pitchFamily="34" charset="0"/>
-                <a:ea typeface="Cambria" pitchFamily="34" charset="-122"/>
-                <a:cs typeface="Cambria" pitchFamily="34" charset="-120"/>
-              </a:rPr>
-              <a:t>−1.2</a:t>
-            </a:r>
-            <a:endParaRPr lang="en-US" sz="8400" dirty="0"/>
-          </a:p>
-        </p:txBody>
+              <a:rPr lang="en-US" sz="3600" b="1" dirty="0">
+                <a:solidFill>
+                  <a:srgbClr val="9CA3AF"/>
+                </a:solidFill>
+              </a:rPr>
+              <a:t>+</a:t>
+            </a:r>
+            <a:endParaRPr lang="en-US" sz="3600" dirty="0"/>
+          </a:p>
+        </p:txBody>
+      </p:sp>
+      <p:sp>
+        <p:nvSpPr>
+          <p:cNvPr id="10" name="Shape 8"/>
+          <p:cNvSpPr/>
+          <p:nvPr/>
+        </p:nvSpPr>
+        <p:spPr>
+          <a:xfrm>
+            <a:off x="4572000" y="2743200"/>
+            <a:ext cx="1005840" cy="1005840"/>
+          </a:xfrm>
+          <a:prstGeom prst="ellipse">
+            <a:avLst/>
+          </a:prstGeom>
+          <a:solidFill>
+            <a:srgbClr val="7C3AED"/>
+          </a:solidFill>
+          <a:ln w="12700">
+            <a:solidFill>
+              <a:srgbClr val="7C3AED"/>
+            </a:solidFill>
+            <a:prstDash val="solid"/>
+          </a:ln>
+        </p:spPr>
       </p:sp>
       <p:sp>
         <p:nvSpPr>
@@ -3342,8 +3138,8 @@
         </p:nvSpPr>
         <p:spPr>
           <a:xfrm>
-            <a:off x="6355080" y="4526280"/>
-            <a:ext cx="5212080" cy="365760"/>
+            <a:off x="4572000" y="2743200"/>
+            <a:ext cx="1005840" cy="1005840"/>
           </a:xfrm>
           <a:prstGeom prst="rect">
             <a:avLst/>
@@ -3359,14 +3155,14 @@
               <a:buNone/>
             </a:pPr>
             <a:r>
-              <a:rPr lang="en-US" sz="1600" dirty="0">
-                <a:solidFill>
-                  <a:srgbClr val="374151"/>
-                </a:solidFill>
-              </a:rPr>
-              <a:t>after French-only news</a:t>
-            </a:r>
-            <a:endParaRPr lang="en-US" sz="1600" dirty="0"/>
+              <a:rPr lang="en-US" sz="2600" b="1" dirty="0">
+                <a:solidFill>
+                  <a:srgbClr val="FFFFFF"/>
+                </a:solidFill>
+              </a:rPr>
+              <a:t>FR</a:t>
+            </a:r>
+            <a:endParaRPr lang="en-US" sz="2600" dirty="0"/>
           </a:p>
         </p:txBody>
       </p:sp>
@@ -3378,8 +3174,8 @@
         </p:nvSpPr>
         <p:spPr>
           <a:xfrm>
-            <a:off x="6355080" y="4846320"/>
-            <a:ext cx="5212080" cy="365760"/>
+            <a:off x="5669280" y="2743200"/>
+            <a:ext cx="1463040" cy="1005840"/>
           </a:xfrm>
           <a:prstGeom prst="rect">
             <a:avLst/>
@@ -3395,31 +3191,81 @@
               <a:buNone/>
             </a:pPr>
             <a:r>
-              <a:rPr lang="en-US" sz="1600" b="1" dirty="0">
-                <a:solidFill>
-                  <a:srgbClr val="374151"/>
-                </a:solidFill>
-              </a:rPr>
-              <a:t>+0.3</a:t>
-            </a:r>
+              <a:rPr lang="en-US" sz="3600" b="1" dirty="0">
+                <a:solidFill>
+                  <a:srgbClr val="9CA3AF"/>
+                </a:solidFill>
+              </a:rPr>
+              <a:t>÷ 3  =</a:t>
+            </a:r>
+            <a:endParaRPr lang="en-US" sz="3600" dirty="0"/>
+          </a:p>
+        </p:txBody>
+      </p:sp>
+      <p:sp>
+        <p:nvSpPr>
+          <p:cNvPr id="13" name="Shape 11"/>
+          <p:cNvSpPr/>
+          <p:nvPr/>
+        </p:nvSpPr>
+        <p:spPr>
+          <a:xfrm>
+            <a:off x="7315200" y="2560320"/>
+            <a:ext cx="1371600" cy="1371600"/>
+          </a:xfrm>
+          <a:prstGeom prst="ellipse">
+            <a:avLst/>
+          </a:prstGeom>
+          <a:solidFill>
+            <a:srgbClr val="C2410C"/>
+          </a:solidFill>
+          <a:ln w="12700">
+            <a:solidFill>
+              <a:srgbClr val="C2410C"/>
+            </a:solidFill>
+            <a:prstDash val="solid"/>
+          </a:ln>
+        </p:spPr>
+      </p:sp>
+      <p:sp>
+        <p:nvSpPr>
+          <p:cNvPr id="14" name="Text 12"/>
+          <p:cNvSpPr txBox="1"/>
+          <p:nvPr/>
+        </p:nvSpPr>
+        <p:spPr>
+          <a:xfrm>
+            <a:off x="7315200" y="2560320"/>
+            <a:ext cx="1371600" cy="1371600"/>
+          </a:xfrm>
+          <a:prstGeom prst="rect">
+            <a:avLst/>
+          </a:prstGeom>
+          <a:noFill/>
+          <a:ln/>
+        </p:spPr>
+        <p:txBody>
+          <a:bodyPr wrap="square" lIns="0" tIns="0" rIns="0" bIns="0" rtlCol="0" anchor="ctr"/>
+          <a:lstStyle/>
+          <a:p>
             <a:pPr algn="ctr" indent="0" marL="0">
               <a:buNone/>
             </a:pPr>
             <a:r>
-              <a:rPr lang="en-US" sz="1600" dirty="0">
-                <a:solidFill>
-                  <a:srgbClr val="374151"/>
-                </a:solidFill>
-              </a:rPr>
-              <a:t> if you only test in French</a:t>
-            </a:r>
-            <a:endParaRPr lang="en-US" sz="1600" dirty="0"/>
-          </a:p>
-        </p:txBody>
-      </p:sp>
-      <p:sp>
-        <p:nvSpPr>
-          <p:cNvPr id="13" name="Text 0"/>
+              <a:rPr lang="en-US" sz="4800" dirty="0">
+                <a:solidFill>
+                  <a:srgbClr val="FFFFFF"/>
+                </a:solidFill>
+              </a:rPr>
+              <a:t>★</a:t>
+            </a:r>
+            <a:endParaRPr lang="en-US" sz="4800" dirty="0"/>
+          </a:p>
+        </p:txBody>
+      </p:sp>
+      <p:sp>
+        <p:nvSpPr>
+          <p:cNvPr id="15" name="Text 0"/>
           <p:cNvSpPr/>
           <p:nvPr>
             <p:ph idx="102" type="body" hasCustomPrompt="1"/>
@@ -3449,7 +3295,7 @@
                   <a:schemeClr val="tx1"/>
                 </a:solidFill>
               </a:rPr>
-              <a:t>Old facts stay, general skills slip. </a:t>
+              <a:t>Yes: train three, average the weights. </a:t>
             </a:r>
             <a:pPr indent="0" marL="0">
               <a:buNone/>
@@ -3460,7 +3306,7 @@
                   <a:srgbClr val="6B7280"/>
                 </a:solidFill>
               </a:rPr>
-              <a:t>And you only see it if you test beyond the training language.</a:t>
+              <a:t>All the facts, none of the damage, no training.</a:t>
             </a:r>
             <a:endParaRPr lang="en-US" sz="1800" dirty="0"/>
           </a:p>
@@ -3516,9 +3362,6 @@
   <p:clrMapOvr>
     <a:masterClrMapping/>
   </p:clrMapOvr>
-  <p:transition spd="med">
-    <p:fade/>
-  </p:transition>
 </p:sld>
 </file>
 
@@ -3571,7 +3414,7 @@
                   <a:schemeClr val="accent1"/>
                 </a:solidFill>
               </a:rPr>
-              <a:t>WAY 2 · QUESTION 8</a:t>
+              <a:t>WAY 2 · QUESTION 8 · WORK IN PROGRESS</a:t>
             </a:r>
             <a:endParaRPr lang="en-US" sz="1200" dirty="0"/>
           </a:p>
@@ -3609,7 +3452,7 @@
                   <a:schemeClr val="tx1"/>
                 </a:solidFill>
               </a:rPr>
-              <a:t>Can we keep the facts without the cost?</a:t>
+              <a:t>Why does averaging work?</a:t>
             </a:r>
             <a:endParaRPr lang="en-US" sz="3200" dirty="0"/>
           </a:p>
@@ -3617,444 +3460,118 @@
       </p:sp>
       <p:sp>
         <p:nvSpPr>
-          <p:cNvPr id="4" name="Text 2"/>
-          <p:cNvSpPr txBox="1"/>
-          <p:nvPr/>
-        </p:nvSpPr>
-        <p:spPr>
-          <a:xfrm>
-            <a:off x="822960" y="2148840"/>
-            <a:ext cx="4023360" cy="320040"/>
-          </a:xfrm>
-          <a:prstGeom prst="rect">
-            <a:avLst/>
-          </a:prstGeom>
-          <a:noFill/>
-          <a:ln/>
-        </p:spPr>
-        <p:txBody>
-          <a:bodyPr wrap="square" lIns="0" tIns="0" rIns="0" bIns="0" rtlCol="0" anchor="ctr"/>
-          <a:lstStyle/>
-          <a:p>
-            <a:pPr algn="ctr" indent="0" marL="0">
-              <a:buNone/>
-            </a:pPr>
-            <a:r>
-              <a:rPr lang="en-US" sz="1400" b="1" dirty="0">
-                <a:solidFill>
-                  <a:srgbClr val="6B7280"/>
-                </a:solidFill>
-              </a:rPr>
-              <a:t>new facts learned</a:t>
-            </a:r>
-            <a:endParaRPr lang="en-US" sz="1400" dirty="0"/>
-          </a:p>
-        </p:txBody>
-      </p:sp>
-      <p:sp>
-        <p:nvSpPr>
-          <p:cNvPr id="5" name="Shape 3"/>
-          <p:cNvSpPr/>
-          <p:nvPr/>
-        </p:nvSpPr>
-        <p:spPr>
-          <a:xfrm>
-            <a:off x="914400" y="3474720"/>
-            <a:ext cx="731520" cy="1371600"/>
-          </a:xfrm>
-          <a:prstGeom prst="rect">
-            <a:avLst/>
-          </a:prstGeom>
-          <a:solidFill>
-            <a:srgbClr val="2563EB"/>
-          </a:solidFill>
-          <a:ln w="12700">
+          <p:cNvPr id="4" name="Shape 2"/>
+          <p:cNvSpPr/>
+          <p:nvPr/>
+        </p:nvSpPr>
+        <p:spPr>
+          <a:xfrm flipV="1">
+            <a:off x="1463040" y="4206240"/>
+            <a:ext cx="3657600" cy="731520"/>
+          </a:xfrm>
+          <a:prstGeom prst="line">
+            <a:avLst/>
+          </a:prstGeom>
+          <a:noFill/>
+          <a:ln w="50800">
             <a:solidFill>
               <a:srgbClr val="2563EB"/>
             </a:solidFill>
             <a:prstDash val="solid"/>
+            <a:tailEnd type="triangle"/>
           </a:ln>
         </p:spPr>
       </p:sp>
       <p:sp>
         <p:nvSpPr>
-          <p:cNvPr id="6" name="Text 4"/>
-          <p:cNvSpPr txBox="1"/>
-          <p:nvPr/>
-        </p:nvSpPr>
-        <p:spPr>
-          <a:xfrm>
-            <a:off x="731520" y="3090672"/>
-            <a:ext cx="1097280" cy="365760"/>
-          </a:xfrm>
-          <a:prstGeom prst="rect">
-            <a:avLst/>
-          </a:prstGeom>
-          <a:noFill/>
-          <a:ln/>
-        </p:spPr>
-        <p:txBody>
-          <a:bodyPr wrap="square" lIns="0" tIns="0" rIns="0" bIns="0" rtlCol="0" anchor="ctr"/>
-          <a:lstStyle/>
-          <a:p>
-            <a:pPr algn="ctr" indent="0" marL="0">
-              <a:buNone/>
-            </a:pPr>
-            <a:r>
-              <a:rPr lang="en-US" sz="1600" b="1" dirty="0">
-                <a:solidFill>
-                  <a:srgbClr val="111827"/>
-                </a:solidFill>
-              </a:rPr>
-              <a:t>+3.4</a:t>
-            </a:r>
-            <a:endParaRPr lang="en-US" sz="1600" dirty="0"/>
-          </a:p>
-        </p:txBody>
-      </p:sp>
-      <p:sp>
-        <p:nvSpPr>
-          <p:cNvPr id="7" name="Text 5"/>
-          <p:cNvSpPr txBox="1"/>
-          <p:nvPr/>
-        </p:nvSpPr>
-        <p:spPr>
-          <a:xfrm>
-            <a:off x="822960" y="4919472"/>
-            <a:ext cx="914400" cy="320040"/>
-          </a:xfrm>
-          <a:prstGeom prst="rect">
-            <a:avLst/>
-          </a:prstGeom>
-          <a:noFill/>
-          <a:ln/>
-        </p:spPr>
-        <p:txBody>
-          <a:bodyPr wrap="square" lIns="0" tIns="0" rIns="0" bIns="0" rtlCol="0" anchor="ctr"/>
-          <a:lstStyle/>
-          <a:p>
-            <a:pPr algn="ctr" indent="0" marL="0">
-              <a:buNone/>
-            </a:pPr>
-            <a:r>
-              <a:rPr lang="en-US" sz="1400" b="1" dirty="0">
-                <a:solidFill>
-                  <a:srgbClr val="111827"/>
-                </a:solidFill>
-              </a:rPr>
-              <a:t>EN</a:t>
-            </a:r>
-            <a:endParaRPr lang="en-US" sz="1400" dirty="0"/>
-          </a:p>
-        </p:txBody>
-      </p:sp>
-      <p:sp>
-        <p:nvSpPr>
-          <p:cNvPr id="8" name="Shape 6"/>
-          <p:cNvSpPr/>
-          <p:nvPr/>
-        </p:nvSpPr>
-        <p:spPr>
-          <a:xfrm>
-            <a:off x="1874520" y="3794760"/>
-            <a:ext cx="731520" cy="1051560"/>
-          </a:xfrm>
-          <a:prstGeom prst="rect">
-            <a:avLst/>
-          </a:prstGeom>
-          <a:solidFill>
-            <a:srgbClr val="D97706"/>
-          </a:solidFill>
-          <a:ln w="12700">
+          <p:cNvPr id="5" name="Shape 3"/>
+          <p:cNvSpPr/>
+          <p:nvPr/>
+        </p:nvSpPr>
+        <p:spPr>
+          <a:xfrm flipV="1">
+            <a:off x="1463040" y="2194560"/>
+            <a:ext cx="1188720" cy="2743200"/>
+          </a:xfrm>
+          <a:prstGeom prst="line">
+            <a:avLst/>
+          </a:prstGeom>
+          <a:noFill/>
+          <a:ln w="50800">
             <a:solidFill>
               <a:srgbClr val="D97706"/>
             </a:solidFill>
             <a:prstDash val="solid"/>
+            <a:tailEnd type="triangle"/>
           </a:ln>
         </p:spPr>
       </p:sp>
       <p:sp>
         <p:nvSpPr>
-          <p:cNvPr id="9" name="Text 7"/>
-          <p:cNvSpPr txBox="1"/>
-          <p:nvPr/>
-        </p:nvSpPr>
-        <p:spPr>
-          <a:xfrm>
-            <a:off x="1691640" y="3410712"/>
-            <a:ext cx="1097280" cy="365760"/>
-          </a:xfrm>
-          <a:prstGeom prst="rect">
-            <a:avLst/>
-          </a:prstGeom>
-          <a:noFill/>
-          <a:ln/>
-        </p:spPr>
-        <p:txBody>
-          <a:bodyPr wrap="square" lIns="0" tIns="0" rIns="0" bIns="0" rtlCol="0" anchor="ctr"/>
-          <a:lstStyle/>
-          <a:p>
-            <a:pPr algn="ctr" indent="0" marL="0">
-              <a:buNone/>
-            </a:pPr>
-            <a:r>
-              <a:rPr lang="en-US" sz="1600" b="1" dirty="0">
-                <a:solidFill>
-                  <a:srgbClr val="111827"/>
-                </a:solidFill>
-              </a:rPr>
-              <a:t>+2.6</a:t>
-            </a:r>
-            <a:endParaRPr lang="en-US" sz="1600" dirty="0"/>
-          </a:p>
-        </p:txBody>
-      </p:sp>
-      <p:sp>
-        <p:nvSpPr>
-          <p:cNvPr id="10" name="Text 8"/>
-          <p:cNvSpPr txBox="1"/>
-          <p:nvPr/>
-        </p:nvSpPr>
-        <p:spPr>
-          <a:xfrm>
-            <a:off x="1783080" y="4919472"/>
-            <a:ext cx="914400" cy="320040"/>
-          </a:xfrm>
-          <a:prstGeom prst="rect">
-            <a:avLst/>
-          </a:prstGeom>
-          <a:noFill/>
-          <a:ln/>
-        </p:spPr>
-        <p:txBody>
-          <a:bodyPr wrap="square" lIns="0" tIns="0" rIns="0" bIns="0" rtlCol="0" anchor="ctr"/>
-          <a:lstStyle/>
-          <a:p>
-            <a:pPr algn="ctr" indent="0" marL="0">
-              <a:buNone/>
-            </a:pPr>
-            <a:r>
-              <a:rPr lang="en-US" sz="1400" b="1" dirty="0">
-                <a:solidFill>
-                  <a:srgbClr val="111827"/>
-                </a:solidFill>
-              </a:rPr>
-              <a:t>DE</a:t>
-            </a:r>
-            <a:endParaRPr lang="en-US" sz="1400" dirty="0"/>
-          </a:p>
-        </p:txBody>
-      </p:sp>
-      <p:sp>
-        <p:nvSpPr>
-          <p:cNvPr id="11" name="Shape 9"/>
-          <p:cNvSpPr/>
-          <p:nvPr/>
-        </p:nvSpPr>
-        <p:spPr>
-          <a:xfrm>
-            <a:off x="2834640" y="3520440"/>
-            <a:ext cx="731520" cy="1325880"/>
-          </a:xfrm>
-          <a:prstGeom prst="rect">
-            <a:avLst/>
-          </a:prstGeom>
-          <a:solidFill>
-            <a:srgbClr val="7C3AED"/>
-          </a:solidFill>
-          <a:ln w="12700">
+          <p:cNvPr id="6" name="Shape 4"/>
+          <p:cNvSpPr/>
+          <p:nvPr/>
+        </p:nvSpPr>
+        <p:spPr>
+          <a:xfrm flipV="1">
+            <a:off x="1463040" y="2286000"/>
+            <a:ext cx="3017520" cy="2651760"/>
+          </a:xfrm>
+          <a:prstGeom prst="line">
+            <a:avLst/>
+          </a:prstGeom>
+          <a:noFill/>
+          <a:ln w="50800">
             <a:solidFill>
               <a:srgbClr val="7C3AED"/>
             </a:solidFill>
             <a:prstDash val="solid"/>
+            <a:tailEnd type="triangle"/>
           </a:ln>
         </p:spPr>
       </p:sp>
       <p:sp>
         <p:nvSpPr>
-          <p:cNvPr id="12" name="Text 10"/>
-          <p:cNvSpPr txBox="1"/>
-          <p:nvPr/>
-        </p:nvSpPr>
-        <p:spPr>
-          <a:xfrm>
-            <a:off x="2651760" y="3136392"/>
-            <a:ext cx="1097280" cy="365760"/>
-          </a:xfrm>
-          <a:prstGeom prst="rect">
-            <a:avLst/>
-          </a:prstGeom>
-          <a:noFill/>
-          <a:ln/>
-        </p:spPr>
-        <p:txBody>
-          <a:bodyPr wrap="square" lIns="0" tIns="0" rIns="0" bIns="0" rtlCol="0" anchor="ctr"/>
-          <a:lstStyle/>
-          <a:p>
-            <a:pPr algn="ctr" indent="0" marL="0">
-              <a:buNone/>
-            </a:pPr>
-            <a:r>
-              <a:rPr lang="en-US" sz="1600" b="1" dirty="0">
-                <a:solidFill>
-                  <a:srgbClr val="111827"/>
-                </a:solidFill>
-              </a:rPr>
-              <a:t>+3.3</a:t>
-            </a:r>
-            <a:endParaRPr lang="en-US" sz="1600" dirty="0"/>
-          </a:p>
-        </p:txBody>
-      </p:sp>
-      <p:sp>
-        <p:nvSpPr>
-          <p:cNvPr id="13" name="Text 11"/>
-          <p:cNvSpPr txBox="1"/>
-          <p:nvPr/>
-        </p:nvSpPr>
-        <p:spPr>
-          <a:xfrm>
-            <a:off x="2743200" y="4919472"/>
-            <a:ext cx="914400" cy="320040"/>
-          </a:xfrm>
-          <a:prstGeom prst="rect">
-            <a:avLst/>
-          </a:prstGeom>
-          <a:noFill/>
-          <a:ln/>
-        </p:spPr>
-        <p:txBody>
-          <a:bodyPr wrap="square" lIns="0" tIns="0" rIns="0" bIns="0" rtlCol="0" anchor="ctr"/>
-          <a:lstStyle/>
-          <a:p>
-            <a:pPr algn="ctr" indent="0" marL="0">
-              <a:buNone/>
-            </a:pPr>
-            <a:r>
-              <a:rPr lang="en-US" sz="1400" b="1" dirty="0">
-                <a:solidFill>
-                  <a:srgbClr val="111827"/>
-                </a:solidFill>
-              </a:rPr>
-              <a:t>FR</a:t>
-            </a:r>
-            <a:endParaRPr lang="en-US" sz="1400" dirty="0"/>
-          </a:p>
-        </p:txBody>
-      </p:sp>
-      <p:sp>
-        <p:nvSpPr>
-          <p:cNvPr id="14" name="Shape 12"/>
-          <p:cNvSpPr/>
-          <p:nvPr/>
-        </p:nvSpPr>
-        <p:spPr>
-          <a:xfrm>
-            <a:off x="3794760" y="2834640"/>
-            <a:ext cx="731520" cy="2011680"/>
-          </a:xfrm>
-          <a:prstGeom prst="rect">
-            <a:avLst/>
-          </a:prstGeom>
-          <a:solidFill>
-            <a:srgbClr val="C2410C"/>
-          </a:solidFill>
-          <a:ln w="12700">
+          <p:cNvPr id="7" name="Shape 5"/>
+          <p:cNvSpPr/>
+          <p:nvPr/>
+        </p:nvSpPr>
+        <p:spPr>
+          <a:xfrm flipV="1">
+            <a:off x="1463040" y="3657600"/>
+            <a:ext cx="2194560" cy="1280160"/>
+          </a:xfrm>
+          <a:prstGeom prst="line">
+            <a:avLst/>
+          </a:prstGeom>
+          <a:noFill/>
+          <a:ln w="88900">
             <a:solidFill>
               <a:srgbClr val="C2410C"/>
             </a:solidFill>
             <a:prstDash val="solid"/>
+            <a:tailEnd type="triangle"/>
           </a:ln>
         </p:spPr>
       </p:sp>
       <p:sp>
         <p:nvSpPr>
-          <p:cNvPr id="15" name="Text 13"/>
-          <p:cNvSpPr txBox="1"/>
-          <p:nvPr/>
-        </p:nvSpPr>
-        <p:spPr>
-          <a:xfrm>
-            <a:off x="3611880" y="2450592"/>
-            <a:ext cx="1097280" cy="365760"/>
-          </a:xfrm>
-          <a:prstGeom prst="rect">
-            <a:avLst/>
-          </a:prstGeom>
-          <a:noFill/>
-          <a:ln/>
-        </p:spPr>
-        <p:txBody>
-          <a:bodyPr wrap="square" lIns="0" tIns="0" rIns="0" bIns="0" rtlCol="0" anchor="ctr"/>
-          <a:lstStyle/>
-          <a:p>
-            <a:pPr algn="ctr" indent="0" marL="0">
-              <a:buNone/>
-            </a:pPr>
-            <a:r>
-              <a:rPr lang="en-US" sz="1600" b="1" dirty="0">
-                <a:solidFill>
-                  <a:srgbClr val="C2410C"/>
-                </a:solidFill>
-              </a:rPr>
-              <a:t>+5.0</a:t>
-            </a:r>
-            <a:endParaRPr lang="en-US" sz="1600" dirty="0"/>
-          </a:p>
-        </p:txBody>
-      </p:sp>
-      <p:sp>
-        <p:nvSpPr>
-          <p:cNvPr id="16" name="Text 14"/>
-          <p:cNvSpPr txBox="1"/>
-          <p:nvPr/>
-        </p:nvSpPr>
-        <p:spPr>
-          <a:xfrm>
-            <a:off x="3703320" y="4919472"/>
-            <a:ext cx="914400" cy="320040"/>
-          </a:xfrm>
-          <a:prstGeom prst="rect">
-            <a:avLst/>
-          </a:prstGeom>
-          <a:noFill/>
-          <a:ln/>
-        </p:spPr>
-        <p:txBody>
-          <a:bodyPr wrap="square" lIns="0" tIns="0" rIns="0" bIns="0" rtlCol="0" anchor="ctr"/>
-          <a:lstStyle/>
-          <a:p>
-            <a:pPr algn="ctr" indent="0" marL="0">
-              <a:buNone/>
-            </a:pPr>
-            <a:r>
-              <a:rPr lang="en-US" sz="1400" b="1" dirty="0">
-                <a:solidFill>
-                  <a:srgbClr val="111827"/>
-                </a:solidFill>
-              </a:rPr>
-              <a:t>Mix</a:t>
-            </a:r>
-            <a:endParaRPr lang="en-US" sz="1400" dirty="0"/>
-          </a:p>
-        </p:txBody>
-      </p:sp>
-      <p:sp>
-        <p:nvSpPr>
-          <p:cNvPr id="17" name="Shape 15"/>
-          <p:cNvSpPr/>
-          <p:nvPr/>
-        </p:nvSpPr>
-        <p:spPr>
-          <a:xfrm>
-            <a:off x="777240" y="4846320"/>
-            <a:ext cx="3840480" cy="0"/>
-          </a:xfrm>
-          <a:prstGeom prst="line">
-            <a:avLst/>
-          </a:prstGeom>
-          <a:noFill/>
-          <a:ln w="25400">
+          <p:cNvPr id="8" name="Shape 6"/>
+          <p:cNvSpPr/>
+          <p:nvPr/>
+        </p:nvSpPr>
+        <p:spPr>
+          <a:xfrm>
+            <a:off x="1325880" y="4800600"/>
+            <a:ext cx="274320" cy="274320"/>
+          </a:xfrm>
+          <a:prstGeom prst="ellipse">
+            <a:avLst/>
+          </a:prstGeom>
+          <a:solidFill>
+            <a:srgbClr val="FFFFFF"/>
+          </a:solidFill>
+          <a:ln w="38100">
             <a:solidFill>
               <a:srgbClr val="111827"/>
             </a:solidFill>
@@ -4064,14 +3581,14 @@
       </p:sp>
       <p:sp>
         <p:nvSpPr>
-          <p:cNvPr id="18" name="Text 16"/>
+          <p:cNvPr id="9" name="Text 7"/>
           <p:cNvSpPr txBox="1"/>
           <p:nvPr/>
         </p:nvSpPr>
         <p:spPr>
           <a:xfrm>
-            <a:off x="6583680" y="2148840"/>
-            <a:ext cx="4023360" cy="320040"/>
+            <a:off x="640080" y="5120640"/>
+            <a:ext cx="1645920" cy="320040"/>
           </a:xfrm>
           <a:prstGeom prst="rect">
             <a:avLst/>
@@ -4089,73 +3606,241 @@
             <a:r>
               <a:rPr lang="en-US" sz="1400" b="1" dirty="0">
                 <a:solidFill>
+                  <a:srgbClr val="111827"/>
+                </a:solidFill>
+              </a:rPr>
+              <a:t>base model</a:t>
+            </a:r>
+            <a:endParaRPr lang="en-US" sz="1400" dirty="0"/>
+          </a:p>
+        </p:txBody>
+      </p:sp>
+      <p:sp>
+        <p:nvSpPr>
+          <p:cNvPr id="10" name="Text 8"/>
+          <p:cNvSpPr txBox="1"/>
+          <p:nvPr/>
+        </p:nvSpPr>
+        <p:spPr>
+          <a:xfrm>
+            <a:off x="5212080" y="4023360"/>
+            <a:ext cx="548640" cy="320040"/>
+          </a:xfrm>
+          <a:prstGeom prst="rect">
+            <a:avLst/>
+          </a:prstGeom>
+          <a:noFill/>
+          <a:ln/>
+        </p:spPr>
+        <p:txBody>
+          <a:bodyPr wrap="square" lIns="0" tIns="0" rIns="0" bIns="0" rtlCol="0" anchor="ctr"/>
+          <a:lstStyle/>
+          <a:p>
+            <a:pPr indent="0" marL="0">
+              <a:buNone/>
+            </a:pPr>
+            <a:r>
+              <a:rPr lang="en-US" sz="1600" b="1" dirty="0">
+                <a:solidFill>
+                  <a:srgbClr val="2563EB"/>
+                </a:solidFill>
+              </a:rPr>
+              <a:t>EN</a:t>
+            </a:r>
+            <a:endParaRPr lang="en-US" sz="1600" dirty="0"/>
+          </a:p>
+        </p:txBody>
+      </p:sp>
+      <p:sp>
+        <p:nvSpPr>
+          <p:cNvPr id="11" name="Text 9"/>
+          <p:cNvSpPr txBox="1"/>
+          <p:nvPr/>
+        </p:nvSpPr>
+        <p:spPr>
+          <a:xfrm>
+            <a:off x="2377440" y="1874520"/>
+            <a:ext cx="548640" cy="320040"/>
+          </a:xfrm>
+          <a:prstGeom prst="rect">
+            <a:avLst/>
+          </a:prstGeom>
+          <a:noFill/>
+          <a:ln/>
+        </p:spPr>
+        <p:txBody>
+          <a:bodyPr wrap="square" lIns="0" tIns="0" rIns="0" bIns="0" rtlCol="0" anchor="ctr"/>
+          <a:lstStyle/>
+          <a:p>
+            <a:pPr indent="0" marL="0">
+              <a:buNone/>
+            </a:pPr>
+            <a:r>
+              <a:rPr lang="en-US" sz="1600" b="1" dirty="0">
+                <a:solidFill>
+                  <a:srgbClr val="D97706"/>
+                </a:solidFill>
+              </a:rPr>
+              <a:t>DE</a:t>
+            </a:r>
+            <a:endParaRPr lang="en-US" sz="1600" dirty="0"/>
+          </a:p>
+        </p:txBody>
+      </p:sp>
+      <p:sp>
+        <p:nvSpPr>
+          <p:cNvPr id="12" name="Text 10"/>
+          <p:cNvSpPr txBox="1"/>
+          <p:nvPr/>
+        </p:nvSpPr>
+        <p:spPr>
+          <a:xfrm>
+            <a:off x="4526280" y="1965960"/>
+            <a:ext cx="548640" cy="320040"/>
+          </a:xfrm>
+          <a:prstGeom prst="rect">
+            <a:avLst/>
+          </a:prstGeom>
+          <a:noFill/>
+          <a:ln/>
+        </p:spPr>
+        <p:txBody>
+          <a:bodyPr wrap="square" lIns="0" tIns="0" rIns="0" bIns="0" rtlCol="0" anchor="ctr"/>
+          <a:lstStyle/>
+          <a:p>
+            <a:pPr indent="0" marL="0">
+              <a:buNone/>
+            </a:pPr>
+            <a:r>
+              <a:rPr lang="en-US" sz="1600" b="1" dirty="0">
+                <a:solidFill>
+                  <a:srgbClr val="7C3AED"/>
+                </a:solidFill>
+              </a:rPr>
+              <a:t>FR</a:t>
+            </a:r>
+            <a:endParaRPr lang="en-US" sz="1600" dirty="0"/>
+          </a:p>
+        </p:txBody>
+      </p:sp>
+      <p:sp>
+        <p:nvSpPr>
+          <p:cNvPr id="13" name="Text 11"/>
+          <p:cNvSpPr txBox="1"/>
+          <p:nvPr/>
+        </p:nvSpPr>
+        <p:spPr>
+          <a:xfrm>
+            <a:off x="3749040" y="3429000"/>
+            <a:ext cx="1463040" cy="320040"/>
+          </a:xfrm>
+          <a:prstGeom prst="rect">
+            <a:avLst/>
+          </a:prstGeom>
+          <a:noFill/>
+          <a:ln/>
+        </p:spPr>
+        <p:txBody>
+          <a:bodyPr wrap="square" lIns="0" tIns="0" rIns="0" bIns="0" rtlCol="0" anchor="ctr"/>
+          <a:lstStyle/>
+          <a:p>
+            <a:pPr indent="0" marL="0">
+              <a:buNone/>
+            </a:pPr>
+            <a:r>
+              <a:rPr lang="en-US" sz="1600" b="1" dirty="0">
+                <a:solidFill>
+                  <a:srgbClr val="C2410C"/>
+                </a:solidFill>
+              </a:rPr>
+              <a:t>average ★</a:t>
+            </a:r>
+            <a:endParaRPr lang="en-US" sz="1600" dirty="0"/>
+          </a:p>
+        </p:txBody>
+      </p:sp>
+      <p:sp>
+        <p:nvSpPr>
+          <p:cNvPr id="14" name="Text 12"/>
+          <p:cNvSpPr txBox="1"/>
+          <p:nvPr/>
+        </p:nvSpPr>
+        <p:spPr>
+          <a:xfrm>
+            <a:off x="6400800" y="2468880"/>
+            <a:ext cx="5120640" cy="548640"/>
+          </a:xfrm>
+          <a:prstGeom prst="rect">
+            <a:avLst/>
+          </a:prstGeom>
+          <a:noFill/>
+          <a:ln/>
+        </p:spPr>
+        <p:txBody>
+          <a:bodyPr wrap="square" lIns="0" tIns="0" rIns="0" bIns="0" rtlCol="0" anchor="ctr"/>
+          <a:lstStyle/>
+          <a:p>
+            <a:pPr indent="0" marL="0">
+              <a:buNone/>
+            </a:pPr>
+            <a:r>
+              <a:rPr lang="en-US" sz="2200" b="1" dirty="0">
+                <a:solidFill>
+                  <a:srgbClr val="111827"/>
+                </a:solidFill>
+              </a:rPr>
+              <a:t>Three updates, three different directions</a:t>
+            </a:r>
+            <a:endParaRPr lang="en-US" sz="2200" dirty="0"/>
+          </a:p>
+        </p:txBody>
+      </p:sp>
+      <p:sp>
+        <p:nvSpPr>
+          <p:cNvPr id="15" name="Text 13"/>
+          <p:cNvSpPr txBox="1"/>
+          <p:nvPr/>
+        </p:nvSpPr>
+        <p:spPr>
+          <a:xfrm>
+            <a:off x="6400800" y="3017520"/>
+            <a:ext cx="5120640" cy="365760"/>
+          </a:xfrm>
+          <a:prstGeom prst="rect">
+            <a:avLst/>
+          </a:prstGeom>
+          <a:noFill/>
+          <a:ln/>
+        </p:spPr>
+        <p:txBody>
+          <a:bodyPr wrap="square" lIns="0" tIns="0" rIns="0" bIns="0" rtlCol="0" anchor="ctr"/>
+          <a:lstStyle/>
+          <a:p>
+            <a:pPr indent="0" marL="0">
+              <a:buNone/>
+            </a:pPr>
+            <a:r>
+              <a:rPr lang="en-US" sz="1500" dirty="0">
+                <a:solidFill>
                   <a:srgbClr val="6B7280"/>
                 </a:solidFill>
               </a:rPr>
-              <a:t>skills lost</a:t>
-            </a:r>
-            <a:endParaRPr lang="en-US" sz="1400" dirty="0"/>
-          </a:p>
-        </p:txBody>
-      </p:sp>
-      <p:sp>
-        <p:nvSpPr>
-          <p:cNvPr id="19" name="Shape 17"/>
-          <p:cNvSpPr/>
-          <p:nvPr/>
-        </p:nvSpPr>
-        <p:spPr>
-          <a:xfrm>
-            <a:off x="6537960" y="2651760"/>
-            <a:ext cx="3840480" cy="0"/>
-          </a:xfrm>
-          <a:prstGeom prst="line">
-            <a:avLst/>
-          </a:prstGeom>
-          <a:noFill/>
-          <a:ln w="25400">
-            <a:solidFill>
-              <a:srgbClr val="111827"/>
-            </a:solidFill>
-            <a:prstDash val="solid"/>
-          </a:ln>
-        </p:spPr>
-      </p:sp>
-      <p:sp>
-        <p:nvSpPr>
-          <p:cNvPr id="20" name="Shape 18"/>
-          <p:cNvSpPr/>
-          <p:nvPr/>
-        </p:nvSpPr>
-        <p:spPr>
-          <a:xfrm>
-            <a:off x="6675120" y="2651760"/>
-            <a:ext cx="731520" cy="640080"/>
-          </a:xfrm>
-          <a:prstGeom prst="rect">
-            <a:avLst/>
-          </a:prstGeom>
-          <a:solidFill>
-            <a:srgbClr val="2563EB"/>
-          </a:solidFill>
-          <a:ln w="12700">
-            <a:solidFill>
-              <a:srgbClr val="2563EB"/>
-            </a:solidFill>
-            <a:prstDash val="solid"/>
-          </a:ln>
-        </p:spPr>
-      </p:sp>
-      <p:sp>
-        <p:nvSpPr>
-          <p:cNvPr id="21" name="Text 19"/>
+              <a:t>averaging keeps what they share, cancels the rest</a:t>
+            </a:r>
+            <a:endParaRPr lang="en-US" sz="1500" dirty="0"/>
+          </a:p>
+        </p:txBody>
+      </p:sp>
+      <p:sp>
+        <p:nvSpPr>
+          <p:cNvPr id="16" name="Text 14"/>
           <p:cNvSpPr txBox="1"/>
           <p:nvPr/>
         </p:nvSpPr>
         <p:spPr>
           <a:xfrm>
-            <a:off x="6492240" y="3337560"/>
-            <a:ext cx="1097280" cy="320040"/>
+            <a:off x="6400800" y="3931920"/>
+            <a:ext cx="5120640" cy="548640"/>
           </a:xfrm>
           <a:prstGeom prst="rect">
             <a:avLst/>
@@ -4167,31 +3852,31 @@
           <a:bodyPr wrap="square" lIns="0" tIns="0" rIns="0" bIns="0" rtlCol="0" anchor="ctr"/>
           <a:lstStyle/>
           <a:p>
-            <a:pPr algn="ctr" indent="0" marL="0">
-              <a:buNone/>
-            </a:pPr>
-            <a:r>
-              <a:rPr lang="en-US" sz="1600" b="1" dirty="0">
-                <a:solidFill>
-                  <a:srgbClr val="111827"/>
-                </a:solidFill>
-              </a:rPr>
-              <a:t>−0.5</a:t>
-            </a:r>
-            <a:endParaRPr lang="en-US" sz="1600" dirty="0"/>
-          </a:p>
-        </p:txBody>
-      </p:sp>
-      <p:sp>
-        <p:nvSpPr>
-          <p:cNvPr id="22" name="Text 20"/>
+            <a:pPr indent="0" marL="0">
+              <a:buNone/>
+            </a:pPr>
+            <a:r>
+              <a:rPr lang="en-US" sz="2200" b="1" dirty="0">
+                <a:solidFill>
+                  <a:srgbClr val="C2410C"/>
+                </a:solidFill>
+              </a:rPr>
+              <a:t>The shared part lives in the MLPs</a:t>
+            </a:r>
+            <a:endParaRPr lang="en-US" sz="2200" dirty="0"/>
+          </a:p>
+        </p:txBody>
+      </p:sp>
+      <p:sp>
+        <p:nvSpPr>
+          <p:cNvPr id="17" name="Text 15"/>
           <p:cNvSpPr txBox="1"/>
           <p:nvPr/>
         </p:nvSpPr>
         <p:spPr>
           <a:xfrm>
-            <a:off x="6583680" y="3657600"/>
-            <a:ext cx="914400" cy="320040"/>
+            <a:off x="6400800" y="4480560"/>
+            <a:ext cx="5120640" cy="365760"/>
           </a:xfrm>
           <a:prstGeom prst="rect">
             <a:avLst/>
@@ -4203,315 +3888,24 @@
           <a:bodyPr wrap="square" lIns="0" tIns="0" rIns="0" bIns="0" rtlCol="0" anchor="ctr"/>
           <a:lstStyle/>
           <a:p>
-            <a:pPr algn="ctr" indent="0" marL="0">
-              <a:buNone/>
-            </a:pPr>
-            <a:r>
-              <a:rPr lang="en-US" sz="1400" b="1" dirty="0">
-                <a:solidFill>
-                  <a:srgbClr val="111827"/>
-                </a:solidFill>
-              </a:rPr>
-              <a:t>EN</a:t>
-            </a:r>
-            <a:endParaRPr lang="en-US" sz="1400" dirty="0"/>
-          </a:p>
-        </p:txBody>
-      </p:sp>
-      <p:sp>
-        <p:nvSpPr>
-          <p:cNvPr id="23" name="Shape 21"/>
-          <p:cNvSpPr/>
-          <p:nvPr/>
-        </p:nvSpPr>
-        <p:spPr>
-          <a:xfrm>
-            <a:off x="7635240" y="2651760"/>
-            <a:ext cx="731520" cy="1645920"/>
-          </a:xfrm>
-          <a:prstGeom prst="rect">
-            <a:avLst/>
-          </a:prstGeom>
-          <a:solidFill>
-            <a:srgbClr val="D97706"/>
-          </a:solidFill>
-          <a:ln w="12700">
-            <a:solidFill>
-              <a:srgbClr val="D97706"/>
-            </a:solidFill>
-            <a:prstDash val="solid"/>
-          </a:ln>
-        </p:spPr>
-      </p:sp>
-      <p:sp>
-        <p:nvSpPr>
-          <p:cNvPr id="24" name="Text 22"/>
-          <p:cNvSpPr txBox="1"/>
-          <p:nvPr/>
-        </p:nvSpPr>
-        <p:spPr>
-          <a:xfrm>
-            <a:off x="7452360" y="4343400"/>
-            <a:ext cx="1097280" cy="320040"/>
-          </a:xfrm>
-          <a:prstGeom prst="rect">
-            <a:avLst/>
-          </a:prstGeom>
-          <a:noFill/>
-          <a:ln/>
-        </p:spPr>
-        <p:txBody>
-          <a:bodyPr wrap="square" lIns="0" tIns="0" rIns="0" bIns="0" rtlCol="0" anchor="ctr"/>
-          <a:lstStyle/>
-          <a:p>
-            <a:pPr algn="ctr" indent="0" marL="0">
-              <a:buNone/>
-            </a:pPr>
-            <a:r>
-              <a:rPr lang="en-US" sz="1600" b="1" dirty="0">
-                <a:solidFill>
-                  <a:srgbClr val="C2410C"/>
-                </a:solidFill>
-              </a:rPr>
-              <a:t>−1.3</a:t>
-            </a:r>
-            <a:endParaRPr lang="en-US" sz="1600" dirty="0"/>
-          </a:p>
-        </p:txBody>
-      </p:sp>
-      <p:sp>
-        <p:nvSpPr>
-          <p:cNvPr id="25" name="Text 23"/>
-          <p:cNvSpPr txBox="1"/>
-          <p:nvPr/>
-        </p:nvSpPr>
-        <p:spPr>
-          <a:xfrm>
-            <a:off x="7543800" y="4663440"/>
-            <a:ext cx="914400" cy="320040"/>
-          </a:xfrm>
-          <a:prstGeom prst="rect">
-            <a:avLst/>
-          </a:prstGeom>
-          <a:noFill/>
-          <a:ln/>
-        </p:spPr>
-        <p:txBody>
-          <a:bodyPr wrap="square" lIns="0" tIns="0" rIns="0" bIns="0" rtlCol="0" anchor="ctr"/>
-          <a:lstStyle/>
-          <a:p>
-            <a:pPr algn="ctr" indent="0" marL="0">
-              <a:buNone/>
-            </a:pPr>
-            <a:r>
-              <a:rPr lang="en-US" sz="1400" b="1" dirty="0">
-                <a:solidFill>
-                  <a:srgbClr val="111827"/>
-                </a:solidFill>
-              </a:rPr>
-              <a:t>DE</a:t>
-            </a:r>
-            <a:endParaRPr lang="en-US" sz="1400" dirty="0"/>
-          </a:p>
-        </p:txBody>
-      </p:sp>
-      <p:sp>
-        <p:nvSpPr>
-          <p:cNvPr id="26" name="Shape 24"/>
-          <p:cNvSpPr/>
-          <p:nvPr/>
-        </p:nvSpPr>
-        <p:spPr>
-          <a:xfrm>
-            <a:off x="8595360" y="2651760"/>
-            <a:ext cx="731520" cy="1508760"/>
-          </a:xfrm>
-          <a:prstGeom prst="rect">
-            <a:avLst/>
-          </a:prstGeom>
-          <a:solidFill>
-            <a:srgbClr val="7C3AED"/>
-          </a:solidFill>
-          <a:ln w="12700">
-            <a:solidFill>
-              <a:srgbClr val="7C3AED"/>
-            </a:solidFill>
-            <a:prstDash val="solid"/>
-          </a:ln>
-        </p:spPr>
-      </p:sp>
-      <p:sp>
-        <p:nvSpPr>
-          <p:cNvPr id="27" name="Text 25"/>
-          <p:cNvSpPr txBox="1"/>
-          <p:nvPr/>
-        </p:nvSpPr>
-        <p:spPr>
-          <a:xfrm>
-            <a:off x="8412480" y="4206240"/>
-            <a:ext cx="1097280" cy="320040"/>
-          </a:xfrm>
-          <a:prstGeom prst="rect">
-            <a:avLst/>
-          </a:prstGeom>
-          <a:noFill/>
-          <a:ln/>
-        </p:spPr>
-        <p:txBody>
-          <a:bodyPr wrap="square" lIns="0" tIns="0" rIns="0" bIns="0" rtlCol="0" anchor="ctr"/>
-          <a:lstStyle/>
-          <a:p>
-            <a:pPr algn="ctr" indent="0" marL="0">
-              <a:buNone/>
-            </a:pPr>
-            <a:r>
-              <a:rPr lang="en-US" sz="1600" b="1" dirty="0">
-                <a:solidFill>
-                  <a:srgbClr val="C2410C"/>
-                </a:solidFill>
-              </a:rPr>
-              <a:t>−1.2</a:t>
-            </a:r>
-            <a:endParaRPr lang="en-US" sz="1600" dirty="0"/>
-          </a:p>
-        </p:txBody>
-      </p:sp>
-      <p:sp>
-        <p:nvSpPr>
-          <p:cNvPr id="28" name="Text 26"/>
-          <p:cNvSpPr txBox="1"/>
-          <p:nvPr/>
-        </p:nvSpPr>
-        <p:spPr>
-          <a:xfrm>
-            <a:off x="8503920" y="4526280"/>
-            <a:ext cx="914400" cy="320040"/>
-          </a:xfrm>
-          <a:prstGeom prst="rect">
-            <a:avLst/>
-          </a:prstGeom>
-          <a:noFill/>
-          <a:ln/>
-        </p:spPr>
-        <p:txBody>
-          <a:bodyPr wrap="square" lIns="0" tIns="0" rIns="0" bIns="0" rtlCol="0" anchor="ctr"/>
-          <a:lstStyle/>
-          <a:p>
-            <a:pPr algn="ctr" indent="0" marL="0">
-              <a:buNone/>
-            </a:pPr>
-            <a:r>
-              <a:rPr lang="en-US" sz="1400" b="1" dirty="0">
-                <a:solidFill>
-                  <a:srgbClr val="111827"/>
-                </a:solidFill>
-              </a:rPr>
-              <a:t>FR</a:t>
-            </a:r>
-            <a:endParaRPr lang="en-US" sz="1400" dirty="0"/>
-          </a:p>
-        </p:txBody>
-      </p:sp>
-      <p:sp>
-        <p:nvSpPr>
-          <p:cNvPr id="29" name="Shape 27"/>
-          <p:cNvSpPr/>
-          <p:nvPr/>
-        </p:nvSpPr>
-        <p:spPr>
-          <a:xfrm>
-            <a:off x="9555480" y="2651760"/>
-            <a:ext cx="731520" cy="384048"/>
-          </a:xfrm>
-          <a:prstGeom prst="rect">
-            <a:avLst/>
-          </a:prstGeom>
-          <a:solidFill>
-            <a:srgbClr val="C2410C"/>
-          </a:solidFill>
-          <a:ln w="12700">
-            <a:solidFill>
-              <a:srgbClr val="C2410C"/>
-            </a:solidFill>
-            <a:prstDash val="solid"/>
-          </a:ln>
-        </p:spPr>
-      </p:sp>
-      <p:sp>
-        <p:nvSpPr>
-          <p:cNvPr id="30" name="Text 28"/>
-          <p:cNvSpPr txBox="1"/>
-          <p:nvPr/>
-        </p:nvSpPr>
-        <p:spPr>
-          <a:xfrm>
-            <a:off x="9372600" y="3081528"/>
-            <a:ext cx="1097280" cy="320040"/>
-          </a:xfrm>
-          <a:prstGeom prst="rect">
-            <a:avLst/>
-          </a:prstGeom>
-          <a:noFill/>
-          <a:ln/>
-        </p:spPr>
-        <p:txBody>
-          <a:bodyPr wrap="square" lIns="0" tIns="0" rIns="0" bIns="0" rtlCol="0" anchor="ctr"/>
-          <a:lstStyle/>
-          <a:p>
-            <a:pPr algn="ctr" indent="0" marL="0">
-              <a:buNone/>
-            </a:pPr>
-            <a:r>
-              <a:rPr lang="en-US" sz="1600" b="1" dirty="0">
-                <a:solidFill>
-                  <a:srgbClr val="111827"/>
-                </a:solidFill>
-              </a:rPr>
-              <a:t>−0.3</a:t>
-            </a:r>
-            <a:endParaRPr lang="en-US" sz="1600" dirty="0"/>
-          </a:p>
-        </p:txBody>
-      </p:sp>
-      <p:sp>
-        <p:nvSpPr>
-          <p:cNvPr id="31" name="Text 29"/>
-          <p:cNvSpPr txBox="1"/>
-          <p:nvPr/>
-        </p:nvSpPr>
-        <p:spPr>
-          <a:xfrm>
-            <a:off x="9464040" y="3401568"/>
-            <a:ext cx="914400" cy="320040"/>
-          </a:xfrm>
-          <a:prstGeom prst="rect">
-            <a:avLst/>
-          </a:prstGeom>
-          <a:noFill/>
-          <a:ln/>
-        </p:spPr>
-        <p:txBody>
-          <a:bodyPr wrap="square" lIns="0" tIns="0" rIns="0" bIns="0" rtlCol="0" anchor="ctr"/>
-          <a:lstStyle/>
-          <a:p>
-            <a:pPr algn="ctr" indent="0" marL="0">
-              <a:buNone/>
-            </a:pPr>
-            <a:r>
-              <a:rPr lang="en-US" sz="1400" b="1" dirty="0">
-                <a:solidFill>
-                  <a:srgbClr val="111827"/>
-                </a:solidFill>
-              </a:rPr>
-              <a:t>Mix</a:t>
-            </a:r>
-            <a:endParaRPr lang="en-US" sz="1400" dirty="0"/>
-          </a:p>
-        </p:txBody>
-      </p:sp>
-      <p:sp>
-        <p:nvSpPr>
-          <p:cNvPr id="32" name="Text 0"/>
+            <a:pPr indent="0" marL="0">
+              <a:buNone/>
+            </a:pPr>
+            <a:r>
+              <a:rPr lang="en-US" sz="1500" dirty="0">
+                <a:solidFill>
+                  <a:srgbClr val="6B7280"/>
+                </a:solidFill>
+              </a:rPr>
+              <a:t>the same place steering found in Way 1</a:t>
+            </a:r>
+            <a:endParaRPr lang="en-US" sz="1500" dirty="0"/>
+          </a:p>
+        </p:txBody>
+      </p:sp>
+      <p:sp>
+        <p:nvSpPr>
+          <p:cNvPr id="18" name="Text 0"/>
           <p:cNvSpPr/>
           <p:nvPr>
             <p:ph idx="102" type="body" hasCustomPrompt="1"/>
@@ -4541,7 +3935,7 @@
                   <a:schemeClr val="tx1"/>
                 </a:solidFill>
               </a:rPr>
-              <a:t>Mixing helps: more facts, less damage. </a:t>
+              <a:t>New knowledge is a direction. </a:t>
             </a:r>
             <a:pPr indent="0" marL="0">
               <a:buNone/>
@@ -4552,7 +3946,7 @@
                   <a:srgbClr val="6B7280"/>
                 </a:solidFill>
               </a:rPr>
-              <a:t>But can we do better without training at all?</a:t>
+              <a:t>Averaging keeps the shared part.</a:t>
             </a:r>
             <a:endParaRPr lang="en-US" sz="1800" dirty="0"/>
           </a:p>
@@ -4608,9 +4002,6 @@
   <p:clrMapOvr>
     <a:masterClrMapping/>
   </p:clrMapOvr>
-  <p:transition spd="med">
-    <p:fade/>
-  </p:transition>
 </p:sld>
 </file>
 
@@ -4663,7 +4054,7 @@
                   <a:schemeClr val="accent1"/>
                 </a:solidFill>
               </a:rPr>
-              <a:t>WAY 2 · QUESTION 8 · THE TRICK</a:t>
+              <a:t>WAY 2 · IN ONE PICTURE</a:t>
             </a:r>
             <a:endParaRPr lang="en-US" sz="1200" dirty="0"/>
           </a:p>
@@ -4701,7 +4092,7 @@
                   <a:schemeClr val="tx1"/>
                 </a:solidFill>
               </a:rPr>
-              <a:t>Three models, one average. </a:t>
+              <a:t>Every update learns. </a:t>
             </a:r>
             <a:pPr algn="l" indent="0" marL="0">
               <a:buNone/>
@@ -4712,580 +4103,39 @@
                   <a:srgbClr val="6B7280"/>
                 </a:solidFill>
               </a:rPr>
-              <a:t>No training.</a:t>
+              <a:t>Only the average learns without losing.</a:t>
             </a:r>
             <a:endParaRPr lang="en-US" sz="3200" dirty="0"/>
           </a:p>
         </p:txBody>
       </p:sp>
-      <p:sp>
-        <p:nvSpPr>
-          <p:cNvPr id="4" name="Shape 2"/>
-          <p:cNvSpPr/>
-          <p:nvPr/>
-        </p:nvSpPr>
-        <p:spPr>
-          <a:xfrm>
-            <a:off x="1280160" y="2743200"/>
-            <a:ext cx="1005840" cy="1005840"/>
-          </a:xfrm>
-          <a:prstGeom prst="ellipse">
-            <a:avLst/>
-          </a:prstGeom>
-          <a:solidFill>
-            <a:srgbClr val="2563EB"/>
-          </a:solidFill>
-          <a:ln w="12700">
-            <a:solidFill>
-              <a:srgbClr val="2563EB"/>
-            </a:solidFill>
-            <a:prstDash val="solid"/>
-          </a:ln>
-        </p:spPr>
-      </p:sp>
-      <p:sp>
-        <p:nvSpPr>
-          <p:cNvPr id="5" name="Text 3"/>
-          <p:cNvSpPr txBox="1"/>
-          <p:nvPr/>
-        </p:nvSpPr>
-        <p:spPr>
-          <a:xfrm>
-            <a:off x="1280160" y="2743200"/>
-            <a:ext cx="1005840" cy="1005840"/>
-          </a:xfrm>
-          <a:prstGeom prst="rect">
-            <a:avLst/>
-          </a:prstGeom>
-          <a:noFill/>
-          <a:ln/>
-        </p:spPr>
-        <p:txBody>
-          <a:bodyPr wrap="square" lIns="0" tIns="0" rIns="0" bIns="0" rtlCol="0" anchor="ctr"/>
-          <a:lstStyle/>
-          <a:p>
-            <a:pPr algn="ctr" indent="0" marL="0">
-              <a:buNone/>
-            </a:pPr>
-            <a:r>
-              <a:rPr lang="en-US" sz="2600" b="1" dirty="0">
-                <a:solidFill>
-                  <a:srgbClr val="FFFFFF"/>
-                </a:solidFill>
-              </a:rPr>
-              <a:t>EN</a:t>
-            </a:r>
-            <a:endParaRPr lang="en-US" sz="2600" dirty="0"/>
-          </a:p>
-        </p:txBody>
-      </p:sp>
-      <p:sp>
-        <p:nvSpPr>
-          <p:cNvPr id="6" name="Text 4"/>
-          <p:cNvSpPr txBox="1"/>
-          <p:nvPr/>
-        </p:nvSpPr>
-        <p:spPr>
-          <a:xfrm>
-            <a:off x="2377440" y="2743200"/>
-            <a:ext cx="457200" cy="1005840"/>
-          </a:xfrm>
-          <a:prstGeom prst="rect">
-            <a:avLst/>
-          </a:prstGeom>
-          <a:noFill/>
-          <a:ln/>
-        </p:spPr>
-        <p:txBody>
-          <a:bodyPr wrap="square" lIns="0" tIns="0" rIns="0" bIns="0" rtlCol="0" anchor="ctr"/>
-          <a:lstStyle/>
-          <a:p>
-            <a:pPr algn="ctr" indent="0" marL="0">
-              <a:buNone/>
-            </a:pPr>
-            <a:r>
-              <a:rPr lang="en-US" sz="3600" b="1" dirty="0">
-                <a:solidFill>
-                  <a:srgbClr val="9CA3AF"/>
-                </a:solidFill>
-              </a:rPr>
-              <a:t>+</a:t>
-            </a:r>
-            <a:endParaRPr lang="en-US" sz="3600" dirty="0"/>
-          </a:p>
-        </p:txBody>
-      </p:sp>
-      <p:sp>
-        <p:nvSpPr>
-          <p:cNvPr id="7" name="Shape 5"/>
-          <p:cNvSpPr/>
-          <p:nvPr/>
-        </p:nvSpPr>
-        <p:spPr>
-          <a:xfrm>
-            <a:off x="2926080" y="2743200"/>
-            <a:ext cx="1005840" cy="1005840"/>
-          </a:xfrm>
-          <a:prstGeom prst="ellipse">
-            <a:avLst/>
-          </a:prstGeom>
-          <a:solidFill>
-            <a:srgbClr val="D97706"/>
-          </a:solidFill>
-          <a:ln w="12700">
-            <a:solidFill>
-              <a:srgbClr val="D97706"/>
-            </a:solidFill>
-            <a:prstDash val="solid"/>
-          </a:ln>
-        </p:spPr>
-      </p:sp>
-      <p:sp>
-        <p:nvSpPr>
-          <p:cNvPr id="8" name="Text 6"/>
-          <p:cNvSpPr txBox="1"/>
-          <p:nvPr/>
-        </p:nvSpPr>
-        <p:spPr>
-          <a:xfrm>
-            <a:off x="2926080" y="2743200"/>
-            <a:ext cx="1005840" cy="1005840"/>
-          </a:xfrm>
-          <a:prstGeom prst="rect">
-            <a:avLst/>
-          </a:prstGeom>
-          <a:noFill/>
-          <a:ln/>
-        </p:spPr>
-        <p:txBody>
-          <a:bodyPr wrap="square" lIns="0" tIns="0" rIns="0" bIns="0" rtlCol="0" anchor="ctr"/>
-          <a:lstStyle/>
-          <a:p>
-            <a:pPr algn="ctr" indent="0" marL="0">
-              <a:buNone/>
-            </a:pPr>
-            <a:r>
-              <a:rPr lang="en-US" sz="2600" b="1" dirty="0">
-                <a:solidFill>
-                  <a:srgbClr val="FFFFFF"/>
-                </a:solidFill>
-              </a:rPr>
-              <a:t>DE</a:t>
-            </a:r>
-            <a:endParaRPr lang="en-US" sz="2600" dirty="0"/>
-          </a:p>
-        </p:txBody>
-      </p:sp>
-      <p:sp>
-        <p:nvSpPr>
-          <p:cNvPr id="9" name="Text 7"/>
-          <p:cNvSpPr txBox="1"/>
-          <p:nvPr/>
-        </p:nvSpPr>
-        <p:spPr>
-          <a:xfrm>
-            <a:off x="4023360" y="2743200"/>
-            <a:ext cx="457200" cy="1005840"/>
-          </a:xfrm>
-          <a:prstGeom prst="rect">
-            <a:avLst/>
-          </a:prstGeom>
-          <a:noFill/>
-          <a:ln/>
-        </p:spPr>
-        <p:txBody>
-          <a:bodyPr wrap="square" lIns="0" tIns="0" rIns="0" bIns="0" rtlCol="0" anchor="ctr"/>
-          <a:lstStyle/>
-          <a:p>
-            <a:pPr algn="ctr" indent="0" marL="0">
-              <a:buNone/>
-            </a:pPr>
-            <a:r>
-              <a:rPr lang="en-US" sz="3600" b="1" dirty="0">
-                <a:solidFill>
-                  <a:srgbClr val="9CA3AF"/>
-                </a:solidFill>
-              </a:rPr>
-              <a:t>+</a:t>
-            </a:r>
-            <a:endParaRPr lang="en-US" sz="3600" dirty="0"/>
-          </a:p>
-        </p:txBody>
-      </p:sp>
-      <p:sp>
-        <p:nvSpPr>
-          <p:cNvPr id="10" name="Shape 8"/>
-          <p:cNvSpPr/>
-          <p:nvPr/>
-        </p:nvSpPr>
-        <p:spPr>
-          <a:xfrm>
-            <a:off x="4572000" y="2743200"/>
-            <a:ext cx="1005840" cy="1005840"/>
-          </a:xfrm>
-          <a:prstGeom prst="ellipse">
-            <a:avLst/>
-          </a:prstGeom>
-          <a:solidFill>
-            <a:srgbClr val="7C3AED"/>
-          </a:solidFill>
-          <a:ln w="12700">
-            <a:solidFill>
-              <a:srgbClr val="7C3AED"/>
-            </a:solidFill>
-            <a:prstDash val="solid"/>
-          </a:ln>
-        </p:spPr>
-      </p:sp>
-      <p:sp>
-        <p:nvSpPr>
-          <p:cNvPr id="11" name="Text 9"/>
-          <p:cNvSpPr txBox="1"/>
-          <p:nvPr/>
-        </p:nvSpPr>
-        <p:spPr>
-          <a:xfrm>
-            <a:off x="4572000" y="2743200"/>
-            <a:ext cx="1005840" cy="1005840"/>
-          </a:xfrm>
-          <a:prstGeom prst="rect">
-            <a:avLst/>
-          </a:prstGeom>
-          <a:noFill/>
-          <a:ln/>
-        </p:spPr>
-        <p:txBody>
-          <a:bodyPr wrap="square" lIns="0" tIns="0" rIns="0" bIns="0" rtlCol="0" anchor="ctr"/>
-          <a:lstStyle/>
-          <a:p>
-            <a:pPr algn="ctr" indent="0" marL="0">
-              <a:buNone/>
-            </a:pPr>
-            <a:r>
-              <a:rPr lang="en-US" sz="2600" b="1" dirty="0">
-                <a:solidFill>
-                  <a:srgbClr val="FFFFFF"/>
-                </a:solidFill>
-              </a:rPr>
-              <a:t>FR</a:t>
-            </a:r>
-            <a:endParaRPr lang="en-US" sz="2600" dirty="0"/>
-          </a:p>
-        </p:txBody>
-      </p:sp>
-      <p:sp>
-        <p:nvSpPr>
-          <p:cNvPr id="12" name="Text 10"/>
-          <p:cNvSpPr txBox="1"/>
-          <p:nvPr/>
-        </p:nvSpPr>
-        <p:spPr>
-          <a:xfrm>
-            <a:off x="5669280" y="2743200"/>
-            <a:ext cx="1463040" cy="1005840"/>
-          </a:xfrm>
-          <a:prstGeom prst="rect">
-            <a:avLst/>
-          </a:prstGeom>
-          <a:noFill/>
-          <a:ln/>
-        </p:spPr>
-        <p:txBody>
-          <a:bodyPr wrap="square" lIns="0" tIns="0" rIns="0" bIns="0" rtlCol="0" anchor="ctr"/>
-          <a:lstStyle/>
-          <a:p>
-            <a:pPr algn="ctr" indent="0" marL="0">
-              <a:buNone/>
-            </a:pPr>
-            <a:r>
-              <a:rPr lang="en-US" sz="3600" b="1" dirty="0">
-                <a:solidFill>
-                  <a:srgbClr val="9CA3AF"/>
-                </a:solidFill>
-              </a:rPr>
-              <a:t>÷ 3  =</a:t>
-            </a:r>
-            <a:endParaRPr lang="en-US" sz="3600" dirty="0"/>
-          </a:p>
-        </p:txBody>
-      </p:sp>
-      <p:sp>
-        <p:nvSpPr>
-          <p:cNvPr id="13" name="Shape 11"/>
-          <p:cNvSpPr/>
-          <p:nvPr/>
-        </p:nvSpPr>
-        <p:spPr>
-          <a:xfrm>
-            <a:off x="7315200" y="2560320"/>
-            <a:ext cx="1371600" cy="1371600"/>
-          </a:xfrm>
-          <a:prstGeom prst="ellipse">
-            <a:avLst/>
-          </a:prstGeom>
-          <a:solidFill>
-            <a:srgbClr val="C2410C"/>
-          </a:solidFill>
-          <a:ln w="12700">
-            <a:solidFill>
-              <a:srgbClr val="C2410C"/>
-            </a:solidFill>
-            <a:prstDash val="solid"/>
-          </a:ln>
-        </p:spPr>
-      </p:sp>
-      <p:sp>
-        <p:nvSpPr>
-          <p:cNvPr id="14" name="Text 12"/>
-          <p:cNvSpPr txBox="1"/>
-          <p:nvPr/>
-        </p:nvSpPr>
-        <p:spPr>
-          <a:xfrm>
-            <a:off x="7315200" y="2560320"/>
-            <a:ext cx="1371600" cy="1371600"/>
-          </a:xfrm>
-          <a:prstGeom prst="rect">
-            <a:avLst/>
-          </a:prstGeom>
-          <a:noFill/>
-          <a:ln/>
-        </p:spPr>
-        <p:txBody>
-          <a:bodyPr wrap="square" lIns="0" tIns="0" rIns="0" bIns="0" rtlCol="0" anchor="ctr"/>
-          <a:lstStyle/>
-          <a:p>
-            <a:pPr algn="ctr" indent="0" marL="0">
-              <a:buNone/>
-            </a:pPr>
-            <a:r>
-              <a:rPr lang="en-US" sz="4800" dirty="0">
-                <a:solidFill>
-                  <a:srgbClr val="FFFFFF"/>
-                </a:solidFill>
-              </a:rPr>
-              <a:t>★</a:t>
-            </a:r>
-            <a:endParaRPr lang="en-US" sz="4800" dirty="0"/>
-          </a:p>
-        </p:txBody>
-      </p:sp>
-      <p:sp>
-        <p:nvSpPr>
-          <p:cNvPr id="15" name="Text 13"/>
-          <p:cNvSpPr txBox="1"/>
-          <p:nvPr/>
-        </p:nvSpPr>
-        <p:spPr>
-          <a:xfrm>
-            <a:off x="1280160" y="4206240"/>
-            <a:ext cx="2377440" cy="914400"/>
-          </a:xfrm>
-          <a:prstGeom prst="rect">
-            <a:avLst/>
-          </a:prstGeom>
-          <a:noFill/>
-          <a:ln/>
-        </p:spPr>
-        <p:txBody>
-          <a:bodyPr wrap="square" lIns="0" tIns="0" rIns="0" bIns="0" rtlCol="0" anchor="ctr"/>
-          <a:lstStyle/>
-          <a:p>
-            <a:pPr algn="ctr" indent="0" marL="0">
-              <a:buNone/>
-            </a:pPr>
-            <a:r>
-              <a:rPr lang="en-US" sz="6000" b="1" dirty="0">
-                <a:solidFill>
-                  <a:srgbClr val="C2410C"/>
-                </a:solidFill>
-                <a:latin typeface="Cambria" pitchFamily="34" charset="0"/>
-                <a:ea typeface="Cambria" pitchFamily="34" charset="-122"/>
-                <a:cs typeface="Cambria" pitchFamily="34" charset="-120"/>
-              </a:rPr>
-              <a:t>+5.1</a:t>
-            </a:r>
-            <a:endParaRPr lang="en-US" sz="6000" dirty="0"/>
-          </a:p>
-        </p:txBody>
-      </p:sp>
-      <p:sp>
-        <p:nvSpPr>
-          <p:cNvPr id="16" name="Text 14"/>
-          <p:cNvSpPr txBox="1"/>
-          <p:nvPr/>
-        </p:nvSpPr>
-        <p:spPr>
-          <a:xfrm>
-            <a:off x="1280160" y="5120640"/>
-            <a:ext cx="2377440" cy="365760"/>
-          </a:xfrm>
-          <a:prstGeom prst="rect">
-            <a:avLst/>
-          </a:prstGeom>
-          <a:noFill/>
-          <a:ln/>
-        </p:spPr>
-        <p:txBody>
-          <a:bodyPr wrap="square" lIns="0" tIns="0" rIns="0" bIns="0" rtlCol="0" anchor="ctr"/>
-          <a:lstStyle/>
-          <a:p>
-            <a:pPr algn="ctr" indent="0" marL="0">
-              <a:buNone/>
-            </a:pPr>
-            <a:r>
-              <a:rPr lang="en-US" sz="1500" dirty="0">
-                <a:solidFill>
-                  <a:srgbClr val="6B7280"/>
-                </a:solidFill>
-              </a:rPr>
-              <a:t>new facts</a:t>
-            </a:r>
-            <a:endParaRPr lang="en-US" sz="1500" dirty="0"/>
-          </a:p>
-        </p:txBody>
-      </p:sp>
-      <p:sp>
-        <p:nvSpPr>
-          <p:cNvPr id="17" name="Text 15"/>
-          <p:cNvSpPr txBox="1"/>
-          <p:nvPr/>
-        </p:nvSpPr>
-        <p:spPr>
-          <a:xfrm>
-            <a:off x="4023360" y="4206240"/>
-            <a:ext cx="2377440" cy="914400"/>
-          </a:xfrm>
-          <a:prstGeom prst="rect">
-            <a:avLst/>
-          </a:prstGeom>
-          <a:noFill/>
-          <a:ln/>
-        </p:spPr>
-        <p:txBody>
-          <a:bodyPr wrap="square" lIns="0" tIns="0" rIns="0" bIns="0" rtlCol="0" anchor="ctr"/>
-          <a:lstStyle/>
-          <a:p>
-            <a:pPr algn="ctr" indent="0" marL="0">
-              <a:buNone/>
-            </a:pPr>
-            <a:r>
-              <a:rPr lang="en-US" sz="6000" b="1" dirty="0">
-                <a:solidFill>
-                  <a:srgbClr val="111827"/>
-                </a:solidFill>
-                <a:latin typeface="Cambria" pitchFamily="34" charset="0"/>
-                <a:ea typeface="Cambria" pitchFamily="34" charset="-122"/>
-                <a:cs typeface="Cambria" pitchFamily="34" charset="-120"/>
-              </a:rPr>
-              <a:t>+0.2</a:t>
-            </a:r>
-            <a:endParaRPr lang="en-US" sz="6000" dirty="0"/>
-          </a:p>
-        </p:txBody>
-      </p:sp>
-      <p:sp>
-        <p:nvSpPr>
-          <p:cNvPr id="18" name="Text 16"/>
-          <p:cNvSpPr txBox="1"/>
-          <p:nvPr/>
-        </p:nvSpPr>
-        <p:spPr>
-          <a:xfrm>
-            <a:off x="4023360" y="5120640"/>
-            <a:ext cx="2377440" cy="365760"/>
-          </a:xfrm>
-          <a:prstGeom prst="rect">
-            <a:avLst/>
-          </a:prstGeom>
-          <a:noFill/>
-          <a:ln/>
-        </p:spPr>
-        <p:txBody>
-          <a:bodyPr wrap="square" lIns="0" tIns="0" rIns="0" bIns="0" rtlCol="0" anchor="ctr"/>
-          <a:lstStyle/>
-          <a:p>
-            <a:pPr algn="ctr" indent="0" marL="0">
-              <a:buNone/>
-            </a:pPr>
-            <a:r>
-              <a:rPr lang="en-US" sz="1500" dirty="0">
-                <a:solidFill>
-                  <a:srgbClr val="6B7280"/>
-                </a:solidFill>
-              </a:rPr>
-              <a:t>skills, nothing lost</a:t>
-            </a:r>
-            <a:endParaRPr lang="en-US" sz="1500" dirty="0"/>
-          </a:p>
-        </p:txBody>
-      </p:sp>
-      <p:sp>
-        <p:nvSpPr>
-          <p:cNvPr id="19" name="Shape 17"/>
-          <p:cNvSpPr/>
-          <p:nvPr/>
-        </p:nvSpPr>
-        <p:spPr>
-          <a:xfrm>
-            <a:off x="6949440" y="4526280"/>
-            <a:ext cx="4206240" cy="384048"/>
-          </a:xfrm>
-          <a:prstGeom prst="roundRect">
-            <a:avLst>
-              <a:gd name="adj" fmla="val 50000"/>
-            </a:avLst>
-          </a:prstGeom>
-          <a:solidFill>
-            <a:srgbClr val="DCFCE7"/>
-          </a:solidFill>
-          <a:ln w="12700">
-            <a:solidFill>
-              <a:srgbClr val="DCFCE7"/>
-            </a:solidFill>
-            <a:prstDash val="solid"/>
-          </a:ln>
-        </p:spPr>
-      </p:sp>
-      <p:sp>
-        <p:nvSpPr>
-          <p:cNvPr id="20" name="Text 18"/>
-          <p:cNvSpPr txBox="1"/>
-          <p:nvPr/>
-        </p:nvSpPr>
-        <p:spPr>
-          <a:xfrm>
-            <a:off x="6949440" y="4526280"/>
-            <a:ext cx="4206240" cy="384048"/>
-          </a:xfrm>
-          <a:prstGeom prst="rect">
-            <a:avLst/>
-          </a:prstGeom>
-          <a:noFill/>
-          <a:ln/>
-        </p:spPr>
-        <p:txBody>
-          <a:bodyPr wrap="square" lIns="0" tIns="0" rIns="0" bIns="0" rtlCol="0" anchor="ctr"/>
-          <a:lstStyle/>
-          <a:p>
-            <a:pPr algn="ctr" indent="0" marL="0">
-              <a:buNone/>
-            </a:pPr>
-            <a:r>
-              <a:rPr lang="en-US" sz="1300" b="1" dirty="0">
-                <a:solidFill>
-                  <a:srgbClr val="166534"/>
-                </a:solidFill>
-              </a:rPr>
-              <a:t>zero training  ·  just average the weights</a:t>
-            </a:r>
-            <a:endParaRPr lang="en-US" sz="1300" dirty="0"/>
-          </a:p>
-        </p:txBody>
-      </p:sp>
-      <p:sp>
-        <p:nvSpPr>
-          <p:cNvPr id="21" name="Text 0"/>
+      <p:pic>
+        <p:nvPicPr>
+          <p:cNvPr id="4" name="Image 0" descr="/tmp/claude-0/-home-user-Claude-expo-repo-36501/d3d88de1-f67d-5aa6-8097-3ece5ccf8bcb/scratchpad/build/summary_part2.png">    </p:cNvPr>
+          <p:cNvPicPr>
+            <a:picLocks noChangeAspect="1"/>
+          </p:cNvPicPr>
+          <p:nvPr/>
+        </p:nvPicPr>
+        <p:blipFill>
+          <a:blip r:embed="rId1"/>
+          <a:stretch>
+            <a:fillRect/>
+          </a:stretch>
+        </p:blipFill>
+        <p:spPr>
+          <a:xfrm>
+            <a:off x="2331720" y="1965960"/>
+            <a:ext cx="7498080" cy="3994831"/>
+          </a:xfrm>
+          <a:prstGeom prst="rect">
+            <a:avLst/>
+          </a:prstGeom>
+        </p:spPr>
+      </p:pic>
+      <p:sp>
+        <p:nvSpPr>
+          <p:cNvPr id="5" name="Text 0"/>
           <p:cNvSpPr/>
           <p:nvPr>
             <p:ph idx="102" type="body" hasCustomPrompt="1"/>
@@ -5315,7 +4165,7 @@
                   <a:schemeClr val="tx1"/>
                 </a:solidFill>
               </a:rPr>
-              <a:t>All the facts, none of the damage. </a:t>
+              <a:t>Right = more new facts. Up = nothing forgotten. </a:t>
             </a:r>
             <a:pPr indent="0" marL="0">
               <a:buNone/>
@@ -5326,7 +4176,7 @@
                   <a:srgbClr val="6B7280"/>
                 </a:solidFill>
               </a:rPr>
-              <a:t>Train separately, merge afterwards.</a:t>
+              <a:t>Top right is where we want to be.</a:t>
             </a:r>
             <a:endParaRPr lang="en-US" sz="1800" dirty="0"/>
           </a:p>
@@ -5382,9 +4232,6 @@
   <p:clrMapOvr>
     <a:masterClrMapping/>
   </p:clrMapOvr>
-  <p:transition spd="med">
-    <p:fade/>
-  </p:transition>
 </p:sld>
 </file>
 
@@ -5437,963 +4284,6 @@
                   <a:schemeClr val="accent1"/>
                 </a:solidFill>
               </a:rPr>
-              <a:t>WAY 2 · QUESTION 9 · WORK IN PROGRESS</a:t>
-            </a:r>
-            <a:endParaRPr lang="en-US" sz="1200" dirty="0"/>
-          </a:p>
-        </p:txBody>
-      </p:sp>
-      <p:sp>
-        <p:nvSpPr>
-          <p:cNvPr id="3" name="Text 0"/>
-          <p:cNvSpPr/>
-          <p:nvPr>
-            <p:ph idx="101" type="title" hasCustomPrompt="1"/>
-          </p:nvPr>
-        </p:nvSpPr>
-        <p:spPr>
-          <a:xfrm>
-            <a:off x="640080" y="731520"/>
-            <a:ext cx="10908792" cy="1097280"/>
-          </a:xfrm>
-          <a:prstGeom prst="rect">
-            <a:avLst/>
-          </a:prstGeom>
-          <a:noFill/>
-          <a:ln/>
-        </p:spPr>
-        <p:txBody>
-          <a:bodyPr wrap="square" lIns="0" tIns="0" rIns="0" bIns="0" rtlCol="0" anchor="t"/>
-          <a:lstStyle/>
-          <a:p>
-            <a:pPr algn="l" indent="0" marL="0">
-              <a:buNone/>
-            </a:pPr>
-            <a:r>
-              <a:rPr lang="en-US" sz="3200" b="1" dirty="0">
-                <a:solidFill>
-                  <a:schemeClr val="tx1"/>
-                </a:solidFill>
-              </a:rPr>
-              <a:t>Why does averaging work?</a:t>
-            </a:r>
-            <a:endParaRPr lang="en-US" sz="3200" dirty="0"/>
-          </a:p>
-        </p:txBody>
-      </p:sp>
-      <p:sp>
-        <p:nvSpPr>
-          <p:cNvPr id="4" name="Shape 2"/>
-          <p:cNvSpPr/>
-          <p:nvPr/>
-        </p:nvSpPr>
-        <p:spPr>
-          <a:xfrm flipV="1">
-            <a:off x="1463040" y="4206240"/>
-            <a:ext cx="3657600" cy="731520"/>
-          </a:xfrm>
-          <a:prstGeom prst="line">
-            <a:avLst/>
-          </a:prstGeom>
-          <a:noFill/>
-          <a:ln w="50800">
-            <a:solidFill>
-              <a:srgbClr val="2563EB"/>
-            </a:solidFill>
-            <a:prstDash val="solid"/>
-            <a:tailEnd type="triangle"/>
-          </a:ln>
-        </p:spPr>
-      </p:sp>
-      <p:sp>
-        <p:nvSpPr>
-          <p:cNvPr id="5" name="Shape 3"/>
-          <p:cNvSpPr/>
-          <p:nvPr/>
-        </p:nvSpPr>
-        <p:spPr>
-          <a:xfrm flipV="1">
-            <a:off x="1463040" y="2194560"/>
-            <a:ext cx="1188720" cy="2743200"/>
-          </a:xfrm>
-          <a:prstGeom prst="line">
-            <a:avLst/>
-          </a:prstGeom>
-          <a:noFill/>
-          <a:ln w="50800">
-            <a:solidFill>
-              <a:srgbClr val="D97706"/>
-            </a:solidFill>
-            <a:prstDash val="solid"/>
-            <a:tailEnd type="triangle"/>
-          </a:ln>
-        </p:spPr>
-      </p:sp>
-      <p:sp>
-        <p:nvSpPr>
-          <p:cNvPr id="6" name="Shape 4"/>
-          <p:cNvSpPr/>
-          <p:nvPr/>
-        </p:nvSpPr>
-        <p:spPr>
-          <a:xfrm flipV="1">
-            <a:off x="1463040" y="2286000"/>
-            <a:ext cx="3017520" cy="2651760"/>
-          </a:xfrm>
-          <a:prstGeom prst="line">
-            <a:avLst/>
-          </a:prstGeom>
-          <a:noFill/>
-          <a:ln w="50800">
-            <a:solidFill>
-              <a:srgbClr val="7C3AED"/>
-            </a:solidFill>
-            <a:prstDash val="solid"/>
-            <a:tailEnd type="triangle"/>
-          </a:ln>
-        </p:spPr>
-      </p:sp>
-      <p:sp>
-        <p:nvSpPr>
-          <p:cNvPr id="7" name="Shape 5"/>
-          <p:cNvSpPr/>
-          <p:nvPr/>
-        </p:nvSpPr>
-        <p:spPr>
-          <a:xfrm flipV="1">
-            <a:off x="1463040" y="3657600"/>
-            <a:ext cx="2194560" cy="1280160"/>
-          </a:xfrm>
-          <a:prstGeom prst="line">
-            <a:avLst/>
-          </a:prstGeom>
-          <a:noFill/>
-          <a:ln w="88900">
-            <a:solidFill>
-              <a:srgbClr val="C2410C"/>
-            </a:solidFill>
-            <a:prstDash val="solid"/>
-            <a:tailEnd type="triangle"/>
-          </a:ln>
-        </p:spPr>
-      </p:sp>
-      <p:sp>
-        <p:nvSpPr>
-          <p:cNvPr id="8" name="Shape 6"/>
-          <p:cNvSpPr/>
-          <p:nvPr/>
-        </p:nvSpPr>
-        <p:spPr>
-          <a:xfrm>
-            <a:off x="1325880" y="4800600"/>
-            <a:ext cx="274320" cy="274320"/>
-          </a:xfrm>
-          <a:prstGeom prst="ellipse">
-            <a:avLst/>
-          </a:prstGeom>
-          <a:solidFill>
-            <a:srgbClr val="FFFFFF"/>
-          </a:solidFill>
-          <a:ln w="38100">
-            <a:solidFill>
-              <a:srgbClr val="111827"/>
-            </a:solidFill>
-            <a:prstDash val="solid"/>
-          </a:ln>
-        </p:spPr>
-      </p:sp>
-      <p:sp>
-        <p:nvSpPr>
-          <p:cNvPr id="9" name="Text 7"/>
-          <p:cNvSpPr txBox="1"/>
-          <p:nvPr/>
-        </p:nvSpPr>
-        <p:spPr>
-          <a:xfrm>
-            <a:off x="640080" y="5120640"/>
-            <a:ext cx="1645920" cy="320040"/>
-          </a:xfrm>
-          <a:prstGeom prst="rect">
-            <a:avLst/>
-          </a:prstGeom>
-          <a:noFill/>
-          <a:ln/>
-        </p:spPr>
-        <p:txBody>
-          <a:bodyPr wrap="square" lIns="0" tIns="0" rIns="0" bIns="0" rtlCol="0" anchor="ctr"/>
-          <a:lstStyle/>
-          <a:p>
-            <a:pPr algn="ctr" indent="0" marL="0">
-              <a:buNone/>
-            </a:pPr>
-            <a:r>
-              <a:rPr lang="en-US" sz="1400" b="1" dirty="0">
-                <a:solidFill>
-                  <a:srgbClr val="111827"/>
-                </a:solidFill>
-              </a:rPr>
-              <a:t>base model</a:t>
-            </a:r>
-            <a:endParaRPr lang="en-US" sz="1400" dirty="0"/>
-          </a:p>
-        </p:txBody>
-      </p:sp>
-      <p:sp>
-        <p:nvSpPr>
-          <p:cNvPr id="10" name="Text 8"/>
-          <p:cNvSpPr txBox="1"/>
-          <p:nvPr/>
-        </p:nvSpPr>
-        <p:spPr>
-          <a:xfrm>
-            <a:off x="5212080" y="4023360"/>
-            <a:ext cx="548640" cy="320040"/>
-          </a:xfrm>
-          <a:prstGeom prst="rect">
-            <a:avLst/>
-          </a:prstGeom>
-          <a:noFill/>
-          <a:ln/>
-        </p:spPr>
-        <p:txBody>
-          <a:bodyPr wrap="square" lIns="0" tIns="0" rIns="0" bIns="0" rtlCol="0" anchor="ctr"/>
-          <a:lstStyle/>
-          <a:p>
-            <a:pPr indent="0" marL="0">
-              <a:buNone/>
-            </a:pPr>
-            <a:r>
-              <a:rPr lang="en-US" sz="1600" b="1" dirty="0">
-                <a:solidFill>
-                  <a:srgbClr val="2563EB"/>
-                </a:solidFill>
-              </a:rPr>
-              <a:t>EN</a:t>
-            </a:r>
-            <a:endParaRPr lang="en-US" sz="1600" dirty="0"/>
-          </a:p>
-        </p:txBody>
-      </p:sp>
-      <p:sp>
-        <p:nvSpPr>
-          <p:cNvPr id="11" name="Text 9"/>
-          <p:cNvSpPr txBox="1"/>
-          <p:nvPr/>
-        </p:nvSpPr>
-        <p:spPr>
-          <a:xfrm>
-            <a:off x="2377440" y="1874520"/>
-            <a:ext cx="548640" cy="320040"/>
-          </a:xfrm>
-          <a:prstGeom prst="rect">
-            <a:avLst/>
-          </a:prstGeom>
-          <a:noFill/>
-          <a:ln/>
-        </p:spPr>
-        <p:txBody>
-          <a:bodyPr wrap="square" lIns="0" tIns="0" rIns="0" bIns="0" rtlCol="0" anchor="ctr"/>
-          <a:lstStyle/>
-          <a:p>
-            <a:pPr indent="0" marL="0">
-              <a:buNone/>
-            </a:pPr>
-            <a:r>
-              <a:rPr lang="en-US" sz="1600" b="1" dirty="0">
-                <a:solidFill>
-                  <a:srgbClr val="D97706"/>
-                </a:solidFill>
-              </a:rPr>
-              <a:t>DE</a:t>
-            </a:r>
-            <a:endParaRPr lang="en-US" sz="1600" dirty="0"/>
-          </a:p>
-        </p:txBody>
-      </p:sp>
-      <p:sp>
-        <p:nvSpPr>
-          <p:cNvPr id="12" name="Text 10"/>
-          <p:cNvSpPr txBox="1"/>
-          <p:nvPr/>
-        </p:nvSpPr>
-        <p:spPr>
-          <a:xfrm>
-            <a:off x="4526280" y="1965960"/>
-            <a:ext cx="548640" cy="320040"/>
-          </a:xfrm>
-          <a:prstGeom prst="rect">
-            <a:avLst/>
-          </a:prstGeom>
-          <a:noFill/>
-          <a:ln/>
-        </p:spPr>
-        <p:txBody>
-          <a:bodyPr wrap="square" lIns="0" tIns="0" rIns="0" bIns="0" rtlCol="0" anchor="ctr"/>
-          <a:lstStyle/>
-          <a:p>
-            <a:pPr indent="0" marL="0">
-              <a:buNone/>
-            </a:pPr>
-            <a:r>
-              <a:rPr lang="en-US" sz="1600" b="1" dirty="0">
-                <a:solidFill>
-                  <a:srgbClr val="7C3AED"/>
-                </a:solidFill>
-              </a:rPr>
-              <a:t>FR</a:t>
-            </a:r>
-            <a:endParaRPr lang="en-US" sz="1600" dirty="0"/>
-          </a:p>
-        </p:txBody>
-      </p:sp>
-      <p:sp>
-        <p:nvSpPr>
-          <p:cNvPr id="13" name="Text 11"/>
-          <p:cNvSpPr txBox="1"/>
-          <p:nvPr/>
-        </p:nvSpPr>
-        <p:spPr>
-          <a:xfrm>
-            <a:off x="3749040" y="3429000"/>
-            <a:ext cx="1463040" cy="320040"/>
-          </a:xfrm>
-          <a:prstGeom prst="rect">
-            <a:avLst/>
-          </a:prstGeom>
-          <a:noFill/>
-          <a:ln/>
-        </p:spPr>
-        <p:txBody>
-          <a:bodyPr wrap="square" lIns="0" tIns="0" rIns="0" bIns="0" rtlCol="0" anchor="ctr"/>
-          <a:lstStyle/>
-          <a:p>
-            <a:pPr indent="0" marL="0">
-              <a:buNone/>
-            </a:pPr>
-            <a:r>
-              <a:rPr lang="en-US" sz="1600" b="1" dirty="0">
-                <a:solidFill>
-                  <a:srgbClr val="C2410C"/>
-                </a:solidFill>
-              </a:rPr>
-              <a:t>average ★</a:t>
-            </a:r>
-            <a:endParaRPr lang="en-US" sz="1600" dirty="0"/>
-          </a:p>
-        </p:txBody>
-      </p:sp>
-      <p:sp>
-        <p:nvSpPr>
-          <p:cNvPr id="14" name="Text 12"/>
-          <p:cNvSpPr txBox="1"/>
-          <p:nvPr/>
-        </p:nvSpPr>
-        <p:spPr>
-          <a:xfrm>
-            <a:off x="6400800" y="2286000"/>
-            <a:ext cx="1737360" cy="731520"/>
-          </a:xfrm>
-          <a:prstGeom prst="rect">
-            <a:avLst/>
-          </a:prstGeom>
-          <a:noFill/>
-          <a:ln/>
-        </p:spPr>
-        <p:txBody>
-          <a:bodyPr wrap="square" lIns="0" tIns="0" rIns="0" bIns="0" rtlCol="0" anchor="ctr"/>
-          <a:lstStyle/>
-          <a:p>
-            <a:pPr indent="0" marL="0">
-              <a:buNone/>
-            </a:pPr>
-            <a:r>
-              <a:rPr lang="en-US" sz="4000" b="1" dirty="0">
-                <a:solidFill>
-                  <a:srgbClr val="111827"/>
-                </a:solidFill>
-                <a:latin typeface="Cambria" pitchFamily="34" charset="0"/>
-                <a:ea typeface="Cambria" pitchFamily="34" charset="-122"/>
-                <a:cs typeface="Cambria" pitchFamily="34" charset="-120"/>
-              </a:rPr>
-              <a:t>≈0.15</a:t>
-            </a:r>
-            <a:endParaRPr lang="en-US" sz="4000" dirty="0"/>
-          </a:p>
-        </p:txBody>
-      </p:sp>
-      <p:sp>
-        <p:nvSpPr>
-          <p:cNvPr id="15" name="Text 13"/>
-          <p:cNvSpPr txBox="1"/>
-          <p:nvPr/>
-        </p:nvSpPr>
-        <p:spPr>
-          <a:xfrm>
-            <a:off x="8229600" y="2331720"/>
-            <a:ext cx="3383280" cy="731520"/>
-          </a:xfrm>
-          <a:prstGeom prst="rect">
-            <a:avLst/>
-          </a:prstGeom>
-          <a:noFill/>
-          <a:ln/>
-        </p:spPr>
-        <p:txBody>
-          <a:bodyPr wrap="square" lIns="0" tIns="0" rIns="0" bIns="0" rtlCol="0" anchor="ctr"/>
-          <a:lstStyle/>
-          <a:p>
-            <a:pPr indent="0" marL="0">
-              <a:buNone/>
-            </a:pPr>
-            <a:r>
-              <a:rPr lang="en-US" sz="1400" dirty="0">
-                <a:solidFill>
-                  <a:srgbClr val="374151"/>
-                </a:solidFill>
-              </a:rPr>
-              <a:t>similarity of the three updates: nearly unrelated directions</a:t>
-            </a:r>
-            <a:endParaRPr lang="en-US" sz="1400" dirty="0"/>
-          </a:p>
-        </p:txBody>
-      </p:sp>
-      <p:sp>
-        <p:nvSpPr>
-          <p:cNvPr id="16" name="Text 14"/>
-          <p:cNvSpPr txBox="1"/>
-          <p:nvPr/>
-        </p:nvSpPr>
-        <p:spPr>
-          <a:xfrm>
-            <a:off x="6400800" y="3337560"/>
-            <a:ext cx="1737360" cy="731520"/>
-          </a:xfrm>
-          <a:prstGeom prst="rect">
-            <a:avLst/>
-          </a:prstGeom>
-          <a:noFill/>
-          <a:ln/>
-        </p:spPr>
-        <p:txBody>
-          <a:bodyPr wrap="square" lIns="0" tIns="0" rIns="0" bIns="0" rtlCol="0" anchor="ctr"/>
-          <a:lstStyle/>
-          <a:p>
-            <a:pPr indent="0" marL="0">
-              <a:buNone/>
-            </a:pPr>
-            <a:r>
-              <a:rPr lang="en-US" sz="4000" b="1" dirty="0">
-                <a:solidFill>
-                  <a:srgbClr val="C2410C"/>
-                </a:solidFill>
-                <a:latin typeface="Cambria" pitchFamily="34" charset="0"/>
-                <a:ea typeface="Cambria" pitchFamily="34" charset="-122"/>
-                <a:cs typeface="Cambria" pitchFamily="34" charset="-120"/>
-              </a:rPr>
-              <a:t>≈65%</a:t>
-            </a:r>
-            <a:endParaRPr lang="en-US" sz="4000" dirty="0"/>
-          </a:p>
-        </p:txBody>
-      </p:sp>
-      <p:sp>
-        <p:nvSpPr>
-          <p:cNvPr id="17" name="Text 15"/>
-          <p:cNvSpPr txBox="1"/>
-          <p:nvPr/>
-        </p:nvSpPr>
-        <p:spPr>
-          <a:xfrm>
-            <a:off x="8229600" y="3383280"/>
-            <a:ext cx="3383280" cy="731520"/>
-          </a:xfrm>
-          <a:prstGeom prst="rect">
-            <a:avLst/>
-          </a:prstGeom>
-          <a:noFill/>
-          <a:ln/>
-        </p:spPr>
-        <p:txBody>
-          <a:bodyPr wrap="square" lIns="0" tIns="0" rIns="0" bIns="0" rtlCol="0" anchor="ctr"/>
-          <a:lstStyle/>
-          <a:p>
-            <a:pPr indent="0" marL="0">
-              <a:buNone/>
-            </a:pPr>
-            <a:r>
-              <a:rPr lang="en-US" sz="1400" dirty="0">
-                <a:solidFill>
-                  <a:srgbClr val="374151"/>
-                </a:solidFill>
-              </a:rPr>
-              <a:t>of one update's length: language-specific parts cancel, the shared part stays</a:t>
-            </a:r>
-            <a:endParaRPr lang="en-US" sz="1400" dirty="0"/>
-          </a:p>
-        </p:txBody>
-      </p:sp>
-      <p:sp>
-        <p:nvSpPr>
-          <p:cNvPr id="18" name="Text 16"/>
-          <p:cNvSpPr txBox="1"/>
-          <p:nvPr/>
-        </p:nvSpPr>
-        <p:spPr>
-          <a:xfrm>
-            <a:off x="6400800" y="4389120"/>
-            <a:ext cx="1737360" cy="731520"/>
-          </a:xfrm>
-          <a:prstGeom prst="rect">
-            <a:avLst/>
-          </a:prstGeom>
-          <a:noFill/>
-          <a:ln/>
-        </p:spPr>
-        <p:txBody>
-          <a:bodyPr wrap="square" lIns="0" tIns="0" rIns="0" bIns="0" rtlCol="0" anchor="ctr"/>
-          <a:lstStyle/>
-          <a:p>
-            <a:pPr indent="0" marL="0">
-              <a:buNone/>
-            </a:pPr>
-            <a:r>
-              <a:rPr lang="en-US" sz="4000" b="1" dirty="0">
-                <a:solidFill>
-                  <a:srgbClr val="111827"/>
-                </a:solidFill>
-                <a:latin typeface="Cambria" pitchFamily="34" charset="0"/>
-                <a:ea typeface="Cambria" pitchFamily="34" charset="-122"/>
-                <a:cs typeface="Cambria" pitchFamily="34" charset="-120"/>
-              </a:rPr>
-              <a:t>MLPs</a:t>
-            </a:r>
-            <a:endParaRPr lang="en-US" sz="4000" dirty="0"/>
-          </a:p>
-        </p:txBody>
-      </p:sp>
-      <p:sp>
-        <p:nvSpPr>
-          <p:cNvPr id="19" name="Text 17"/>
-          <p:cNvSpPr txBox="1"/>
-          <p:nvPr/>
-        </p:nvSpPr>
-        <p:spPr>
-          <a:xfrm>
-            <a:off x="8229600" y="4434840"/>
-            <a:ext cx="3383280" cy="731520"/>
-          </a:xfrm>
-          <a:prstGeom prst="rect">
-            <a:avLst/>
-          </a:prstGeom>
-          <a:noFill/>
-          <a:ln/>
-        </p:spPr>
-        <p:txBody>
-          <a:bodyPr wrap="square" lIns="0" tIns="0" rIns="0" bIns="0" rtlCol="0" anchor="ctr"/>
-          <a:lstStyle/>
-          <a:p>
-            <a:pPr indent="0" marL="0">
-              <a:buNone/>
-            </a:pPr>
-            <a:r>
-              <a:rPr lang="en-US" sz="1400" dirty="0">
-                <a:solidFill>
-                  <a:srgbClr val="374151"/>
-                </a:solidFill>
-              </a:rPr>
-              <a:t>carry 92–100% of the new facts, the same place steering found in part 1</a:t>
-            </a:r>
-            <a:endParaRPr lang="en-US" sz="1400" dirty="0"/>
-          </a:p>
-        </p:txBody>
-      </p:sp>
-      <p:sp>
-        <p:nvSpPr>
-          <p:cNvPr id="20" name="Text 0"/>
-          <p:cNvSpPr/>
-          <p:nvPr>
-            <p:ph idx="102" type="body" hasCustomPrompt="1"/>
-          </p:nvPr>
-        </p:nvSpPr>
-        <p:spPr>
-          <a:xfrm>
-            <a:off x="640080" y="5989320"/>
-            <a:ext cx="10908792" cy="548640"/>
-          </a:xfrm>
-          <a:prstGeom prst="rect">
-            <a:avLst/>
-          </a:prstGeom>
-          <a:noFill/>
-          <a:ln/>
-        </p:spPr>
-        <p:txBody>
-          <a:bodyPr wrap="square" lIns="0" tIns="0" rIns="0" bIns="0" rtlCol="0" anchor="ctr"/>
-          <a:lstStyle/>
-          <a:p>
-            <a:pPr indent="0" marL="0">
-              <a:buNone/>
-            </a:pPr>
-            <a:r>
-              <a:rPr lang="en-US" sz="1800" b="1" dirty="0">
-                <a:solidFill>
-                  <a:schemeClr val="tx1"/>
-                </a:solidFill>
-              </a:rPr>
-              <a:t>New knowledge is a direction; averaging keeps the shared part. </a:t>
-            </a:r>
-            <a:pPr indent="0" marL="0">
-              <a:buNone/>
-            </a:pPr>
-            <a:r>
-              <a:rPr lang="en-US" sz="1800" b="1" i="1" dirty="0">
-                <a:solidFill>
-                  <a:srgbClr val="6B7280"/>
-                </a:solidFill>
-              </a:rPr>
-              <a:t>Running now: shorter step, or better direction?</a:t>
-            </a:r>
-            <a:endParaRPr lang="en-US" sz="1800" dirty="0"/>
-          </a:p>
-        </p:txBody>
-      </p:sp>
-      <p:sp>
-        <p:nvSpPr>
-          <p:cNvPr id="25" name="Slide Number Placeholder 0"/>
-          <p:cNvSpPr>
-            <a:spLocks noGrp="1"/>
-          </p:cNvSpPr>
-          <p:nvPr>
-            <p:ph type="sldNum" sz="quarter" idx="4294967295"/>
-          </p:nvPr>
-        </p:nvSpPr>
-        <p:spPr>
-          <a:xfrm>
-            <a:off x="11247120" y="6446520"/>
-            <a:ext cx="548640" cy="274320"/>
-          </a:xfrm>
-          <a:prstGeom prst="rect">
-            <a:avLst/>
-          </a:prstGeom>
-          <a:extLst>
-            <a:ext uri="{C572A759-6A51-4108-AA02-DFA0A04FC94B}">
-              <ma14:wrappingTextBoxFlag xmlns:ma14="http://schemas.microsoft.com/office/mac/drawingml/2011/main" val="0"/>
-            </a:ext>
-          </a:extLst>
-        </p:spPr>
-        <p:txBody>
-          <a:bodyPr/>
-          <a:lstStyle>
-            <a:lvl1pPr>
-              <a:defRPr sz="1000">
-                <a:solidFill>
-                  <a:srgbClr val="9CA3AF"/>
-                </a:solidFill>
-              </a:defRPr>
-            </a:lvl1pPr>
-          </a:lstStyle>
-          <a:p>
-            <a:pPr algn="l"/>
-            <a:fld id="{F7021451-1387-4CA6-816F-3879F97B5CBC}" type="slidenum">
-              <a:rPr b="0" lang="en-US"/>
-              <a:t>13</a:t>
-            </a:fld>
-            <a:endParaRPr lang="en-US"/>
-          </a:p>
-        </p:txBody>
-      </p:sp>
-    </p:spTree>
-  </p:cSld>
-  <p:clrMapOvr>
-    <a:masterClrMapping/>
-  </p:clrMapOvr>
-  <p:transition spd="med">
-    <p:fade/>
-  </p:transition>
-</p:sld>
-</file>
-
-<file path=ppt/slides/slide14.xml><?xml version="1.0" encoding="utf-8"?>
-<p:sld xmlns:a="http://schemas.openxmlformats.org/drawingml/2006/main" xmlns:r="http://schemas.openxmlformats.org/officeDocument/2006/relationships" xmlns:p="http://schemas.openxmlformats.org/presentationml/2006/main">
-  <p:cSld name="Slide 14">
-    <p:spTree>
-      <p:nvGrpSpPr>
-        <p:cNvPr id="1" name=""/>
-        <p:cNvGrpSpPr/>
-        <p:nvPr/>
-      </p:nvGrpSpPr>
-      <p:grpSpPr>
-        <a:xfrm>
-          <a:off x="0" y="0"/>
-          <a:ext cx="0" cy="0"/>
-          <a:chOff x="0" y="0"/>
-          <a:chExt cx="0" cy="0"/>
-        </a:xfrm>
-      </p:grpSpPr>
-      <p:sp>
-        <p:nvSpPr>
-          <p:cNvPr id="2" name="Text 0"/>
-          <p:cNvSpPr/>
-          <p:nvPr>
-            <p:ph idx="100" type="body" hasCustomPrompt="1"/>
-          </p:nvPr>
-        </p:nvSpPr>
-        <p:spPr>
-          <a:xfrm>
-            <a:off x="640080" y="411480"/>
-            <a:ext cx="10908792" cy="320040"/>
-          </a:xfrm>
-          <a:prstGeom prst="rect">
-            <a:avLst/>
-          </a:prstGeom>
-          <a:noFill/>
-          <a:ln/>
-        </p:spPr>
-        <p:txBody>
-          <a:bodyPr wrap="square" lIns="0" tIns="0" rIns="0" bIns="0" rtlCol="0"/>
-          <a:lstStyle/>
-          <a:p>
-            <a:pPr indent="0" marL="0">
-              <a:buNone/>
-            </a:pPr>
-            <a:r>
-              <a:rPr lang="en-US" sz="1200" b="1" spc="300" kern="0" dirty="0">
-                <a:solidFill>
-                  <a:schemeClr val="accent1"/>
-                </a:solidFill>
-              </a:rPr>
-              <a:t>WAY 2 · IN ONE PICTURE</a:t>
-            </a:r>
-            <a:endParaRPr lang="en-US" sz="1200" dirty="0"/>
-          </a:p>
-        </p:txBody>
-      </p:sp>
-      <p:sp>
-        <p:nvSpPr>
-          <p:cNvPr id="3" name="Text 0"/>
-          <p:cNvSpPr/>
-          <p:nvPr>
-            <p:ph idx="101" type="title" hasCustomPrompt="1"/>
-          </p:nvPr>
-        </p:nvSpPr>
-        <p:spPr>
-          <a:xfrm>
-            <a:off x="640080" y="731520"/>
-            <a:ext cx="10908792" cy="1097280"/>
-          </a:xfrm>
-          <a:prstGeom prst="rect">
-            <a:avLst/>
-          </a:prstGeom>
-          <a:noFill/>
-          <a:ln/>
-        </p:spPr>
-        <p:txBody>
-          <a:bodyPr wrap="square" lIns="0" tIns="0" rIns="0" bIns="0" rtlCol="0" anchor="t"/>
-          <a:lstStyle/>
-          <a:p>
-            <a:pPr algn="l" indent="0" marL="0">
-              <a:buNone/>
-            </a:pPr>
-            <a:r>
-              <a:rPr lang="en-US" sz="3200" b="1" dirty="0">
-                <a:solidFill>
-                  <a:schemeClr val="tx1"/>
-                </a:solidFill>
-              </a:rPr>
-              <a:t>Every update learns. </a:t>
-            </a:r>
-            <a:pPr algn="l" indent="0" marL="0">
-              <a:buNone/>
-            </a:pPr>
-            <a:r>
-              <a:rPr lang="en-US" sz="3200" b="1" i="1" dirty="0">
-                <a:solidFill>
-                  <a:srgbClr val="6B7280"/>
-                </a:solidFill>
-              </a:rPr>
-              <a:t>Only the average learns without losing.</a:t>
-            </a:r>
-            <a:endParaRPr lang="en-US" sz="3200" dirty="0"/>
-          </a:p>
-        </p:txBody>
-      </p:sp>
-      <p:pic>
-        <p:nvPicPr>
-          <p:cNvPr id="4" name="Image 0" descr="/tmp/claude-0/-home-user-Claude-expo-repo-36501/d3d88de1-f67d-5aa6-8097-3ece5ccf8bcb/scratchpad/build/summary_part2.png">    </p:cNvPr>
-          <p:cNvPicPr>
-            <a:picLocks noChangeAspect="1"/>
-          </p:cNvPicPr>
-          <p:nvPr/>
-        </p:nvPicPr>
-        <p:blipFill>
-          <a:blip r:embed="rId1"/>
-          <a:stretch>
-            <a:fillRect/>
-          </a:stretch>
-        </p:blipFill>
-        <p:spPr>
-          <a:xfrm>
-            <a:off x="2331720" y="1965960"/>
-            <a:ext cx="7498080" cy="3994831"/>
-          </a:xfrm>
-          <a:prstGeom prst="rect">
-            <a:avLst/>
-          </a:prstGeom>
-        </p:spPr>
-      </p:pic>
-      <p:sp>
-        <p:nvSpPr>
-          <p:cNvPr id="5" name="Text 0"/>
-          <p:cNvSpPr/>
-          <p:nvPr>
-            <p:ph idx="102" type="body" hasCustomPrompt="1"/>
-          </p:nvPr>
-        </p:nvSpPr>
-        <p:spPr>
-          <a:xfrm>
-            <a:off x="640080" y="5989320"/>
-            <a:ext cx="10908792" cy="548640"/>
-          </a:xfrm>
-          <a:prstGeom prst="rect">
-            <a:avLst/>
-          </a:prstGeom>
-          <a:noFill/>
-          <a:ln/>
-        </p:spPr>
-        <p:txBody>
-          <a:bodyPr wrap="square" lIns="0" tIns="0" rIns="0" bIns="0" rtlCol="0" anchor="ctr"/>
-          <a:lstStyle/>
-          <a:p>
-            <a:pPr indent="0" marL="0">
-              <a:buNone/>
-            </a:pPr>
-            <a:r>
-              <a:rPr lang="en-US" sz="1800" b="1" dirty="0">
-                <a:solidFill>
-                  <a:schemeClr val="tx1"/>
-                </a:solidFill>
-              </a:rPr>
-              <a:t>Right = more new facts. Up = nothing forgotten. </a:t>
-            </a:r>
-            <a:pPr indent="0" marL="0">
-              <a:buNone/>
-            </a:pPr>
-            <a:r>
-              <a:rPr lang="en-US" sz="1800" b="1" i="1" dirty="0">
-                <a:solidFill>
-                  <a:srgbClr val="6B7280"/>
-                </a:solidFill>
-              </a:rPr>
-              <a:t>Top right is where we want to be.</a:t>
-            </a:r>
-            <a:endParaRPr lang="en-US" sz="1800" dirty="0"/>
-          </a:p>
-        </p:txBody>
-      </p:sp>
-      <p:sp>
-        <p:nvSpPr>
-          <p:cNvPr id="25" name="Slide Number Placeholder 0"/>
-          <p:cNvSpPr>
-            <a:spLocks noGrp="1"/>
-          </p:cNvSpPr>
-          <p:nvPr>
-            <p:ph type="sldNum" sz="quarter" idx="4294967295"/>
-          </p:nvPr>
-        </p:nvSpPr>
-        <p:spPr>
-          <a:xfrm>
-            <a:off x="11247120" y="6446520"/>
-            <a:ext cx="548640" cy="274320"/>
-          </a:xfrm>
-          <a:prstGeom prst="rect">
-            <a:avLst/>
-          </a:prstGeom>
-          <a:extLst>
-            <a:ext uri="{C572A759-6A51-4108-AA02-DFA0A04FC94B}">
-              <ma14:wrappingTextBoxFlag xmlns:ma14="http://schemas.microsoft.com/office/mac/drawingml/2011/main" val="0"/>
-            </a:ext>
-          </a:extLst>
-        </p:spPr>
-        <p:txBody>
-          <a:bodyPr/>
-          <a:lstStyle>
-            <a:lvl1pPr>
-              <a:defRPr sz="1000">
-                <a:solidFill>
-                  <a:srgbClr val="9CA3AF"/>
-                </a:solidFill>
-              </a:defRPr>
-            </a:lvl1pPr>
-          </a:lstStyle>
-          <a:p>
-            <a:pPr algn="l"/>
-            <a:fld id="{F7021451-1387-4CA6-816F-3879F97B5CBC}" type="slidenum">
-              <a:rPr b="0" lang="en-US"/>
-              <a:t>14</a:t>
-            </a:fld>
-            <a:endParaRPr lang="en-US"/>
-          </a:p>
-        </p:txBody>
-      </p:sp>
-    </p:spTree>
-  </p:cSld>
-  <p:clrMapOvr>
-    <a:masterClrMapping/>
-  </p:clrMapOvr>
-  <p:transition spd="med">
-    <p:fade/>
-  </p:transition>
-</p:sld>
-</file>
-
-<file path=ppt/slides/slide15.xml><?xml version="1.0" encoding="utf-8"?>
-<p:sld xmlns:a="http://schemas.openxmlformats.org/drawingml/2006/main" xmlns:r="http://schemas.openxmlformats.org/officeDocument/2006/relationships" xmlns:p="http://schemas.openxmlformats.org/presentationml/2006/main">
-  <p:cSld name="Slide 15">
-    <p:spTree>
-      <p:nvGrpSpPr>
-        <p:cNvPr id="1" name=""/>
-        <p:cNvGrpSpPr/>
-        <p:nvPr/>
-      </p:nvGrpSpPr>
-      <p:grpSpPr>
-        <a:xfrm>
-          <a:off x="0" y="0"/>
-          <a:ext cx="0" cy="0"/>
-          <a:chOff x="0" y="0"/>
-          <a:chExt cx="0" cy="0"/>
-        </a:xfrm>
-      </p:grpSpPr>
-      <p:sp>
-        <p:nvSpPr>
-          <p:cNvPr id="2" name="Text 0"/>
-          <p:cNvSpPr/>
-          <p:nvPr>
-            <p:ph idx="100" type="body" hasCustomPrompt="1"/>
-          </p:nvPr>
-        </p:nvSpPr>
-        <p:spPr>
-          <a:xfrm>
-            <a:off x="640080" y="411480"/>
-            <a:ext cx="10908792" cy="320040"/>
-          </a:xfrm>
-          <a:prstGeom prst="rect">
-            <a:avLst/>
-          </a:prstGeom>
-          <a:noFill/>
-          <a:ln/>
-        </p:spPr>
-        <p:txBody>
-          <a:bodyPr wrap="square" lIns="0" tIns="0" rIns="0" bIns="0" rtlCol="0"/>
-          <a:lstStyle/>
-          <a:p>
-            <a:pPr indent="0" marL="0">
-              <a:buNone/>
-            </a:pPr>
-            <a:r>
-              <a:rPr lang="en-US" sz="1200" b="1" spc="300" kern="0" dirty="0">
-                <a:solidFill>
-                  <a:schemeClr val="accent1"/>
-                </a:solidFill>
-              </a:rPr>
               <a:t>THE ANSWERS</a:t>
             </a:r>
             <a:endParaRPr lang="en-US" sz="1200" dirty="0"/>
@@ -7099,7 +4989,7 @@
             <a:pPr algn="l"/>
             <a:fld id="{F7021451-1387-4CA6-816F-3879F97B5CBC}" type="slidenum">
               <a:rPr b="0" lang="en-US"/>
-              <a:t>15</a:t>
+              <a:t>13</a:t>
             </a:fld>
             <a:endParaRPr lang="en-US"/>
           </a:p>
@@ -7110,9 +5000,6 @@
   <p:clrMapOvr>
     <a:masterClrMapping/>
   </p:clrMapOvr>
-  <p:transition spd="med">
-    <p:fade/>
-  </p:transition>
 </p:sld>
 </file>
 
@@ -7532,7 +5419,7 @@
                   <a:srgbClr val="6B7280"/>
                 </a:solidFill>
               </a:rPr>
-              <a:t>6 questions</a:t>
+              <a:t>5 questions</a:t>
             </a:r>
             <a:endParaRPr lang="en-US" sz="1600" dirty="0"/>
           </a:p>
@@ -7570,7 +5457,7 @@
                   <a:schemeClr val="tx1"/>
                 </a:solidFill>
               </a:rPr>
-              <a:t>Nine questions. </a:t>
+              <a:t>Eight questions. </a:t>
             </a:r>
             <a:pPr indent="0" marL="0">
               <a:buNone/>
@@ -7637,9 +5524,6 @@
   <p:clrMapOvr>
     <a:masterClrMapping/>
   </p:clrMapOvr>
-  <p:transition spd="med">
-    <p:fade/>
-  </p:transition>
 </p:sld>
 </file>
 
@@ -8282,205 +6166,7 @@
       </p:sp>
       <p:sp>
         <p:nvSpPr>
-          <p:cNvPr id="21" name="Shape 19"/>
-          <p:cNvSpPr/>
-          <p:nvPr/>
-        </p:nvSpPr>
-        <p:spPr>
-          <a:xfrm>
-            <a:off x="6675120" y="2286000"/>
-            <a:ext cx="4846320" cy="1188720"/>
-          </a:xfrm>
-          <a:prstGeom prst="roundRect">
-            <a:avLst>
-              <a:gd name="adj" fmla="val 9231"/>
-            </a:avLst>
-          </a:prstGeom>
-          <a:solidFill>
-            <a:srgbClr val="F9FAFB"/>
-          </a:solidFill>
-          <a:ln w="12700">
-            <a:solidFill>
-              <a:srgbClr val="E5E7EB"/>
-            </a:solidFill>
-            <a:prstDash val="solid"/>
-          </a:ln>
-        </p:spPr>
-      </p:sp>
-      <p:sp>
-        <p:nvSpPr>
-          <p:cNvPr id="22" name="Text 20"/>
-          <p:cNvSpPr txBox="1"/>
-          <p:nvPr/>
-        </p:nvSpPr>
-        <p:spPr>
-          <a:xfrm>
-            <a:off x="6903720" y="2377440"/>
-            <a:ext cx="4480560" cy="457200"/>
-          </a:xfrm>
-          <a:prstGeom prst="rect">
-            <a:avLst/>
-          </a:prstGeom>
-          <a:noFill/>
-          <a:ln/>
-        </p:spPr>
-        <p:txBody>
-          <a:bodyPr wrap="square" lIns="0" tIns="0" rIns="0" bIns="0" rtlCol="0" anchor="ctr"/>
-          <a:lstStyle/>
-          <a:p>
-            <a:pPr indent="0" marL="0">
-              <a:buNone/>
-            </a:pPr>
-            <a:r>
-              <a:rPr lang="en-US" sz="1800" b="1" dirty="0">
-                <a:solidFill>
-                  <a:srgbClr val="111827"/>
-                </a:solidFill>
-              </a:rPr>
-              <a:t>Even a fact seen once leaves a trace</a:t>
-            </a:r>
-            <a:endParaRPr lang="en-US" sz="1800" dirty="0"/>
-          </a:p>
-        </p:txBody>
-      </p:sp>
-      <p:sp>
-        <p:nvSpPr>
-          <p:cNvPr id="23" name="Text 21"/>
-          <p:cNvSpPr txBox="1"/>
-          <p:nvPr/>
-        </p:nvSpPr>
-        <p:spPr>
-          <a:xfrm>
-            <a:off x="6903720" y="2834640"/>
-            <a:ext cx="4480560" cy="457200"/>
-          </a:xfrm>
-          <a:prstGeom prst="rect">
-            <a:avLst/>
-          </a:prstGeom>
-          <a:noFill/>
-          <a:ln/>
-        </p:spPr>
-        <p:txBody>
-          <a:bodyPr wrap="square" lIns="0" tIns="0" rIns="0" bIns="0" rtlCol="0" anchor="ctr"/>
-          <a:lstStyle/>
-          <a:p>
-            <a:pPr indent="0" marL="0">
-              <a:buNone/>
-            </a:pPr>
-            <a:r>
-              <a:rPr lang="en-US" sz="1500" dirty="0">
-                <a:solidFill>
-                  <a:srgbClr val="374151"/>
-                </a:solidFill>
-              </a:rPr>
-              <a:t>the information is in there, weakly</a:t>
-            </a:r>
-            <a:endParaRPr lang="en-US" sz="1500" dirty="0"/>
-          </a:p>
-        </p:txBody>
-      </p:sp>
-      <p:sp>
-        <p:nvSpPr>
-          <p:cNvPr id="24" name="Shape 22"/>
-          <p:cNvSpPr/>
-          <p:nvPr/>
-        </p:nvSpPr>
-        <p:spPr>
-          <a:xfrm>
-            <a:off x="6675120" y="3749040"/>
-            <a:ext cx="4846320" cy="1371600"/>
-          </a:xfrm>
-          <a:prstGeom prst="roundRect">
-            <a:avLst>
-              <a:gd name="adj" fmla="val 8000"/>
-            </a:avLst>
-          </a:prstGeom>
-          <a:solidFill>
-            <a:srgbClr val="F9FAFB"/>
-          </a:solidFill>
-          <a:ln w="12700">
-            <a:solidFill>
-              <a:srgbClr val="E5E7EB"/>
-            </a:solidFill>
-            <a:prstDash val="solid"/>
-          </a:ln>
-        </p:spPr>
-      </p:sp>
-      <p:sp>
-        <p:nvSpPr>
-          <p:cNvPr id="25" name="Text 23"/>
-          <p:cNvSpPr txBox="1"/>
-          <p:nvPr/>
-        </p:nvSpPr>
-        <p:spPr>
-          <a:xfrm>
-            <a:off x="6903720" y="3840480"/>
-            <a:ext cx="4480560" cy="548640"/>
-          </a:xfrm>
-          <a:prstGeom prst="rect">
-            <a:avLst/>
-          </a:prstGeom>
-          <a:noFill/>
-          <a:ln/>
-        </p:spPr>
-        <p:txBody>
-          <a:bodyPr wrap="square" lIns="0" tIns="0" rIns="0" bIns="0" rtlCol="0" anchor="ctr"/>
-          <a:lstStyle/>
-          <a:p>
-            <a:pPr indent="0" marL="0">
-              <a:buNone/>
-            </a:pPr>
-            <a:r>
-              <a:rPr lang="en-US" sz="1800" b="1" dirty="0">
-                <a:solidFill>
-                  <a:srgbClr val="111827"/>
-                </a:solidFill>
-              </a:rPr>
-              <a:t>But it gets drowned out on the way to the output</a:t>
-            </a:r>
-            <a:endParaRPr lang="en-US" sz="1800" dirty="0"/>
-          </a:p>
-        </p:txBody>
-      </p:sp>
-      <p:sp>
-        <p:nvSpPr>
-          <p:cNvPr id="26" name="Text 24"/>
-          <p:cNvSpPr txBox="1"/>
-          <p:nvPr/>
-        </p:nvSpPr>
-        <p:spPr>
-          <a:xfrm>
-            <a:off x="6903720" y="4434840"/>
-            <a:ext cx="4480560" cy="548640"/>
-          </a:xfrm>
-          <a:prstGeom prst="rect">
-            <a:avLst/>
-          </a:prstGeom>
-          <a:noFill/>
-          <a:ln/>
-        </p:spPr>
-        <p:txBody>
-          <a:bodyPr wrap="square" lIns="0" tIns="0" rIns="0" bIns="0" rtlCol="0" anchor="ctr"/>
-          <a:lstStyle/>
-          <a:p>
-            <a:pPr indent="0" marL="0">
-              <a:buNone/>
-            </a:pPr>
-            <a:r>
-              <a:rPr lang="en-US" sz="1500" dirty="0">
-                <a:solidFill>
-                  <a:srgbClr val="374151"/>
-                </a:solidFill>
-              </a:rPr>
-              <a:t>higher layers mix it with everything else: vague, not wrong</a:t>
-            </a:r>
-            <a:endParaRPr lang="en-US" sz="1500" dirty="0"/>
-          </a:p>
-        </p:txBody>
-      </p:sp>
-      <p:sp>
-        <p:nvSpPr>
-          <p:cNvPr id="27" name="Text 0"/>
+          <p:cNvPr id="21" name="Text 0"/>
           <p:cNvSpPr/>
           <p:nvPr>
             <p:ph idx="102" type="body" hasCustomPrompt="1"/>
@@ -8577,9 +6263,6 @@
   <p:clrMapOvr>
     <a:masterClrMapping/>
   </p:clrMapOvr>
-  <p:transition spd="med">
-    <p:fade/>
-  </p:transition>
 </p:sld>
 </file>
 
@@ -9237,43 +6920,7 @@
       </p:sp>
       <p:sp>
         <p:nvSpPr>
-          <p:cNvPr id="25" name="Text 23"/>
-          <p:cNvSpPr txBox="1"/>
-          <p:nvPr/>
-        </p:nvSpPr>
-        <p:spPr>
-          <a:xfrm>
-            <a:off x="640080" y="5486400"/>
-            <a:ext cx="4754880" cy="365760"/>
-          </a:xfrm>
-          <a:prstGeom prst="rect">
-            <a:avLst/>
-          </a:prstGeom>
-          <a:noFill/>
-          <a:ln/>
-        </p:spPr>
-        <p:txBody>
-          <a:bodyPr wrap="square" lIns="0" tIns="0" rIns="0" bIns="0" rtlCol="0" anchor="ctr"/>
-          <a:lstStyle/>
-          <a:p>
-            <a:pPr algn="ctr" indent="0" marL="0">
-              <a:buNone/>
-            </a:pPr>
-            <a:r>
-              <a:rPr lang="en-US" sz="1200" dirty="0">
-                <a:solidFill>
-                  <a:srgbClr val="6B7280"/>
-                </a:solidFill>
-              </a:rPr>
-              <a:t>inside one layer, each dot a sentence: the domains are separable</a:t>
-            </a:r>
-            <a:endParaRPr lang="en-US" sz="1200" dirty="0"/>
-          </a:p>
-        </p:txBody>
-      </p:sp>
-      <p:sp>
-        <p:nvSpPr>
-          <p:cNvPr id="26" name="Shape 24"/>
+          <p:cNvPr id="25" name="Shape 23"/>
           <p:cNvSpPr/>
           <p:nvPr/>
         </p:nvSpPr>
@@ -9300,7 +6947,7 @@
       </p:sp>
       <p:sp>
         <p:nvSpPr>
-          <p:cNvPr id="27" name="Shape 25"/>
+          <p:cNvPr id="26" name="Shape 24"/>
           <p:cNvSpPr/>
           <p:nvPr/>
         </p:nvSpPr>
@@ -9327,7 +6974,7 @@
       </p:sp>
       <p:sp>
         <p:nvSpPr>
-          <p:cNvPr id="28" name="Shape 26"/>
+          <p:cNvPr id="27" name="Shape 25"/>
           <p:cNvSpPr/>
           <p:nvPr/>
         </p:nvSpPr>
@@ -9354,48 +7001,48 @@
       </p:sp>
       <p:sp>
         <p:nvSpPr>
+          <p:cNvPr id="28" name="Text 26"/>
+          <p:cNvSpPr txBox="1"/>
+          <p:nvPr/>
+        </p:nvSpPr>
+        <p:spPr>
+          <a:xfrm>
+            <a:off x="6400800" y="3511296"/>
+            <a:ext cx="3108960" cy="457200"/>
+          </a:xfrm>
+          <a:prstGeom prst="rect">
+            <a:avLst/>
+          </a:prstGeom>
+          <a:noFill/>
+          <a:ln/>
+        </p:spPr>
+        <p:txBody>
+          <a:bodyPr wrap="square" lIns="0" tIns="0" rIns="0" bIns="0" rtlCol="0" anchor="ctr"/>
+          <a:lstStyle/>
+          <a:p>
+            <a:pPr algn="ctr" indent="0" marL="0">
+              <a:buNone/>
+            </a:pPr>
+            <a:r>
+              <a:rPr lang="en-US" sz="1600" b="1" dirty="0">
+                <a:solidFill>
+                  <a:srgbClr val="FFFFFF"/>
+                </a:solidFill>
+              </a:rPr>
+              <a:t>MLP, layer 8</a:t>
+            </a:r>
+            <a:endParaRPr lang="en-US" sz="1600" dirty="0"/>
+          </a:p>
+        </p:txBody>
+      </p:sp>
+      <p:sp>
+        <p:nvSpPr>
           <p:cNvPr id="29" name="Text 27"/>
           <p:cNvSpPr txBox="1"/>
           <p:nvPr/>
         </p:nvSpPr>
         <p:spPr>
           <a:xfrm>
-            <a:off x="6400800" y="3511296"/>
-            <a:ext cx="3108960" cy="457200"/>
-          </a:xfrm>
-          <a:prstGeom prst="rect">
-            <a:avLst/>
-          </a:prstGeom>
-          <a:noFill/>
-          <a:ln/>
-        </p:spPr>
-        <p:txBody>
-          <a:bodyPr wrap="square" lIns="0" tIns="0" rIns="0" bIns="0" rtlCol="0" anchor="ctr"/>
-          <a:lstStyle/>
-          <a:p>
-            <a:pPr algn="ctr" indent="0" marL="0">
-              <a:buNone/>
-            </a:pPr>
-            <a:r>
-              <a:rPr lang="en-US" sz="1600" b="1" dirty="0">
-                <a:solidFill>
-                  <a:srgbClr val="FFFFFF"/>
-                </a:solidFill>
-              </a:rPr>
-              <a:t>MLP, layer 8</a:t>
-            </a:r>
-            <a:endParaRPr lang="en-US" sz="1600" dirty="0"/>
-          </a:p>
-        </p:txBody>
-      </p:sp>
-      <p:sp>
-        <p:nvSpPr>
-          <p:cNvPr id="30" name="Text 28"/>
-          <p:cNvSpPr txBox="1"/>
-          <p:nvPr/>
-        </p:nvSpPr>
-        <p:spPr>
-          <a:xfrm>
             <a:off x="9738360" y="3465576"/>
             <a:ext cx="1097280" cy="548640"/>
           </a:xfrm>
@@ -9426,7 +7073,7 @@
       </p:sp>
       <p:sp>
         <p:nvSpPr>
-          <p:cNvPr id="31" name="Shape 29"/>
+          <p:cNvPr id="30" name="Shape 28"/>
           <p:cNvSpPr/>
           <p:nvPr/>
         </p:nvSpPr>
@@ -9453,7 +7100,7 @@
       </p:sp>
       <p:sp>
         <p:nvSpPr>
-          <p:cNvPr id="32" name="Shape 30"/>
+          <p:cNvPr id="31" name="Shape 29"/>
           <p:cNvSpPr/>
           <p:nvPr/>
         </p:nvSpPr>
@@ -9480,70 +7127,7 @@
       </p:sp>
       <p:sp>
         <p:nvSpPr>
-          <p:cNvPr id="33" name="Shape 31"/>
-          <p:cNvSpPr/>
-          <p:nvPr/>
-        </p:nvSpPr>
-        <p:spPr>
-          <a:xfrm>
-            <a:off x="6400800" y="5394960"/>
-            <a:ext cx="4846320" cy="384048"/>
-          </a:xfrm>
-          <a:prstGeom prst="roundRect">
-            <a:avLst>
-              <a:gd name="adj" fmla="val 50000"/>
-            </a:avLst>
-          </a:prstGeom>
-          <a:solidFill>
-            <a:srgbClr val="DCFCE7"/>
-          </a:solidFill>
-          <a:ln w="12700">
-            <a:solidFill>
-              <a:srgbClr val="DCFCE7"/>
-            </a:solidFill>
-            <a:prstDash val="solid"/>
-          </a:ln>
-        </p:spPr>
-      </p:sp>
-      <p:sp>
-        <p:nvSpPr>
-          <p:cNvPr id="34" name="Text 32"/>
-          <p:cNvSpPr txBox="1"/>
-          <p:nvPr/>
-        </p:nvSpPr>
-        <p:spPr>
-          <a:xfrm>
-            <a:off x="6400800" y="5394960"/>
-            <a:ext cx="4846320" cy="384048"/>
-          </a:xfrm>
-          <a:prstGeom prst="rect">
-            <a:avLst/>
-          </a:prstGeom>
-          <a:noFill/>
-          <a:ln/>
-        </p:spPr>
-        <p:txBody>
-          <a:bodyPr wrap="square" lIns="0" tIns="0" rIns="0" bIns="0" rtlCol="0" anchor="ctr"/>
-          <a:lstStyle/>
-          <a:p>
-            <a:pPr algn="ctr" indent="0" marL="0">
-              <a:buNone/>
-            </a:pPr>
-            <a:r>
-              <a:rPr lang="en-US" sz="1300" b="1" dirty="0">
-                <a:solidFill>
-                  <a:srgbClr val="166534"/>
-                </a:solidFill>
-              </a:rPr>
-              <a:t>one vector addition  ·  versus billions of tokens of training</a:t>
-            </a:r>
-            <a:endParaRPr lang="en-US" sz="1300" dirty="0"/>
-          </a:p>
-        </p:txBody>
-      </p:sp>
-      <p:sp>
-        <p:nvSpPr>
-          <p:cNvPr id="35" name="Text 0"/>
+          <p:cNvPr id="32" name="Text 0"/>
           <p:cNvSpPr/>
           <p:nvPr>
             <p:ph idx="102" type="body" hasCustomPrompt="1"/>
@@ -9640,9 +7224,6 @@
   <p:clrMapOvr>
     <a:masterClrMapping/>
   </p:clrMapOvr>
-  <p:transition spd="med">
-    <p:fade/>
-  </p:transition>
 </p:sld>
 </file>
 
@@ -10078,205 +7659,7 @@
       </p:sp>
       <p:sp>
         <p:nvSpPr>
-          <p:cNvPr id="14" name="Shape 12"/>
-          <p:cNvSpPr/>
-          <p:nvPr/>
-        </p:nvSpPr>
-        <p:spPr>
-          <a:xfrm>
-            <a:off x="6766560" y="2377440"/>
-            <a:ext cx="4754880" cy="1188720"/>
-          </a:xfrm>
-          <a:prstGeom prst="roundRect">
-            <a:avLst>
-              <a:gd name="adj" fmla="val 9231"/>
-            </a:avLst>
-          </a:prstGeom>
-          <a:solidFill>
-            <a:srgbClr val="F9FAFB"/>
-          </a:solidFill>
-          <a:ln w="12700">
-            <a:solidFill>
-              <a:srgbClr val="E5E7EB"/>
-            </a:solidFill>
-            <a:prstDash val="solid"/>
-          </a:ln>
-        </p:spPr>
-      </p:sp>
-      <p:sp>
-        <p:nvSpPr>
-          <p:cNvPr id="15" name="Text 13"/>
-          <p:cNvSpPr txBox="1"/>
-          <p:nvPr/>
-        </p:nvSpPr>
-        <p:spPr>
-          <a:xfrm>
-            <a:off x="6995160" y="2468880"/>
-            <a:ext cx="4389120" cy="320040"/>
-          </a:xfrm>
-          <a:prstGeom prst="rect">
-            <a:avLst/>
-          </a:prstGeom>
-          <a:noFill/>
-          <a:ln/>
-        </p:spPr>
-        <p:txBody>
-          <a:bodyPr wrap="square" lIns="0" tIns="0" rIns="0" bIns="0" rtlCol="0" anchor="ctr"/>
-          <a:lstStyle/>
-          <a:p>
-            <a:pPr indent="0" marL="0">
-              <a:buNone/>
-            </a:pPr>
-            <a:r>
-              <a:rPr lang="en-US" sz="1200" b="1" spc="200" kern="0" dirty="0">
-                <a:solidFill>
-                  <a:srgbClr val="6B7280"/>
-                </a:solidFill>
-              </a:rPr>
-              <a:t>FACTS · MEDICAL, LAW</a:t>
-            </a:r>
-            <a:endParaRPr lang="en-US" sz="1200" dirty="0"/>
-          </a:p>
-        </p:txBody>
-      </p:sp>
-      <p:sp>
-        <p:nvSpPr>
-          <p:cNvPr id="16" name="Text 14"/>
-          <p:cNvSpPr txBox="1"/>
-          <p:nvPr/>
-        </p:nvSpPr>
-        <p:spPr>
-          <a:xfrm>
-            <a:off x="6995160" y="2834640"/>
-            <a:ext cx="4389120" cy="548640"/>
-          </a:xfrm>
-          <a:prstGeom prst="rect">
-            <a:avLst/>
-          </a:prstGeom>
-          <a:noFill/>
-          <a:ln/>
-        </p:spPr>
-        <p:txBody>
-          <a:bodyPr wrap="square" lIns="0" tIns="0" rIns="0" bIns="0" rtlCol="0" anchor="ctr"/>
-          <a:lstStyle/>
-          <a:p>
-            <a:pPr indent="0" marL="0">
-              <a:buNone/>
-            </a:pPr>
-            <a:r>
-              <a:rPr lang="en-US" sz="2000" b="1" dirty="0">
-                <a:solidFill>
-                  <a:srgbClr val="111827"/>
-                </a:solidFill>
-              </a:rPr>
-              <a:t>MLP wins, in 3 of 3 models</a:t>
-            </a:r>
-            <a:endParaRPr lang="en-US" sz="2000" dirty="0"/>
-          </a:p>
-        </p:txBody>
-      </p:sp>
-      <p:sp>
-        <p:nvSpPr>
-          <p:cNvPr id="17" name="Shape 15"/>
-          <p:cNvSpPr/>
-          <p:nvPr/>
-        </p:nvSpPr>
-        <p:spPr>
-          <a:xfrm>
-            <a:off x="6766560" y="3840480"/>
-            <a:ext cx="4754880" cy="1188720"/>
-          </a:xfrm>
-          <a:prstGeom prst="roundRect">
-            <a:avLst>
-              <a:gd name="adj" fmla="val 9231"/>
-            </a:avLst>
-          </a:prstGeom>
-          <a:solidFill>
-            <a:srgbClr val="F9FAFB"/>
-          </a:solidFill>
-          <a:ln w="12700">
-            <a:solidFill>
-              <a:srgbClr val="E5E7EB"/>
-            </a:solidFill>
-            <a:prstDash val="solid"/>
-          </a:ln>
-        </p:spPr>
-      </p:sp>
-      <p:sp>
-        <p:nvSpPr>
-          <p:cNvPr id="18" name="Text 16"/>
-          <p:cNvSpPr txBox="1"/>
-          <p:nvPr/>
-        </p:nvSpPr>
-        <p:spPr>
-          <a:xfrm>
-            <a:off x="6995160" y="3931920"/>
-            <a:ext cx="4389120" cy="320040"/>
-          </a:xfrm>
-          <a:prstGeom prst="rect">
-            <a:avLst/>
-          </a:prstGeom>
-          <a:noFill/>
-          <a:ln/>
-        </p:spPr>
-        <p:txBody>
-          <a:bodyPr wrap="square" lIns="0" tIns="0" rIns="0" bIns="0" rtlCol="0" anchor="ctr"/>
-          <a:lstStyle/>
-          <a:p>
-            <a:pPr indent="0" marL="0">
-              <a:buNone/>
-            </a:pPr>
-            <a:r>
-              <a:rPr lang="en-US" sz="1200" b="1" spc="200" kern="0" dirty="0">
-                <a:solidFill>
-                  <a:srgbClr val="6B7280"/>
-                </a:solidFill>
-              </a:rPr>
-              <a:t>BEHAVIOUR · TONE</a:t>
-            </a:r>
-            <a:endParaRPr lang="en-US" sz="1200" dirty="0"/>
-          </a:p>
-        </p:txBody>
-      </p:sp>
-      <p:sp>
-        <p:nvSpPr>
-          <p:cNvPr id="19" name="Text 17"/>
-          <p:cNvSpPr txBox="1"/>
-          <p:nvPr/>
-        </p:nvSpPr>
-        <p:spPr>
-          <a:xfrm>
-            <a:off x="6995160" y="4297680"/>
-            <a:ext cx="4389120" cy="548640"/>
-          </a:xfrm>
-          <a:prstGeom prst="rect">
-            <a:avLst/>
-          </a:prstGeom>
-          <a:noFill/>
-          <a:ln/>
-        </p:spPr>
-        <p:txBody>
-          <a:bodyPr wrap="square" lIns="0" tIns="0" rIns="0" bIns="0" rtlCol="0" anchor="ctr"/>
-          <a:lstStyle/>
-          <a:p>
-            <a:pPr indent="0" marL="0">
-              <a:buNone/>
-            </a:pPr>
-            <a:r>
-              <a:rPr lang="en-US" sz="2000" b="1" dirty="0">
-                <a:solidFill>
-                  <a:srgbClr val="111827"/>
-                </a:solidFill>
-              </a:rPr>
-              <a:t>attention wins, MLP can even hurt</a:t>
-            </a:r>
-            <a:endParaRPr lang="en-US" sz="2000" dirty="0"/>
-          </a:p>
-        </p:txBody>
-      </p:sp>
-      <p:sp>
-        <p:nvSpPr>
-          <p:cNvPr id="20" name="Text 0"/>
+          <p:cNvPr id="14" name="Text 0"/>
           <p:cNvSpPr/>
           <p:nvPr>
             <p:ph idx="102" type="body" hasCustomPrompt="1"/>
@@ -10373,9 +7756,6 @@
   <p:clrMapOvr>
     <a:masterClrMapping/>
   </p:clrMapOvr>
-  <p:transition spd="med">
-    <p:fade/>
-  </p:transition>
 </p:sld>
 </file>
 
@@ -10750,554 +8130,7 @@
       </p:sp>
       <p:sp>
         <p:nvSpPr>
-          <p:cNvPr id="12" name="Shape 10"/>
-          <p:cNvSpPr/>
-          <p:nvPr/>
-        </p:nvSpPr>
-        <p:spPr>
-          <a:xfrm>
-            <a:off x="5852160" y="2743200"/>
-            <a:ext cx="640080" cy="2103120"/>
-          </a:xfrm>
-          <a:prstGeom prst="rect">
-            <a:avLst/>
-          </a:prstGeom>
-          <a:solidFill>
-            <a:srgbClr val="C2410C"/>
-          </a:solidFill>
-          <a:ln w="12700">
-            <a:solidFill>
-              <a:srgbClr val="C2410C"/>
-            </a:solidFill>
-            <a:prstDash val="solid"/>
-          </a:ln>
-        </p:spPr>
-      </p:sp>
-      <p:sp>
-        <p:nvSpPr>
-          <p:cNvPr id="13" name="Text 11"/>
-          <p:cNvSpPr txBox="1"/>
-          <p:nvPr/>
-        </p:nvSpPr>
-        <p:spPr>
-          <a:xfrm>
-            <a:off x="5669280" y="2359152"/>
-            <a:ext cx="1005840" cy="365760"/>
-          </a:xfrm>
-          <a:prstGeom prst="rect">
-            <a:avLst/>
-          </a:prstGeom>
-          <a:noFill/>
-          <a:ln/>
-        </p:spPr>
-        <p:txBody>
-          <a:bodyPr wrap="square" lIns="0" tIns="0" rIns="0" bIns="0" rtlCol="0" anchor="ctr"/>
-          <a:lstStyle/>
-          <a:p>
-            <a:pPr algn="ctr" indent="0" marL="0">
-              <a:buNone/>
-            </a:pPr>
-            <a:r>
-              <a:rPr lang="en-US" sz="1600" b="1" dirty="0">
-                <a:solidFill>
-                  <a:srgbClr val="C2410C"/>
-                </a:solidFill>
-              </a:rPr>
-              <a:t>+8</a:t>
-            </a:r>
-            <a:endParaRPr lang="en-US" sz="1600" dirty="0"/>
-          </a:p>
-        </p:txBody>
-      </p:sp>
-      <p:sp>
-        <p:nvSpPr>
-          <p:cNvPr id="14" name="Shape 12"/>
-          <p:cNvSpPr/>
-          <p:nvPr/>
-        </p:nvSpPr>
-        <p:spPr>
-          <a:xfrm>
-            <a:off x="6583680" y="4343400"/>
-            <a:ext cx="640080" cy="502920"/>
-          </a:xfrm>
-          <a:prstGeom prst="rect">
-            <a:avLst/>
-          </a:prstGeom>
-          <a:solidFill>
-            <a:srgbClr val="9CA3AF"/>
-          </a:solidFill>
-          <a:ln w="12700">
-            <a:solidFill>
-              <a:srgbClr val="9CA3AF"/>
-            </a:solidFill>
-            <a:prstDash val="solid"/>
-          </a:ln>
-        </p:spPr>
-      </p:sp>
-      <p:sp>
-        <p:nvSpPr>
-          <p:cNvPr id="15" name="Text 13"/>
-          <p:cNvSpPr txBox="1"/>
-          <p:nvPr/>
-        </p:nvSpPr>
-        <p:spPr>
-          <a:xfrm>
-            <a:off x="6400800" y="3959352"/>
-            <a:ext cx="1005840" cy="365760"/>
-          </a:xfrm>
-          <a:prstGeom prst="rect">
-            <a:avLst/>
-          </a:prstGeom>
-          <a:noFill/>
-          <a:ln/>
-        </p:spPr>
-        <p:txBody>
-          <a:bodyPr wrap="square" lIns="0" tIns="0" rIns="0" bIns="0" rtlCol="0" anchor="ctr"/>
-          <a:lstStyle/>
-          <a:p>
-            <a:pPr algn="ctr" indent="0" marL="0">
-              <a:buNone/>
-            </a:pPr>
-            <a:r>
-              <a:rPr lang="en-US" sz="1600" b="1" dirty="0">
-                <a:solidFill>
-                  <a:srgbClr val="6B7280"/>
-                </a:solidFill>
-              </a:rPr>
-              <a:t>+2</a:t>
-            </a:r>
-            <a:endParaRPr lang="en-US" sz="1600" dirty="0"/>
-          </a:p>
-        </p:txBody>
-      </p:sp>
-      <p:sp>
-        <p:nvSpPr>
-          <p:cNvPr id="16" name="Shape 14"/>
-          <p:cNvSpPr/>
-          <p:nvPr/>
-        </p:nvSpPr>
-        <p:spPr>
-          <a:xfrm>
-            <a:off x="7772400" y="3566160"/>
-            <a:ext cx="640080" cy="1280160"/>
-          </a:xfrm>
-          <a:prstGeom prst="rect">
-            <a:avLst/>
-          </a:prstGeom>
-          <a:solidFill>
-            <a:srgbClr val="C2410C"/>
-          </a:solidFill>
-          <a:ln w="12700">
-            <a:solidFill>
-              <a:srgbClr val="C2410C"/>
-            </a:solidFill>
-            <a:prstDash val="solid"/>
-          </a:ln>
-        </p:spPr>
-      </p:sp>
-      <p:sp>
-        <p:nvSpPr>
-          <p:cNvPr id="17" name="Text 15"/>
-          <p:cNvSpPr txBox="1"/>
-          <p:nvPr/>
-        </p:nvSpPr>
-        <p:spPr>
-          <a:xfrm>
-            <a:off x="7589520" y="3182112"/>
-            <a:ext cx="1005840" cy="365760"/>
-          </a:xfrm>
-          <a:prstGeom prst="rect">
-            <a:avLst/>
-          </a:prstGeom>
-          <a:noFill/>
-          <a:ln/>
-        </p:spPr>
-        <p:txBody>
-          <a:bodyPr wrap="square" lIns="0" tIns="0" rIns="0" bIns="0" rtlCol="0" anchor="ctr"/>
-          <a:lstStyle/>
-          <a:p>
-            <a:pPr algn="ctr" indent="0" marL="0">
-              <a:buNone/>
-            </a:pPr>
-            <a:r>
-              <a:rPr lang="en-US" sz="1600" b="1" dirty="0">
-                <a:solidFill>
-                  <a:srgbClr val="C2410C"/>
-                </a:solidFill>
-              </a:rPr>
-              <a:t>+5</a:t>
-            </a:r>
-            <a:endParaRPr lang="en-US" sz="1600" dirty="0"/>
-          </a:p>
-        </p:txBody>
-      </p:sp>
-      <p:sp>
-        <p:nvSpPr>
-          <p:cNvPr id="18" name="Shape 16"/>
-          <p:cNvSpPr/>
-          <p:nvPr/>
-        </p:nvSpPr>
-        <p:spPr>
-          <a:xfrm>
-            <a:off x="8503920" y="4572000"/>
-            <a:ext cx="640080" cy="274320"/>
-          </a:xfrm>
-          <a:prstGeom prst="rect">
-            <a:avLst/>
-          </a:prstGeom>
-          <a:solidFill>
-            <a:srgbClr val="9CA3AF"/>
-          </a:solidFill>
-          <a:ln w="12700">
-            <a:solidFill>
-              <a:srgbClr val="9CA3AF"/>
-            </a:solidFill>
-            <a:prstDash val="solid"/>
-          </a:ln>
-        </p:spPr>
-      </p:sp>
-      <p:sp>
-        <p:nvSpPr>
-          <p:cNvPr id="19" name="Text 17"/>
-          <p:cNvSpPr txBox="1"/>
-          <p:nvPr/>
-        </p:nvSpPr>
-        <p:spPr>
-          <a:xfrm>
-            <a:off x="8321040" y="4187952"/>
-            <a:ext cx="1005840" cy="365760"/>
-          </a:xfrm>
-          <a:prstGeom prst="rect">
-            <a:avLst/>
-          </a:prstGeom>
-          <a:noFill/>
-          <a:ln/>
-        </p:spPr>
-        <p:txBody>
-          <a:bodyPr wrap="square" lIns="0" tIns="0" rIns="0" bIns="0" rtlCol="0" anchor="ctr"/>
-          <a:lstStyle/>
-          <a:p>
-            <a:pPr algn="ctr" indent="0" marL="0">
-              <a:buNone/>
-            </a:pPr>
-            <a:r>
-              <a:rPr lang="en-US" sz="1600" b="1" dirty="0">
-                <a:solidFill>
-                  <a:srgbClr val="6B7280"/>
-                </a:solidFill>
-              </a:rPr>
-              <a:t>+1</a:t>
-            </a:r>
-            <a:endParaRPr lang="en-US" sz="1600" dirty="0"/>
-          </a:p>
-        </p:txBody>
-      </p:sp>
-      <p:sp>
-        <p:nvSpPr>
-          <p:cNvPr id="20" name="Shape 18"/>
-          <p:cNvSpPr/>
-          <p:nvPr/>
-        </p:nvSpPr>
-        <p:spPr>
-          <a:xfrm>
-            <a:off x="9692640" y="3657600"/>
-            <a:ext cx="640080" cy="1188720"/>
-          </a:xfrm>
-          <a:prstGeom prst="rect">
-            <a:avLst/>
-          </a:prstGeom>
-          <a:solidFill>
-            <a:srgbClr val="C2410C"/>
-          </a:solidFill>
-          <a:ln w="12700">
-            <a:solidFill>
-              <a:srgbClr val="C2410C"/>
-            </a:solidFill>
-            <a:prstDash val="solid"/>
-          </a:ln>
-        </p:spPr>
-      </p:sp>
-      <p:sp>
-        <p:nvSpPr>
-          <p:cNvPr id="21" name="Text 19"/>
-          <p:cNvSpPr txBox="1"/>
-          <p:nvPr/>
-        </p:nvSpPr>
-        <p:spPr>
-          <a:xfrm>
-            <a:off x="9509760" y="3273552"/>
-            <a:ext cx="1005840" cy="365760"/>
-          </a:xfrm>
-          <a:prstGeom prst="rect">
-            <a:avLst/>
-          </a:prstGeom>
-          <a:noFill/>
-          <a:ln/>
-        </p:spPr>
-        <p:txBody>
-          <a:bodyPr wrap="square" lIns="0" tIns="0" rIns="0" bIns="0" rtlCol="0" anchor="ctr"/>
-          <a:lstStyle/>
-          <a:p>
-            <a:pPr algn="ctr" indent="0" marL="0">
-              <a:buNone/>
-            </a:pPr>
-            <a:r>
-              <a:rPr lang="en-US" sz="1600" b="1" dirty="0">
-                <a:solidFill>
-                  <a:srgbClr val="C2410C"/>
-                </a:solidFill>
-              </a:rPr>
-              <a:t>+4.5</a:t>
-            </a:r>
-            <a:endParaRPr lang="en-US" sz="1600" dirty="0"/>
-          </a:p>
-        </p:txBody>
-      </p:sp>
-      <p:sp>
-        <p:nvSpPr>
-          <p:cNvPr id="22" name="Shape 20"/>
-          <p:cNvSpPr/>
-          <p:nvPr/>
-        </p:nvSpPr>
-        <p:spPr>
-          <a:xfrm>
-            <a:off x="10424160" y="4818888"/>
-            <a:ext cx="640080" cy="27432"/>
-          </a:xfrm>
-          <a:prstGeom prst="rect">
-            <a:avLst/>
-          </a:prstGeom>
-          <a:solidFill>
-            <a:srgbClr val="9CA3AF"/>
-          </a:solidFill>
-          <a:ln w="12700">
-            <a:solidFill>
-              <a:srgbClr val="9CA3AF"/>
-            </a:solidFill>
-            <a:prstDash val="solid"/>
-          </a:ln>
-        </p:spPr>
-      </p:sp>
-      <p:sp>
-        <p:nvSpPr>
-          <p:cNvPr id="23" name="Text 21"/>
-          <p:cNvSpPr txBox="1"/>
-          <p:nvPr/>
-        </p:nvSpPr>
-        <p:spPr>
-          <a:xfrm>
-            <a:off x="10241280" y="4434840"/>
-            <a:ext cx="1005840" cy="365760"/>
-          </a:xfrm>
-          <a:prstGeom prst="rect">
-            <a:avLst/>
-          </a:prstGeom>
-          <a:noFill/>
-          <a:ln/>
-        </p:spPr>
-        <p:txBody>
-          <a:bodyPr wrap="square" lIns="0" tIns="0" rIns="0" bIns="0" rtlCol="0" anchor="ctr"/>
-          <a:lstStyle/>
-          <a:p>
-            <a:pPr algn="ctr" indent="0" marL="0">
-              <a:buNone/>
-            </a:pPr>
-            <a:r>
-              <a:rPr lang="en-US" sz="1600" b="1" dirty="0">
-                <a:solidFill>
-                  <a:srgbClr val="6B7280"/>
-                </a:solidFill>
-              </a:rPr>
-              <a:t>0</a:t>
-            </a:r>
-            <a:endParaRPr lang="en-US" sz="1600" dirty="0"/>
-          </a:p>
-        </p:txBody>
-      </p:sp>
-      <p:sp>
-        <p:nvSpPr>
-          <p:cNvPr id="24" name="Shape 22"/>
-          <p:cNvSpPr/>
-          <p:nvPr/>
-        </p:nvSpPr>
-        <p:spPr>
-          <a:xfrm>
-            <a:off x="5715000" y="4846320"/>
-            <a:ext cx="5760720" cy="0"/>
-          </a:xfrm>
-          <a:prstGeom prst="line">
-            <a:avLst/>
-          </a:prstGeom>
-          <a:noFill/>
-          <a:ln w="25400">
-            <a:solidFill>
-              <a:srgbClr val="111827"/>
-            </a:solidFill>
-            <a:prstDash val="solid"/>
-          </a:ln>
-        </p:spPr>
-      </p:sp>
-      <p:sp>
-        <p:nvSpPr>
-          <p:cNvPr id="25" name="Shape 23"/>
-          <p:cNvSpPr/>
-          <p:nvPr/>
-        </p:nvSpPr>
-        <p:spPr>
-          <a:xfrm>
-            <a:off x="6675120" y="5074920"/>
-            <a:ext cx="201168" cy="201168"/>
-          </a:xfrm>
-          <a:prstGeom prst="rect">
-            <a:avLst/>
-          </a:prstGeom>
-          <a:solidFill>
-            <a:srgbClr val="C2410C"/>
-          </a:solidFill>
-          <a:ln w="12700">
-            <a:solidFill>
-              <a:srgbClr val="C2410C"/>
-            </a:solidFill>
-            <a:prstDash val="solid"/>
-          </a:ln>
-        </p:spPr>
-      </p:sp>
-      <p:sp>
-        <p:nvSpPr>
-          <p:cNvPr id="26" name="Text 24"/>
-          <p:cNvSpPr txBox="1"/>
-          <p:nvPr/>
-        </p:nvSpPr>
-        <p:spPr>
-          <a:xfrm>
-            <a:off x="6949440" y="5029200"/>
-            <a:ext cx="1097280" cy="292608"/>
-          </a:xfrm>
-          <a:prstGeom prst="rect">
-            <a:avLst/>
-          </a:prstGeom>
-          <a:noFill/>
-          <a:ln/>
-        </p:spPr>
-        <p:txBody>
-          <a:bodyPr wrap="square" lIns="0" tIns="0" rIns="0" bIns="0" rtlCol="0" anchor="ctr"/>
-          <a:lstStyle/>
-          <a:p>
-            <a:pPr indent="0" marL="0">
-              <a:buNone/>
-            </a:pPr>
-            <a:r>
-              <a:rPr lang="en-US" sz="1300" b="1" dirty="0">
-                <a:solidFill>
-                  <a:srgbClr val="374151"/>
-                </a:solidFill>
-              </a:rPr>
-              <a:t>news</a:t>
-            </a:r>
-            <a:endParaRPr lang="en-US" sz="1300" dirty="0"/>
-          </a:p>
-        </p:txBody>
-      </p:sp>
-      <p:sp>
-        <p:nvSpPr>
-          <p:cNvPr id="27" name="Shape 25"/>
-          <p:cNvSpPr/>
-          <p:nvPr/>
-        </p:nvSpPr>
-        <p:spPr>
-          <a:xfrm>
-            <a:off x="8138160" y="5074920"/>
-            <a:ext cx="201168" cy="201168"/>
-          </a:xfrm>
-          <a:prstGeom prst="rect">
-            <a:avLst/>
-          </a:prstGeom>
-          <a:solidFill>
-            <a:srgbClr val="9CA3AF"/>
-          </a:solidFill>
-          <a:ln w="12700">
-            <a:solidFill>
-              <a:srgbClr val="9CA3AF"/>
-            </a:solidFill>
-            <a:prstDash val="solid"/>
-          </a:ln>
-        </p:spPr>
-      </p:sp>
-      <p:sp>
-        <p:nvSpPr>
-          <p:cNvPr id="28" name="Text 26"/>
-          <p:cNvSpPr txBox="1"/>
-          <p:nvPr/>
-        </p:nvSpPr>
-        <p:spPr>
-          <a:xfrm>
-            <a:off x="8412480" y="5029200"/>
-            <a:ext cx="2194560" cy="292608"/>
-          </a:xfrm>
-          <a:prstGeom prst="rect">
-            <a:avLst/>
-          </a:prstGeom>
-          <a:noFill/>
-          <a:ln/>
-        </p:spPr>
-        <p:txBody>
-          <a:bodyPr wrap="square" lIns="0" tIns="0" rIns="0" bIns="0" rtlCol="0" anchor="ctr"/>
-          <a:lstStyle/>
-          <a:p>
-            <a:pPr indent="0" marL="0">
-              <a:buNone/>
-            </a:pPr>
-            <a:r>
-              <a:rPr lang="en-US" sz="1300" b="1" dirty="0">
-                <a:solidFill>
-                  <a:srgbClr val="374151"/>
-                </a:solidFill>
-              </a:rPr>
-              <a:t>random web text</a:t>
-            </a:r>
-            <a:endParaRPr lang="en-US" sz="1300" dirty="0"/>
-          </a:p>
-        </p:txBody>
-      </p:sp>
-      <p:sp>
-        <p:nvSpPr>
-          <p:cNvPr id="29" name="Text 27"/>
-          <p:cNvSpPr txBox="1"/>
-          <p:nvPr/>
-        </p:nvSpPr>
-        <p:spPr>
-          <a:xfrm>
-            <a:off x="5760720" y="5394960"/>
-            <a:ext cx="5486400" cy="274320"/>
-          </a:xfrm>
-          <a:prstGeom prst="rect">
-            <a:avLst/>
-          </a:prstGeom>
-          <a:noFill/>
-          <a:ln/>
-        </p:spPr>
-        <p:txBody>
-          <a:bodyPr wrap="square" lIns="0" tIns="0" rIns="0" bIns="0" rtlCol="0" anchor="ctr"/>
-          <a:lstStyle/>
-          <a:p>
-            <a:pPr indent="0" marL="0">
-              <a:buNone/>
-            </a:pPr>
-            <a:r>
-              <a:rPr lang="en-US" sz="1200" dirty="0">
-                <a:solidFill>
-                  <a:srgbClr val="6B7280"/>
-                </a:solidFill>
-              </a:rPr>
-              <a:t>new facts learned, three quizzes, eight models</a:t>
-            </a:r>
-            <a:endParaRPr lang="en-US" sz="1200" dirty="0"/>
-          </a:p>
-        </p:txBody>
-      </p:sp>
-      <p:sp>
-        <p:nvSpPr>
-          <p:cNvPr id="30" name="Text 0"/>
+          <p:cNvPr id="12" name="Text 0"/>
           <p:cNvSpPr/>
           <p:nvPr>
             <p:ph idx="102" type="body" hasCustomPrompt="1"/>
@@ -11338,7 +8171,7 @@
                   <a:srgbClr val="6B7280"/>
                 </a:solidFill>
               </a:rPr>
-              <a:t>6 billion tokens instead of a new model, and news teaches 2–4× more than web text.</a:t>
+              <a:t>A few billion tokens instead of a new model.</a:t>
             </a:r>
             <a:endParaRPr lang="en-US" sz="1800" dirty="0"/>
           </a:p>
@@ -11394,9 +8227,6 @@
   <p:clrMapOvr>
     <a:masterClrMapping/>
   </p:clrMapOvr>
-  <p:transition spd="med">
-    <p:fade/>
-  </p:transition>
 </p:sld>
 </file>
 
@@ -12164,9 +8994,6 @@
   <p:clrMapOvr>
     <a:masterClrMapping/>
   </p:clrMapOvr>
-  <p:transition spd="med">
-    <p:fade/>
-  </p:transition>
 </p:sld>
 </file>
 
@@ -12538,9 +9365,6 @@
   <p:clrMapOvr>
     <a:masterClrMapping/>
   </p:clrMapOvr>
-  <p:transition spd="med">
-    <p:fade/>
-  </p:transition>
 </p:sld>
 </file>
 
@@ -12631,7 +9455,7 @@
                   <a:schemeClr val="tx1"/>
                 </a:solidFill>
               </a:rPr>
-              <a:t>What decides how much it learns?</a:t>
+              <a:t>What does it cost?</a:t>
             </a:r>
             <a:endParaRPr lang="en-US" sz="3200" dirty="0"/>
           </a:p>
@@ -12645,18 +9469,20 @@
         </p:nvSpPr>
         <p:spPr>
           <a:xfrm>
-            <a:off x="1463040" y="4663440"/>
-            <a:ext cx="914400" cy="365760"/>
-          </a:xfrm>
-          <a:prstGeom prst="rect">
-            <a:avLst/>
+            <a:off x="640080" y="2286000"/>
+            <a:ext cx="5212080" cy="3108960"/>
+          </a:xfrm>
+          <a:prstGeom prst="roundRect">
+            <a:avLst>
+              <a:gd name="adj" fmla="val 3529"/>
+            </a:avLst>
           </a:prstGeom>
           <a:solidFill>
-            <a:srgbClr val="C2410C"/>
+            <a:srgbClr val="F9FAFB"/>
           </a:solidFill>
           <a:ln w="12700">
             <a:solidFill>
-              <a:srgbClr val="C2410C"/>
+              <a:srgbClr val="E5E7EB"/>
             </a:solidFill>
             <a:prstDash val="solid"/>
           </a:ln>
@@ -12670,8 +9496,8 @@
         </p:nvSpPr>
         <p:spPr>
           <a:xfrm>
-            <a:off x="1280160" y="4279392"/>
-            <a:ext cx="1280160" cy="365760"/>
+            <a:off x="640080" y="2514600"/>
+            <a:ext cx="5212080" cy="320040"/>
           </a:xfrm>
           <a:prstGeom prst="rect">
             <a:avLst/>
@@ -12687,12 +9513,87 @@
               <a:buNone/>
             </a:pPr>
             <a:r>
-              <a:rPr lang="en-US" sz="1600" b="1" dirty="0">
-                <a:solidFill>
-                  <a:srgbClr val="C2410C"/>
-                </a:solidFill>
-              </a:rPr>
-              <a:t>+2</a:t>
+              <a:rPr lang="en-US" sz="1200" b="1" spc="200" kern="0" dirty="0">
+                <a:solidFill>
+                  <a:srgbClr val="6B7280"/>
+                </a:solidFill>
+              </a:rPr>
+              <a:t>FACTS FROM BEFORE 2023</a:t>
+            </a:r>
+            <a:endParaRPr lang="en-US" sz="1200" dirty="0"/>
+          </a:p>
+        </p:txBody>
+      </p:sp>
+      <p:sp>
+        <p:nvSpPr>
+          <p:cNvPr id="6" name="Text 4"/>
+          <p:cNvSpPr txBox="1"/>
+          <p:nvPr/>
+        </p:nvSpPr>
+        <p:spPr>
+          <a:xfrm>
+            <a:off x="640080" y="2926080"/>
+            <a:ext cx="5212080" cy="1463040"/>
+          </a:xfrm>
+          <a:prstGeom prst="rect">
+            <a:avLst/>
+          </a:prstGeom>
+          <a:noFill/>
+          <a:ln/>
+        </p:spPr>
+        <p:txBody>
+          <a:bodyPr wrap="square" lIns="0" tIns="0" rIns="0" bIns="0" rtlCol="0" anchor="ctr"/>
+          <a:lstStyle/>
+          <a:p>
+            <a:pPr algn="ctr" indent="0" marL="0">
+              <a:buNone/>
+            </a:pPr>
+            <a:r>
+              <a:rPr lang="en-US" sz="8400" b="1" dirty="0">
+                <a:solidFill>
+                  <a:srgbClr val="111827"/>
+                </a:solidFill>
+                <a:latin typeface="Cambria" pitchFamily="34" charset="0"/>
+                <a:ea typeface="Cambria" pitchFamily="34" charset="-122"/>
+                <a:cs typeface="Cambria" pitchFamily="34" charset="-120"/>
+              </a:rPr>
+              <a:t>+0.3</a:t>
+            </a:r>
+            <a:endParaRPr lang="en-US" sz="8400" dirty="0"/>
+          </a:p>
+        </p:txBody>
+      </p:sp>
+      <p:sp>
+        <p:nvSpPr>
+          <p:cNvPr id="7" name="Text 5"/>
+          <p:cNvSpPr txBox="1"/>
+          <p:nvPr/>
+        </p:nvSpPr>
+        <p:spPr>
+          <a:xfrm>
+            <a:off x="640080" y="4572000"/>
+            <a:ext cx="5212080" cy="365760"/>
+          </a:xfrm>
+          <a:prstGeom prst="rect">
+            <a:avLst/>
+          </a:prstGeom>
+          <a:noFill/>
+          <a:ln/>
+        </p:spPr>
+        <p:txBody>
+          <a:bodyPr wrap="square" lIns="0" tIns="0" rIns="0" bIns="0" rtlCol="0" anchor="ctr"/>
+          <a:lstStyle/>
+          <a:p>
+            <a:pPr algn="ctr" indent="0" marL="0">
+              <a:buNone/>
+            </a:pPr>
+            <a:r>
+              <a:rPr lang="en-US" sz="1600" dirty="0">
+                <a:solidFill>
+                  <a:srgbClr val="374151"/>
+                </a:solidFill>
+              </a:rPr>
+              <a:t>nothing forgotten</a:t>
             </a:r>
             <a:endParaRPr lang="en-US" sz="1600" dirty="0"/>
           </a:p>
@@ -12700,20 +9601,22 @@
       </p:sp>
       <p:sp>
         <p:nvSpPr>
-          <p:cNvPr id="6" name="Shape 4"/>
-          <p:cNvSpPr/>
-          <p:nvPr/>
-        </p:nvSpPr>
-        <p:spPr>
-          <a:xfrm>
-            <a:off x="2560320" y="4681728"/>
-            <a:ext cx="914400" cy="347472"/>
-          </a:xfrm>
-          <a:prstGeom prst="rect">
-            <a:avLst/>
+          <p:cNvPr id="8" name="Shape 6"/>
+          <p:cNvSpPr/>
+          <p:nvPr/>
+        </p:nvSpPr>
+        <p:spPr>
+          <a:xfrm>
+            <a:off x="6355080" y="2286000"/>
+            <a:ext cx="5212080" cy="3108960"/>
+          </a:xfrm>
+          <a:prstGeom prst="roundRect">
+            <a:avLst>
+              <a:gd name="adj" fmla="val 3529"/>
+            </a:avLst>
           </a:prstGeom>
           <a:solidFill>
-            <a:srgbClr val="FDBA74"/>
+            <a:srgbClr val="FFF7ED"/>
           </a:solidFill>
           <a:ln w="12700">
             <a:solidFill>
@@ -12725,73 +9628,14 @@
       </p:sp>
       <p:sp>
         <p:nvSpPr>
-          <p:cNvPr id="7" name="Text 5"/>
-          <p:cNvSpPr txBox="1"/>
-          <p:nvPr/>
-        </p:nvSpPr>
-        <p:spPr>
-          <a:xfrm>
-            <a:off x="2377440" y="4297680"/>
-            <a:ext cx="1280160" cy="365760"/>
-          </a:xfrm>
-          <a:prstGeom prst="rect">
-            <a:avLst/>
-          </a:prstGeom>
-          <a:noFill/>
-          <a:ln/>
-        </p:spPr>
-        <p:txBody>
-          <a:bodyPr wrap="square" lIns="0" tIns="0" rIns="0" bIns="0" rtlCol="0" anchor="ctr"/>
-          <a:lstStyle/>
-          <a:p>
-            <a:pPr algn="ctr" indent="0" marL="0">
-              <a:buNone/>
-            </a:pPr>
-            <a:r>
-              <a:rPr lang="en-US" sz="1600" b="1" dirty="0">
-                <a:solidFill>
-                  <a:srgbClr val="6B7280"/>
-                </a:solidFill>
-              </a:rPr>
-              <a:t>+2</a:t>
-            </a:r>
-            <a:endParaRPr lang="en-US" sz="1600" dirty="0"/>
-          </a:p>
-        </p:txBody>
-      </p:sp>
-      <p:sp>
-        <p:nvSpPr>
-          <p:cNvPr id="8" name="Shape 6"/>
-          <p:cNvSpPr/>
-          <p:nvPr/>
-        </p:nvSpPr>
-        <p:spPr>
-          <a:xfrm>
-            <a:off x="1325880" y="5029200"/>
-            <a:ext cx="2286000" cy="0"/>
-          </a:xfrm>
-          <a:prstGeom prst="line">
-            <a:avLst/>
-          </a:prstGeom>
-          <a:noFill/>
-          <a:ln w="25400">
-            <a:solidFill>
-              <a:srgbClr val="111827"/>
-            </a:solidFill>
-            <a:prstDash val="solid"/>
-          </a:ln>
-        </p:spPr>
-      </p:sp>
-      <p:sp>
-        <p:nvSpPr>
           <p:cNvPr id="9" name="Text 7"/>
           <p:cNvSpPr txBox="1"/>
           <p:nvPr/>
         </p:nvSpPr>
         <p:spPr>
           <a:xfrm>
-            <a:off x="1097280" y="5120640"/>
-            <a:ext cx="2743200" cy="365760"/>
+            <a:off x="6355080" y="2514600"/>
+            <a:ext cx="5212080" cy="320040"/>
           </a:xfrm>
           <a:prstGeom prst="rect">
             <a:avLst/>
@@ -12807,41 +9651,55 @@
               <a:buNone/>
             </a:pPr>
             <a:r>
-              <a:rPr lang="en-US" sz="1500" b="1" dirty="0">
-                <a:solidFill>
-                  <a:srgbClr val="111827"/>
-                </a:solidFill>
-              </a:rPr>
-              <a:t>mentioned a few times</a:t>
-            </a:r>
-            <a:endParaRPr lang="en-US" sz="1500" dirty="0"/>
-          </a:p>
-        </p:txBody>
-      </p:sp>
-      <p:sp>
-        <p:nvSpPr>
-          <p:cNvPr id="10" name="Shape 8"/>
-          <p:cNvSpPr/>
-          <p:nvPr/>
-        </p:nvSpPr>
-        <p:spPr>
-          <a:xfrm>
-            <a:off x="4754880" y="2743200"/>
-            <a:ext cx="914400" cy="2286000"/>
-          </a:xfrm>
-          <a:prstGeom prst="rect">
-            <a:avLst/>
-          </a:prstGeom>
-          <a:solidFill>
-            <a:srgbClr val="C2410C"/>
-          </a:solidFill>
-          <a:ln w="12700">
-            <a:solidFill>
-              <a:srgbClr val="C2410C"/>
-            </a:solidFill>
-            <a:prstDash val="solid"/>
-          </a:ln>
-        </p:spPr>
+              <a:rPr lang="en-US" sz="1200" b="1" spc="200" kern="0" dirty="0">
+                <a:solidFill>
+                  <a:srgbClr val="C2410C"/>
+                </a:solidFill>
+              </a:rPr>
+              <a:t>GENERAL SKILLS · 20 TESTS</a:t>
+            </a:r>
+            <a:endParaRPr lang="en-US" sz="1200" dirty="0"/>
+          </a:p>
+        </p:txBody>
+      </p:sp>
+      <p:sp>
+        <p:nvSpPr>
+          <p:cNvPr id="10" name="Text 8"/>
+          <p:cNvSpPr txBox="1"/>
+          <p:nvPr/>
+        </p:nvSpPr>
+        <p:spPr>
+          <a:xfrm>
+            <a:off x="6355080" y="2926080"/>
+            <a:ext cx="5212080" cy="1463040"/>
+          </a:xfrm>
+          <a:prstGeom prst="rect">
+            <a:avLst/>
+          </a:prstGeom>
+          <a:noFill/>
+          <a:ln/>
+        </p:spPr>
+        <p:txBody>
+          <a:bodyPr wrap="square" lIns="0" tIns="0" rIns="0" bIns="0" rtlCol="0" anchor="ctr"/>
+          <a:lstStyle/>
+          <a:p>
+            <a:pPr algn="ctr" indent="0" marL="0">
+              <a:buNone/>
+            </a:pPr>
+            <a:r>
+              <a:rPr lang="en-US" sz="8400" b="1" dirty="0">
+                <a:solidFill>
+                  <a:srgbClr val="C2410C"/>
+                </a:solidFill>
+                <a:latin typeface="Cambria" pitchFamily="34" charset="0"/>
+                <a:ea typeface="Cambria" pitchFamily="34" charset="-122"/>
+                <a:cs typeface="Cambria" pitchFamily="34" charset="-120"/>
+              </a:rPr>
+              <a:t>−1.2</a:t>
+            </a:r>
+            <a:endParaRPr lang="en-US" sz="8400" dirty="0"/>
+          </a:p>
+        </p:txBody>
       </p:sp>
       <p:sp>
         <p:nvSpPr>
@@ -12851,8 +9709,8 @@
         </p:nvSpPr>
         <p:spPr>
           <a:xfrm>
-            <a:off x="4572000" y="2359152"/>
-            <a:ext cx="1280160" cy="365760"/>
+            <a:off x="6355080" y="4572000"/>
+            <a:ext cx="5212080" cy="365760"/>
           </a:xfrm>
           <a:prstGeom prst="rect">
             <a:avLst/>
@@ -12868,12 +9726,12 @@
               <a:buNone/>
             </a:pPr>
             <a:r>
-              <a:rPr lang="en-US" sz="1600" b="1" dirty="0">
-                <a:solidFill>
-                  <a:srgbClr val="C2410C"/>
-                </a:solidFill>
-              </a:rPr>
-              <a:t>+12</a:t>
+              <a:rPr lang="en-US" sz="1600" dirty="0">
+                <a:solidFill>
+                  <a:srgbClr val="374151"/>
+                </a:solidFill>
+              </a:rPr>
+              <a:t>looks fine in the training language, drops in the others</a:t>
             </a:r>
             <a:endParaRPr lang="en-US" sz="1600" dirty="0"/>
           </a:p>
@@ -12881,249 +9739,7 @@
       </p:sp>
       <p:sp>
         <p:nvSpPr>
-          <p:cNvPr id="12" name="Shape 10"/>
-          <p:cNvSpPr/>
-          <p:nvPr/>
-        </p:nvSpPr>
-        <p:spPr>
-          <a:xfrm>
-            <a:off x="5852160" y="3291840"/>
-            <a:ext cx="914400" cy="1737360"/>
-          </a:xfrm>
-          <a:prstGeom prst="rect">
-            <a:avLst/>
-          </a:prstGeom>
-          <a:solidFill>
-            <a:srgbClr val="FDBA74"/>
-          </a:solidFill>
-          <a:ln w="12700">
-            <a:solidFill>
-              <a:srgbClr val="FDBA74"/>
-            </a:solidFill>
-            <a:prstDash val="solid"/>
-          </a:ln>
-        </p:spPr>
-      </p:sp>
-      <p:sp>
-        <p:nvSpPr>
-          <p:cNvPr id="13" name="Text 11"/>
-          <p:cNvSpPr txBox="1"/>
-          <p:nvPr/>
-        </p:nvSpPr>
-        <p:spPr>
-          <a:xfrm>
-            <a:off x="5669280" y="2907792"/>
-            <a:ext cx="1280160" cy="365760"/>
-          </a:xfrm>
-          <a:prstGeom prst="rect">
-            <a:avLst/>
-          </a:prstGeom>
-          <a:noFill/>
-          <a:ln/>
-        </p:spPr>
-        <p:txBody>
-          <a:bodyPr wrap="square" lIns="0" tIns="0" rIns="0" bIns="0" rtlCol="0" anchor="ctr"/>
-          <a:lstStyle/>
-          <a:p>
-            <a:pPr algn="ctr" indent="0" marL="0">
-              <a:buNone/>
-            </a:pPr>
-            <a:r>
-              <a:rPr lang="en-US" sz="1600" b="1" dirty="0">
-                <a:solidFill>
-                  <a:srgbClr val="6B7280"/>
-                </a:solidFill>
-              </a:rPr>
-              <a:t>+9</a:t>
-            </a:r>
-            <a:endParaRPr lang="en-US" sz="1600" dirty="0"/>
-          </a:p>
-        </p:txBody>
-      </p:sp>
-      <p:sp>
-        <p:nvSpPr>
-          <p:cNvPr id="14" name="Shape 12"/>
-          <p:cNvSpPr/>
-          <p:nvPr/>
-        </p:nvSpPr>
-        <p:spPr>
-          <a:xfrm>
-            <a:off x="4617720" y="5029200"/>
-            <a:ext cx="2286000" cy="0"/>
-          </a:xfrm>
-          <a:prstGeom prst="line">
-            <a:avLst/>
-          </a:prstGeom>
-          <a:noFill/>
-          <a:ln w="25400">
-            <a:solidFill>
-              <a:srgbClr val="111827"/>
-            </a:solidFill>
-            <a:prstDash val="solid"/>
-          </a:ln>
-        </p:spPr>
-      </p:sp>
-      <p:sp>
-        <p:nvSpPr>
-          <p:cNvPr id="15" name="Text 13"/>
-          <p:cNvSpPr txBox="1"/>
-          <p:nvPr/>
-        </p:nvSpPr>
-        <p:spPr>
-          <a:xfrm>
-            <a:off x="4389120" y="5120640"/>
-            <a:ext cx="2743200" cy="365760"/>
-          </a:xfrm>
-          <a:prstGeom prst="rect">
-            <a:avLst/>
-          </a:prstGeom>
-          <a:noFill/>
-          <a:ln/>
-        </p:spPr>
-        <p:txBody>
-          <a:bodyPr wrap="square" lIns="0" tIns="0" rIns="0" bIns="0" rtlCol="0" anchor="ctr"/>
-          <a:lstStyle/>
-          <a:p>
-            <a:pPr algn="ctr" indent="0" marL="0">
-              <a:buNone/>
-            </a:pPr>
-            <a:r>
-              <a:rPr lang="en-US" sz="1500" b="1" dirty="0">
-                <a:solidFill>
-                  <a:srgbClr val="111827"/>
-                </a:solidFill>
-              </a:rPr>
-              <a:t>mentioned 200+ times</a:t>
-            </a:r>
-            <a:endParaRPr lang="en-US" sz="1500" dirty="0"/>
-          </a:p>
-        </p:txBody>
-      </p:sp>
-      <p:sp>
-        <p:nvSpPr>
-          <p:cNvPr id="16" name="Shape 14"/>
-          <p:cNvSpPr/>
-          <p:nvPr/>
-        </p:nvSpPr>
-        <p:spPr>
-          <a:xfrm>
-            <a:off x="8046720" y="3291840"/>
-            <a:ext cx="274320" cy="274320"/>
-          </a:xfrm>
-          <a:prstGeom prst="rect">
-            <a:avLst/>
-          </a:prstGeom>
-          <a:solidFill>
-            <a:srgbClr val="C2410C"/>
-          </a:solidFill>
-          <a:ln w="12700">
-            <a:solidFill>
-              <a:srgbClr val="C2410C"/>
-            </a:solidFill>
-            <a:prstDash val="solid"/>
-          </a:ln>
-        </p:spPr>
-      </p:sp>
-      <p:sp>
-        <p:nvSpPr>
-          <p:cNvPr id="17" name="Text 15"/>
-          <p:cNvSpPr txBox="1"/>
-          <p:nvPr/>
-        </p:nvSpPr>
-        <p:spPr>
-          <a:xfrm>
-            <a:off x="8458200" y="3246120"/>
-            <a:ext cx="3200400" cy="365760"/>
-          </a:xfrm>
-          <a:prstGeom prst="rect">
-            <a:avLst/>
-          </a:prstGeom>
-          <a:noFill/>
-          <a:ln/>
-        </p:spPr>
-        <p:txBody>
-          <a:bodyPr wrap="square" lIns="0" tIns="0" rIns="0" bIns="0" rtlCol="0" anchor="ctr"/>
-          <a:lstStyle/>
-          <a:p>
-            <a:pPr indent="0" marL="0">
-              <a:buNone/>
-            </a:pPr>
-            <a:r>
-              <a:rPr lang="en-US" sz="1400" b="1" dirty="0">
-                <a:solidFill>
-                  <a:srgbClr val="374151"/>
-                </a:solidFill>
-              </a:rPr>
-              <a:t>asked in the training language</a:t>
-            </a:r>
-            <a:endParaRPr lang="en-US" sz="1400" dirty="0"/>
-          </a:p>
-        </p:txBody>
-      </p:sp>
-      <p:sp>
-        <p:nvSpPr>
-          <p:cNvPr id="18" name="Shape 16"/>
-          <p:cNvSpPr/>
-          <p:nvPr/>
-        </p:nvSpPr>
-        <p:spPr>
-          <a:xfrm>
-            <a:off x="8046720" y="3840480"/>
-            <a:ext cx="274320" cy="274320"/>
-          </a:xfrm>
-          <a:prstGeom prst="rect">
-            <a:avLst/>
-          </a:prstGeom>
-          <a:solidFill>
-            <a:srgbClr val="FDBA74"/>
-          </a:solidFill>
-          <a:ln w="12700">
-            <a:solidFill>
-              <a:srgbClr val="FDBA74"/>
-            </a:solidFill>
-            <a:prstDash val="solid"/>
-          </a:ln>
-        </p:spPr>
-      </p:sp>
-      <p:sp>
-        <p:nvSpPr>
-          <p:cNvPr id="19" name="Text 17"/>
-          <p:cNvSpPr txBox="1"/>
-          <p:nvPr/>
-        </p:nvSpPr>
-        <p:spPr>
-          <a:xfrm>
-            <a:off x="8458200" y="3794760"/>
-            <a:ext cx="3200400" cy="365760"/>
-          </a:xfrm>
-          <a:prstGeom prst="rect">
-            <a:avLst/>
-          </a:prstGeom>
-          <a:noFill/>
-          <a:ln/>
-        </p:spPr>
-        <p:txBody>
-          <a:bodyPr wrap="square" lIns="0" tIns="0" rIns="0" bIns="0" rtlCol="0" anchor="ctr"/>
-          <a:lstStyle/>
-          <a:p>
-            <a:pPr indent="0" marL="0">
-              <a:buNone/>
-            </a:pPr>
-            <a:r>
-              <a:rPr lang="en-US" sz="1400" b="1" dirty="0">
-                <a:solidFill>
-                  <a:srgbClr val="374151"/>
-                </a:solidFill>
-              </a:rPr>
-              <a:t>asked in the other two</a:t>
-            </a:r>
-            <a:endParaRPr lang="en-US" sz="1400" dirty="0"/>
-          </a:p>
-        </p:txBody>
-      </p:sp>
-      <p:sp>
-        <p:nvSpPr>
-          <p:cNvPr id="20" name="Text 0"/>
+          <p:cNvPr id="12" name="Text 0"/>
           <p:cNvSpPr/>
           <p:nvPr>
             <p:ph idx="102" type="body" hasCustomPrompt="1"/>
@@ -13153,7 +9769,7 @@
                   <a:schemeClr val="tx1"/>
                 </a:solidFill>
               </a:rPr>
-              <a:t>Repetition, the same curve as in Way 1. </a:t>
+              <a:t>Old facts stay, general skills slip. </a:t>
             </a:r>
             <a:pPr indent="0" marL="0">
               <a:buNone/>
@@ -13164,7 +9780,7 @@
                   <a:srgbClr val="6B7280"/>
                 </a:solidFill>
               </a:rPr>
-              <a:t>What the news repeats, the model learns, in every language.</a:t>
+              <a:t>And you only see it if you test beyond the training language.</a:t>
             </a:r>
             <a:endParaRPr lang="en-US" sz="1800" dirty="0"/>
           </a:p>
@@ -13220,9 +9836,6 @@
   <p:clrMapOvr>
     <a:masterClrMapping/>
   </p:clrMapOvr>
-  <p:transition spd="med">
-    <p:fade/>
-  </p:transition>
 </p:sld>
 </file>
 

--- a/slides/Retrain_or_teach.pptx
+++ b/slides/Retrain_or_teach.pptx
@@ -18,9 +18,11 @@
     <p:sldId id="266" r:id="rId12"/>
     <p:sldId id="267" r:id="rId13"/>
     <p:sldId id="268" r:id="rId14"/>
+    <p:sldId id="269" r:id="rId15"/>
+    <p:sldId id="270" r:id="rId16"/>
   </p:sldIdLst>
   <p:notesMasterIdLst>
-    <p:notesMasterId r:id="rId15"/>
+    <p:notesMasterId r:id="rId17"/>
   </p:notesMasterIdLst>
   <p:sldSz cx="12192000" cy="6858000"/>
   <p:notesSz cx="6858000" cy="12192000"/>
@@ -119,29 +121,31 @@
   <p:extLst>
     <p:ext uri="{521415D9-36F7-43E2-AB2F-B90AF26B5E84}">
       <p14:sectionLst xmlns:p14="http://schemas.microsoft.com/office/powerpoint/2010/main">
-        <p14:section name="Part 1: It already knows more than it says" id="{7e6aec92-26ae-cfa2-9c8e-31f7dac9bb10}">
+        <p14:section name="Part 1: It already knows more than it says" id="{01591cce-541e-db62-015b-61ff818a6a41}">
           <p14:sldIdLst>
             <p14:sldId id="256"/>
             <p14:sldId id="257"/>
             <p14:sldId id="258"/>
             <p14:sldId id="259"/>
             <p14:sldId id="260"/>
+            <p14:sldId id="261"/>
+            <p14:sldId id="262"/>
           </p14:sldIdLst>
         </p14:section>
-        <p14:section name="Part 2: It needs knowledge it never had" id="{494eed78-a698-5c6d-709d-b4c400dc676c}">
+        <p14:section name="Part 2: It needs knowledge it never had" id="{1a2261ae-e48b-b80e-6378-dece46723cdf}">
           <p14:sldIdLst>
-            <p14:sldId id="261"/>
-            <p14:sldId id="262"/>
             <p14:sldId id="263"/>
             <p14:sldId id="264"/>
+            <p14:sldId id="265"/>
+            <p14:sldId id="266"/>
           </p14:sldIdLst>
         </p14:section>
-        <p14:section name="Train separately, average, and why it works" id="{ed4eb2d3-e00f-4847-66e0-de31c32f3f6b}">
+        <p14:section name="Train separately, average, and why it works" id="{851df018-6490-944e-93ce-ce212be6d272}">
           <p14:sldIdLst>
-            <p14:sldId id="265"/>
-            <p14:sldId id="266"/>
             <p14:sldId id="267"/>
             <p14:sldId id="268"/>
+            <p14:sldId id="269"/>
+            <p14:sldId id="270"/>
           </p14:sldIdLst>
         </p14:section>
       </p14:sectionLst>
@@ -636,7 +640,7 @@
           <a:p>
             <a:r>
               <a:rPr lang="en-US" dirty="0"/>
-              <a:t>Take the three single-language models and average their weights: add the numbers, divide by three. No training. Model soups, Wortsman et al. 2022. As many new facts as the mixture, plus 5.1, and zero skill loss. It beats every single-language model on both axes. Language-specific updates can be trained separately and merged.</a:t>
+              <a:t>Yes, mostly. About 70% of the accuracy gain survives when you ask in another language, between 57 and 88% depending on direction. French to English travels better than English to French.</a:t>
             </a:r>
             <a:endParaRPr lang="en-US" dirty="0"/>
           </a:p>
@@ -724,7 +728,7 @@
           <a:p>
             <a:r>
               <a:rPr lang="en-US" dirty="0"/>
-              <a:t>Preliminary. Each language update moves the model in a different direction; similarity only about 0.15. Averaging cancels most of each language-specific part and keeps what all three share: about 65% as far from base as a single update. Keep only the MLP changes and 92 to 100% of the new facts survive, the same place steering found. Running now: is averaging a shorter, safer step or a better direction? And can we walk further along it?</a:t>
+              <a:t>Old facts from before 2023: kept, slightly up. General skills on twenty tests in three languages: they slip. French-only loses 1.2, German 1.3, English 0.5. Test the French model only in French and it looks fine. Catastrophic forgetting in a new disguise, and the multilingual lens makes it visible.</a:t>
             </a:r>
             <a:endParaRPr lang="en-US" dirty="0"/>
           </a:p>
@@ -812,7 +816,7 @@
           <a:p>
             <a:r>
               <a:rPr lang="en-US" dirty="0"/>
-              <a:t>Part two in one picture. Right means more new facts learned; up means general skills kept. Each single-language update learns but forgets. The mixture learns the most and forgets less. The average of the three single-language models, no extra training, sits top right: as many facts as the mixture and nothing lost.</a:t>
+              <a:t>Take the three single-language models and average their weights: add the numbers, divide by three. No training. Model soups, Wortsman et al. 2022. As many new facts as the mixture, plus 5.1, and zero skill loss. It beats every single-language model on both axes. Language-specific updates can be trained separately and merged.</a:t>
             </a:r>
             <a:endParaRPr lang="en-US" dirty="0"/>
           </a:p>
@@ -900,7 +904,7 @@
           <a:p>
             <a:r>
               <a:rPr lang="en-US" dirty="0"/>
-              <a:t>The answers. Retrain or teach? Teach. If it already knows it, steer it. If it never read it, let it read, then average. Does the language matter? Less than you'd think. And the question I'm chasing: if new knowledge is a direction we can add, average and steer, do we ever need to retrain from scratch? Thank you.</a:t>
+              <a:t>Preliminary. Each language update moves the model in a different direction; similarity only about 0.15. Averaging cancels most of each language-specific part and keeps what all three share: about 65% as far from base as a single update. Keep only the MLP changes and 92 to 100% of the new facts survive, the same place steering found. Running now: is averaging a shorter, safer step or a better direction? And can we walk further along it?</a:t>
             </a:r>
             <a:endParaRPr lang="en-US" dirty="0"/>
           </a:p>
@@ -924,6 +928,182 @@
             <a:fld id="{F7021451-1387-4CA6-816F-3879F97B5CBC}" type="slidenum">
               <a:rPr lang="en-US"/>
               <a:t>13</a:t>
+            </a:fld>
+            <a:endParaRPr lang="en-US"/>
+          </a:p>
+        </p:txBody>
+      </p:sp>
+    </p:spTree>
+    <p:extLst>
+      <p:ext uri="{BB962C8B-B14F-4D97-AF65-F5344CB8AC3E}">
+        <p14:creationId xmlns:p14="http://schemas.microsoft.com/office/powerpoint/2010/main" val="1024086991"/>
+      </p:ext>
+    </p:extLst>
+  </p:cSld>
+  <p:clrMapOvr>
+    <a:masterClrMapping/>
+  </p:clrMapOvr>
+</p:notes>
+</file>
+
+<file path=ppt/notesSlides/notesSlide14.xml><?xml version="1.0" encoding="utf-8"?>
+<p:notes xmlns:a="http://schemas.openxmlformats.org/drawingml/2006/main" xmlns:r="http://schemas.openxmlformats.org/officeDocument/2006/relationships" xmlns:p="http://schemas.openxmlformats.org/presentationml/2006/main">
+  <p:cSld>
+    <p:spTree>
+      <p:nvGrpSpPr>
+        <p:cNvPr id="1" name=""/>
+        <p:cNvGrpSpPr/>
+        <p:nvPr/>
+      </p:nvGrpSpPr>
+      <p:grpSpPr>
+        <a:xfrm>
+          <a:off x="0" y="0"/>
+          <a:ext cx="0" cy="0"/>
+          <a:chOff x="0" y="0"/>
+          <a:chExt cx="0" cy="0"/>
+        </a:xfrm>
+      </p:grpSpPr>
+      <p:sp>
+        <p:nvSpPr>
+          <p:cNvPr id="2" name="Slide Image Placeholder 1"/>
+          <p:cNvSpPr>
+            <a:spLocks noGrp="1" noRot="1" noChangeAspect="1"/>
+          </p:cNvSpPr>
+          <p:nvPr>
+            <p:ph type="sldImg"/>
+          </p:nvPr>
+        </p:nvSpPr>
+        <p:spPr/>
+      </p:sp>
+      <p:sp>
+        <p:nvSpPr>
+          <p:cNvPr id="3" name="Notes Placeholder 2"/>
+          <p:cNvSpPr>
+            <a:spLocks noGrp="1"/>
+          </p:cNvSpPr>
+          <p:nvPr>
+            <p:ph type="body" idx="1"/>
+          </p:nvPr>
+        </p:nvSpPr>
+        <p:spPr/>
+        <p:txBody>
+          <a:bodyPr/>
+          <a:lstStyle/>
+          <a:p>
+            <a:r>
+              <a:rPr lang="en-US" dirty="0"/>
+              <a:t>Part two in one picture. Right means more new facts learned; up means general skills kept. Each single-language update learns but forgets. The mixture learns the most and forgets less. The average of the three single-language models, no extra training, sits top right: as many facts as the mixture and nothing lost.</a:t>
+            </a:r>
+            <a:endParaRPr lang="en-US" dirty="0"/>
+          </a:p>
+        </p:txBody>
+      </p:sp>
+      <p:sp>
+        <p:nvSpPr>
+          <p:cNvPr id="4" name="Slide Number Placeholder 3"/>
+          <p:cNvSpPr>
+            <a:spLocks noGrp="1"/>
+          </p:cNvSpPr>
+          <p:nvPr>
+            <p:ph type="sldNum" sz="quarter" idx="10"/>
+          </p:nvPr>
+        </p:nvSpPr>
+        <p:spPr/>
+        <p:txBody>
+          <a:bodyPr/>
+          <a:lstStyle/>
+          <a:p>
+            <a:fld id="{F7021451-1387-4CA6-816F-3879F97B5CBC}" type="slidenum">
+              <a:rPr lang="en-US"/>
+              <a:t>14</a:t>
+            </a:fld>
+            <a:endParaRPr lang="en-US"/>
+          </a:p>
+        </p:txBody>
+      </p:sp>
+    </p:spTree>
+    <p:extLst>
+      <p:ext uri="{BB962C8B-B14F-4D97-AF65-F5344CB8AC3E}">
+        <p14:creationId xmlns:p14="http://schemas.microsoft.com/office/powerpoint/2010/main" val="1024086991"/>
+      </p:ext>
+    </p:extLst>
+  </p:cSld>
+  <p:clrMapOvr>
+    <a:masterClrMapping/>
+  </p:clrMapOvr>
+</p:notes>
+</file>
+
+<file path=ppt/notesSlides/notesSlide15.xml><?xml version="1.0" encoding="utf-8"?>
+<p:notes xmlns:a="http://schemas.openxmlformats.org/drawingml/2006/main" xmlns:r="http://schemas.openxmlformats.org/officeDocument/2006/relationships" xmlns:p="http://schemas.openxmlformats.org/presentationml/2006/main">
+  <p:cSld>
+    <p:spTree>
+      <p:nvGrpSpPr>
+        <p:cNvPr id="1" name=""/>
+        <p:cNvGrpSpPr/>
+        <p:nvPr/>
+      </p:nvGrpSpPr>
+      <p:grpSpPr>
+        <a:xfrm>
+          <a:off x="0" y="0"/>
+          <a:ext cx="0" cy="0"/>
+          <a:chOff x="0" y="0"/>
+          <a:chExt cx="0" cy="0"/>
+        </a:xfrm>
+      </p:grpSpPr>
+      <p:sp>
+        <p:nvSpPr>
+          <p:cNvPr id="2" name="Slide Image Placeholder 1"/>
+          <p:cNvSpPr>
+            <a:spLocks noGrp="1" noRot="1" noChangeAspect="1"/>
+          </p:cNvSpPr>
+          <p:nvPr>
+            <p:ph type="sldImg"/>
+          </p:nvPr>
+        </p:nvSpPr>
+        <p:spPr/>
+      </p:sp>
+      <p:sp>
+        <p:nvSpPr>
+          <p:cNvPr id="3" name="Notes Placeholder 2"/>
+          <p:cNvSpPr>
+            <a:spLocks noGrp="1"/>
+          </p:cNvSpPr>
+          <p:nvPr>
+            <p:ph type="body" idx="1"/>
+          </p:nvPr>
+        </p:nvSpPr>
+        <p:spPr/>
+        <p:txBody>
+          <a:bodyPr/>
+          <a:lstStyle/>
+          <a:p>
+            <a:r>
+              <a:rPr lang="en-US" dirty="0"/>
+              <a:t>The answers. Retrain or teach? Teach. If it already knows it, steer it. If it never read it, let it read, then average. Does the language matter? Less than you'd think. And the question I'm chasing: if new knowledge is a direction we can add, average and steer, do we ever need to retrain from scratch? Thank you.</a:t>
+            </a:r>
+            <a:endParaRPr lang="en-US" dirty="0"/>
+          </a:p>
+        </p:txBody>
+      </p:sp>
+      <p:sp>
+        <p:nvSpPr>
+          <p:cNvPr id="4" name="Slide Number Placeholder 3"/>
+          <p:cNvSpPr>
+            <a:spLocks noGrp="1"/>
+          </p:cNvSpPr>
+          <p:nvPr>
+            <p:ph type="sldNum" sz="quarter" idx="10"/>
+          </p:nvPr>
+        </p:nvSpPr>
+        <p:spPr/>
+        <p:txBody>
+          <a:bodyPr/>
+          <a:lstStyle/>
+          <a:p>
+            <a:fld id="{F7021451-1387-4CA6-816F-3879F97B5CBC}" type="slidenum">
+              <a:rPr lang="en-US"/>
+              <a:t>15</a:t>
             </a:fld>
             <a:endParaRPr lang="en-US"/>
           </a:p>
@@ -988,7 +1168,7 @@
           <a:p>
             <a:r>
               <a:rPr lang="en-US" dirty="0"/>
-              <a:t>The map. Goal: keep an AI useful after it's built, without rebuilding it. Way one: the model already has the knowledge, it just doesn't come out, three questions. Way two: it never read it, yesterday's news, so it has to learn, six questions, and this is where language comes in.</a:t>
+              <a:t>A language model is trained once on a giant snapshot of text, then frozen. The models we use stopped reading around the end of 2023. Everything after that it never saw. Ask it and it guesses, confidently. So: how do we keep it useful?</a:t>
             </a:r>
             <a:endParaRPr lang="en-US" dirty="0"/>
           </a:p>
@@ -1076,7 +1256,7 @@
           <a:p>
             <a:r>
               <a:rPr lang="en-US" dirty="0"/>
-              <a:t>How well a model answers a fact depends on how often it has seen it. The curve rises steeply with repetition, but even a fact seen once leaves a small, real trace. For rare facts the information is in there, weakly, and it gets drowned out by higher-level computation on the way to the output. If the knowledge is already there, we don't need training. We need to help it out. (Bar heights sketch the log-linear trend; exact numbers in the papers.)</a:t>
+              <a:t>The usual fix: train it some more. Two problems. Expensive: about 48 billion words, weeks on 8 GPUs. And it forgets: after medical training the model gets worse at simple things it could do before. Catastrophic forgetting. Can we teach instead of retrain?</a:t>
             </a:r>
             <a:endParaRPr lang="en-US" dirty="0"/>
           </a:p>
@@ -1164,7 +1344,7 @@
           <a:p>
             <a:r>
               <a:rPr lang="en-US" dirty="0"/>
-              <a:t>Look inside one layer, each dot is a sentence, and medical sentences sit in their own cluster. Compute the direction from everything-else to medical, once. At inference, add that vector to the activations at one layer. One addition per forward pass, no training, nothing forgotten.</a:t>
+              <a:t>The map. Goal: keep an AI useful after it's built, without rebuilding it. Way one: the model already has the knowledge, it just doesn't come out, three questions. Way two: it never read it, yesterday's news, so it has to learn, six questions, and this is where language comes in.</a:t>
             </a:r>
             <a:endParaRPr lang="en-US" dirty="0"/>
           </a:p>
@@ -1252,7 +1432,7 @@
           <a:p>
             <a:r>
               <a:rPr lang="en-US" dirty="0"/>
-              <a:t>Where you add the vector matters. Nudging the MLP layers improves factual recall by 45%, more than double the residual stream where everyone usually steers. It flips for behaviour: for tone, attention wins. So facts live in the MLPs. But steering can only surface what the model has already read. It cannot tell the model who won an election last year. For that, part two.</a:t>
+              <a:t>How well a model answers a fact depends on how often it has seen it. The curve rises steeply with repetition, but even a fact seen once leaves a small, real trace. For rare facts the information is in there, weakly, and it gets drowned out by higher-level computation on the way to the output. If the knowledge is already there, we don't need training. We need to help it out. (Bar heights sketch the log-linear trend; exact numbers in the papers.)</a:t>
             </a:r>
             <a:endParaRPr lang="en-US" dirty="0"/>
           </a:p>
@@ -1340,7 +1520,7 @@
           <a:p>
             <a:r>
               <a:rPr lang="en-US" dirty="0"/>
-              <a:t>Sometimes the knowledge genuinely isn't in there: everything after the cutoff. Retraining from scratch is trillions of tokens and millions of dollars. The alternative is continued pretraining on about six billion tokens of fresh news. In NewsCPT, news beat random web text by two to four times on every model and quiz. So it works. What happens inside when we do this?</a:t>
+              <a:t>We opened the black box. Inside one layer, each dot a sentence, medical sentences sit in their own corner, cleanly separated. Knowledge has an address. So we can point at it: one arrow, v, from everything-else to medical.</a:t>
             </a:r>
             <a:endParaRPr lang="en-US" dirty="0"/>
           </a:p>
@@ -1428,7 +1608,7 @@
           <a:p>
             <a:r>
               <a:rPr lang="en-US" dirty="0"/>
-              <a:t>Plain model, no chain-of-thought. It reads the news in English only. I ask about the same event in German or French. Does it keep the answer? We updated models on English, German or French news, then asked the exact same facts, about fifteen thousand, translated, in all three languages. Who thinks it transfers?</a:t>
+              <a:t>While the model answers, add that arrow to its activity at one layer. One addition, no training, nothing forgotten. And where you add it matters: at the MLP layers, the memory blocks, factual recall improves by 45%, more than double the usual spot. Facts live in the MLPs. But steering can only surface what the model has already read. For yesterday's news: Way two.</a:t>
             </a:r>
             <a:endParaRPr lang="en-US" dirty="0"/>
           </a:p>
@@ -1516,7 +1696,7 @@
           <a:p>
             <a:r>
               <a:rPr lang="en-US" dirty="0"/>
-              <a:t>Yes, mostly. About 70% of the accuracy gain survives when you ask in another language, between 57 and 88% depending on direction. French to English travels better than English to French.</a:t>
+              <a:t>Sometimes the knowledge genuinely isn't in there: everything after the cutoff. Retraining from scratch is trillions of tokens and millions of dollars. The alternative is continued pretraining on about six billion tokens of fresh news. In NewsCPT, news beat random web text by two to four times on every model and quiz. So it works. What happens inside when we do this?</a:t>
             </a:r>
             <a:endParaRPr lang="en-US" dirty="0"/>
           </a:p>
@@ -1604,7 +1784,7 @@
           <a:p>
             <a:r>
               <a:rPr lang="en-US" dirty="0"/>
-              <a:t>Old facts from before 2023: kept, slightly up. General skills on twenty tests in three languages: they slip. French-only loses 1.2, German 1.3, English 0.5. Test the French model only in French and it looks fine. Catastrophic forgetting in a new disguise, and the multilingual lens makes it visible.</a:t>
+              <a:t>Plain model, no chain-of-thought. It reads the news in English only. I ask about the same event in German or French. Does it keep the answer? We updated models on English, German or French news, then asked the exact same facts, about fifteen thousand, translated, in all three languages. Who thinks it transfers?</a:t>
             </a:r>
             <a:endParaRPr lang="en-US" dirty="0"/>
           </a:p>
@@ -2867,7 +3047,7 @@
                   <a:schemeClr val="accent1"/>
                 </a:solidFill>
               </a:rPr>
-              <a:t>WAY 2 · QUESTION 7</a:t>
+              <a:t>WAY 2 · THE ANSWER</a:t>
             </a:r>
             <a:endParaRPr lang="en-US" sz="1200" dirty="0"/>
           </a:p>
@@ -2905,7 +3085,18 @@
                   <a:schemeClr val="tx1"/>
                 </a:solidFill>
               </a:rPr>
-              <a:t>Can we keep the facts without the cost?</a:t>
+              <a:t>Mostly, yes. </a:t>
+            </a:r>
+            <a:pPr algn="l" indent="0" marL="0">
+              <a:buNone/>
+            </a:pPr>
+            <a:r>
+              <a:rPr lang="en-US" sz="3200" b="1" i="1" dirty="0">
+                <a:solidFill>
+                  <a:srgbClr val="6B7280"/>
+                </a:solidFill>
+              </a:rPr>
+              <a:t>Knowledge doesn't really speak a language.</a:t>
             </a:r>
             <a:endParaRPr lang="en-US" sz="3200" dirty="0"/>
           </a:p>
@@ -2913,24 +3104,65 @@
       </p:sp>
       <p:sp>
         <p:nvSpPr>
-          <p:cNvPr id="4" name="Shape 2"/>
-          <p:cNvSpPr/>
-          <p:nvPr/>
-        </p:nvSpPr>
-        <p:spPr>
-          <a:xfrm>
-            <a:off x="1280160" y="2743200"/>
-            <a:ext cx="1005840" cy="1005840"/>
-          </a:xfrm>
-          <a:prstGeom prst="ellipse">
-            <a:avLst/>
+          <p:cNvPr id="4" name="Text 2"/>
+          <p:cNvSpPr txBox="1"/>
+          <p:nvPr/>
+        </p:nvSpPr>
+        <p:spPr>
+          <a:xfrm>
+            <a:off x="640080" y="2103120"/>
+            <a:ext cx="10908792" cy="1828800"/>
+          </a:xfrm>
+          <a:prstGeom prst="rect">
+            <a:avLst/>
+          </a:prstGeom>
+          <a:noFill/>
+          <a:ln/>
+        </p:spPr>
+        <p:txBody>
+          <a:bodyPr wrap="square" lIns="0" tIns="0" rIns="0" bIns="0" rtlCol="0" anchor="ctr"/>
+          <a:lstStyle/>
+          <a:p>
+            <a:pPr algn="ctr" indent="0" marL="0">
+              <a:buNone/>
+            </a:pPr>
+            <a:r>
+              <a:rPr lang="en-US" sz="12000" b="1" dirty="0">
+                <a:solidFill>
+                  <a:srgbClr val="C2410C"/>
+                </a:solidFill>
+                <a:latin typeface="Cambria" pitchFamily="34" charset="0"/>
+                <a:ea typeface="Cambria" pitchFamily="34" charset="-122"/>
+                <a:cs typeface="Cambria" pitchFamily="34" charset="-120"/>
+              </a:rPr>
+              <a:t>~70%</a:t>
+            </a:r>
+            <a:endParaRPr lang="en-US" sz="12000" dirty="0"/>
+          </a:p>
+        </p:txBody>
+      </p:sp>
+      <p:sp>
+        <p:nvSpPr>
+          <p:cNvPr id="5" name="Shape 3"/>
+          <p:cNvSpPr/>
+          <p:nvPr/>
+        </p:nvSpPr>
+        <p:spPr>
+          <a:xfrm>
+            <a:off x="1554480" y="4206240"/>
+            <a:ext cx="9052560" cy="502920"/>
+          </a:xfrm>
+          <a:prstGeom prst="roundRect">
+            <a:avLst>
+              <a:gd name="adj" fmla="val 18182"/>
+            </a:avLst>
           </a:prstGeom>
           <a:solidFill>
-            <a:srgbClr val="2563EB"/>
+            <a:srgbClr val="F3F4F6"/>
           </a:solidFill>
           <a:ln w="12700">
             <a:solidFill>
-              <a:srgbClr val="2563EB"/>
+              <a:srgbClr val="E5E7EB"/>
             </a:solidFill>
             <a:prstDash val="solid"/>
           </a:ln>
@@ -2938,283 +3170,19 @@
       </p:sp>
       <p:sp>
         <p:nvSpPr>
-          <p:cNvPr id="5" name="Text 3"/>
-          <p:cNvSpPr txBox="1"/>
-          <p:nvPr/>
-        </p:nvSpPr>
-        <p:spPr>
-          <a:xfrm>
-            <a:off x="1280160" y="2743200"/>
-            <a:ext cx="1005840" cy="1005840"/>
-          </a:xfrm>
-          <a:prstGeom prst="rect">
-            <a:avLst/>
-          </a:prstGeom>
-          <a:noFill/>
-          <a:ln/>
-        </p:spPr>
-        <p:txBody>
-          <a:bodyPr wrap="square" lIns="0" tIns="0" rIns="0" bIns="0" rtlCol="0" anchor="ctr"/>
-          <a:lstStyle/>
-          <a:p>
-            <a:pPr algn="ctr" indent="0" marL="0">
-              <a:buNone/>
-            </a:pPr>
-            <a:r>
-              <a:rPr lang="en-US" sz="2600" b="1" dirty="0">
-                <a:solidFill>
-                  <a:srgbClr val="FFFFFF"/>
-                </a:solidFill>
-              </a:rPr>
-              <a:t>EN</a:t>
-            </a:r>
-            <a:endParaRPr lang="en-US" sz="2600" dirty="0"/>
-          </a:p>
-        </p:txBody>
-      </p:sp>
-      <p:sp>
-        <p:nvSpPr>
-          <p:cNvPr id="6" name="Text 4"/>
-          <p:cNvSpPr txBox="1"/>
-          <p:nvPr/>
-        </p:nvSpPr>
-        <p:spPr>
-          <a:xfrm>
-            <a:off x="2377440" y="2743200"/>
-            <a:ext cx="457200" cy="1005840"/>
-          </a:xfrm>
-          <a:prstGeom prst="rect">
-            <a:avLst/>
-          </a:prstGeom>
-          <a:noFill/>
-          <a:ln/>
-        </p:spPr>
-        <p:txBody>
-          <a:bodyPr wrap="square" lIns="0" tIns="0" rIns="0" bIns="0" rtlCol="0" anchor="ctr"/>
-          <a:lstStyle/>
-          <a:p>
-            <a:pPr algn="ctr" indent="0" marL="0">
-              <a:buNone/>
-            </a:pPr>
-            <a:r>
-              <a:rPr lang="en-US" sz="3600" b="1" dirty="0">
-                <a:solidFill>
-                  <a:srgbClr val="9CA3AF"/>
-                </a:solidFill>
-              </a:rPr>
-              <a:t>+</a:t>
-            </a:r>
-            <a:endParaRPr lang="en-US" sz="3600" dirty="0"/>
-          </a:p>
-        </p:txBody>
-      </p:sp>
-      <p:sp>
-        <p:nvSpPr>
-          <p:cNvPr id="7" name="Shape 5"/>
-          <p:cNvSpPr/>
-          <p:nvPr/>
-        </p:nvSpPr>
-        <p:spPr>
-          <a:xfrm>
-            <a:off x="2926080" y="2743200"/>
-            <a:ext cx="1005840" cy="1005840"/>
-          </a:xfrm>
-          <a:prstGeom prst="ellipse">
-            <a:avLst/>
-          </a:prstGeom>
-          <a:solidFill>
-            <a:srgbClr val="D97706"/>
-          </a:solidFill>
-          <a:ln w="12700">
-            <a:solidFill>
-              <a:srgbClr val="D97706"/>
-            </a:solidFill>
-            <a:prstDash val="solid"/>
-          </a:ln>
-        </p:spPr>
-      </p:sp>
-      <p:sp>
-        <p:nvSpPr>
-          <p:cNvPr id="8" name="Text 6"/>
-          <p:cNvSpPr txBox="1"/>
-          <p:nvPr/>
-        </p:nvSpPr>
-        <p:spPr>
-          <a:xfrm>
-            <a:off x="2926080" y="2743200"/>
-            <a:ext cx="1005840" cy="1005840"/>
-          </a:xfrm>
-          <a:prstGeom prst="rect">
-            <a:avLst/>
-          </a:prstGeom>
-          <a:noFill/>
-          <a:ln/>
-        </p:spPr>
-        <p:txBody>
-          <a:bodyPr wrap="square" lIns="0" tIns="0" rIns="0" bIns="0" rtlCol="0" anchor="ctr"/>
-          <a:lstStyle/>
-          <a:p>
-            <a:pPr algn="ctr" indent="0" marL="0">
-              <a:buNone/>
-            </a:pPr>
-            <a:r>
-              <a:rPr lang="en-US" sz="2600" b="1" dirty="0">
-                <a:solidFill>
-                  <a:srgbClr val="FFFFFF"/>
-                </a:solidFill>
-              </a:rPr>
-              <a:t>DE</a:t>
-            </a:r>
-            <a:endParaRPr lang="en-US" sz="2600" dirty="0"/>
-          </a:p>
-        </p:txBody>
-      </p:sp>
-      <p:sp>
-        <p:nvSpPr>
-          <p:cNvPr id="9" name="Text 7"/>
-          <p:cNvSpPr txBox="1"/>
-          <p:nvPr/>
-        </p:nvSpPr>
-        <p:spPr>
-          <a:xfrm>
-            <a:off x="4023360" y="2743200"/>
-            <a:ext cx="457200" cy="1005840"/>
-          </a:xfrm>
-          <a:prstGeom prst="rect">
-            <a:avLst/>
-          </a:prstGeom>
-          <a:noFill/>
-          <a:ln/>
-        </p:spPr>
-        <p:txBody>
-          <a:bodyPr wrap="square" lIns="0" tIns="0" rIns="0" bIns="0" rtlCol="0" anchor="ctr"/>
-          <a:lstStyle/>
-          <a:p>
-            <a:pPr algn="ctr" indent="0" marL="0">
-              <a:buNone/>
-            </a:pPr>
-            <a:r>
-              <a:rPr lang="en-US" sz="3600" b="1" dirty="0">
-                <a:solidFill>
-                  <a:srgbClr val="9CA3AF"/>
-                </a:solidFill>
-              </a:rPr>
-              <a:t>+</a:t>
-            </a:r>
-            <a:endParaRPr lang="en-US" sz="3600" dirty="0"/>
-          </a:p>
-        </p:txBody>
-      </p:sp>
-      <p:sp>
-        <p:nvSpPr>
-          <p:cNvPr id="10" name="Shape 8"/>
-          <p:cNvSpPr/>
-          <p:nvPr/>
-        </p:nvSpPr>
-        <p:spPr>
-          <a:xfrm>
-            <a:off x="4572000" y="2743200"/>
-            <a:ext cx="1005840" cy="1005840"/>
-          </a:xfrm>
-          <a:prstGeom prst="ellipse">
-            <a:avLst/>
-          </a:prstGeom>
-          <a:solidFill>
-            <a:srgbClr val="7C3AED"/>
-          </a:solidFill>
-          <a:ln w="12700">
-            <a:solidFill>
-              <a:srgbClr val="7C3AED"/>
-            </a:solidFill>
-            <a:prstDash val="solid"/>
-          </a:ln>
-        </p:spPr>
-      </p:sp>
-      <p:sp>
-        <p:nvSpPr>
-          <p:cNvPr id="11" name="Text 9"/>
-          <p:cNvSpPr txBox="1"/>
-          <p:nvPr/>
-        </p:nvSpPr>
-        <p:spPr>
-          <a:xfrm>
-            <a:off x="4572000" y="2743200"/>
-            <a:ext cx="1005840" cy="1005840"/>
-          </a:xfrm>
-          <a:prstGeom prst="rect">
-            <a:avLst/>
-          </a:prstGeom>
-          <a:noFill/>
-          <a:ln/>
-        </p:spPr>
-        <p:txBody>
-          <a:bodyPr wrap="square" lIns="0" tIns="0" rIns="0" bIns="0" rtlCol="0" anchor="ctr"/>
-          <a:lstStyle/>
-          <a:p>
-            <a:pPr algn="ctr" indent="0" marL="0">
-              <a:buNone/>
-            </a:pPr>
-            <a:r>
-              <a:rPr lang="en-US" sz="2600" b="1" dirty="0">
-                <a:solidFill>
-                  <a:srgbClr val="FFFFFF"/>
-                </a:solidFill>
-              </a:rPr>
-              <a:t>FR</a:t>
-            </a:r>
-            <a:endParaRPr lang="en-US" sz="2600" dirty="0"/>
-          </a:p>
-        </p:txBody>
-      </p:sp>
-      <p:sp>
-        <p:nvSpPr>
-          <p:cNvPr id="12" name="Text 10"/>
-          <p:cNvSpPr txBox="1"/>
-          <p:nvPr/>
-        </p:nvSpPr>
-        <p:spPr>
-          <a:xfrm>
-            <a:off x="5669280" y="2743200"/>
-            <a:ext cx="1463040" cy="1005840"/>
-          </a:xfrm>
-          <a:prstGeom prst="rect">
-            <a:avLst/>
-          </a:prstGeom>
-          <a:noFill/>
-          <a:ln/>
-        </p:spPr>
-        <p:txBody>
-          <a:bodyPr wrap="square" lIns="0" tIns="0" rIns="0" bIns="0" rtlCol="0" anchor="ctr"/>
-          <a:lstStyle/>
-          <a:p>
-            <a:pPr algn="ctr" indent="0" marL="0">
-              <a:buNone/>
-            </a:pPr>
-            <a:r>
-              <a:rPr lang="en-US" sz="3600" b="1" dirty="0">
-                <a:solidFill>
-                  <a:srgbClr val="9CA3AF"/>
-                </a:solidFill>
-              </a:rPr>
-              <a:t>÷ 3  =</a:t>
-            </a:r>
-            <a:endParaRPr lang="en-US" sz="3600" dirty="0"/>
-          </a:p>
-        </p:txBody>
-      </p:sp>
-      <p:sp>
-        <p:nvSpPr>
-          <p:cNvPr id="13" name="Shape 11"/>
-          <p:cNvSpPr/>
-          <p:nvPr/>
-        </p:nvSpPr>
-        <p:spPr>
-          <a:xfrm>
-            <a:off x="7315200" y="2560320"/>
-            <a:ext cx="1371600" cy="1371600"/>
-          </a:xfrm>
-          <a:prstGeom prst="ellipse">
-            <a:avLst/>
+          <p:cNvPr id="6" name="Shape 4"/>
+          <p:cNvSpPr/>
+          <p:nvPr/>
+        </p:nvSpPr>
+        <p:spPr>
+          <a:xfrm>
+            <a:off x="1554480" y="4206240"/>
+            <a:ext cx="6336792" cy="502920"/>
+          </a:xfrm>
+          <a:prstGeom prst="roundRect">
+            <a:avLst>
+              <a:gd name="adj" fmla="val 18182"/>
+            </a:avLst>
           </a:prstGeom>
           <a:solidFill>
             <a:srgbClr val="C2410C"/>
@@ -3229,14 +3197,14 @@
       </p:sp>
       <p:sp>
         <p:nvSpPr>
-          <p:cNvPr id="14" name="Text 12"/>
+          <p:cNvPr id="7" name="Text 5"/>
           <p:cNvSpPr txBox="1"/>
           <p:nvPr/>
         </p:nvSpPr>
         <p:spPr>
           <a:xfrm>
-            <a:off x="7315200" y="2560320"/>
-            <a:ext cx="1371600" cy="1371600"/>
+            <a:off x="1554480" y="4800600"/>
+            <a:ext cx="3657600" cy="320040"/>
           </a:xfrm>
           <a:prstGeom prst="rect">
             <a:avLst/>
@@ -3248,24 +3216,60 @@
           <a:bodyPr wrap="square" lIns="0" tIns="0" rIns="0" bIns="0" rtlCol="0" anchor="ctr"/>
           <a:lstStyle/>
           <a:p>
-            <a:pPr algn="ctr" indent="0" marL="0">
-              <a:buNone/>
-            </a:pPr>
-            <a:r>
-              <a:rPr lang="en-US" sz="4800" dirty="0">
-                <a:solidFill>
-                  <a:srgbClr val="FFFFFF"/>
-                </a:solidFill>
-              </a:rPr>
-              <a:t>★</a:t>
-            </a:r>
-            <a:endParaRPr lang="en-US" sz="4800" dirty="0"/>
-          </a:p>
-        </p:txBody>
-      </p:sp>
-      <p:sp>
-        <p:nvSpPr>
-          <p:cNvPr id="15" name="Text 0"/>
+            <a:pPr indent="0" marL="0">
+              <a:buNone/>
+            </a:pPr>
+            <a:r>
+              <a:rPr lang="en-US" sz="1400" b="1" dirty="0">
+                <a:solidFill>
+                  <a:srgbClr val="6B7280"/>
+                </a:solidFill>
+              </a:rPr>
+              <a:t>what it learned in English</a:t>
+            </a:r>
+            <a:endParaRPr lang="en-US" sz="1400" dirty="0"/>
+          </a:p>
+        </p:txBody>
+      </p:sp>
+      <p:sp>
+        <p:nvSpPr>
+          <p:cNvPr id="8" name="Text 6"/>
+          <p:cNvSpPr txBox="1"/>
+          <p:nvPr/>
+        </p:nvSpPr>
+        <p:spPr>
+          <a:xfrm>
+            <a:off x="6949440" y="4800600"/>
+            <a:ext cx="3657600" cy="320040"/>
+          </a:xfrm>
+          <a:prstGeom prst="rect">
+            <a:avLst/>
+          </a:prstGeom>
+          <a:noFill/>
+          <a:ln/>
+        </p:spPr>
+        <p:txBody>
+          <a:bodyPr wrap="square" lIns="0" tIns="0" rIns="0" bIns="0" rtlCol="0" anchor="ctr"/>
+          <a:lstStyle/>
+          <a:p>
+            <a:pPr algn="r" indent="0" marL="0">
+              <a:buNone/>
+            </a:pPr>
+            <a:r>
+              <a:rPr lang="en-US" sz="1400" b="1" dirty="0">
+                <a:solidFill>
+                  <a:srgbClr val="6B7280"/>
+                </a:solidFill>
+              </a:rPr>
+              <a:t>100% = as good as asking in English</a:t>
+            </a:r>
+            <a:endParaRPr lang="en-US" sz="1400" dirty="0"/>
+          </a:p>
+        </p:txBody>
+      </p:sp>
+      <p:sp>
+        <p:nvSpPr>
+          <p:cNvPr id="9" name="Text 0"/>
           <p:cNvSpPr/>
           <p:nvPr>
             <p:ph idx="102" type="body" hasCustomPrompt="1"/>
@@ -3295,7 +3299,7 @@
                   <a:schemeClr val="tx1"/>
                 </a:solidFill>
               </a:rPr>
-              <a:t>Yes: train three, average the weights. </a:t>
+              <a:t>About 70% of what it learned in English, it can answer in German or French. </a:t>
             </a:r>
             <a:pPr indent="0" marL="0">
               <a:buNone/>
@@ -3306,7 +3310,7 @@
                   <a:srgbClr val="6B7280"/>
                 </a:solidFill>
               </a:rPr>
-              <a:t>All the facts, none of the damage, no training.</a:t>
+              <a:t>Asking in the language it read is still a bit better.</a:t>
             </a:r>
             <a:endParaRPr lang="en-US" sz="1800" dirty="0"/>
           </a:p>
@@ -3414,7 +3418,7 @@
                   <a:schemeClr val="accent1"/>
                 </a:solidFill>
               </a:rPr>
-              <a:t>WAY 2 · QUESTION 8 · WORK IN PROGRESS</a:t>
+              <a:t>WAY 2 · THE CATCH</a:t>
             </a:r>
             <a:endParaRPr lang="en-US" sz="1200" dirty="0"/>
           </a:p>
@@ -3452,7 +3456,7 @@
                   <a:schemeClr val="tx1"/>
                 </a:solidFill>
               </a:rPr>
-              <a:t>Why does averaging work?</a:t>
+              <a:t>But it quietly gets worse at other things.</a:t>
             </a:r>
             <a:endParaRPr lang="en-US" sz="3200" dirty="0"/>
           </a:p>
@@ -3465,115 +3469,21 @@
           <p:nvPr/>
         </p:nvSpPr>
         <p:spPr>
-          <a:xfrm flipV="1">
-            <a:off x="1463040" y="4206240"/>
-            <a:ext cx="3657600" cy="731520"/>
-          </a:xfrm>
-          <a:prstGeom prst="line">
-            <a:avLst/>
-          </a:prstGeom>
-          <a:noFill/>
-          <a:ln w="50800">
+          <a:xfrm>
+            <a:off x="640080" y="2286000"/>
+            <a:ext cx="5212080" cy="3108960"/>
+          </a:xfrm>
+          <a:prstGeom prst="roundRect">
+            <a:avLst>
+              <a:gd name="adj" fmla="val 3529"/>
+            </a:avLst>
+          </a:prstGeom>
+          <a:solidFill>
+            <a:srgbClr val="F9FAFB"/>
+          </a:solidFill>
+          <a:ln w="12700">
             <a:solidFill>
-              <a:srgbClr val="2563EB"/>
-            </a:solidFill>
-            <a:prstDash val="solid"/>
-            <a:tailEnd type="triangle"/>
-          </a:ln>
-        </p:spPr>
-      </p:sp>
-      <p:sp>
-        <p:nvSpPr>
-          <p:cNvPr id="5" name="Shape 3"/>
-          <p:cNvSpPr/>
-          <p:nvPr/>
-        </p:nvSpPr>
-        <p:spPr>
-          <a:xfrm flipV="1">
-            <a:off x="1463040" y="2194560"/>
-            <a:ext cx="1188720" cy="2743200"/>
-          </a:xfrm>
-          <a:prstGeom prst="line">
-            <a:avLst/>
-          </a:prstGeom>
-          <a:noFill/>
-          <a:ln w="50800">
-            <a:solidFill>
-              <a:srgbClr val="D97706"/>
-            </a:solidFill>
-            <a:prstDash val="solid"/>
-            <a:tailEnd type="triangle"/>
-          </a:ln>
-        </p:spPr>
-      </p:sp>
-      <p:sp>
-        <p:nvSpPr>
-          <p:cNvPr id="6" name="Shape 4"/>
-          <p:cNvSpPr/>
-          <p:nvPr/>
-        </p:nvSpPr>
-        <p:spPr>
-          <a:xfrm flipV="1">
-            <a:off x="1463040" y="2286000"/>
-            <a:ext cx="3017520" cy="2651760"/>
-          </a:xfrm>
-          <a:prstGeom prst="line">
-            <a:avLst/>
-          </a:prstGeom>
-          <a:noFill/>
-          <a:ln w="50800">
-            <a:solidFill>
-              <a:srgbClr val="7C3AED"/>
-            </a:solidFill>
-            <a:prstDash val="solid"/>
-            <a:tailEnd type="triangle"/>
-          </a:ln>
-        </p:spPr>
-      </p:sp>
-      <p:sp>
-        <p:nvSpPr>
-          <p:cNvPr id="7" name="Shape 5"/>
-          <p:cNvSpPr/>
-          <p:nvPr/>
-        </p:nvSpPr>
-        <p:spPr>
-          <a:xfrm flipV="1">
-            <a:off x="1463040" y="3657600"/>
-            <a:ext cx="2194560" cy="1280160"/>
-          </a:xfrm>
-          <a:prstGeom prst="line">
-            <a:avLst/>
-          </a:prstGeom>
-          <a:noFill/>
-          <a:ln w="88900">
-            <a:solidFill>
-              <a:srgbClr val="C2410C"/>
-            </a:solidFill>
-            <a:prstDash val="solid"/>
-            <a:tailEnd type="triangle"/>
-          </a:ln>
-        </p:spPr>
-      </p:sp>
-      <p:sp>
-        <p:nvSpPr>
-          <p:cNvPr id="8" name="Shape 6"/>
-          <p:cNvSpPr/>
-          <p:nvPr/>
-        </p:nvSpPr>
-        <p:spPr>
-          <a:xfrm>
-            <a:off x="1325880" y="4800600"/>
-            <a:ext cx="274320" cy="274320"/>
-          </a:xfrm>
-          <a:prstGeom prst="ellipse">
-            <a:avLst/>
-          </a:prstGeom>
-          <a:solidFill>
-            <a:srgbClr val="FFFFFF"/>
-          </a:solidFill>
-          <a:ln w="38100">
-            <a:solidFill>
-              <a:srgbClr val="111827"/>
+              <a:srgbClr val="E5E7EB"/>
             </a:solidFill>
             <a:prstDash val="solid"/>
           </a:ln>
@@ -3581,14 +3491,152 @@
       </p:sp>
       <p:sp>
         <p:nvSpPr>
+          <p:cNvPr id="5" name="Text 3"/>
+          <p:cNvSpPr txBox="1"/>
+          <p:nvPr/>
+        </p:nvSpPr>
+        <p:spPr>
+          <a:xfrm>
+            <a:off x="640080" y="2514600"/>
+            <a:ext cx="5212080" cy="320040"/>
+          </a:xfrm>
+          <a:prstGeom prst="rect">
+            <a:avLst/>
+          </a:prstGeom>
+          <a:noFill/>
+          <a:ln/>
+        </p:spPr>
+        <p:txBody>
+          <a:bodyPr wrap="square" lIns="0" tIns="0" rIns="0" bIns="0" rtlCol="0" anchor="ctr"/>
+          <a:lstStyle/>
+          <a:p>
+            <a:pPr algn="ctr" indent="0" marL="0">
+              <a:buNone/>
+            </a:pPr>
+            <a:r>
+              <a:rPr lang="en-US" sz="1200" b="1" spc="200" kern="0" dirty="0">
+                <a:solidFill>
+                  <a:srgbClr val="6B7280"/>
+                </a:solidFill>
+              </a:rPr>
+              <a:t>FACTS FROM BEFORE 2023</a:t>
+            </a:r>
+            <a:endParaRPr lang="en-US" sz="1200" dirty="0"/>
+          </a:p>
+        </p:txBody>
+      </p:sp>
+      <p:sp>
+        <p:nvSpPr>
+          <p:cNvPr id="6" name="Text 4"/>
+          <p:cNvSpPr txBox="1"/>
+          <p:nvPr/>
+        </p:nvSpPr>
+        <p:spPr>
+          <a:xfrm>
+            <a:off x="640080" y="2926080"/>
+            <a:ext cx="5212080" cy="1463040"/>
+          </a:xfrm>
+          <a:prstGeom prst="rect">
+            <a:avLst/>
+          </a:prstGeom>
+          <a:noFill/>
+          <a:ln/>
+        </p:spPr>
+        <p:txBody>
+          <a:bodyPr wrap="square" lIns="0" tIns="0" rIns="0" bIns="0" rtlCol="0" anchor="ctr"/>
+          <a:lstStyle/>
+          <a:p>
+            <a:pPr algn="ctr" indent="0" marL="0">
+              <a:buNone/>
+            </a:pPr>
+            <a:r>
+              <a:rPr lang="en-US" sz="8400" b="1" dirty="0">
+                <a:solidFill>
+                  <a:srgbClr val="111827"/>
+                </a:solidFill>
+                <a:latin typeface="Cambria" pitchFamily="34" charset="0"/>
+                <a:ea typeface="Cambria" pitchFamily="34" charset="-122"/>
+                <a:cs typeface="Cambria" pitchFamily="34" charset="-120"/>
+              </a:rPr>
+              <a:t>+0.3</a:t>
+            </a:r>
+            <a:endParaRPr lang="en-US" sz="8400" dirty="0"/>
+          </a:p>
+        </p:txBody>
+      </p:sp>
+      <p:sp>
+        <p:nvSpPr>
+          <p:cNvPr id="7" name="Text 5"/>
+          <p:cNvSpPr txBox="1"/>
+          <p:nvPr/>
+        </p:nvSpPr>
+        <p:spPr>
+          <a:xfrm>
+            <a:off x="640080" y="4572000"/>
+            <a:ext cx="5212080" cy="365760"/>
+          </a:xfrm>
+          <a:prstGeom prst="rect">
+            <a:avLst/>
+          </a:prstGeom>
+          <a:noFill/>
+          <a:ln/>
+        </p:spPr>
+        <p:txBody>
+          <a:bodyPr wrap="square" lIns="0" tIns="0" rIns="0" bIns="0" rtlCol="0" anchor="ctr"/>
+          <a:lstStyle/>
+          <a:p>
+            <a:pPr algn="ctr" indent="0" marL="0">
+              <a:buNone/>
+            </a:pPr>
+            <a:r>
+              <a:rPr lang="en-US" sz="1600" dirty="0">
+                <a:solidFill>
+                  <a:srgbClr val="374151"/>
+                </a:solidFill>
+              </a:rPr>
+              <a:t>nothing forgotten</a:t>
+            </a:r>
+            <a:endParaRPr lang="en-US" sz="1600" dirty="0"/>
+          </a:p>
+        </p:txBody>
+      </p:sp>
+      <p:sp>
+        <p:nvSpPr>
+          <p:cNvPr id="8" name="Shape 6"/>
+          <p:cNvSpPr/>
+          <p:nvPr/>
+        </p:nvSpPr>
+        <p:spPr>
+          <a:xfrm>
+            <a:off x="6355080" y="2286000"/>
+            <a:ext cx="5212080" cy="3108960"/>
+          </a:xfrm>
+          <a:prstGeom prst="roundRect">
+            <a:avLst>
+              <a:gd name="adj" fmla="val 3529"/>
+            </a:avLst>
+          </a:prstGeom>
+          <a:solidFill>
+            <a:srgbClr val="FFF7ED"/>
+          </a:solidFill>
+          <a:ln w="12700">
+            <a:solidFill>
+              <a:srgbClr val="FDBA74"/>
+            </a:solidFill>
+            <a:prstDash val="solid"/>
+          </a:ln>
+        </p:spPr>
+      </p:sp>
+      <p:sp>
+        <p:nvSpPr>
           <p:cNvPr id="9" name="Text 7"/>
           <p:cNvSpPr txBox="1"/>
           <p:nvPr/>
         </p:nvSpPr>
         <p:spPr>
           <a:xfrm>
-            <a:off x="640080" y="5120640"/>
-            <a:ext cx="1645920" cy="320040"/>
+            <a:off x="6355080" y="2514600"/>
+            <a:ext cx="5212080" cy="320040"/>
           </a:xfrm>
           <a:prstGeom prst="rect">
             <a:avLst/>
@@ -3604,14 +3652,14 @@
               <a:buNone/>
             </a:pPr>
             <a:r>
-              <a:rPr lang="en-US" sz="1400" b="1" dirty="0">
-                <a:solidFill>
-                  <a:srgbClr val="111827"/>
-                </a:solidFill>
-              </a:rPr>
-              <a:t>base model</a:t>
-            </a:r>
-            <a:endParaRPr lang="en-US" sz="1400" dirty="0"/>
+              <a:rPr lang="en-US" sz="1200" b="1" spc="200" kern="0" dirty="0">
+                <a:solidFill>
+                  <a:srgbClr val="C2410C"/>
+                </a:solidFill>
+              </a:rPr>
+              <a:t>GENERAL SKILLS · 20 TESTS</a:t>
+            </a:r>
+            <a:endParaRPr lang="en-US" sz="1200" dirty="0"/>
           </a:p>
         </p:txBody>
       </p:sp>
@@ -3623,8 +3671,8 @@
         </p:nvSpPr>
         <p:spPr>
           <a:xfrm>
-            <a:off x="5212080" y="4023360"/>
-            <a:ext cx="548640" cy="320040"/>
+            <a:off x="6355080" y="2926080"/>
+            <a:ext cx="5212080" cy="1463040"/>
           </a:xfrm>
           <a:prstGeom prst="rect">
             <a:avLst/>
@@ -3636,18 +3684,21 @@
           <a:bodyPr wrap="square" lIns="0" tIns="0" rIns="0" bIns="0" rtlCol="0" anchor="ctr"/>
           <a:lstStyle/>
           <a:p>
-            <a:pPr indent="0" marL="0">
-              <a:buNone/>
-            </a:pPr>
-            <a:r>
-              <a:rPr lang="en-US" sz="1600" b="1" dirty="0">
-                <a:solidFill>
-                  <a:srgbClr val="2563EB"/>
-                </a:solidFill>
-              </a:rPr>
-              <a:t>EN</a:t>
-            </a:r>
-            <a:endParaRPr lang="en-US" sz="1600" dirty="0"/>
+            <a:pPr algn="ctr" indent="0" marL="0">
+              <a:buNone/>
+            </a:pPr>
+            <a:r>
+              <a:rPr lang="en-US" sz="8400" b="1" dirty="0">
+                <a:solidFill>
+                  <a:srgbClr val="C2410C"/>
+                </a:solidFill>
+                <a:latin typeface="Cambria" pitchFamily="34" charset="0"/>
+                <a:ea typeface="Cambria" pitchFamily="34" charset="-122"/>
+                <a:cs typeface="Cambria" pitchFamily="34" charset="-120"/>
+              </a:rPr>
+              <a:t>−1.2</a:t>
+            </a:r>
+            <a:endParaRPr lang="en-US" sz="8400" dirty="0"/>
           </a:p>
         </p:txBody>
       </p:sp>
@@ -3659,8 +3710,8 @@
         </p:nvSpPr>
         <p:spPr>
           <a:xfrm>
-            <a:off x="2377440" y="1874520"/>
-            <a:ext cx="548640" cy="320040"/>
+            <a:off x="6355080" y="4572000"/>
+            <a:ext cx="5212080" cy="365760"/>
           </a:xfrm>
           <a:prstGeom prst="rect">
             <a:avLst/>
@@ -3672,16 +3723,16 @@
           <a:bodyPr wrap="square" lIns="0" tIns="0" rIns="0" bIns="0" rtlCol="0" anchor="ctr"/>
           <a:lstStyle/>
           <a:p>
-            <a:pPr indent="0" marL="0">
-              <a:buNone/>
-            </a:pPr>
-            <a:r>
-              <a:rPr lang="en-US" sz="1600" b="1" dirty="0">
-                <a:solidFill>
-                  <a:srgbClr val="D97706"/>
-                </a:solidFill>
-              </a:rPr>
-              <a:t>DE</a:t>
+            <a:pPr algn="ctr" indent="0" marL="0">
+              <a:buNone/>
+            </a:pPr>
+            <a:r>
+              <a:rPr lang="en-US" sz="1600" dirty="0">
+                <a:solidFill>
+                  <a:srgbClr val="374151"/>
+                </a:solidFill>
+              </a:rPr>
+              <a:t>looks fine in the training language, drops in the others</a:t>
             </a:r>
             <a:endParaRPr lang="en-US" sz="1600" dirty="0"/>
           </a:p>
@@ -3689,223 +3740,7 @@
       </p:sp>
       <p:sp>
         <p:nvSpPr>
-          <p:cNvPr id="12" name="Text 10"/>
-          <p:cNvSpPr txBox="1"/>
-          <p:nvPr/>
-        </p:nvSpPr>
-        <p:spPr>
-          <a:xfrm>
-            <a:off x="4526280" y="1965960"/>
-            <a:ext cx="548640" cy="320040"/>
-          </a:xfrm>
-          <a:prstGeom prst="rect">
-            <a:avLst/>
-          </a:prstGeom>
-          <a:noFill/>
-          <a:ln/>
-        </p:spPr>
-        <p:txBody>
-          <a:bodyPr wrap="square" lIns="0" tIns="0" rIns="0" bIns="0" rtlCol="0" anchor="ctr"/>
-          <a:lstStyle/>
-          <a:p>
-            <a:pPr indent="0" marL="0">
-              <a:buNone/>
-            </a:pPr>
-            <a:r>
-              <a:rPr lang="en-US" sz="1600" b="1" dirty="0">
-                <a:solidFill>
-                  <a:srgbClr val="7C3AED"/>
-                </a:solidFill>
-              </a:rPr>
-              <a:t>FR</a:t>
-            </a:r>
-            <a:endParaRPr lang="en-US" sz="1600" dirty="0"/>
-          </a:p>
-        </p:txBody>
-      </p:sp>
-      <p:sp>
-        <p:nvSpPr>
-          <p:cNvPr id="13" name="Text 11"/>
-          <p:cNvSpPr txBox="1"/>
-          <p:nvPr/>
-        </p:nvSpPr>
-        <p:spPr>
-          <a:xfrm>
-            <a:off x="3749040" y="3429000"/>
-            <a:ext cx="1463040" cy="320040"/>
-          </a:xfrm>
-          <a:prstGeom prst="rect">
-            <a:avLst/>
-          </a:prstGeom>
-          <a:noFill/>
-          <a:ln/>
-        </p:spPr>
-        <p:txBody>
-          <a:bodyPr wrap="square" lIns="0" tIns="0" rIns="0" bIns="0" rtlCol="0" anchor="ctr"/>
-          <a:lstStyle/>
-          <a:p>
-            <a:pPr indent="0" marL="0">
-              <a:buNone/>
-            </a:pPr>
-            <a:r>
-              <a:rPr lang="en-US" sz="1600" b="1" dirty="0">
-                <a:solidFill>
-                  <a:srgbClr val="C2410C"/>
-                </a:solidFill>
-              </a:rPr>
-              <a:t>average ★</a:t>
-            </a:r>
-            <a:endParaRPr lang="en-US" sz="1600" dirty="0"/>
-          </a:p>
-        </p:txBody>
-      </p:sp>
-      <p:sp>
-        <p:nvSpPr>
-          <p:cNvPr id="14" name="Text 12"/>
-          <p:cNvSpPr txBox="1"/>
-          <p:nvPr/>
-        </p:nvSpPr>
-        <p:spPr>
-          <a:xfrm>
-            <a:off x="6400800" y="2468880"/>
-            <a:ext cx="5120640" cy="548640"/>
-          </a:xfrm>
-          <a:prstGeom prst="rect">
-            <a:avLst/>
-          </a:prstGeom>
-          <a:noFill/>
-          <a:ln/>
-        </p:spPr>
-        <p:txBody>
-          <a:bodyPr wrap="square" lIns="0" tIns="0" rIns="0" bIns="0" rtlCol="0" anchor="ctr"/>
-          <a:lstStyle/>
-          <a:p>
-            <a:pPr indent="0" marL="0">
-              <a:buNone/>
-            </a:pPr>
-            <a:r>
-              <a:rPr lang="en-US" sz="2200" b="1" dirty="0">
-                <a:solidFill>
-                  <a:srgbClr val="111827"/>
-                </a:solidFill>
-              </a:rPr>
-              <a:t>Three updates, three different directions</a:t>
-            </a:r>
-            <a:endParaRPr lang="en-US" sz="2200" dirty="0"/>
-          </a:p>
-        </p:txBody>
-      </p:sp>
-      <p:sp>
-        <p:nvSpPr>
-          <p:cNvPr id="15" name="Text 13"/>
-          <p:cNvSpPr txBox="1"/>
-          <p:nvPr/>
-        </p:nvSpPr>
-        <p:spPr>
-          <a:xfrm>
-            <a:off x="6400800" y="3017520"/>
-            <a:ext cx="5120640" cy="365760"/>
-          </a:xfrm>
-          <a:prstGeom prst="rect">
-            <a:avLst/>
-          </a:prstGeom>
-          <a:noFill/>
-          <a:ln/>
-        </p:spPr>
-        <p:txBody>
-          <a:bodyPr wrap="square" lIns="0" tIns="0" rIns="0" bIns="0" rtlCol="0" anchor="ctr"/>
-          <a:lstStyle/>
-          <a:p>
-            <a:pPr indent="0" marL="0">
-              <a:buNone/>
-            </a:pPr>
-            <a:r>
-              <a:rPr lang="en-US" sz="1500" dirty="0">
-                <a:solidFill>
-                  <a:srgbClr val="6B7280"/>
-                </a:solidFill>
-              </a:rPr>
-              <a:t>averaging keeps what they share, cancels the rest</a:t>
-            </a:r>
-            <a:endParaRPr lang="en-US" sz="1500" dirty="0"/>
-          </a:p>
-        </p:txBody>
-      </p:sp>
-      <p:sp>
-        <p:nvSpPr>
-          <p:cNvPr id="16" name="Text 14"/>
-          <p:cNvSpPr txBox="1"/>
-          <p:nvPr/>
-        </p:nvSpPr>
-        <p:spPr>
-          <a:xfrm>
-            <a:off x="6400800" y="3931920"/>
-            <a:ext cx="5120640" cy="548640"/>
-          </a:xfrm>
-          <a:prstGeom prst="rect">
-            <a:avLst/>
-          </a:prstGeom>
-          <a:noFill/>
-          <a:ln/>
-        </p:spPr>
-        <p:txBody>
-          <a:bodyPr wrap="square" lIns="0" tIns="0" rIns="0" bIns="0" rtlCol="0" anchor="ctr"/>
-          <a:lstStyle/>
-          <a:p>
-            <a:pPr indent="0" marL="0">
-              <a:buNone/>
-            </a:pPr>
-            <a:r>
-              <a:rPr lang="en-US" sz="2200" b="1" dirty="0">
-                <a:solidFill>
-                  <a:srgbClr val="C2410C"/>
-                </a:solidFill>
-              </a:rPr>
-              <a:t>The shared part lives in the MLPs</a:t>
-            </a:r>
-            <a:endParaRPr lang="en-US" sz="2200" dirty="0"/>
-          </a:p>
-        </p:txBody>
-      </p:sp>
-      <p:sp>
-        <p:nvSpPr>
-          <p:cNvPr id="17" name="Text 15"/>
-          <p:cNvSpPr txBox="1"/>
-          <p:nvPr/>
-        </p:nvSpPr>
-        <p:spPr>
-          <a:xfrm>
-            <a:off x="6400800" y="4480560"/>
-            <a:ext cx="5120640" cy="365760"/>
-          </a:xfrm>
-          <a:prstGeom prst="rect">
-            <a:avLst/>
-          </a:prstGeom>
-          <a:noFill/>
-          <a:ln/>
-        </p:spPr>
-        <p:txBody>
-          <a:bodyPr wrap="square" lIns="0" tIns="0" rIns="0" bIns="0" rtlCol="0" anchor="ctr"/>
-          <a:lstStyle/>
-          <a:p>
-            <a:pPr indent="0" marL="0">
-              <a:buNone/>
-            </a:pPr>
-            <a:r>
-              <a:rPr lang="en-US" sz="1500" dirty="0">
-                <a:solidFill>
-                  <a:srgbClr val="6B7280"/>
-                </a:solidFill>
-              </a:rPr>
-              <a:t>the same place steering found in Way 1</a:t>
-            </a:r>
-            <a:endParaRPr lang="en-US" sz="1500" dirty="0"/>
-          </a:p>
-        </p:txBody>
-      </p:sp>
-      <p:sp>
-        <p:nvSpPr>
-          <p:cNvPr id="18" name="Text 0"/>
+          <p:cNvPr id="12" name="Text 0"/>
           <p:cNvSpPr/>
           <p:nvPr>
             <p:ph idx="102" type="body" hasCustomPrompt="1"/>
@@ -3935,7 +3770,7 @@
                   <a:schemeClr val="tx1"/>
                 </a:solidFill>
               </a:rPr>
-              <a:t>New knowledge is a direction. </a:t>
+              <a:t>Old facts stay. General skills slip. </a:t>
             </a:r>
             <a:pPr indent="0" marL="0">
               <a:buNone/>
@@ -3946,7 +3781,7 @@
                   <a:srgbClr val="6B7280"/>
                 </a:solidFill>
               </a:rPr>
-              <a:t>Averaging keeps the shared part.</a:t>
+              <a:t>And you only notice if you test in the other languages.</a:t>
             </a:r>
             <a:endParaRPr lang="en-US" sz="1800" dirty="0"/>
           </a:p>
@@ -4054,7 +3889,7 @@
                   <a:schemeClr val="accent1"/>
                 </a:solidFill>
               </a:rPr>
-              <a:t>WAY 2 · IN ONE PICTURE</a:t>
+              <a:t>WAY 2 · THE TRICK</a:t>
             </a:r>
             <a:endParaRPr lang="en-US" sz="1200" dirty="0"/>
           </a:p>
@@ -4092,50 +3927,367 @@
                   <a:schemeClr val="tx1"/>
                 </a:solidFill>
               </a:rPr>
-              <a:t>Every update learns. </a:t>
-            </a:r>
-            <a:pPr algn="l" indent="0" marL="0">
-              <a:buNone/>
-            </a:pPr>
-            <a:r>
-              <a:rPr lang="en-US" sz="3200" b="1" i="1" dirty="0">
-                <a:solidFill>
-                  <a:srgbClr val="6B7280"/>
-                </a:solidFill>
-              </a:rPr>
-              <a:t>Only the average learns without losing.</a:t>
+              <a:t>Teach three students, then average their brains.</a:t>
             </a:r>
             <a:endParaRPr lang="en-US" sz="3200" dirty="0"/>
           </a:p>
         </p:txBody>
       </p:sp>
-      <p:pic>
-        <p:nvPicPr>
-          <p:cNvPr id="4" name="Image 0" descr="/tmp/claude-0/-home-user-Claude-expo-repo-36501/d3d88de1-f67d-5aa6-8097-3ece5ccf8bcb/scratchpad/build/summary_part2.png">    </p:cNvPr>
-          <p:cNvPicPr>
-            <a:picLocks noChangeAspect="1"/>
-          </p:cNvPicPr>
-          <p:nvPr/>
-        </p:nvPicPr>
-        <p:blipFill>
-          <a:blip r:embed="rId1"/>
-          <a:stretch>
-            <a:fillRect/>
-          </a:stretch>
-        </p:blipFill>
-        <p:spPr>
-          <a:xfrm>
-            <a:off x="2331720" y="1965960"/>
-            <a:ext cx="7498080" cy="3994831"/>
-          </a:xfrm>
-          <a:prstGeom prst="rect">
-            <a:avLst/>
-          </a:prstGeom>
-        </p:spPr>
-      </p:pic>
-      <p:sp>
-        <p:nvSpPr>
-          <p:cNvPr id="5" name="Text 0"/>
+      <p:sp>
+        <p:nvSpPr>
+          <p:cNvPr id="4" name="Shape 2"/>
+          <p:cNvSpPr/>
+          <p:nvPr/>
+        </p:nvSpPr>
+        <p:spPr>
+          <a:xfrm>
+            <a:off x="1280160" y="2743200"/>
+            <a:ext cx="1005840" cy="1005840"/>
+          </a:xfrm>
+          <a:prstGeom prst="ellipse">
+            <a:avLst/>
+          </a:prstGeom>
+          <a:solidFill>
+            <a:srgbClr val="2563EB"/>
+          </a:solidFill>
+          <a:ln w="12700">
+            <a:solidFill>
+              <a:srgbClr val="2563EB"/>
+            </a:solidFill>
+            <a:prstDash val="solid"/>
+          </a:ln>
+        </p:spPr>
+      </p:sp>
+      <p:sp>
+        <p:nvSpPr>
+          <p:cNvPr id="5" name="Text 3"/>
+          <p:cNvSpPr txBox="1"/>
+          <p:nvPr/>
+        </p:nvSpPr>
+        <p:spPr>
+          <a:xfrm>
+            <a:off x="1280160" y="2743200"/>
+            <a:ext cx="1005840" cy="1005840"/>
+          </a:xfrm>
+          <a:prstGeom prst="rect">
+            <a:avLst/>
+          </a:prstGeom>
+          <a:noFill/>
+          <a:ln/>
+        </p:spPr>
+        <p:txBody>
+          <a:bodyPr wrap="square" lIns="0" tIns="0" rIns="0" bIns="0" rtlCol="0" anchor="ctr"/>
+          <a:lstStyle/>
+          <a:p>
+            <a:pPr algn="ctr" indent="0" marL="0">
+              <a:buNone/>
+            </a:pPr>
+            <a:r>
+              <a:rPr lang="en-US" sz="2600" b="1" dirty="0">
+                <a:solidFill>
+                  <a:srgbClr val="FFFFFF"/>
+                </a:solidFill>
+              </a:rPr>
+              <a:t>EN</a:t>
+            </a:r>
+            <a:endParaRPr lang="en-US" sz="2600" dirty="0"/>
+          </a:p>
+        </p:txBody>
+      </p:sp>
+      <p:sp>
+        <p:nvSpPr>
+          <p:cNvPr id="6" name="Text 4"/>
+          <p:cNvSpPr txBox="1"/>
+          <p:nvPr/>
+        </p:nvSpPr>
+        <p:spPr>
+          <a:xfrm>
+            <a:off x="2377440" y="2743200"/>
+            <a:ext cx="457200" cy="1005840"/>
+          </a:xfrm>
+          <a:prstGeom prst="rect">
+            <a:avLst/>
+          </a:prstGeom>
+          <a:noFill/>
+          <a:ln/>
+        </p:spPr>
+        <p:txBody>
+          <a:bodyPr wrap="square" lIns="0" tIns="0" rIns="0" bIns="0" rtlCol="0" anchor="ctr"/>
+          <a:lstStyle/>
+          <a:p>
+            <a:pPr algn="ctr" indent="0" marL="0">
+              <a:buNone/>
+            </a:pPr>
+            <a:r>
+              <a:rPr lang="en-US" sz="3600" b="1" dirty="0">
+                <a:solidFill>
+                  <a:srgbClr val="9CA3AF"/>
+                </a:solidFill>
+              </a:rPr>
+              <a:t>+</a:t>
+            </a:r>
+            <a:endParaRPr lang="en-US" sz="3600" dirty="0"/>
+          </a:p>
+        </p:txBody>
+      </p:sp>
+      <p:sp>
+        <p:nvSpPr>
+          <p:cNvPr id="7" name="Shape 5"/>
+          <p:cNvSpPr/>
+          <p:nvPr/>
+        </p:nvSpPr>
+        <p:spPr>
+          <a:xfrm>
+            <a:off x="2926080" y="2743200"/>
+            <a:ext cx="1005840" cy="1005840"/>
+          </a:xfrm>
+          <a:prstGeom prst="ellipse">
+            <a:avLst/>
+          </a:prstGeom>
+          <a:solidFill>
+            <a:srgbClr val="D97706"/>
+          </a:solidFill>
+          <a:ln w="12700">
+            <a:solidFill>
+              <a:srgbClr val="D97706"/>
+            </a:solidFill>
+            <a:prstDash val="solid"/>
+          </a:ln>
+        </p:spPr>
+      </p:sp>
+      <p:sp>
+        <p:nvSpPr>
+          <p:cNvPr id="8" name="Text 6"/>
+          <p:cNvSpPr txBox="1"/>
+          <p:nvPr/>
+        </p:nvSpPr>
+        <p:spPr>
+          <a:xfrm>
+            <a:off x="2926080" y="2743200"/>
+            <a:ext cx="1005840" cy="1005840"/>
+          </a:xfrm>
+          <a:prstGeom prst="rect">
+            <a:avLst/>
+          </a:prstGeom>
+          <a:noFill/>
+          <a:ln/>
+        </p:spPr>
+        <p:txBody>
+          <a:bodyPr wrap="square" lIns="0" tIns="0" rIns="0" bIns="0" rtlCol="0" anchor="ctr"/>
+          <a:lstStyle/>
+          <a:p>
+            <a:pPr algn="ctr" indent="0" marL="0">
+              <a:buNone/>
+            </a:pPr>
+            <a:r>
+              <a:rPr lang="en-US" sz="2600" b="1" dirty="0">
+                <a:solidFill>
+                  <a:srgbClr val="FFFFFF"/>
+                </a:solidFill>
+              </a:rPr>
+              <a:t>DE</a:t>
+            </a:r>
+            <a:endParaRPr lang="en-US" sz="2600" dirty="0"/>
+          </a:p>
+        </p:txBody>
+      </p:sp>
+      <p:sp>
+        <p:nvSpPr>
+          <p:cNvPr id="9" name="Text 7"/>
+          <p:cNvSpPr txBox="1"/>
+          <p:nvPr/>
+        </p:nvSpPr>
+        <p:spPr>
+          <a:xfrm>
+            <a:off x="4023360" y="2743200"/>
+            <a:ext cx="457200" cy="1005840"/>
+          </a:xfrm>
+          <a:prstGeom prst="rect">
+            <a:avLst/>
+          </a:prstGeom>
+          <a:noFill/>
+          <a:ln/>
+        </p:spPr>
+        <p:txBody>
+          <a:bodyPr wrap="square" lIns="0" tIns="0" rIns="0" bIns="0" rtlCol="0" anchor="ctr"/>
+          <a:lstStyle/>
+          <a:p>
+            <a:pPr algn="ctr" indent="0" marL="0">
+              <a:buNone/>
+            </a:pPr>
+            <a:r>
+              <a:rPr lang="en-US" sz="3600" b="1" dirty="0">
+                <a:solidFill>
+                  <a:srgbClr val="9CA3AF"/>
+                </a:solidFill>
+              </a:rPr>
+              <a:t>+</a:t>
+            </a:r>
+            <a:endParaRPr lang="en-US" sz="3600" dirty="0"/>
+          </a:p>
+        </p:txBody>
+      </p:sp>
+      <p:sp>
+        <p:nvSpPr>
+          <p:cNvPr id="10" name="Shape 8"/>
+          <p:cNvSpPr/>
+          <p:nvPr/>
+        </p:nvSpPr>
+        <p:spPr>
+          <a:xfrm>
+            <a:off x="4572000" y="2743200"/>
+            <a:ext cx="1005840" cy="1005840"/>
+          </a:xfrm>
+          <a:prstGeom prst="ellipse">
+            <a:avLst/>
+          </a:prstGeom>
+          <a:solidFill>
+            <a:srgbClr val="7C3AED"/>
+          </a:solidFill>
+          <a:ln w="12700">
+            <a:solidFill>
+              <a:srgbClr val="7C3AED"/>
+            </a:solidFill>
+            <a:prstDash val="solid"/>
+          </a:ln>
+        </p:spPr>
+      </p:sp>
+      <p:sp>
+        <p:nvSpPr>
+          <p:cNvPr id="11" name="Text 9"/>
+          <p:cNvSpPr txBox="1"/>
+          <p:nvPr/>
+        </p:nvSpPr>
+        <p:spPr>
+          <a:xfrm>
+            <a:off x="4572000" y="2743200"/>
+            <a:ext cx="1005840" cy="1005840"/>
+          </a:xfrm>
+          <a:prstGeom prst="rect">
+            <a:avLst/>
+          </a:prstGeom>
+          <a:noFill/>
+          <a:ln/>
+        </p:spPr>
+        <p:txBody>
+          <a:bodyPr wrap="square" lIns="0" tIns="0" rIns="0" bIns="0" rtlCol="0" anchor="ctr"/>
+          <a:lstStyle/>
+          <a:p>
+            <a:pPr algn="ctr" indent="0" marL="0">
+              <a:buNone/>
+            </a:pPr>
+            <a:r>
+              <a:rPr lang="en-US" sz="2600" b="1" dirty="0">
+                <a:solidFill>
+                  <a:srgbClr val="FFFFFF"/>
+                </a:solidFill>
+              </a:rPr>
+              <a:t>FR</a:t>
+            </a:r>
+            <a:endParaRPr lang="en-US" sz="2600" dirty="0"/>
+          </a:p>
+        </p:txBody>
+      </p:sp>
+      <p:sp>
+        <p:nvSpPr>
+          <p:cNvPr id="12" name="Text 10"/>
+          <p:cNvSpPr txBox="1"/>
+          <p:nvPr/>
+        </p:nvSpPr>
+        <p:spPr>
+          <a:xfrm>
+            <a:off x="5669280" y="2743200"/>
+            <a:ext cx="1463040" cy="1005840"/>
+          </a:xfrm>
+          <a:prstGeom prst="rect">
+            <a:avLst/>
+          </a:prstGeom>
+          <a:noFill/>
+          <a:ln/>
+        </p:spPr>
+        <p:txBody>
+          <a:bodyPr wrap="square" lIns="0" tIns="0" rIns="0" bIns="0" rtlCol="0" anchor="ctr"/>
+          <a:lstStyle/>
+          <a:p>
+            <a:pPr algn="ctr" indent="0" marL="0">
+              <a:buNone/>
+            </a:pPr>
+            <a:r>
+              <a:rPr lang="en-US" sz="3600" b="1" dirty="0">
+                <a:solidFill>
+                  <a:srgbClr val="9CA3AF"/>
+                </a:solidFill>
+              </a:rPr>
+              <a:t>÷ 3  =</a:t>
+            </a:r>
+            <a:endParaRPr lang="en-US" sz="3600" dirty="0"/>
+          </a:p>
+        </p:txBody>
+      </p:sp>
+      <p:sp>
+        <p:nvSpPr>
+          <p:cNvPr id="13" name="Shape 11"/>
+          <p:cNvSpPr/>
+          <p:nvPr/>
+        </p:nvSpPr>
+        <p:spPr>
+          <a:xfrm>
+            <a:off x="7315200" y="2560320"/>
+            <a:ext cx="1371600" cy="1371600"/>
+          </a:xfrm>
+          <a:prstGeom prst="ellipse">
+            <a:avLst/>
+          </a:prstGeom>
+          <a:solidFill>
+            <a:srgbClr val="C2410C"/>
+          </a:solidFill>
+          <a:ln w="12700">
+            <a:solidFill>
+              <a:srgbClr val="C2410C"/>
+            </a:solidFill>
+            <a:prstDash val="solid"/>
+          </a:ln>
+        </p:spPr>
+      </p:sp>
+      <p:sp>
+        <p:nvSpPr>
+          <p:cNvPr id="14" name="Text 12"/>
+          <p:cNvSpPr txBox="1"/>
+          <p:nvPr/>
+        </p:nvSpPr>
+        <p:spPr>
+          <a:xfrm>
+            <a:off x="7315200" y="2560320"/>
+            <a:ext cx="1371600" cy="1371600"/>
+          </a:xfrm>
+          <a:prstGeom prst="rect">
+            <a:avLst/>
+          </a:prstGeom>
+          <a:noFill/>
+          <a:ln/>
+        </p:spPr>
+        <p:txBody>
+          <a:bodyPr wrap="square" lIns="0" tIns="0" rIns="0" bIns="0" rtlCol="0" anchor="ctr"/>
+          <a:lstStyle/>
+          <a:p>
+            <a:pPr algn="ctr" indent="0" marL="0">
+              <a:buNone/>
+            </a:pPr>
+            <a:r>
+              <a:rPr lang="en-US" sz="4800" dirty="0">
+                <a:solidFill>
+                  <a:srgbClr val="FFFFFF"/>
+                </a:solidFill>
+              </a:rPr>
+              <a:t>★</a:t>
+            </a:r>
+            <a:endParaRPr lang="en-US" sz="4800" dirty="0"/>
+          </a:p>
+        </p:txBody>
+      </p:sp>
+      <p:sp>
+        <p:nvSpPr>
+          <p:cNvPr id="15" name="Text 0"/>
           <p:cNvSpPr/>
           <p:nvPr>
             <p:ph idx="102" type="body" hasCustomPrompt="1"/>
@@ -4165,7 +4317,7 @@
                   <a:schemeClr val="tx1"/>
                 </a:solidFill>
               </a:rPr>
-              <a:t>Right = more new facts. Up = nothing forgotten. </a:t>
+              <a:t>All the new facts, nothing lost, no extra training. </a:t>
             </a:r>
             <a:pPr indent="0" marL="0">
               <a:buNone/>
@@ -4176,7 +4328,7 @@
                   <a:srgbClr val="6B7280"/>
                 </a:solidFill>
               </a:rPr>
-              <a:t>Top right is where we want to be.</a:t>
+              <a:t>Train one model per language, then average the weights.</a:t>
             </a:r>
             <a:endParaRPr lang="en-US" sz="1800" dirty="0"/>
           </a:p>
@@ -4284,6 +4436,887 @@
                   <a:schemeClr val="accent1"/>
                 </a:solidFill>
               </a:rPr>
+              <a:t>WAY 2 · WHY IT WORKS · WORK IN PROGRESS</a:t>
+            </a:r>
+            <a:endParaRPr lang="en-US" sz="1200" dirty="0"/>
+          </a:p>
+        </p:txBody>
+      </p:sp>
+      <p:sp>
+        <p:nvSpPr>
+          <p:cNvPr id="3" name="Text 0"/>
+          <p:cNvSpPr/>
+          <p:nvPr>
+            <p:ph idx="101" type="title" hasCustomPrompt="1"/>
+          </p:nvPr>
+        </p:nvSpPr>
+        <p:spPr>
+          <a:xfrm>
+            <a:off x="640080" y="731520"/>
+            <a:ext cx="10908792" cy="1097280"/>
+          </a:xfrm>
+          <a:prstGeom prst="rect">
+            <a:avLst/>
+          </a:prstGeom>
+          <a:noFill/>
+          <a:ln/>
+        </p:spPr>
+        <p:txBody>
+          <a:bodyPr wrap="square" lIns="0" tIns="0" rIns="0" bIns="0" rtlCol="0" anchor="t"/>
+          <a:lstStyle/>
+          <a:p>
+            <a:pPr algn="l" indent="0" marL="0">
+              <a:buNone/>
+            </a:pPr>
+            <a:r>
+              <a:rPr lang="en-US" sz="3200" b="1" dirty="0">
+                <a:solidFill>
+                  <a:schemeClr val="tx1"/>
+                </a:solidFill>
+              </a:rPr>
+              <a:t>Each language pulls in its own direction. </a:t>
+            </a:r>
+            <a:pPr algn="l" indent="0" marL="0">
+              <a:buNone/>
+            </a:pPr>
+            <a:r>
+              <a:rPr lang="en-US" sz="3200" b="1" i="1" dirty="0">
+                <a:solidFill>
+                  <a:srgbClr val="6B7280"/>
+                </a:solidFill>
+              </a:rPr>
+              <a:t>Averaging keeps what they share.</a:t>
+            </a:r>
+            <a:endParaRPr lang="en-US" sz="3200" dirty="0"/>
+          </a:p>
+        </p:txBody>
+      </p:sp>
+      <p:sp>
+        <p:nvSpPr>
+          <p:cNvPr id="4" name="Shape 2"/>
+          <p:cNvSpPr/>
+          <p:nvPr/>
+        </p:nvSpPr>
+        <p:spPr>
+          <a:xfrm flipV="1">
+            <a:off x="1463040" y="4206240"/>
+            <a:ext cx="3657600" cy="731520"/>
+          </a:xfrm>
+          <a:prstGeom prst="line">
+            <a:avLst/>
+          </a:prstGeom>
+          <a:noFill/>
+          <a:ln w="50800">
+            <a:solidFill>
+              <a:srgbClr val="2563EB"/>
+            </a:solidFill>
+            <a:prstDash val="solid"/>
+            <a:tailEnd type="triangle"/>
+          </a:ln>
+        </p:spPr>
+      </p:sp>
+      <p:sp>
+        <p:nvSpPr>
+          <p:cNvPr id="5" name="Shape 3"/>
+          <p:cNvSpPr/>
+          <p:nvPr/>
+        </p:nvSpPr>
+        <p:spPr>
+          <a:xfrm flipV="1">
+            <a:off x="1463040" y="2194560"/>
+            <a:ext cx="1188720" cy="2743200"/>
+          </a:xfrm>
+          <a:prstGeom prst="line">
+            <a:avLst/>
+          </a:prstGeom>
+          <a:noFill/>
+          <a:ln w="50800">
+            <a:solidFill>
+              <a:srgbClr val="D97706"/>
+            </a:solidFill>
+            <a:prstDash val="solid"/>
+            <a:tailEnd type="triangle"/>
+          </a:ln>
+        </p:spPr>
+      </p:sp>
+      <p:sp>
+        <p:nvSpPr>
+          <p:cNvPr id="6" name="Shape 4"/>
+          <p:cNvSpPr/>
+          <p:nvPr/>
+        </p:nvSpPr>
+        <p:spPr>
+          <a:xfrm flipV="1">
+            <a:off x="1463040" y="2286000"/>
+            <a:ext cx="3017520" cy="2651760"/>
+          </a:xfrm>
+          <a:prstGeom prst="line">
+            <a:avLst/>
+          </a:prstGeom>
+          <a:noFill/>
+          <a:ln w="50800">
+            <a:solidFill>
+              <a:srgbClr val="7C3AED"/>
+            </a:solidFill>
+            <a:prstDash val="solid"/>
+            <a:tailEnd type="triangle"/>
+          </a:ln>
+        </p:spPr>
+      </p:sp>
+      <p:sp>
+        <p:nvSpPr>
+          <p:cNvPr id="7" name="Shape 5"/>
+          <p:cNvSpPr/>
+          <p:nvPr/>
+        </p:nvSpPr>
+        <p:spPr>
+          <a:xfrm flipV="1">
+            <a:off x="1463040" y="3657600"/>
+            <a:ext cx="2194560" cy="1280160"/>
+          </a:xfrm>
+          <a:prstGeom prst="line">
+            <a:avLst/>
+          </a:prstGeom>
+          <a:noFill/>
+          <a:ln w="88900">
+            <a:solidFill>
+              <a:srgbClr val="C2410C"/>
+            </a:solidFill>
+            <a:prstDash val="solid"/>
+            <a:tailEnd type="triangle"/>
+          </a:ln>
+        </p:spPr>
+      </p:sp>
+      <p:sp>
+        <p:nvSpPr>
+          <p:cNvPr id="8" name="Shape 6"/>
+          <p:cNvSpPr/>
+          <p:nvPr/>
+        </p:nvSpPr>
+        <p:spPr>
+          <a:xfrm>
+            <a:off x="1325880" y="4800600"/>
+            <a:ext cx="274320" cy="274320"/>
+          </a:xfrm>
+          <a:prstGeom prst="ellipse">
+            <a:avLst/>
+          </a:prstGeom>
+          <a:solidFill>
+            <a:srgbClr val="FFFFFF"/>
+          </a:solidFill>
+          <a:ln w="38100">
+            <a:solidFill>
+              <a:srgbClr val="111827"/>
+            </a:solidFill>
+            <a:prstDash val="solid"/>
+          </a:ln>
+        </p:spPr>
+      </p:sp>
+      <p:sp>
+        <p:nvSpPr>
+          <p:cNvPr id="9" name="Text 7"/>
+          <p:cNvSpPr txBox="1"/>
+          <p:nvPr/>
+        </p:nvSpPr>
+        <p:spPr>
+          <a:xfrm>
+            <a:off x="640080" y="5120640"/>
+            <a:ext cx="1645920" cy="320040"/>
+          </a:xfrm>
+          <a:prstGeom prst="rect">
+            <a:avLst/>
+          </a:prstGeom>
+          <a:noFill/>
+          <a:ln/>
+        </p:spPr>
+        <p:txBody>
+          <a:bodyPr wrap="square" lIns="0" tIns="0" rIns="0" bIns="0" rtlCol="0" anchor="ctr"/>
+          <a:lstStyle/>
+          <a:p>
+            <a:pPr algn="ctr" indent="0" marL="0">
+              <a:buNone/>
+            </a:pPr>
+            <a:r>
+              <a:rPr lang="en-US" sz="1400" b="1" dirty="0">
+                <a:solidFill>
+                  <a:srgbClr val="111827"/>
+                </a:solidFill>
+              </a:rPr>
+              <a:t>base model</a:t>
+            </a:r>
+            <a:endParaRPr lang="en-US" sz="1400" dirty="0"/>
+          </a:p>
+        </p:txBody>
+      </p:sp>
+      <p:sp>
+        <p:nvSpPr>
+          <p:cNvPr id="10" name="Text 8"/>
+          <p:cNvSpPr txBox="1"/>
+          <p:nvPr/>
+        </p:nvSpPr>
+        <p:spPr>
+          <a:xfrm>
+            <a:off x="5212080" y="4023360"/>
+            <a:ext cx="548640" cy="320040"/>
+          </a:xfrm>
+          <a:prstGeom prst="rect">
+            <a:avLst/>
+          </a:prstGeom>
+          <a:noFill/>
+          <a:ln/>
+        </p:spPr>
+        <p:txBody>
+          <a:bodyPr wrap="square" lIns="0" tIns="0" rIns="0" bIns="0" rtlCol="0" anchor="ctr"/>
+          <a:lstStyle/>
+          <a:p>
+            <a:pPr indent="0" marL="0">
+              <a:buNone/>
+            </a:pPr>
+            <a:r>
+              <a:rPr lang="en-US" sz="1600" b="1" dirty="0">
+                <a:solidFill>
+                  <a:srgbClr val="2563EB"/>
+                </a:solidFill>
+              </a:rPr>
+              <a:t>EN</a:t>
+            </a:r>
+            <a:endParaRPr lang="en-US" sz="1600" dirty="0"/>
+          </a:p>
+        </p:txBody>
+      </p:sp>
+      <p:sp>
+        <p:nvSpPr>
+          <p:cNvPr id="11" name="Text 9"/>
+          <p:cNvSpPr txBox="1"/>
+          <p:nvPr/>
+        </p:nvSpPr>
+        <p:spPr>
+          <a:xfrm>
+            <a:off x="2377440" y="1874520"/>
+            <a:ext cx="548640" cy="320040"/>
+          </a:xfrm>
+          <a:prstGeom prst="rect">
+            <a:avLst/>
+          </a:prstGeom>
+          <a:noFill/>
+          <a:ln/>
+        </p:spPr>
+        <p:txBody>
+          <a:bodyPr wrap="square" lIns="0" tIns="0" rIns="0" bIns="0" rtlCol="0" anchor="ctr"/>
+          <a:lstStyle/>
+          <a:p>
+            <a:pPr indent="0" marL="0">
+              <a:buNone/>
+            </a:pPr>
+            <a:r>
+              <a:rPr lang="en-US" sz="1600" b="1" dirty="0">
+                <a:solidFill>
+                  <a:srgbClr val="D97706"/>
+                </a:solidFill>
+              </a:rPr>
+              <a:t>DE</a:t>
+            </a:r>
+            <a:endParaRPr lang="en-US" sz="1600" dirty="0"/>
+          </a:p>
+        </p:txBody>
+      </p:sp>
+      <p:sp>
+        <p:nvSpPr>
+          <p:cNvPr id="12" name="Text 10"/>
+          <p:cNvSpPr txBox="1"/>
+          <p:nvPr/>
+        </p:nvSpPr>
+        <p:spPr>
+          <a:xfrm>
+            <a:off x="4526280" y="1965960"/>
+            <a:ext cx="548640" cy="320040"/>
+          </a:xfrm>
+          <a:prstGeom prst="rect">
+            <a:avLst/>
+          </a:prstGeom>
+          <a:noFill/>
+          <a:ln/>
+        </p:spPr>
+        <p:txBody>
+          <a:bodyPr wrap="square" lIns="0" tIns="0" rIns="0" bIns="0" rtlCol="0" anchor="ctr"/>
+          <a:lstStyle/>
+          <a:p>
+            <a:pPr indent="0" marL="0">
+              <a:buNone/>
+            </a:pPr>
+            <a:r>
+              <a:rPr lang="en-US" sz="1600" b="1" dirty="0">
+                <a:solidFill>
+                  <a:srgbClr val="7C3AED"/>
+                </a:solidFill>
+              </a:rPr>
+              <a:t>FR</a:t>
+            </a:r>
+            <a:endParaRPr lang="en-US" sz="1600" dirty="0"/>
+          </a:p>
+        </p:txBody>
+      </p:sp>
+      <p:sp>
+        <p:nvSpPr>
+          <p:cNvPr id="13" name="Text 11"/>
+          <p:cNvSpPr txBox="1"/>
+          <p:nvPr/>
+        </p:nvSpPr>
+        <p:spPr>
+          <a:xfrm>
+            <a:off x="3749040" y="3429000"/>
+            <a:ext cx="1463040" cy="320040"/>
+          </a:xfrm>
+          <a:prstGeom prst="rect">
+            <a:avLst/>
+          </a:prstGeom>
+          <a:noFill/>
+          <a:ln/>
+        </p:spPr>
+        <p:txBody>
+          <a:bodyPr wrap="square" lIns="0" tIns="0" rIns="0" bIns="0" rtlCol="0" anchor="ctr"/>
+          <a:lstStyle/>
+          <a:p>
+            <a:pPr indent="0" marL="0">
+              <a:buNone/>
+            </a:pPr>
+            <a:r>
+              <a:rPr lang="en-US" sz="1600" b="1" dirty="0">
+                <a:solidFill>
+                  <a:srgbClr val="C2410C"/>
+                </a:solidFill>
+              </a:rPr>
+              <a:t>average ★</a:t>
+            </a:r>
+            <a:endParaRPr lang="en-US" sz="1600" dirty="0"/>
+          </a:p>
+        </p:txBody>
+      </p:sp>
+      <p:sp>
+        <p:nvSpPr>
+          <p:cNvPr id="14" name="Text 12"/>
+          <p:cNvSpPr txBox="1"/>
+          <p:nvPr/>
+        </p:nvSpPr>
+        <p:spPr>
+          <a:xfrm>
+            <a:off x="6400800" y="2468880"/>
+            <a:ext cx="5120640" cy="548640"/>
+          </a:xfrm>
+          <a:prstGeom prst="rect">
+            <a:avLst/>
+          </a:prstGeom>
+          <a:noFill/>
+          <a:ln/>
+        </p:spPr>
+        <p:txBody>
+          <a:bodyPr wrap="square" lIns="0" tIns="0" rIns="0" bIns="0" rtlCol="0" anchor="ctr"/>
+          <a:lstStyle/>
+          <a:p>
+            <a:pPr indent="0" marL="0">
+              <a:buNone/>
+            </a:pPr>
+            <a:r>
+              <a:rPr lang="en-US" sz="2200" b="1" dirty="0">
+                <a:solidFill>
+                  <a:srgbClr val="111827"/>
+                </a:solidFill>
+              </a:rPr>
+              <a:t>Three updates, three different directions</a:t>
+            </a:r>
+            <a:endParaRPr lang="en-US" sz="2200" dirty="0"/>
+          </a:p>
+        </p:txBody>
+      </p:sp>
+      <p:sp>
+        <p:nvSpPr>
+          <p:cNvPr id="15" name="Text 13"/>
+          <p:cNvSpPr txBox="1"/>
+          <p:nvPr/>
+        </p:nvSpPr>
+        <p:spPr>
+          <a:xfrm>
+            <a:off x="6400800" y="3017520"/>
+            <a:ext cx="5120640" cy="365760"/>
+          </a:xfrm>
+          <a:prstGeom prst="rect">
+            <a:avLst/>
+          </a:prstGeom>
+          <a:noFill/>
+          <a:ln/>
+        </p:spPr>
+        <p:txBody>
+          <a:bodyPr wrap="square" lIns="0" tIns="0" rIns="0" bIns="0" rtlCol="0" anchor="ctr"/>
+          <a:lstStyle/>
+          <a:p>
+            <a:pPr indent="0" marL="0">
+              <a:buNone/>
+            </a:pPr>
+            <a:r>
+              <a:rPr lang="en-US" sz="1500" dirty="0">
+                <a:solidFill>
+                  <a:srgbClr val="6B7280"/>
+                </a:solidFill>
+              </a:rPr>
+              <a:t>averaging keeps what they share, cancels the rest</a:t>
+            </a:r>
+            <a:endParaRPr lang="en-US" sz="1500" dirty="0"/>
+          </a:p>
+        </p:txBody>
+      </p:sp>
+      <p:sp>
+        <p:nvSpPr>
+          <p:cNvPr id="16" name="Text 14"/>
+          <p:cNvSpPr txBox="1"/>
+          <p:nvPr/>
+        </p:nvSpPr>
+        <p:spPr>
+          <a:xfrm>
+            <a:off x="6400800" y="3931920"/>
+            <a:ext cx="5120640" cy="548640"/>
+          </a:xfrm>
+          <a:prstGeom prst="rect">
+            <a:avLst/>
+          </a:prstGeom>
+          <a:noFill/>
+          <a:ln/>
+        </p:spPr>
+        <p:txBody>
+          <a:bodyPr wrap="square" lIns="0" tIns="0" rIns="0" bIns="0" rtlCol="0" anchor="ctr"/>
+          <a:lstStyle/>
+          <a:p>
+            <a:pPr indent="0" marL="0">
+              <a:buNone/>
+            </a:pPr>
+            <a:r>
+              <a:rPr lang="en-US" sz="2200" b="1" dirty="0">
+                <a:solidFill>
+                  <a:srgbClr val="C2410C"/>
+                </a:solidFill>
+              </a:rPr>
+              <a:t>The shared part lives in the MLPs</a:t>
+            </a:r>
+            <a:endParaRPr lang="en-US" sz="2200" dirty="0"/>
+          </a:p>
+        </p:txBody>
+      </p:sp>
+      <p:sp>
+        <p:nvSpPr>
+          <p:cNvPr id="17" name="Text 15"/>
+          <p:cNvSpPr txBox="1"/>
+          <p:nvPr/>
+        </p:nvSpPr>
+        <p:spPr>
+          <a:xfrm>
+            <a:off x="6400800" y="4480560"/>
+            <a:ext cx="5120640" cy="365760"/>
+          </a:xfrm>
+          <a:prstGeom prst="rect">
+            <a:avLst/>
+          </a:prstGeom>
+          <a:noFill/>
+          <a:ln/>
+        </p:spPr>
+        <p:txBody>
+          <a:bodyPr wrap="square" lIns="0" tIns="0" rIns="0" bIns="0" rtlCol="0" anchor="ctr"/>
+          <a:lstStyle/>
+          <a:p>
+            <a:pPr indent="0" marL="0">
+              <a:buNone/>
+            </a:pPr>
+            <a:r>
+              <a:rPr lang="en-US" sz="1500" dirty="0">
+                <a:solidFill>
+                  <a:srgbClr val="6B7280"/>
+                </a:solidFill>
+              </a:rPr>
+              <a:t>the same place steering found in Way 1</a:t>
+            </a:r>
+            <a:endParaRPr lang="en-US" sz="1500" dirty="0"/>
+          </a:p>
+        </p:txBody>
+      </p:sp>
+      <p:sp>
+        <p:nvSpPr>
+          <p:cNvPr id="18" name="Text 0"/>
+          <p:cNvSpPr/>
+          <p:nvPr>
+            <p:ph idx="102" type="body" hasCustomPrompt="1"/>
+          </p:nvPr>
+        </p:nvSpPr>
+        <p:spPr>
+          <a:xfrm>
+            <a:off x="640080" y="5989320"/>
+            <a:ext cx="10908792" cy="548640"/>
+          </a:xfrm>
+          <a:prstGeom prst="rect">
+            <a:avLst/>
+          </a:prstGeom>
+          <a:noFill/>
+          <a:ln/>
+        </p:spPr>
+        <p:txBody>
+          <a:bodyPr wrap="square" lIns="0" tIns="0" rIns="0" bIns="0" rtlCol="0" anchor="ctr"/>
+          <a:lstStyle/>
+          <a:p>
+            <a:pPr indent="0" marL="0">
+              <a:buNone/>
+            </a:pPr>
+            <a:r>
+              <a:rPr lang="en-US" sz="1800" b="1" dirty="0">
+                <a:solidFill>
+                  <a:schemeClr val="tx1"/>
+                </a:solidFill>
+              </a:rPr>
+              <a:t>New knowledge is a direction. </a:t>
+            </a:r>
+            <a:pPr indent="0" marL="0">
+              <a:buNone/>
+            </a:pPr>
+            <a:r>
+              <a:rPr lang="en-US" sz="1800" b="1" i="1" dirty="0">
+                <a:solidFill>
+                  <a:srgbClr val="6B7280"/>
+                </a:solidFill>
+              </a:rPr>
+              <a:t>And it lives in the MLPs, the same place Way 1 found.</a:t>
+            </a:r>
+            <a:endParaRPr lang="en-US" sz="1800" dirty="0"/>
+          </a:p>
+        </p:txBody>
+      </p:sp>
+      <p:sp>
+        <p:nvSpPr>
+          <p:cNvPr id="25" name="Slide Number Placeholder 0"/>
+          <p:cNvSpPr>
+            <a:spLocks noGrp="1"/>
+          </p:cNvSpPr>
+          <p:nvPr>
+            <p:ph type="sldNum" sz="quarter" idx="4294967295"/>
+          </p:nvPr>
+        </p:nvSpPr>
+        <p:spPr>
+          <a:xfrm>
+            <a:off x="11247120" y="6446520"/>
+            <a:ext cx="548640" cy="274320"/>
+          </a:xfrm>
+          <a:prstGeom prst="rect">
+            <a:avLst/>
+          </a:prstGeom>
+          <a:extLst>
+            <a:ext uri="{C572A759-6A51-4108-AA02-DFA0A04FC94B}">
+              <ma14:wrappingTextBoxFlag xmlns:ma14="http://schemas.microsoft.com/office/mac/drawingml/2011/main" val="0"/>
+            </a:ext>
+          </a:extLst>
+        </p:spPr>
+        <p:txBody>
+          <a:bodyPr/>
+          <a:lstStyle>
+            <a:lvl1pPr>
+              <a:defRPr sz="1000">
+                <a:solidFill>
+                  <a:srgbClr val="9CA3AF"/>
+                </a:solidFill>
+              </a:defRPr>
+            </a:lvl1pPr>
+          </a:lstStyle>
+          <a:p>
+            <a:pPr algn="l"/>
+            <a:fld id="{F7021451-1387-4CA6-816F-3879F97B5CBC}" type="slidenum">
+              <a:rPr b="0" lang="en-US"/>
+              <a:t>13</a:t>
+            </a:fld>
+            <a:endParaRPr lang="en-US"/>
+          </a:p>
+        </p:txBody>
+      </p:sp>
+    </p:spTree>
+  </p:cSld>
+  <p:clrMapOvr>
+    <a:masterClrMapping/>
+  </p:clrMapOvr>
+</p:sld>
+</file>
+
+<file path=ppt/slides/slide14.xml><?xml version="1.0" encoding="utf-8"?>
+<p:sld xmlns:a="http://schemas.openxmlformats.org/drawingml/2006/main" xmlns:r="http://schemas.openxmlformats.org/officeDocument/2006/relationships" xmlns:p="http://schemas.openxmlformats.org/presentationml/2006/main">
+  <p:cSld name="Slide 14">
+    <p:spTree>
+      <p:nvGrpSpPr>
+        <p:cNvPr id="1" name=""/>
+        <p:cNvGrpSpPr/>
+        <p:nvPr/>
+      </p:nvGrpSpPr>
+      <p:grpSpPr>
+        <a:xfrm>
+          <a:off x="0" y="0"/>
+          <a:ext cx="0" cy="0"/>
+          <a:chOff x="0" y="0"/>
+          <a:chExt cx="0" cy="0"/>
+        </a:xfrm>
+      </p:grpSpPr>
+      <p:sp>
+        <p:nvSpPr>
+          <p:cNvPr id="2" name="Text 0"/>
+          <p:cNvSpPr/>
+          <p:nvPr>
+            <p:ph idx="100" type="body" hasCustomPrompt="1"/>
+          </p:nvPr>
+        </p:nvSpPr>
+        <p:spPr>
+          <a:xfrm>
+            <a:off x="640080" y="411480"/>
+            <a:ext cx="10908792" cy="320040"/>
+          </a:xfrm>
+          <a:prstGeom prst="rect">
+            <a:avLst/>
+          </a:prstGeom>
+          <a:noFill/>
+          <a:ln/>
+        </p:spPr>
+        <p:txBody>
+          <a:bodyPr wrap="square" lIns="0" tIns="0" rIns="0" bIns="0" rtlCol="0"/>
+          <a:lstStyle/>
+          <a:p>
+            <a:pPr indent="0" marL="0">
+              <a:buNone/>
+            </a:pPr>
+            <a:r>
+              <a:rPr lang="en-US" sz="1200" b="1" spc="300" kern="0" dirty="0">
+                <a:solidFill>
+                  <a:schemeClr val="accent1"/>
+                </a:solidFill>
+              </a:rPr>
+              <a:t>WAY 2 · IN ONE PICTURE</a:t>
+            </a:r>
+            <a:endParaRPr lang="en-US" sz="1200" dirty="0"/>
+          </a:p>
+        </p:txBody>
+      </p:sp>
+      <p:sp>
+        <p:nvSpPr>
+          <p:cNvPr id="3" name="Text 0"/>
+          <p:cNvSpPr/>
+          <p:nvPr>
+            <p:ph idx="101" type="title" hasCustomPrompt="1"/>
+          </p:nvPr>
+        </p:nvSpPr>
+        <p:spPr>
+          <a:xfrm>
+            <a:off x="640080" y="731520"/>
+            <a:ext cx="10908792" cy="1097280"/>
+          </a:xfrm>
+          <a:prstGeom prst="rect">
+            <a:avLst/>
+          </a:prstGeom>
+          <a:noFill/>
+          <a:ln/>
+        </p:spPr>
+        <p:txBody>
+          <a:bodyPr wrap="square" lIns="0" tIns="0" rIns="0" bIns="0" rtlCol="0" anchor="t"/>
+          <a:lstStyle/>
+          <a:p>
+            <a:pPr algn="l" indent="0" marL="0">
+              <a:buNone/>
+            </a:pPr>
+            <a:r>
+              <a:rPr lang="en-US" sz="3200" b="1" dirty="0">
+                <a:solidFill>
+                  <a:schemeClr val="tx1"/>
+                </a:solidFill>
+              </a:rPr>
+              <a:t>Every update learns. </a:t>
+            </a:r>
+            <a:pPr algn="l" indent="0" marL="0">
+              <a:buNone/>
+            </a:pPr>
+            <a:r>
+              <a:rPr lang="en-US" sz="3200" b="1" i="1" dirty="0">
+                <a:solidFill>
+                  <a:srgbClr val="6B7280"/>
+                </a:solidFill>
+              </a:rPr>
+              <a:t>Only the average learns without losing.</a:t>
+            </a:r>
+            <a:endParaRPr lang="en-US" sz="3200" dirty="0"/>
+          </a:p>
+        </p:txBody>
+      </p:sp>
+      <p:pic>
+        <p:nvPicPr>
+          <p:cNvPr id="4" name="Image 0" descr="/tmp/claude-0/-home-user-Claude-expo-repo-36501/d3d88de1-f67d-5aa6-8097-3ece5ccf8bcb/scratchpad/build/summary_part2.png">    </p:cNvPr>
+          <p:cNvPicPr>
+            <a:picLocks noChangeAspect="1"/>
+          </p:cNvPicPr>
+          <p:nvPr/>
+        </p:nvPicPr>
+        <p:blipFill>
+          <a:blip r:embed="rId1"/>
+          <a:stretch>
+            <a:fillRect/>
+          </a:stretch>
+        </p:blipFill>
+        <p:spPr>
+          <a:xfrm>
+            <a:off x="2331720" y="1965960"/>
+            <a:ext cx="7498080" cy="3994831"/>
+          </a:xfrm>
+          <a:prstGeom prst="rect">
+            <a:avLst/>
+          </a:prstGeom>
+        </p:spPr>
+      </p:pic>
+      <p:sp>
+        <p:nvSpPr>
+          <p:cNvPr id="5" name="Text 0"/>
+          <p:cNvSpPr/>
+          <p:nvPr>
+            <p:ph idx="102" type="body" hasCustomPrompt="1"/>
+          </p:nvPr>
+        </p:nvSpPr>
+        <p:spPr>
+          <a:xfrm>
+            <a:off x="640080" y="5989320"/>
+            <a:ext cx="10908792" cy="548640"/>
+          </a:xfrm>
+          <a:prstGeom prst="rect">
+            <a:avLst/>
+          </a:prstGeom>
+          <a:noFill/>
+          <a:ln/>
+        </p:spPr>
+        <p:txBody>
+          <a:bodyPr wrap="square" lIns="0" tIns="0" rIns="0" bIns="0" rtlCol="0" anchor="ctr"/>
+          <a:lstStyle/>
+          <a:p>
+            <a:pPr indent="0" marL="0">
+              <a:buNone/>
+            </a:pPr>
+            <a:r>
+              <a:rPr lang="en-US" sz="1800" b="1" dirty="0">
+                <a:solidFill>
+                  <a:schemeClr val="tx1"/>
+                </a:solidFill>
+              </a:rPr>
+              <a:t>Right = more new facts. Up = nothing forgotten. </a:t>
+            </a:r>
+            <a:pPr indent="0" marL="0">
+              <a:buNone/>
+            </a:pPr>
+            <a:r>
+              <a:rPr lang="en-US" sz="1800" b="1" i="1" dirty="0">
+                <a:solidFill>
+                  <a:srgbClr val="6B7280"/>
+                </a:solidFill>
+              </a:rPr>
+              <a:t>Top right is where we want to be.</a:t>
+            </a:r>
+            <a:endParaRPr lang="en-US" sz="1800" dirty="0"/>
+          </a:p>
+        </p:txBody>
+      </p:sp>
+      <p:sp>
+        <p:nvSpPr>
+          <p:cNvPr id="25" name="Slide Number Placeholder 0"/>
+          <p:cNvSpPr>
+            <a:spLocks noGrp="1"/>
+          </p:cNvSpPr>
+          <p:nvPr>
+            <p:ph type="sldNum" sz="quarter" idx="4294967295"/>
+          </p:nvPr>
+        </p:nvSpPr>
+        <p:spPr>
+          <a:xfrm>
+            <a:off x="11247120" y="6446520"/>
+            <a:ext cx="548640" cy="274320"/>
+          </a:xfrm>
+          <a:prstGeom prst="rect">
+            <a:avLst/>
+          </a:prstGeom>
+          <a:extLst>
+            <a:ext uri="{C572A759-6A51-4108-AA02-DFA0A04FC94B}">
+              <ma14:wrappingTextBoxFlag xmlns:ma14="http://schemas.microsoft.com/office/mac/drawingml/2011/main" val="0"/>
+            </a:ext>
+          </a:extLst>
+        </p:spPr>
+        <p:txBody>
+          <a:bodyPr/>
+          <a:lstStyle>
+            <a:lvl1pPr>
+              <a:defRPr sz="1000">
+                <a:solidFill>
+                  <a:srgbClr val="9CA3AF"/>
+                </a:solidFill>
+              </a:defRPr>
+            </a:lvl1pPr>
+          </a:lstStyle>
+          <a:p>
+            <a:pPr algn="l"/>
+            <a:fld id="{F7021451-1387-4CA6-816F-3879F97B5CBC}" type="slidenum">
+              <a:rPr b="0" lang="en-US"/>
+              <a:t>14</a:t>
+            </a:fld>
+            <a:endParaRPr lang="en-US"/>
+          </a:p>
+        </p:txBody>
+      </p:sp>
+    </p:spTree>
+  </p:cSld>
+  <p:clrMapOvr>
+    <a:masterClrMapping/>
+  </p:clrMapOvr>
+</p:sld>
+</file>
+
+<file path=ppt/slides/slide15.xml><?xml version="1.0" encoding="utf-8"?>
+<p:sld xmlns:a="http://schemas.openxmlformats.org/drawingml/2006/main" xmlns:r="http://schemas.openxmlformats.org/officeDocument/2006/relationships" xmlns:p="http://schemas.openxmlformats.org/presentationml/2006/main">
+  <p:cSld name="Slide 15">
+    <p:spTree>
+      <p:nvGrpSpPr>
+        <p:cNvPr id="1" name=""/>
+        <p:cNvGrpSpPr/>
+        <p:nvPr/>
+      </p:nvGrpSpPr>
+      <p:grpSpPr>
+        <a:xfrm>
+          <a:off x="0" y="0"/>
+          <a:ext cx="0" cy="0"/>
+          <a:chOff x="0" y="0"/>
+          <a:chExt cx="0" cy="0"/>
+        </a:xfrm>
+      </p:grpSpPr>
+      <p:sp>
+        <p:nvSpPr>
+          <p:cNvPr id="2" name="Text 0"/>
+          <p:cNvSpPr/>
+          <p:nvPr>
+            <p:ph idx="100" type="body" hasCustomPrompt="1"/>
+          </p:nvPr>
+        </p:nvSpPr>
+        <p:spPr>
+          <a:xfrm>
+            <a:off x="640080" y="411480"/>
+            <a:ext cx="10908792" cy="320040"/>
+          </a:xfrm>
+          <a:prstGeom prst="rect">
+            <a:avLst/>
+          </a:prstGeom>
+          <a:noFill/>
+          <a:ln/>
+        </p:spPr>
+        <p:txBody>
+          <a:bodyPr wrap="square" lIns="0" tIns="0" rIns="0" bIns="0" rtlCol="0"/>
+          <a:lstStyle/>
+          <a:p>
+            <a:pPr indent="0" marL="0">
+              <a:buNone/>
+            </a:pPr>
+            <a:r>
+              <a:rPr lang="en-US" sz="1200" b="1" spc="300" kern="0" dirty="0">
+                <a:solidFill>
+                  <a:schemeClr val="accent1"/>
+                </a:solidFill>
+              </a:rPr>
               <a:t>THE ANSWERS</a:t>
             </a:r>
             <a:endParaRPr lang="en-US" sz="1200" dirty="0"/>
@@ -4471,7 +5504,7 @@
                   <a:srgbClr val="374151"/>
                 </a:solidFill>
               </a:rPr>
-              <a:t>One vector at the MLP layers. No training, nothing forgotten.</a:t>
+              <a:t>Point at the knowledge and nudge. No training, nothing forgotten.</a:t>
             </a:r>
             <a:endParaRPr lang="en-US" sz="1350" dirty="0"/>
           </a:p>
@@ -4609,7 +5642,7 @@
                   <a:srgbClr val="374151"/>
                 </a:solidFill>
               </a:rPr>
-              <a:t>Train per language, merge the weights. The facts without the price.</a:t>
+              <a:t>Hand it the newspaper per language, then average. The facts without the price.</a:t>
             </a:r>
             <a:endParaRPr lang="en-US" sz="1350" dirty="0"/>
           </a:p>
@@ -4989,7 +6022,7 @@
             <a:pPr algn="l"/>
             <a:fld id="{F7021451-1387-4CA6-816F-3879F97B5CBC}" type="slidenum">
               <a:rPr b="0" lang="en-US"/>
-              <a:t>13</a:t>
+              <a:t>15</a:t>
             </a:fld>
             <a:endParaRPr lang="en-US"/>
           </a:p>
@@ -5052,7 +6085,7 @@
                   <a:schemeClr val="accent1"/>
                 </a:solidFill>
               </a:rPr>
-              <a:t>THE GOAL</a:t>
+              <a:t>THE HOOK</a:t>
             </a:r>
             <a:endParaRPr lang="en-US" sz="1200" dirty="0"/>
           </a:p>
@@ -5090,7 +6123,7 @@
                   <a:schemeClr val="tx1"/>
                 </a:solidFill>
               </a:rPr>
-              <a:t>Keep an AI useful after it's built. </a:t>
+              <a:t>Your AI finished school in 2023. </a:t>
             </a:r>
             <a:pPr algn="l" indent="0" marL="0">
               <a:buNone/>
@@ -5101,78 +6134,15 @@
                   <a:srgbClr val="6B7280"/>
                 </a:solidFill>
               </a:rPr>
-              <a:t>Without rebuilding it.</a:t>
+              <a:t>It hasn't read anything since.</a:t>
             </a:r>
             <a:endParaRPr lang="en-US" sz="3200" dirty="0"/>
-          </a:p>
-        </p:txBody>
-      </p:sp>
-      <p:sp>
-        <p:nvSpPr>
-          <p:cNvPr id="4" name="Shape 2"/>
-          <p:cNvSpPr/>
-          <p:nvPr/>
-        </p:nvSpPr>
-        <p:spPr>
-          <a:xfrm>
-            <a:off x="640080" y="2194560"/>
-            <a:ext cx="5257800" cy="3611880"/>
-          </a:xfrm>
-          <a:prstGeom prst="roundRect">
-            <a:avLst>
-              <a:gd name="adj" fmla="val 3038"/>
-            </a:avLst>
-          </a:prstGeom>
-          <a:solidFill>
-            <a:srgbClr val="F9FAFB"/>
-          </a:solidFill>
-          <a:ln w="12700">
-            <a:solidFill>
-              <a:srgbClr val="E5E7EB"/>
-            </a:solidFill>
-            <a:prstDash val="solid"/>
-          </a:ln>
-        </p:spPr>
-      </p:sp>
-      <p:sp>
-        <p:nvSpPr>
-          <p:cNvPr id="5" name="Text 3"/>
-          <p:cNvSpPr txBox="1"/>
-          <p:nvPr/>
-        </p:nvSpPr>
-        <p:spPr>
-          <a:xfrm>
-            <a:off x="640080" y="2514600"/>
-            <a:ext cx="5257800" cy="274320"/>
-          </a:xfrm>
-          <a:prstGeom prst="rect">
-            <a:avLst/>
-          </a:prstGeom>
-          <a:noFill/>
-          <a:ln/>
-        </p:spPr>
-        <p:txBody>
-          <a:bodyPr wrap="square" lIns="0" tIns="0" rIns="0" bIns="0" rtlCol="0" anchor="ctr"/>
-          <a:lstStyle/>
-          <a:p>
-            <a:pPr algn="ctr" indent="0" marL="0">
-              <a:buNone/>
-            </a:pPr>
-            <a:r>
-              <a:rPr lang="en-US" sz="1200" b="1" spc="300" kern="0" dirty="0">
-                <a:solidFill>
-                  <a:srgbClr val="C2410C"/>
-                </a:solidFill>
-              </a:rPr>
-              <a:t>WAY 1</a:t>
-            </a:r>
-            <a:endParaRPr lang="en-US" sz="1200" dirty="0"/>
           </a:p>
         </p:txBody>
       </p:sp>
       <p:pic>
         <p:nvPicPr>
-          <p:cNvPr id="6" name="Image 0" descr="preencoded.png">    </p:cNvPr>
+          <p:cNvPr id="4" name="Image 0" descr="preencoded.png">    </p:cNvPr>
           <p:cNvPicPr>
             <a:picLocks noChangeAspect="1"/>
           </p:cNvPicPr>
@@ -5186,8 +6156,8 @@
         </p:blipFill>
         <p:spPr>
           <a:xfrm>
-            <a:off x="2720340" y="2926080"/>
-            <a:ext cx="1097280" cy="1097280"/>
+            <a:off x="5577840" y="2148840"/>
+            <a:ext cx="1005840" cy="1005840"/>
           </a:xfrm>
           <a:prstGeom prst="rect">
             <a:avLst/>
@@ -5196,14 +6166,14 @@
       </p:pic>
       <p:sp>
         <p:nvSpPr>
-          <p:cNvPr id="7" name="Text 4"/>
+          <p:cNvPr id="5" name="Text 2"/>
           <p:cNvSpPr txBox="1"/>
           <p:nvPr/>
         </p:nvSpPr>
         <p:spPr>
           <a:xfrm>
-            <a:off x="640080" y="4206240"/>
-            <a:ext cx="5257800" cy="548640"/>
+            <a:off x="4754880" y="3200400"/>
+            <a:ext cx="2651760" cy="411480"/>
           </a:xfrm>
           <a:prstGeom prst="rect">
             <a:avLst/>
@@ -5219,75 +6189,39 @@
               <a:buNone/>
             </a:pPr>
             <a:r>
-              <a:rPr lang="en-US" sz="2600" b="1" dirty="0">
+              <a:rPr lang="en-US" sz="2400" b="1" dirty="0">
                 <a:solidFill>
                   <a:srgbClr val="111827"/>
                 </a:solidFill>
               </a:rPr>
-              <a:t>It already knows it</a:t>
-            </a:r>
-            <a:endParaRPr lang="en-US" sz="2600" dirty="0"/>
-          </a:p>
-        </p:txBody>
-      </p:sp>
-      <p:sp>
-        <p:nvSpPr>
-          <p:cNvPr id="8" name="Text 5"/>
-          <p:cNvSpPr txBox="1"/>
-          <p:nvPr/>
-        </p:nvSpPr>
-        <p:spPr>
-          <a:xfrm>
-            <a:off x="640080" y="4800600"/>
-            <a:ext cx="5257800" cy="365760"/>
-          </a:xfrm>
-          <a:prstGeom prst="rect">
-            <a:avLst/>
-          </a:prstGeom>
-          <a:noFill/>
-          <a:ln/>
-        </p:spPr>
-        <p:txBody>
-          <a:bodyPr wrap="square" lIns="0" tIns="0" rIns="0" bIns="0" rtlCol="0" anchor="ctr"/>
-          <a:lstStyle/>
-          <a:p>
-            <a:pPr algn="ctr" indent="0" marL="0">
-              <a:buNone/>
-            </a:pPr>
-            <a:r>
-              <a:rPr lang="en-US" sz="1600" dirty="0">
-                <a:solidFill>
-                  <a:srgbClr val="6B7280"/>
-                </a:solidFill>
-              </a:rPr>
-              <a:t>3 questions</a:t>
-            </a:r>
-            <a:endParaRPr lang="en-US" sz="1600" dirty="0"/>
-          </a:p>
-        </p:txBody>
-      </p:sp>
-      <p:sp>
-        <p:nvSpPr>
-          <p:cNvPr id="9" name="Shape 6"/>
-          <p:cNvSpPr/>
-          <p:nvPr/>
-        </p:nvSpPr>
-        <p:spPr>
-          <a:xfrm>
-            <a:off x="6263640" y="2194560"/>
-            <a:ext cx="5257800" cy="3611880"/>
+              <a:t>Dec 2023</a:t>
+            </a:r>
+            <a:endParaRPr lang="en-US" sz="2400" dirty="0"/>
+          </a:p>
+        </p:txBody>
+      </p:sp>
+      <p:sp>
+        <p:nvSpPr>
+          <p:cNvPr id="6" name="Shape 3"/>
+          <p:cNvSpPr/>
+          <p:nvPr/>
+        </p:nvSpPr>
+        <p:spPr>
+          <a:xfrm>
+            <a:off x="640080" y="3749040"/>
+            <a:ext cx="5303520" cy="292608"/>
           </a:xfrm>
           <a:prstGeom prst="roundRect">
             <a:avLst>
-              <a:gd name="adj" fmla="val 3038"/>
+              <a:gd name="adj" fmla="val 50000"/>
             </a:avLst>
           </a:prstGeom>
           <a:solidFill>
-            <a:srgbClr val="FFF7ED"/>
+            <a:srgbClr val="111827"/>
           </a:solidFill>
           <a:ln w="12700">
             <a:solidFill>
-              <a:srgbClr val="FDBA74"/>
+              <a:srgbClr val="111827"/>
             </a:solidFill>
             <a:prstDash val="solid"/>
           </a:ln>
@@ -5295,14 +6229,239 @@
       </p:sp>
       <p:sp>
         <p:nvSpPr>
-          <p:cNvPr id="10" name="Text 7"/>
+          <p:cNvPr id="7" name="Shape 4"/>
+          <p:cNvSpPr/>
+          <p:nvPr/>
+        </p:nvSpPr>
+        <p:spPr>
+          <a:xfrm>
+            <a:off x="6172200" y="3749040"/>
+            <a:ext cx="384048" cy="292608"/>
+          </a:xfrm>
+          <a:prstGeom prst="rect">
+            <a:avLst/>
+          </a:prstGeom>
+          <a:solidFill>
+            <a:srgbClr val="C2410C"/>
+          </a:solidFill>
+          <a:ln w="12700">
+            <a:solidFill>
+              <a:srgbClr val="C2410C"/>
+            </a:solidFill>
+            <a:prstDash val="solid"/>
+          </a:ln>
+        </p:spPr>
+      </p:sp>
+      <p:sp>
+        <p:nvSpPr>
+          <p:cNvPr id="8" name="Shape 5"/>
+          <p:cNvSpPr/>
+          <p:nvPr/>
+        </p:nvSpPr>
+        <p:spPr>
+          <a:xfrm>
+            <a:off x="6775704" y="3749040"/>
+            <a:ext cx="384048" cy="292608"/>
+          </a:xfrm>
+          <a:prstGeom prst="rect">
+            <a:avLst/>
+          </a:prstGeom>
+          <a:solidFill>
+            <a:srgbClr val="C2410C"/>
+          </a:solidFill>
+          <a:ln w="12700">
+            <a:solidFill>
+              <a:srgbClr val="C2410C"/>
+            </a:solidFill>
+            <a:prstDash val="solid"/>
+          </a:ln>
+        </p:spPr>
+      </p:sp>
+      <p:sp>
+        <p:nvSpPr>
+          <p:cNvPr id="9" name="Shape 6"/>
+          <p:cNvSpPr/>
+          <p:nvPr/>
+        </p:nvSpPr>
+        <p:spPr>
+          <a:xfrm>
+            <a:off x="7379208" y="3749040"/>
+            <a:ext cx="384048" cy="292608"/>
+          </a:xfrm>
+          <a:prstGeom prst="rect">
+            <a:avLst/>
+          </a:prstGeom>
+          <a:solidFill>
+            <a:srgbClr val="C2410C"/>
+          </a:solidFill>
+          <a:ln w="12700">
+            <a:solidFill>
+              <a:srgbClr val="C2410C"/>
+            </a:solidFill>
+            <a:prstDash val="solid"/>
+          </a:ln>
+        </p:spPr>
+      </p:sp>
+      <p:sp>
+        <p:nvSpPr>
+          <p:cNvPr id="10" name="Shape 7"/>
+          <p:cNvSpPr/>
+          <p:nvPr/>
+        </p:nvSpPr>
+        <p:spPr>
+          <a:xfrm>
+            <a:off x="7982712" y="3749040"/>
+            <a:ext cx="384048" cy="292608"/>
+          </a:xfrm>
+          <a:prstGeom prst="rect">
+            <a:avLst/>
+          </a:prstGeom>
+          <a:solidFill>
+            <a:srgbClr val="C2410C"/>
+          </a:solidFill>
+          <a:ln w="12700">
+            <a:solidFill>
+              <a:srgbClr val="C2410C"/>
+            </a:solidFill>
+            <a:prstDash val="solid"/>
+          </a:ln>
+        </p:spPr>
+      </p:sp>
+      <p:sp>
+        <p:nvSpPr>
+          <p:cNvPr id="11" name="Shape 8"/>
+          <p:cNvSpPr/>
+          <p:nvPr/>
+        </p:nvSpPr>
+        <p:spPr>
+          <a:xfrm>
+            <a:off x="8586216" y="3749040"/>
+            <a:ext cx="384048" cy="292608"/>
+          </a:xfrm>
+          <a:prstGeom prst="rect">
+            <a:avLst/>
+          </a:prstGeom>
+          <a:solidFill>
+            <a:srgbClr val="C2410C"/>
+          </a:solidFill>
+          <a:ln w="12700">
+            <a:solidFill>
+              <a:srgbClr val="C2410C"/>
+            </a:solidFill>
+            <a:prstDash val="solid"/>
+          </a:ln>
+        </p:spPr>
+      </p:sp>
+      <p:sp>
+        <p:nvSpPr>
+          <p:cNvPr id="12" name="Shape 9"/>
+          <p:cNvSpPr/>
+          <p:nvPr/>
+        </p:nvSpPr>
+        <p:spPr>
+          <a:xfrm>
+            <a:off x="9189720" y="3749040"/>
+            <a:ext cx="384048" cy="292608"/>
+          </a:xfrm>
+          <a:prstGeom prst="rect">
+            <a:avLst/>
+          </a:prstGeom>
+          <a:solidFill>
+            <a:srgbClr val="C2410C"/>
+          </a:solidFill>
+          <a:ln w="12700">
+            <a:solidFill>
+              <a:srgbClr val="C2410C"/>
+            </a:solidFill>
+            <a:prstDash val="solid"/>
+          </a:ln>
+        </p:spPr>
+      </p:sp>
+      <p:sp>
+        <p:nvSpPr>
+          <p:cNvPr id="13" name="Shape 10"/>
+          <p:cNvSpPr/>
+          <p:nvPr/>
+        </p:nvSpPr>
+        <p:spPr>
+          <a:xfrm>
+            <a:off x="9793224" y="3749040"/>
+            <a:ext cx="384048" cy="292608"/>
+          </a:xfrm>
+          <a:prstGeom prst="rect">
+            <a:avLst/>
+          </a:prstGeom>
+          <a:solidFill>
+            <a:srgbClr val="C2410C"/>
+          </a:solidFill>
+          <a:ln w="12700">
+            <a:solidFill>
+              <a:srgbClr val="C2410C"/>
+            </a:solidFill>
+            <a:prstDash val="solid"/>
+          </a:ln>
+        </p:spPr>
+      </p:sp>
+      <p:sp>
+        <p:nvSpPr>
+          <p:cNvPr id="14" name="Shape 11"/>
+          <p:cNvSpPr/>
+          <p:nvPr/>
+        </p:nvSpPr>
+        <p:spPr>
+          <a:xfrm>
+            <a:off x="10396728" y="3749040"/>
+            <a:ext cx="384048" cy="292608"/>
+          </a:xfrm>
+          <a:prstGeom prst="rect">
+            <a:avLst/>
+          </a:prstGeom>
+          <a:solidFill>
+            <a:srgbClr val="C2410C"/>
+          </a:solidFill>
+          <a:ln w="12700">
+            <a:solidFill>
+              <a:srgbClr val="C2410C"/>
+            </a:solidFill>
+            <a:prstDash val="solid"/>
+          </a:ln>
+        </p:spPr>
+      </p:sp>
+      <p:sp>
+        <p:nvSpPr>
+          <p:cNvPr id="15" name="Shape 12"/>
+          <p:cNvSpPr/>
+          <p:nvPr/>
+        </p:nvSpPr>
+        <p:spPr>
+          <a:xfrm>
+            <a:off x="11000232" y="3749040"/>
+            <a:ext cx="384048" cy="292608"/>
+          </a:xfrm>
+          <a:prstGeom prst="rect">
+            <a:avLst/>
+          </a:prstGeom>
+          <a:solidFill>
+            <a:srgbClr val="C2410C"/>
+          </a:solidFill>
+          <a:ln w="12700">
+            <a:solidFill>
+              <a:srgbClr val="C2410C"/>
+            </a:solidFill>
+            <a:prstDash val="solid"/>
+          </a:ln>
+        </p:spPr>
+      </p:sp>
+      <p:sp>
+        <p:nvSpPr>
+          <p:cNvPr id="16" name="Text 13"/>
           <p:cNvSpPr txBox="1"/>
           <p:nvPr/>
         </p:nvSpPr>
         <p:spPr>
           <a:xfrm>
-            <a:off x="6263640" y="2514600"/>
-            <a:ext cx="5257800" cy="274320"/>
+            <a:off x="640080" y="4206240"/>
+            <a:ext cx="5303520" cy="457200"/>
           </a:xfrm>
           <a:prstGeom prst="rect">
             <a:avLst/>
@@ -5314,55 +6473,67 @@
           <a:bodyPr wrap="square" lIns="0" tIns="0" rIns="0" bIns="0" rtlCol="0" anchor="ctr"/>
           <a:lstStyle/>
           <a:p>
-            <a:pPr algn="ctr" indent="0" marL="0">
-              <a:buNone/>
-            </a:pPr>
-            <a:r>
-              <a:rPr lang="en-US" sz="1200" b="1" spc="300" kern="0" dirty="0">
+            <a:pPr indent="0" marL="0">
+              <a:buNone/>
+            </a:pPr>
+            <a:r>
+              <a:rPr lang="en-US" sz="2400" b="1" dirty="0">
+                <a:solidFill>
+                  <a:srgbClr val="111827"/>
+                </a:solidFill>
+              </a:rPr>
+              <a:t>Read everything up to here</a:t>
+            </a:r>
+            <a:endParaRPr lang="en-US" sz="2400" dirty="0"/>
+          </a:p>
+        </p:txBody>
+      </p:sp>
+      <p:sp>
+        <p:nvSpPr>
+          <p:cNvPr id="17" name="Text 14"/>
+          <p:cNvSpPr txBox="1"/>
+          <p:nvPr/>
+        </p:nvSpPr>
+        <p:spPr>
+          <a:xfrm>
+            <a:off x="6172200" y="4206240"/>
+            <a:ext cx="5394960" cy="457200"/>
+          </a:xfrm>
+          <a:prstGeom prst="rect">
+            <a:avLst/>
+          </a:prstGeom>
+          <a:noFill/>
+          <a:ln/>
+        </p:spPr>
+        <p:txBody>
+          <a:bodyPr wrap="square" lIns="0" tIns="0" rIns="0" bIns="0" rtlCol="0" anchor="ctr"/>
+          <a:lstStyle/>
+          <a:p>
+            <a:pPr indent="0" marL="0">
+              <a:buNone/>
+            </a:pPr>
+            <a:r>
+              <a:rPr lang="en-US" sz="2400" b="1" dirty="0">
                 <a:solidFill>
                   <a:srgbClr val="C2410C"/>
                 </a:solidFill>
               </a:rPr>
-              <a:t>WAY 2</a:t>
-            </a:r>
-            <a:endParaRPr lang="en-US" sz="1200" dirty="0"/>
-          </a:p>
-        </p:txBody>
-      </p:sp>
-      <p:pic>
-        <p:nvPicPr>
-          <p:cNvPr id="11" name="Image 1" descr="preencoded.png">    </p:cNvPr>
-          <p:cNvPicPr>
-            <a:picLocks noChangeAspect="1"/>
-          </p:cNvPicPr>
-          <p:nvPr/>
-        </p:nvPicPr>
-        <p:blipFill>
-          <a:blip r:embed="rId2"/>
-          <a:stretch>
-            <a:fillRect/>
-          </a:stretch>
-        </p:blipFill>
-        <p:spPr>
-          <a:xfrm>
-            <a:off x="8343900" y="2926080"/>
-            <a:ext cx="1097280" cy="1097280"/>
-          </a:xfrm>
-          <a:prstGeom prst="rect">
-            <a:avLst/>
-          </a:prstGeom>
-        </p:spPr>
-      </p:pic>
-      <p:sp>
-        <p:nvSpPr>
-          <p:cNvPr id="12" name="Text 8"/>
+              <a:t>Never saw this</a:t>
+            </a:r>
+            <a:endParaRPr lang="en-US" sz="2400" dirty="0"/>
+          </a:p>
+        </p:txBody>
+      </p:sp>
+      <p:sp>
+        <p:nvSpPr>
+          <p:cNvPr id="18" name="Text 15"/>
           <p:cNvSpPr txBox="1"/>
           <p:nvPr/>
         </p:nvSpPr>
         <p:spPr>
           <a:xfrm>
-            <a:off x="6263640" y="4206240"/>
-            <a:ext cx="5257800" cy="548640"/>
+            <a:off x="6172200" y="4663440"/>
+            <a:ext cx="5394960" cy="365760"/>
           </a:xfrm>
           <a:prstGeom prst="rect">
             <a:avLst/>
@@ -5374,60 +6545,24 @@
           <a:bodyPr wrap="square" lIns="0" tIns="0" rIns="0" bIns="0" rtlCol="0" anchor="ctr"/>
           <a:lstStyle/>
           <a:p>
-            <a:pPr algn="ctr" indent="0" marL="0">
-              <a:buNone/>
-            </a:pPr>
-            <a:r>
-              <a:rPr lang="en-US" sz="2600" b="1" dirty="0">
-                <a:solidFill>
-                  <a:srgbClr val="111827"/>
-                </a:solidFill>
-              </a:rPr>
-              <a:t>It never read it</a:t>
-            </a:r>
-            <a:endParaRPr lang="en-US" sz="2600" dirty="0"/>
-          </a:p>
-        </p:txBody>
-      </p:sp>
-      <p:sp>
-        <p:nvSpPr>
-          <p:cNvPr id="13" name="Text 9"/>
-          <p:cNvSpPr txBox="1"/>
-          <p:nvPr/>
-        </p:nvSpPr>
-        <p:spPr>
-          <a:xfrm>
-            <a:off x="6263640" y="4800600"/>
-            <a:ext cx="5257800" cy="365760"/>
-          </a:xfrm>
-          <a:prstGeom prst="rect">
-            <a:avLst/>
-          </a:prstGeom>
-          <a:noFill/>
-          <a:ln/>
-        </p:spPr>
-        <p:txBody>
-          <a:bodyPr wrap="square" lIns="0" tIns="0" rIns="0" bIns="0" rtlCol="0" anchor="ctr"/>
-          <a:lstStyle/>
-          <a:p>
-            <a:pPr algn="ctr" indent="0" marL="0">
-              <a:buNone/>
-            </a:pPr>
-            <a:r>
-              <a:rPr lang="en-US" sz="1600" dirty="0">
+            <a:pPr indent="0" marL="0">
+              <a:buNone/>
+            </a:pPr>
+            <a:r>
+              <a:rPr lang="en-US" sz="1800" dirty="0">
                 <a:solidFill>
                   <a:srgbClr val="6B7280"/>
                 </a:solidFill>
               </a:rPr>
-              <a:t>5 questions</a:t>
-            </a:r>
-            <a:endParaRPr lang="en-US" sz="1600" dirty="0"/>
-          </a:p>
-        </p:txBody>
-      </p:sp>
-      <p:sp>
-        <p:nvSpPr>
-          <p:cNvPr id="14" name="Text 0"/>
+              <a:t>elections · new drugs · yesterday's news</a:t>
+            </a:r>
+            <a:endParaRPr lang="en-US" sz="1800" dirty="0"/>
+          </a:p>
+        </p:txBody>
+      </p:sp>
+      <p:sp>
+        <p:nvSpPr>
+          <p:cNvPr id="19" name="Text 0"/>
           <p:cNvSpPr/>
           <p:nvPr>
             <p:ph idx="102" type="body" hasCustomPrompt="1"/>
@@ -5457,7 +6592,7 @@
                   <a:schemeClr val="tx1"/>
                 </a:solidFill>
               </a:rPr>
-              <a:t>Eight questions. </a:t>
+              <a:t>Ask it about anything after that and it guesses. </a:t>
             </a:r>
             <a:pPr indent="0" marL="0">
               <a:buNone/>
@@ -5468,7 +6603,7 @@
                   <a:srgbClr val="6B7280"/>
                 </a:solidFill>
               </a:rPr>
-              <a:t>One answer at the end.</a:t>
+              <a:t>So how do we keep it useful?</a:t>
             </a:r>
             <a:endParaRPr lang="en-US" sz="1800" dirty="0"/>
           </a:p>
@@ -5576,7 +6711,7 @@
                   <a:schemeClr val="accent1"/>
                 </a:solidFill>
               </a:rPr>
-              <a:t>WAY 1 · QUESTION 1</a:t>
+              <a:t>THE USUAL FIX</a:t>
             </a:r>
             <a:endParaRPr lang="en-US" sz="1200" dirty="0"/>
           </a:p>
@@ -5614,7 +6749,18 @@
                   <a:schemeClr val="tx1"/>
                 </a:solidFill>
               </a:rPr>
-              <a:t>Does the model know more than it says?</a:t>
+              <a:t>Send it back to school. </a:t>
+            </a:r>
+            <a:pPr algn="l" indent="0" marL="0">
+              <a:buNone/>
+            </a:pPr>
+            <a:r>
+              <a:rPr lang="en-US" sz="3200" b="1" i="1" dirty="0">
+                <a:solidFill>
+                  <a:srgbClr val="6B7280"/>
+                </a:solidFill>
+              </a:rPr>
+              <a:t>Expensive, and it forgets.</a:t>
             </a:r>
             <a:endParaRPr lang="en-US" sz="3200" dirty="0"/>
           </a:p>
@@ -5628,14 +6774,154 @@
         </p:nvSpPr>
         <p:spPr>
           <a:xfrm>
-            <a:off x="822960" y="4937760"/>
-            <a:ext cx="822960" cy="182880"/>
-          </a:xfrm>
-          <a:prstGeom prst="rect">
-            <a:avLst/>
+            <a:off x="640080" y="2194560"/>
+            <a:ext cx="5257800" cy="3291840"/>
+          </a:xfrm>
+          <a:prstGeom prst="roundRect">
+            <a:avLst>
+              <a:gd name="adj" fmla="val 3333"/>
+            </a:avLst>
           </a:prstGeom>
           <a:solidFill>
-            <a:srgbClr val="FDBA74"/>
+            <a:srgbClr val="F9FAFB"/>
+          </a:solidFill>
+          <a:ln w="12700">
+            <a:solidFill>
+              <a:srgbClr val="E5E7EB"/>
+            </a:solidFill>
+            <a:prstDash val="solid"/>
+          </a:ln>
+        </p:spPr>
+      </p:sp>
+      <p:sp>
+        <p:nvSpPr>
+          <p:cNvPr id="5" name="Text 3"/>
+          <p:cNvSpPr txBox="1"/>
+          <p:nvPr/>
+        </p:nvSpPr>
+        <p:spPr>
+          <a:xfrm>
+            <a:off x="640080" y="2423160"/>
+            <a:ext cx="5257800" cy="274320"/>
+          </a:xfrm>
+          <a:prstGeom prst="rect">
+            <a:avLst/>
+          </a:prstGeom>
+          <a:noFill/>
+          <a:ln/>
+        </p:spPr>
+        <p:txBody>
+          <a:bodyPr wrap="square" lIns="0" tIns="0" rIns="0" bIns="0" rtlCol="0" anchor="ctr"/>
+          <a:lstStyle/>
+          <a:p>
+            <a:pPr algn="ctr" indent="0" marL="0">
+              <a:buNone/>
+            </a:pPr>
+            <a:r>
+              <a:rPr lang="en-US" sz="1100" b="1" spc="200" kern="0" dirty="0">
+                <a:solidFill>
+                  <a:srgbClr val="6B7280"/>
+                </a:solidFill>
+              </a:rPr>
+              <a:t>TO TEACH IT MEDICINE</a:t>
+            </a:r>
+            <a:endParaRPr lang="en-US" sz="1100" dirty="0"/>
+          </a:p>
+        </p:txBody>
+      </p:sp>
+      <p:sp>
+        <p:nvSpPr>
+          <p:cNvPr id="6" name="Text 4"/>
+          <p:cNvSpPr txBox="1"/>
+          <p:nvPr/>
+        </p:nvSpPr>
+        <p:spPr>
+          <a:xfrm>
+            <a:off x="640080" y="2788920"/>
+            <a:ext cx="5257800" cy="1280160"/>
+          </a:xfrm>
+          <a:prstGeom prst="rect">
+            <a:avLst/>
+          </a:prstGeom>
+          <a:noFill/>
+          <a:ln/>
+        </p:spPr>
+        <p:txBody>
+          <a:bodyPr wrap="square" lIns="0" tIns="0" rIns="0" bIns="0" rtlCol="0" anchor="ctr"/>
+          <a:lstStyle/>
+          <a:p>
+            <a:pPr algn="ctr" indent="0" marL="0">
+              <a:buNone/>
+            </a:pPr>
+            <a:r>
+              <a:rPr lang="en-US" sz="7200" b="1" dirty="0">
+                <a:solidFill>
+                  <a:srgbClr val="111827"/>
+                </a:solidFill>
+                <a:latin typeface="Cambria" pitchFamily="34" charset="0"/>
+                <a:ea typeface="Cambria" pitchFamily="34" charset="-122"/>
+                <a:cs typeface="Cambria" pitchFamily="34" charset="-120"/>
+              </a:rPr>
+              <a:t>~48B</a:t>
+            </a:r>
+            <a:endParaRPr lang="en-US" sz="7200" dirty="0"/>
+          </a:p>
+        </p:txBody>
+      </p:sp>
+      <p:sp>
+        <p:nvSpPr>
+          <p:cNvPr id="7" name="Text 5"/>
+          <p:cNvSpPr txBox="1"/>
+          <p:nvPr/>
+        </p:nvSpPr>
+        <p:spPr>
+          <a:xfrm>
+            <a:off x="1005840" y="4206240"/>
+            <a:ext cx="4526280" cy="731520"/>
+          </a:xfrm>
+          <a:prstGeom prst="rect">
+            <a:avLst/>
+          </a:prstGeom>
+          <a:noFill/>
+          <a:ln/>
+        </p:spPr>
+        <p:txBody>
+          <a:bodyPr wrap="square" lIns="0" tIns="0" rIns="0" bIns="0" rtlCol="0" anchor="ctr"/>
+          <a:lstStyle/>
+          <a:p>
+            <a:pPr algn="ctr" indent="0" marL="0">
+              <a:buNone/>
+            </a:pPr>
+            <a:r>
+              <a:rPr lang="en-US" sz="1500" dirty="0">
+                <a:solidFill>
+                  <a:srgbClr val="374151"/>
+                </a:solidFill>
+              </a:rPr>
+              <a:t>words of training, weeks on 8 GPUs, thousands of dollars per run</a:t>
+            </a:r>
+            <a:endParaRPr lang="en-US" sz="1500" dirty="0"/>
+          </a:p>
+        </p:txBody>
+      </p:sp>
+      <p:sp>
+        <p:nvSpPr>
+          <p:cNvPr id="8" name="Shape 6"/>
+          <p:cNvSpPr/>
+          <p:nvPr/>
+        </p:nvSpPr>
+        <p:spPr>
+          <a:xfrm>
+            <a:off x="6263640" y="2194560"/>
+            <a:ext cx="5257800" cy="3291840"/>
+          </a:xfrm>
+          <a:prstGeom prst="roundRect">
+            <a:avLst>
+              <a:gd name="adj" fmla="val 3333"/>
+            </a:avLst>
+          </a:prstGeom>
+          <a:solidFill>
+            <a:srgbClr val="FFF7ED"/>
           </a:solidFill>
           <a:ln w="12700">
             <a:solidFill>
@@ -5647,14 +6933,14 @@
       </p:sp>
       <p:sp>
         <p:nvSpPr>
-          <p:cNvPr id="5" name="Text 3"/>
+          <p:cNvPr id="9" name="Text 7"/>
           <p:cNvSpPr txBox="1"/>
           <p:nvPr/>
         </p:nvSpPr>
         <p:spPr>
           <a:xfrm>
-            <a:off x="640080" y="4553712"/>
-            <a:ext cx="1188720" cy="365760"/>
+            <a:off x="6263640" y="2423160"/>
+            <a:ext cx="5257800" cy="274320"/>
           </a:xfrm>
           <a:prstGeom prst="rect">
             <a:avLst/>
@@ -5670,12 +6956,48 @@
               <a:buNone/>
             </a:pPr>
             <a:r>
-              <a:rPr lang="en-US" sz="1600" b="1" dirty="0">
-                <a:solidFill>
-                  <a:srgbClr val="6B7280"/>
-                </a:solidFill>
-              </a:rPr>
-              <a:t>+1</a:t>
+              <a:rPr lang="en-US" sz="1100" b="1" spc="200" kern="0" dirty="0">
+                <a:solidFill>
+                  <a:srgbClr val="C2410C"/>
+                </a:solidFill>
+              </a:rPr>
+              <a:t>AND AFTERWARDS</a:t>
+            </a:r>
+            <a:endParaRPr lang="en-US" sz="1100" dirty="0"/>
+          </a:p>
+        </p:txBody>
+      </p:sp>
+      <p:sp>
+        <p:nvSpPr>
+          <p:cNvPr id="10" name="Text 8"/>
+          <p:cNvSpPr txBox="1"/>
+          <p:nvPr/>
+        </p:nvSpPr>
+        <p:spPr>
+          <a:xfrm>
+            <a:off x="6583680" y="2788920"/>
+            <a:ext cx="4617720" cy="822960"/>
+          </a:xfrm>
+          <a:prstGeom prst="rect">
+            <a:avLst/>
+          </a:prstGeom>
+          <a:noFill/>
+          <a:ln/>
+        </p:spPr>
+        <p:txBody>
+          <a:bodyPr wrap="square" lIns="0" tIns="0" rIns="0" bIns="0" rtlCol="0" anchor="ctr"/>
+          <a:lstStyle/>
+          <a:p>
+            <a:pPr algn="ctr" indent="0" marL="0">
+              <a:buNone/>
+            </a:pPr>
+            <a:r>
+              <a:rPr lang="en-US" sz="1600" i="1" dirty="0">
+                <a:solidFill>
+                  <a:srgbClr val="374151"/>
+                </a:solidFill>
+              </a:rPr>
+              <a:t>“Anna passed the file to Ben. Ben passed it to Clara. Who has it?”</a:t>
             </a:r>
             <a:endParaRPr lang="en-US" sz="1600" dirty="0"/>
           </a:p>
@@ -5683,60 +7005,26 @@
       </p:sp>
       <p:sp>
         <p:nvSpPr>
-          <p:cNvPr id="6" name="Text 4"/>
-          <p:cNvSpPr txBox="1"/>
-          <p:nvPr/>
-        </p:nvSpPr>
-        <p:spPr>
-          <a:xfrm>
-            <a:off x="731520" y="5193792"/>
-            <a:ext cx="1005840" cy="274320"/>
-          </a:xfrm>
-          <a:prstGeom prst="rect">
-            <a:avLst/>
-          </a:prstGeom>
-          <a:noFill/>
-          <a:ln/>
-        </p:spPr>
-        <p:txBody>
-          <a:bodyPr wrap="square" lIns="0" tIns="0" rIns="0" bIns="0" rtlCol="0" anchor="ctr"/>
-          <a:lstStyle/>
-          <a:p>
-            <a:pPr algn="ctr" indent="0" marL="0">
-              <a:buNone/>
-            </a:pPr>
-            <a:r>
-              <a:rPr lang="en-US" sz="1300" dirty="0">
-                <a:solidFill>
-                  <a:srgbClr val="6B7280"/>
-                </a:solidFill>
-              </a:rPr>
-              <a:t>once</a:t>
-            </a:r>
-            <a:endParaRPr lang="en-US" sz="1300" dirty="0"/>
-          </a:p>
-        </p:txBody>
-      </p:sp>
-      <p:sp>
-        <p:nvSpPr>
-          <p:cNvPr id="7" name="Shape 5"/>
-          <p:cNvSpPr/>
-          <p:nvPr/>
-        </p:nvSpPr>
-        <p:spPr>
-          <a:xfrm>
-            <a:off x="1920240" y="4709160"/>
-            <a:ext cx="822960" cy="411480"/>
-          </a:xfrm>
-          <a:prstGeom prst="rect">
-            <a:avLst/>
+          <p:cNvPr id="11" name="Shape 9"/>
+          <p:cNvSpPr/>
+          <p:nvPr/>
+        </p:nvSpPr>
+        <p:spPr>
+          <a:xfrm>
+            <a:off x="6858000" y="3794760"/>
+            <a:ext cx="2011680" cy="1188720"/>
+          </a:xfrm>
+          <a:prstGeom prst="roundRect">
+            <a:avLst>
+              <a:gd name="adj" fmla="val 9231"/>
+            </a:avLst>
           </a:prstGeom>
           <a:solidFill>
-            <a:srgbClr val="FB923C"/>
+            <a:srgbClr val="FFFFFF"/>
           </a:solidFill>
-          <a:ln w="12700">
+          <a:ln w="19050">
             <a:solidFill>
-              <a:srgbClr val="FB923C"/>
+              <a:srgbClr val="E5E7EB"/>
             </a:solidFill>
             <a:prstDash val="solid"/>
           </a:ln>
@@ -5744,14 +7032,14 @@
       </p:sp>
       <p:sp>
         <p:nvSpPr>
-          <p:cNvPr id="8" name="Text 6"/>
+          <p:cNvPr id="12" name="Text 10"/>
           <p:cNvSpPr txBox="1"/>
           <p:nvPr/>
         </p:nvSpPr>
         <p:spPr>
           <a:xfrm>
-            <a:off x="1737360" y="4325112"/>
-            <a:ext cx="1188720" cy="365760"/>
+            <a:off x="6858000" y="3886200"/>
+            <a:ext cx="2011680" cy="320040"/>
           </a:xfrm>
           <a:prstGeom prst="rect">
             <a:avLst/>
@@ -5767,27 +7055,27 @@
               <a:buNone/>
             </a:pPr>
             <a:r>
-              <a:rPr lang="en-US" sz="1600" b="1" dirty="0">
+              <a:rPr lang="en-US" sz="1200" dirty="0">
                 <a:solidFill>
                   <a:srgbClr val="6B7280"/>
                 </a:solidFill>
               </a:rPr>
-              <a:t>+2</a:t>
-            </a:r>
-            <a:endParaRPr lang="en-US" sz="1600" dirty="0"/>
-          </a:p>
-        </p:txBody>
-      </p:sp>
-      <p:sp>
-        <p:nvSpPr>
-          <p:cNvPr id="9" name="Text 7"/>
+              <a:t>before</a:t>
+            </a:r>
+            <a:endParaRPr lang="en-US" sz="1200" dirty="0"/>
+          </a:p>
+        </p:txBody>
+      </p:sp>
+      <p:sp>
+        <p:nvSpPr>
+          <p:cNvPr id="13" name="Text 11"/>
           <p:cNvSpPr txBox="1"/>
           <p:nvPr/>
         </p:nvSpPr>
         <p:spPr>
           <a:xfrm>
-            <a:off x="1828800" y="5193792"/>
-            <a:ext cx="1005840" cy="274320"/>
+            <a:off x="6858000" y="4206240"/>
+            <a:ext cx="2011680" cy="640080"/>
           </a:xfrm>
           <a:prstGeom prst="rect">
             <a:avLst/>
@@ -5803,37 +7091,39 @@
               <a:buNone/>
             </a:pPr>
             <a:r>
-              <a:rPr lang="en-US" sz="1300" dirty="0">
-                <a:solidFill>
-                  <a:srgbClr val="6B7280"/>
-                </a:solidFill>
-              </a:rPr>
-              <a:t>a few</a:t>
-            </a:r>
-            <a:endParaRPr lang="en-US" sz="1300" dirty="0"/>
-          </a:p>
-        </p:txBody>
-      </p:sp>
-      <p:sp>
-        <p:nvSpPr>
-          <p:cNvPr id="10" name="Shape 8"/>
-          <p:cNvSpPr/>
-          <p:nvPr/>
-        </p:nvSpPr>
-        <p:spPr>
-          <a:xfrm>
-            <a:off x="3017520" y="4114800"/>
-            <a:ext cx="822960" cy="1005840"/>
-          </a:xfrm>
-          <a:prstGeom prst="rect">
-            <a:avLst/>
+              <a:rPr lang="en-US" sz="2400" b="1" dirty="0">
+                <a:solidFill>
+                  <a:srgbClr val="111827"/>
+                </a:solidFill>
+              </a:rPr>
+              <a:t>Clara ✓</a:t>
+            </a:r>
+            <a:endParaRPr lang="en-US" sz="2400" dirty="0"/>
+          </a:p>
+        </p:txBody>
+      </p:sp>
+      <p:sp>
+        <p:nvSpPr>
+          <p:cNvPr id="14" name="Shape 12"/>
+          <p:cNvSpPr/>
+          <p:nvPr/>
+        </p:nvSpPr>
+        <p:spPr>
+          <a:xfrm>
+            <a:off x="9144000" y="3794760"/>
+            <a:ext cx="2011680" cy="1188720"/>
+          </a:xfrm>
+          <a:prstGeom prst="roundRect">
+            <a:avLst>
+              <a:gd name="adj" fmla="val 9231"/>
+            </a:avLst>
           </a:prstGeom>
           <a:solidFill>
-            <a:srgbClr val="F97316"/>
+            <a:srgbClr val="FFFFFF"/>
           </a:solidFill>
-          <a:ln w="12700">
+          <a:ln w="19050">
             <a:solidFill>
-              <a:srgbClr val="F97316"/>
+              <a:srgbClr val="FDBA74"/>
             </a:solidFill>
             <a:prstDash val="solid"/>
           </a:ln>
@@ -5841,147 +7131,14 @@
       </p:sp>
       <p:sp>
         <p:nvSpPr>
-          <p:cNvPr id="11" name="Text 9"/>
-          <p:cNvSpPr txBox="1"/>
-          <p:nvPr/>
-        </p:nvSpPr>
-        <p:spPr>
-          <a:xfrm>
-            <a:off x="2834640" y="3730752"/>
-            <a:ext cx="1188720" cy="365760"/>
-          </a:xfrm>
-          <a:prstGeom prst="rect">
-            <a:avLst/>
-          </a:prstGeom>
-          <a:noFill/>
-          <a:ln/>
-        </p:spPr>
-        <p:txBody>
-          <a:bodyPr wrap="square" lIns="0" tIns="0" rIns="0" bIns="0" rtlCol="0" anchor="ctr"/>
-          <a:lstStyle/>
-          <a:p>
-            <a:pPr algn="ctr" indent="0" marL="0">
-              <a:buNone/>
-            </a:pPr>
-            <a:r>
-              <a:rPr lang="en-US" sz="1600" b="1" dirty="0">
-                <a:solidFill>
-                  <a:srgbClr val="C2410C"/>
-                </a:solidFill>
-              </a:rPr>
-              <a:t>+5</a:t>
-            </a:r>
-            <a:endParaRPr lang="en-US" sz="1600" dirty="0"/>
-          </a:p>
-        </p:txBody>
-      </p:sp>
-      <p:sp>
-        <p:nvSpPr>
-          <p:cNvPr id="12" name="Text 10"/>
-          <p:cNvSpPr txBox="1"/>
-          <p:nvPr/>
-        </p:nvSpPr>
-        <p:spPr>
-          <a:xfrm>
-            <a:off x="2926080" y="5193792"/>
-            <a:ext cx="1005840" cy="274320"/>
-          </a:xfrm>
-          <a:prstGeom prst="rect">
-            <a:avLst/>
-          </a:prstGeom>
-          <a:noFill/>
-          <a:ln/>
-        </p:spPr>
-        <p:txBody>
-          <a:bodyPr wrap="square" lIns="0" tIns="0" rIns="0" bIns="0" rtlCol="0" anchor="ctr"/>
-          <a:lstStyle/>
-          <a:p>
-            <a:pPr algn="ctr" indent="0" marL="0">
-              <a:buNone/>
-            </a:pPr>
-            <a:r>
-              <a:rPr lang="en-US" sz="1300" dirty="0">
-                <a:solidFill>
-                  <a:srgbClr val="6B7280"/>
-                </a:solidFill>
-              </a:rPr>
-              <a:t>dozens</a:t>
-            </a:r>
-            <a:endParaRPr lang="en-US" sz="1300" dirty="0"/>
-          </a:p>
-        </p:txBody>
-      </p:sp>
-      <p:sp>
-        <p:nvSpPr>
-          <p:cNvPr id="13" name="Shape 11"/>
-          <p:cNvSpPr/>
-          <p:nvPr/>
-        </p:nvSpPr>
-        <p:spPr>
-          <a:xfrm>
-            <a:off x="4114800" y="3474720"/>
-            <a:ext cx="822960" cy="1645920"/>
-          </a:xfrm>
-          <a:prstGeom prst="rect">
-            <a:avLst/>
-          </a:prstGeom>
-          <a:solidFill>
-            <a:srgbClr val="EA580C"/>
-          </a:solidFill>
-          <a:ln w="12700">
-            <a:solidFill>
-              <a:srgbClr val="EA580C"/>
-            </a:solidFill>
-            <a:prstDash val="solid"/>
-          </a:ln>
-        </p:spPr>
-      </p:sp>
-      <p:sp>
-        <p:nvSpPr>
-          <p:cNvPr id="14" name="Text 12"/>
-          <p:cNvSpPr txBox="1"/>
-          <p:nvPr/>
-        </p:nvSpPr>
-        <p:spPr>
-          <a:xfrm>
-            <a:off x="3931920" y="3090672"/>
-            <a:ext cx="1188720" cy="365760"/>
-          </a:xfrm>
-          <a:prstGeom prst="rect">
-            <a:avLst/>
-          </a:prstGeom>
-          <a:noFill/>
-          <a:ln/>
-        </p:spPr>
-        <p:txBody>
-          <a:bodyPr wrap="square" lIns="0" tIns="0" rIns="0" bIns="0" rtlCol="0" anchor="ctr"/>
-          <a:lstStyle/>
-          <a:p>
-            <a:pPr algn="ctr" indent="0" marL="0">
-              <a:buNone/>
-            </a:pPr>
-            <a:r>
-              <a:rPr lang="en-US" sz="1600" b="1" dirty="0">
-                <a:solidFill>
-                  <a:srgbClr val="C2410C"/>
-                </a:solidFill>
-              </a:rPr>
-              <a:t>+8</a:t>
-            </a:r>
-            <a:endParaRPr lang="en-US" sz="1600" dirty="0"/>
-          </a:p>
-        </p:txBody>
-      </p:sp>
-      <p:sp>
-        <p:nvSpPr>
           <p:cNvPr id="15" name="Text 13"/>
           <p:cNvSpPr txBox="1"/>
           <p:nvPr/>
         </p:nvSpPr>
         <p:spPr>
           <a:xfrm>
-            <a:off x="4023360" y="5193792"/>
-            <a:ext cx="1005840" cy="274320"/>
+            <a:off x="9144000" y="3886200"/>
+            <a:ext cx="2011680" cy="320040"/>
           </a:xfrm>
           <a:prstGeom prst="rect">
             <a:avLst/>
@@ -5997,52 +7154,27 @@
               <a:buNone/>
             </a:pPr>
             <a:r>
-              <a:rPr lang="en-US" sz="1300" dirty="0">
-                <a:solidFill>
-                  <a:srgbClr val="6B7280"/>
-                </a:solidFill>
-              </a:rPr>
-              <a:t>~100</a:t>
-            </a:r>
-            <a:endParaRPr lang="en-US" sz="1300" dirty="0"/>
-          </a:p>
-        </p:txBody>
-      </p:sp>
-      <p:sp>
-        <p:nvSpPr>
-          <p:cNvPr id="16" name="Shape 14"/>
-          <p:cNvSpPr/>
-          <p:nvPr/>
-        </p:nvSpPr>
-        <p:spPr>
-          <a:xfrm>
-            <a:off x="5212080" y="2651760"/>
-            <a:ext cx="822960" cy="2468880"/>
-          </a:xfrm>
-          <a:prstGeom prst="rect">
-            <a:avLst/>
-          </a:prstGeom>
-          <a:solidFill>
-            <a:srgbClr val="C2410C"/>
-          </a:solidFill>
-          <a:ln w="12700">
-            <a:solidFill>
-              <a:srgbClr val="C2410C"/>
-            </a:solidFill>
-            <a:prstDash val="solid"/>
-          </a:ln>
-        </p:spPr>
-      </p:sp>
-      <p:sp>
-        <p:nvSpPr>
-          <p:cNvPr id="17" name="Text 15"/>
+              <a:rPr lang="en-US" sz="1200" dirty="0">
+                <a:solidFill>
+                  <a:srgbClr val="C2410C"/>
+                </a:solidFill>
+              </a:rPr>
+              <a:t>after</a:t>
+            </a:r>
+            <a:endParaRPr lang="en-US" sz="1200" dirty="0"/>
+          </a:p>
+        </p:txBody>
+      </p:sp>
+      <p:sp>
+        <p:nvSpPr>
+          <p:cNvPr id="16" name="Text 14"/>
           <p:cNvSpPr txBox="1"/>
           <p:nvPr/>
         </p:nvSpPr>
         <p:spPr>
           <a:xfrm>
-            <a:off x="5029200" y="2267712"/>
-            <a:ext cx="1188720" cy="365760"/>
+            <a:off x="9144000" y="4206240"/>
+            <a:ext cx="2011680" cy="640080"/>
           </a:xfrm>
           <a:prstGeom prst="rect">
             <a:avLst/>
@@ -6058,115 +7190,20 @@
               <a:buNone/>
             </a:pPr>
             <a:r>
-              <a:rPr lang="en-US" sz="1600" b="1" dirty="0">
+              <a:rPr lang="en-US" sz="2400" b="1" dirty="0">
                 <a:solidFill>
                   <a:srgbClr val="C2410C"/>
                 </a:solidFill>
               </a:rPr>
-              <a:t>+12</a:t>
-            </a:r>
-            <a:endParaRPr lang="en-US" sz="1600" dirty="0"/>
-          </a:p>
-        </p:txBody>
-      </p:sp>
-      <p:sp>
-        <p:nvSpPr>
-          <p:cNvPr id="18" name="Text 16"/>
-          <p:cNvSpPr txBox="1"/>
-          <p:nvPr/>
-        </p:nvSpPr>
-        <p:spPr>
-          <a:xfrm>
-            <a:off x="5120640" y="5193792"/>
-            <a:ext cx="1005840" cy="274320"/>
-          </a:xfrm>
-          <a:prstGeom prst="rect">
-            <a:avLst/>
-          </a:prstGeom>
-          <a:noFill/>
-          <a:ln/>
-        </p:spPr>
-        <p:txBody>
-          <a:bodyPr wrap="square" lIns="0" tIns="0" rIns="0" bIns="0" rtlCol="0" anchor="ctr"/>
-          <a:lstStyle/>
-          <a:p>
-            <a:pPr algn="ctr" indent="0" marL="0">
-              <a:buNone/>
-            </a:pPr>
-            <a:r>
-              <a:rPr lang="en-US" sz="1300" dirty="0">
-                <a:solidFill>
-                  <a:srgbClr val="6B7280"/>
-                </a:solidFill>
-              </a:rPr>
-              <a:t>200+</a:t>
-            </a:r>
-            <a:endParaRPr lang="en-US" sz="1300" dirty="0"/>
-          </a:p>
-        </p:txBody>
-      </p:sp>
-      <p:sp>
-        <p:nvSpPr>
-          <p:cNvPr id="19" name="Shape 17"/>
-          <p:cNvSpPr/>
-          <p:nvPr/>
-        </p:nvSpPr>
-        <p:spPr>
-          <a:xfrm>
-            <a:off x="731520" y="5120640"/>
-            <a:ext cx="5486400" cy="0"/>
-          </a:xfrm>
-          <a:prstGeom prst="line">
-            <a:avLst/>
-          </a:prstGeom>
-          <a:noFill/>
-          <a:ln w="25400">
-            <a:solidFill>
-              <a:srgbClr val="111827"/>
-            </a:solidFill>
-            <a:prstDash val="solid"/>
-          </a:ln>
-        </p:spPr>
-      </p:sp>
-      <p:sp>
-        <p:nvSpPr>
-          <p:cNvPr id="20" name="Text 18"/>
-          <p:cNvSpPr txBox="1"/>
-          <p:nvPr/>
-        </p:nvSpPr>
-        <p:spPr>
-          <a:xfrm>
-            <a:off x="731520" y="5504688"/>
-            <a:ext cx="5486400" cy="274320"/>
-          </a:xfrm>
-          <a:prstGeom prst="rect">
-            <a:avLst/>
-          </a:prstGeom>
-          <a:noFill/>
-          <a:ln/>
-        </p:spPr>
-        <p:txBody>
-          <a:bodyPr wrap="square" lIns="0" tIns="0" rIns="0" bIns="0" rtlCol="0" anchor="ctr"/>
-          <a:lstStyle/>
-          <a:p>
-            <a:pPr indent="0" marL="0">
-              <a:buNone/>
-            </a:pPr>
-            <a:r>
-              <a:rPr lang="en-US" sz="1200" dirty="0">
-                <a:solidFill>
-                  <a:srgbClr val="6B7280"/>
-                </a:solidFill>
-              </a:rPr>
-              <a:t>how often the model has seen a fact → how well it answers</a:t>
-            </a:r>
-            <a:endParaRPr lang="en-US" sz="1200" dirty="0"/>
-          </a:p>
-        </p:txBody>
-      </p:sp>
-      <p:sp>
-        <p:nvSpPr>
-          <p:cNvPr id="21" name="Text 0"/>
+              <a:t>Anna ✗</a:t>
+            </a:r>
+            <a:endParaRPr lang="en-US" sz="2400" dirty="0"/>
+          </a:p>
+        </p:txBody>
+      </p:sp>
+      <p:sp>
+        <p:nvSpPr>
+          <p:cNvPr id="17" name="Text 0"/>
           <p:cNvSpPr/>
           <p:nvPr>
             <p:ph idx="102" type="body" hasCustomPrompt="1"/>
@@ -6196,7 +7233,7 @@
                   <a:schemeClr val="tx1"/>
                 </a:solidFill>
               </a:rPr>
-              <a:t>Yes. </a:t>
+              <a:t>Two costs every time: money, and what it used to know. </a:t>
             </a:r>
             <a:pPr indent="0" marL="0">
               <a:buNone/>
@@ -6207,7 +7244,7 @@
                   <a:srgbClr val="6B7280"/>
                 </a:solidFill>
               </a:rPr>
-              <a:t>Even a fact seen once leaves a trace; it just gets drowned out on the way to the output.</a:t>
+              <a:t>Can we teach instead?</a:t>
             </a:r>
             <a:endParaRPr lang="en-US" sz="1800" dirty="0"/>
           </a:p>
@@ -6315,7 +7352,7 @@
                   <a:schemeClr val="accent1"/>
                 </a:solidFill>
               </a:rPr>
-              <a:t>WAY 1 · QUESTION 2</a:t>
+              <a:t>THE PLAN</a:t>
             </a:r>
             <a:endParaRPr lang="en-US" sz="1200" dirty="0"/>
           </a:p>
@@ -6353,7 +7390,18 @@
                   <a:schemeClr val="tx1"/>
                 </a:solidFill>
               </a:rPr>
-              <a:t>Can we get it out without training?</a:t>
+              <a:t>Two ways to teach </a:t>
+            </a:r>
+            <a:pPr algn="l" indent="0" marL="0">
+              <a:buNone/>
+            </a:pPr>
+            <a:r>
+              <a:rPr lang="en-US" sz="3200" b="1" i="1" dirty="0">
+                <a:solidFill>
+                  <a:srgbClr val="6B7280"/>
+                </a:solidFill>
+              </a:rPr>
+              <a:t>instead of retrain.</a:t>
             </a:r>
             <a:endParaRPr lang="en-US" sz="3200" dirty="0"/>
           </a:p>
@@ -6367,12 +7415,12 @@
         </p:nvSpPr>
         <p:spPr>
           <a:xfrm>
-            <a:off x="640080" y="2148840"/>
-            <a:ext cx="4754880" cy="3291840"/>
+            <a:off x="640080" y="2194560"/>
+            <a:ext cx="5257800" cy="3611880"/>
           </a:xfrm>
           <a:prstGeom prst="roundRect">
             <a:avLst>
-              <a:gd name="adj" fmla="val 3333"/>
+              <a:gd name="adj" fmla="val 3038"/>
             </a:avLst>
           </a:prstGeom>
           <a:solidFill>
@@ -6388,24 +7436,158 @@
       </p:sp>
       <p:sp>
         <p:nvSpPr>
-          <p:cNvPr id="5" name="Shape 3"/>
-          <p:cNvSpPr/>
-          <p:nvPr/>
-        </p:nvSpPr>
-        <p:spPr>
-          <a:xfrm>
-            <a:off x="1280160" y="2971800"/>
-            <a:ext cx="201168" cy="201168"/>
-          </a:xfrm>
-          <a:prstGeom prst="ellipse">
-            <a:avLst/>
+          <p:cNvPr id="5" name="Text 3"/>
+          <p:cNvSpPr txBox="1"/>
+          <p:nvPr/>
+        </p:nvSpPr>
+        <p:spPr>
+          <a:xfrm>
+            <a:off x="640080" y="2514600"/>
+            <a:ext cx="5257800" cy="274320"/>
+          </a:xfrm>
+          <a:prstGeom prst="rect">
+            <a:avLst/>
+          </a:prstGeom>
+          <a:noFill/>
+          <a:ln/>
+        </p:spPr>
+        <p:txBody>
+          <a:bodyPr wrap="square" lIns="0" tIns="0" rIns="0" bIns="0" rtlCol="0" anchor="ctr"/>
+          <a:lstStyle/>
+          <a:p>
+            <a:pPr algn="ctr" indent="0" marL="0">
+              <a:buNone/>
+            </a:pPr>
+            <a:r>
+              <a:rPr lang="en-US" sz="1200" b="1" spc="300" kern="0" dirty="0">
+                <a:solidFill>
+                  <a:srgbClr val="C2410C"/>
+                </a:solidFill>
+              </a:rPr>
+              <a:t>WAY 1</a:t>
+            </a:r>
+            <a:endParaRPr lang="en-US" sz="1200" dirty="0"/>
+          </a:p>
+        </p:txBody>
+      </p:sp>
+      <p:pic>
+        <p:nvPicPr>
+          <p:cNvPr id="6" name="Image 0" descr="preencoded.png">    </p:cNvPr>
+          <p:cNvPicPr>
+            <a:picLocks noChangeAspect="1"/>
+          </p:cNvPicPr>
+          <p:nvPr/>
+        </p:nvPicPr>
+        <p:blipFill>
+          <a:blip r:embed="rId1"/>
+          <a:stretch>
+            <a:fillRect/>
+          </a:stretch>
+        </p:blipFill>
+        <p:spPr>
+          <a:xfrm>
+            <a:off x="2720340" y="2926080"/>
+            <a:ext cx="1097280" cy="1097280"/>
+          </a:xfrm>
+          <a:prstGeom prst="rect">
+            <a:avLst/>
+          </a:prstGeom>
+        </p:spPr>
+      </p:pic>
+      <p:sp>
+        <p:nvSpPr>
+          <p:cNvPr id="7" name="Text 4"/>
+          <p:cNvSpPr txBox="1"/>
+          <p:nvPr/>
+        </p:nvSpPr>
+        <p:spPr>
+          <a:xfrm>
+            <a:off x="640080" y="4206240"/>
+            <a:ext cx="5257800" cy="548640"/>
+          </a:xfrm>
+          <a:prstGeom prst="rect">
+            <a:avLst/>
+          </a:prstGeom>
+          <a:noFill/>
+          <a:ln/>
+        </p:spPr>
+        <p:txBody>
+          <a:bodyPr wrap="square" lIns="0" tIns="0" rIns="0" bIns="0" rtlCol="0" anchor="ctr"/>
+          <a:lstStyle/>
+          <a:p>
+            <a:pPr algn="ctr" indent="0" marL="0">
+              <a:buNone/>
+            </a:pPr>
+            <a:r>
+              <a:rPr lang="en-US" sz="2600" b="1" dirty="0">
+                <a:solidFill>
+                  <a:srgbClr val="111827"/>
+                </a:solidFill>
+              </a:rPr>
+              <a:t>It already knows it</a:t>
+            </a:r>
+            <a:endParaRPr lang="en-US" sz="2600" dirty="0"/>
+          </a:p>
+        </p:txBody>
+      </p:sp>
+      <p:sp>
+        <p:nvSpPr>
+          <p:cNvPr id="8" name="Text 5"/>
+          <p:cNvSpPr txBox="1"/>
+          <p:nvPr/>
+        </p:nvSpPr>
+        <p:spPr>
+          <a:xfrm>
+            <a:off x="640080" y="4800600"/>
+            <a:ext cx="5257800" cy="365760"/>
+          </a:xfrm>
+          <a:prstGeom prst="rect">
+            <a:avLst/>
+          </a:prstGeom>
+          <a:noFill/>
+          <a:ln/>
+        </p:spPr>
+        <p:txBody>
+          <a:bodyPr wrap="square" lIns="0" tIns="0" rIns="0" bIns="0" rtlCol="0" anchor="ctr"/>
+          <a:lstStyle/>
+          <a:p>
+            <a:pPr algn="ctr" indent="0" marL="0">
+              <a:buNone/>
+            </a:pPr>
+            <a:r>
+              <a:rPr lang="en-US" sz="1600" dirty="0">
+                <a:solidFill>
+                  <a:srgbClr val="6B7280"/>
+                </a:solidFill>
+              </a:rPr>
+              <a:t>it just doesn't say it</a:t>
+            </a:r>
+            <a:endParaRPr lang="en-US" sz="1600" dirty="0"/>
+          </a:p>
+        </p:txBody>
+      </p:sp>
+      <p:sp>
+        <p:nvSpPr>
+          <p:cNvPr id="9" name="Shape 6"/>
+          <p:cNvSpPr/>
+          <p:nvPr/>
+        </p:nvSpPr>
+        <p:spPr>
+          <a:xfrm>
+            <a:off x="6263640" y="2194560"/>
+            <a:ext cx="5257800" cy="3611880"/>
+          </a:xfrm>
+          <a:prstGeom prst="roundRect">
+            <a:avLst>
+              <a:gd name="adj" fmla="val 3038"/>
+            </a:avLst>
           </a:prstGeom>
           <a:solidFill>
-            <a:srgbClr val="C2410C"/>
+            <a:srgbClr val="FFF7ED"/>
           </a:solidFill>
           <a:ln w="12700">
             <a:solidFill>
-              <a:srgbClr val="C2410C"/>
+              <a:srgbClr val="FDBA74"/>
             </a:solidFill>
             <a:prstDash val="solid"/>
           </a:ln>
@@ -6413,413 +7595,14 @@
       </p:sp>
       <p:sp>
         <p:nvSpPr>
-          <p:cNvPr id="6" name="Shape 4"/>
-          <p:cNvSpPr/>
-          <p:nvPr/>
-        </p:nvSpPr>
-        <p:spPr>
-          <a:xfrm>
-            <a:off x="1737360" y="2697480"/>
-            <a:ext cx="201168" cy="201168"/>
-          </a:xfrm>
-          <a:prstGeom prst="ellipse">
-            <a:avLst/>
-          </a:prstGeom>
-          <a:solidFill>
-            <a:srgbClr val="C2410C"/>
-          </a:solidFill>
-          <a:ln w="12700">
-            <a:solidFill>
-              <a:srgbClr val="C2410C"/>
-            </a:solidFill>
-            <a:prstDash val="solid"/>
-          </a:ln>
-        </p:spPr>
-      </p:sp>
-      <p:sp>
-        <p:nvSpPr>
-          <p:cNvPr id="7" name="Shape 5"/>
-          <p:cNvSpPr/>
-          <p:nvPr/>
-        </p:nvSpPr>
-        <p:spPr>
-          <a:xfrm>
-            <a:off x="1508760" y="3520440"/>
-            <a:ext cx="201168" cy="201168"/>
-          </a:xfrm>
-          <a:prstGeom prst="ellipse">
-            <a:avLst/>
-          </a:prstGeom>
-          <a:solidFill>
-            <a:srgbClr val="C2410C"/>
-          </a:solidFill>
-          <a:ln w="12700">
-            <a:solidFill>
-              <a:srgbClr val="C2410C"/>
-            </a:solidFill>
-            <a:prstDash val="solid"/>
-          </a:ln>
-        </p:spPr>
-      </p:sp>
-      <p:sp>
-        <p:nvSpPr>
-          <p:cNvPr id="8" name="Shape 6"/>
-          <p:cNvSpPr/>
-          <p:nvPr/>
-        </p:nvSpPr>
-        <p:spPr>
-          <a:xfrm>
-            <a:off x="2103120" y="3246120"/>
-            <a:ext cx="201168" cy="201168"/>
-          </a:xfrm>
-          <a:prstGeom prst="ellipse">
-            <a:avLst/>
-          </a:prstGeom>
-          <a:solidFill>
-            <a:srgbClr val="C2410C"/>
-          </a:solidFill>
-          <a:ln w="12700">
-            <a:solidFill>
-              <a:srgbClr val="C2410C"/>
-            </a:solidFill>
-            <a:prstDash val="solid"/>
-          </a:ln>
-        </p:spPr>
-      </p:sp>
-      <p:sp>
-        <p:nvSpPr>
-          <p:cNvPr id="9" name="Shape 7"/>
-          <p:cNvSpPr/>
-          <p:nvPr/>
-        </p:nvSpPr>
-        <p:spPr>
-          <a:xfrm>
-            <a:off x="1188720" y="4069080"/>
-            <a:ext cx="201168" cy="201168"/>
-          </a:xfrm>
-          <a:prstGeom prst="ellipse">
-            <a:avLst/>
-          </a:prstGeom>
-          <a:solidFill>
-            <a:srgbClr val="C2410C"/>
-          </a:solidFill>
-          <a:ln w="12700">
-            <a:solidFill>
-              <a:srgbClr val="C2410C"/>
-            </a:solidFill>
-            <a:prstDash val="solid"/>
-          </a:ln>
-        </p:spPr>
-      </p:sp>
-      <p:sp>
-        <p:nvSpPr>
-          <p:cNvPr id="10" name="Shape 8"/>
-          <p:cNvSpPr/>
-          <p:nvPr/>
-        </p:nvSpPr>
-        <p:spPr>
-          <a:xfrm>
-            <a:off x="1828800" y="3977640"/>
-            <a:ext cx="201168" cy="201168"/>
-          </a:xfrm>
-          <a:prstGeom prst="ellipse">
-            <a:avLst/>
-          </a:prstGeom>
-          <a:solidFill>
-            <a:srgbClr val="C2410C"/>
-          </a:solidFill>
-          <a:ln w="12700">
-            <a:solidFill>
-              <a:srgbClr val="C2410C"/>
-            </a:solidFill>
-            <a:prstDash val="solid"/>
-          </a:ln>
-        </p:spPr>
-      </p:sp>
-      <p:sp>
-        <p:nvSpPr>
-          <p:cNvPr id="11" name="Shape 9"/>
-          <p:cNvSpPr/>
-          <p:nvPr/>
-        </p:nvSpPr>
-        <p:spPr>
-          <a:xfrm>
-            <a:off x="2286000" y="3703320"/>
-            <a:ext cx="201168" cy="201168"/>
-          </a:xfrm>
-          <a:prstGeom prst="ellipse">
-            <a:avLst/>
-          </a:prstGeom>
-          <a:solidFill>
-            <a:srgbClr val="C2410C"/>
-          </a:solidFill>
-          <a:ln w="12700">
-            <a:solidFill>
-              <a:srgbClr val="C2410C"/>
-            </a:solidFill>
-            <a:prstDash val="solid"/>
-          </a:ln>
-        </p:spPr>
-      </p:sp>
-      <p:sp>
-        <p:nvSpPr>
-          <p:cNvPr id="12" name="Shape 10"/>
-          <p:cNvSpPr/>
-          <p:nvPr/>
-        </p:nvSpPr>
-        <p:spPr>
-          <a:xfrm>
-            <a:off x="1554480" y="4526280"/>
-            <a:ext cx="201168" cy="201168"/>
-          </a:xfrm>
-          <a:prstGeom prst="ellipse">
-            <a:avLst/>
-          </a:prstGeom>
-          <a:solidFill>
-            <a:srgbClr val="C2410C"/>
-          </a:solidFill>
-          <a:ln w="12700">
-            <a:solidFill>
-              <a:srgbClr val="C2410C"/>
-            </a:solidFill>
-            <a:prstDash val="solid"/>
-          </a:ln>
-        </p:spPr>
-      </p:sp>
-      <p:sp>
-        <p:nvSpPr>
-          <p:cNvPr id="13" name="Shape 11"/>
-          <p:cNvSpPr/>
-          <p:nvPr/>
-        </p:nvSpPr>
-        <p:spPr>
-          <a:xfrm>
-            <a:off x="3657600" y="3246120"/>
-            <a:ext cx="201168" cy="201168"/>
-          </a:xfrm>
-          <a:prstGeom prst="ellipse">
-            <a:avLst/>
-          </a:prstGeom>
-          <a:solidFill>
-            <a:srgbClr val="2563EB"/>
-          </a:solidFill>
-          <a:ln w="12700">
-            <a:solidFill>
-              <a:srgbClr val="2563EB"/>
-            </a:solidFill>
-            <a:prstDash val="solid"/>
-          </a:ln>
-        </p:spPr>
-      </p:sp>
-      <p:sp>
-        <p:nvSpPr>
-          <p:cNvPr id="14" name="Shape 12"/>
-          <p:cNvSpPr/>
-          <p:nvPr/>
-        </p:nvSpPr>
-        <p:spPr>
-          <a:xfrm>
-            <a:off x="4114800" y="2880360"/>
-            <a:ext cx="201168" cy="201168"/>
-          </a:xfrm>
-          <a:prstGeom prst="ellipse">
-            <a:avLst/>
-          </a:prstGeom>
-          <a:solidFill>
-            <a:srgbClr val="2563EB"/>
-          </a:solidFill>
-          <a:ln w="12700">
-            <a:solidFill>
-              <a:srgbClr val="2563EB"/>
-            </a:solidFill>
-            <a:prstDash val="solid"/>
-          </a:ln>
-        </p:spPr>
-      </p:sp>
-      <p:sp>
-        <p:nvSpPr>
-          <p:cNvPr id="15" name="Shape 13"/>
-          <p:cNvSpPr/>
-          <p:nvPr/>
-        </p:nvSpPr>
-        <p:spPr>
-          <a:xfrm>
-            <a:off x="4480560" y="3520440"/>
-            <a:ext cx="201168" cy="201168"/>
-          </a:xfrm>
-          <a:prstGeom prst="ellipse">
-            <a:avLst/>
-          </a:prstGeom>
-          <a:solidFill>
-            <a:srgbClr val="2563EB"/>
-          </a:solidFill>
-          <a:ln w="12700">
-            <a:solidFill>
-              <a:srgbClr val="2563EB"/>
-            </a:solidFill>
-            <a:prstDash val="solid"/>
-          </a:ln>
-        </p:spPr>
-      </p:sp>
-      <p:sp>
-        <p:nvSpPr>
-          <p:cNvPr id="16" name="Shape 14"/>
-          <p:cNvSpPr/>
-          <p:nvPr/>
-        </p:nvSpPr>
-        <p:spPr>
-          <a:xfrm>
-            <a:off x="3840480" y="3886200"/>
-            <a:ext cx="201168" cy="201168"/>
-          </a:xfrm>
-          <a:prstGeom prst="ellipse">
-            <a:avLst/>
-          </a:prstGeom>
-          <a:solidFill>
-            <a:srgbClr val="2563EB"/>
-          </a:solidFill>
-          <a:ln w="12700">
-            <a:solidFill>
-              <a:srgbClr val="2563EB"/>
-            </a:solidFill>
-            <a:prstDash val="solid"/>
-          </a:ln>
-        </p:spPr>
-      </p:sp>
-      <p:sp>
-        <p:nvSpPr>
-          <p:cNvPr id="17" name="Shape 15"/>
-          <p:cNvSpPr/>
-          <p:nvPr/>
-        </p:nvSpPr>
-        <p:spPr>
-          <a:xfrm>
-            <a:off x="4297680" y="4251960"/>
-            <a:ext cx="201168" cy="201168"/>
-          </a:xfrm>
-          <a:prstGeom prst="ellipse">
-            <a:avLst/>
-          </a:prstGeom>
-          <a:solidFill>
-            <a:srgbClr val="2563EB"/>
-          </a:solidFill>
-          <a:ln w="12700">
-            <a:solidFill>
-              <a:srgbClr val="2563EB"/>
-            </a:solidFill>
-            <a:prstDash val="solid"/>
-          </a:ln>
-        </p:spPr>
-      </p:sp>
-      <p:sp>
-        <p:nvSpPr>
-          <p:cNvPr id="18" name="Shape 16"/>
-          <p:cNvSpPr/>
-          <p:nvPr/>
-        </p:nvSpPr>
-        <p:spPr>
-          <a:xfrm>
-            <a:off x="3474720" y="4617720"/>
-            <a:ext cx="201168" cy="201168"/>
-          </a:xfrm>
-          <a:prstGeom prst="ellipse">
-            <a:avLst/>
-          </a:prstGeom>
-          <a:solidFill>
-            <a:srgbClr val="2563EB"/>
-          </a:solidFill>
-          <a:ln w="12700">
-            <a:solidFill>
-              <a:srgbClr val="2563EB"/>
-            </a:solidFill>
-            <a:prstDash val="solid"/>
-          </a:ln>
-        </p:spPr>
-      </p:sp>
-      <p:sp>
-        <p:nvSpPr>
-          <p:cNvPr id="19" name="Shape 17"/>
-          <p:cNvSpPr/>
-          <p:nvPr/>
-        </p:nvSpPr>
-        <p:spPr>
-          <a:xfrm>
-            <a:off x="4023360" y="4892040"/>
-            <a:ext cx="201168" cy="201168"/>
-          </a:xfrm>
-          <a:prstGeom prst="ellipse">
-            <a:avLst/>
-          </a:prstGeom>
-          <a:solidFill>
-            <a:srgbClr val="2563EB"/>
-          </a:solidFill>
-          <a:ln w="12700">
-            <a:solidFill>
-              <a:srgbClr val="2563EB"/>
-            </a:solidFill>
-            <a:prstDash val="solid"/>
-          </a:ln>
-        </p:spPr>
-      </p:sp>
-      <p:sp>
-        <p:nvSpPr>
-          <p:cNvPr id="20" name="Shape 18"/>
-          <p:cNvSpPr/>
-          <p:nvPr/>
-        </p:nvSpPr>
-        <p:spPr>
-          <a:xfrm>
-            <a:off x="4572000" y="3977640"/>
-            <a:ext cx="201168" cy="201168"/>
-          </a:xfrm>
-          <a:prstGeom prst="ellipse">
-            <a:avLst/>
-          </a:prstGeom>
-          <a:solidFill>
-            <a:srgbClr val="2563EB"/>
-          </a:solidFill>
-          <a:ln w="12700">
-            <a:solidFill>
-              <a:srgbClr val="2563EB"/>
-            </a:solidFill>
-            <a:prstDash val="solid"/>
-          </a:ln>
-        </p:spPr>
-      </p:sp>
-      <p:sp>
-        <p:nvSpPr>
-          <p:cNvPr id="21" name="Shape 19"/>
-          <p:cNvSpPr/>
-          <p:nvPr/>
-        </p:nvSpPr>
-        <p:spPr>
-          <a:xfrm flipH="1">
-            <a:off x="2011680" y="3611880"/>
-            <a:ext cx="2011680" cy="274320"/>
-          </a:xfrm>
-          <a:prstGeom prst="line">
-            <a:avLst/>
-          </a:prstGeom>
-          <a:noFill/>
-          <a:ln w="38100">
-            <a:solidFill>
-              <a:srgbClr val="111827"/>
-            </a:solidFill>
-            <a:prstDash val="solid"/>
-            <a:tailEnd type="triangle"/>
-          </a:ln>
-        </p:spPr>
-      </p:sp>
-      <p:sp>
-        <p:nvSpPr>
-          <p:cNvPr id="22" name="Text 20"/>
+          <p:cNvPr id="10" name="Text 7"/>
           <p:cNvSpPr txBox="1"/>
           <p:nvPr/>
         </p:nvSpPr>
         <p:spPr>
           <a:xfrm>
-            <a:off x="2834640" y="3154680"/>
-            <a:ext cx="457200" cy="365760"/>
+            <a:off x="6263640" y="2514600"/>
+            <a:ext cx="5257800" cy="274320"/>
           </a:xfrm>
           <a:prstGeom prst="rect">
             <a:avLst/>
@@ -6831,31 +7614,91 @@
           <a:bodyPr wrap="square" lIns="0" tIns="0" rIns="0" bIns="0" rtlCol="0" anchor="ctr"/>
           <a:lstStyle/>
           <a:p>
-            <a:pPr indent="0" marL="0">
-              <a:buNone/>
-            </a:pPr>
-            <a:r>
-              <a:rPr lang="en-US" sz="2000" b="1" dirty="0">
+            <a:pPr algn="ctr" indent="0" marL="0">
+              <a:buNone/>
+            </a:pPr>
+            <a:r>
+              <a:rPr lang="en-US" sz="1200" b="1" spc="300" kern="0" dirty="0">
+                <a:solidFill>
+                  <a:srgbClr val="C2410C"/>
+                </a:solidFill>
+              </a:rPr>
+              <a:t>WAY 2</a:t>
+            </a:r>
+            <a:endParaRPr lang="en-US" sz="1200" dirty="0"/>
+          </a:p>
+        </p:txBody>
+      </p:sp>
+      <p:pic>
+        <p:nvPicPr>
+          <p:cNvPr id="11" name="Image 1" descr="preencoded.png">    </p:cNvPr>
+          <p:cNvPicPr>
+            <a:picLocks noChangeAspect="1"/>
+          </p:cNvPicPr>
+          <p:nvPr/>
+        </p:nvPicPr>
+        <p:blipFill>
+          <a:blip r:embed="rId2"/>
+          <a:stretch>
+            <a:fillRect/>
+          </a:stretch>
+        </p:blipFill>
+        <p:spPr>
+          <a:xfrm>
+            <a:off x="8343900" y="2926080"/>
+            <a:ext cx="1097280" cy="1097280"/>
+          </a:xfrm>
+          <a:prstGeom prst="rect">
+            <a:avLst/>
+          </a:prstGeom>
+        </p:spPr>
+      </p:pic>
+      <p:sp>
+        <p:nvSpPr>
+          <p:cNvPr id="12" name="Text 8"/>
+          <p:cNvSpPr txBox="1"/>
+          <p:nvPr/>
+        </p:nvSpPr>
+        <p:spPr>
+          <a:xfrm>
+            <a:off x="6263640" y="4206240"/>
+            <a:ext cx="5257800" cy="548640"/>
+          </a:xfrm>
+          <a:prstGeom prst="rect">
+            <a:avLst/>
+          </a:prstGeom>
+          <a:noFill/>
+          <a:ln/>
+        </p:spPr>
+        <p:txBody>
+          <a:bodyPr wrap="square" lIns="0" tIns="0" rIns="0" bIns="0" rtlCol="0" anchor="ctr"/>
+          <a:lstStyle/>
+          <a:p>
+            <a:pPr algn="ctr" indent="0" marL="0">
+              <a:buNone/>
+            </a:pPr>
+            <a:r>
+              <a:rPr lang="en-US" sz="2600" b="1" dirty="0">
                 <a:solidFill>
                   <a:srgbClr val="111827"/>
                 </a:solidFill>
               </a:rPr>
-              <a:t>v</a:t>
-            </a:r>
-            <a:endParaRPr lang="en-US" sz="2000" dirty="0"/>
-          </a:p>
-        </p:txBody>
-      </p:sp>
-      <p:sp>
-        <p:nvSpPr>
-          <p:cNvPr id="23" name="Text 21"/>
+              <a:t>It never read it</a:t>
+            </a:r>
+            <a:endParaRPr lang="en-US" sz="2600" dirty="0"/>
+          </a:p>
+        </p:txBody>
+      </p:sp>
+      <p:sp>
+        <p:nvSpPr>
+          <p:cNvPr id="13" name="Text 9"/>
           <p:cNvSpPr txBox="1"/>
           <p:nvPr/>
         </p:nvSpPr>
         <p:spPr>
           <a:xfrm>
-            <a:off x="914400" y="4892040"/>
-            <a:ext cx="1828800" cy="365760"/>
+            <a:off x="6263640" y="4800600"/>
+            <a:ext cx="5257800" cy="365760"/>
           </a:xfrm>
           <a:prstGeom prst="rect">
             <a:avLst/>
@@ -6867,169 +7710,16 @@
           <a:bodyPr wrap="square" lIns="0" tIns="0" rIns="0" bIns="0" rtlCol="0" anchor="ctr"/>
           <a:lstStyle/>
           <a:p>
-            <a:pPr indent="0" marL="0">
-              <a:buNone/>
-            </a:pPr>
-            <a:r>
-              <a:rPr lang="en-US" sz="1400" b="1" dirty="0">
-                <a:solidFill>
-                  <a:srgbClr val="C2410C"/>
-                </a:solidFill>
-              </a:rPr>
-              <a:t>medical</a:t>
-            </a:r>
-            <a:endParaRPr lang="en-US" sz="1400" dirty="0"/>
-          </a:p>
-        </p:txBody>
-      </p:sp>
-      <p:sp>
-        <p:nvSpPr>
-          <p:cNvPr id="24" name="Text 22"/>
-          <p:cNvSpPr txBox="1"/>
-          <p:nvPr/>
-        </p:nvSpPr>
-        <p:spPr>
-          <a:xfrm>
-            <a:off x="3383280" y="2423160"/>
-            <a:ext cx="1828800" cy="365760"/>
-          </a:xfrm>
-          <a:prstGeom prst="rect">
-            <a:avLst/>
-          </a:prstGeom>
-          <a:noFill/>
-          <a:ln/>
-        </p:spPr>
-        <p:txBody>
-          <a:bodyPr wrap="square" lIns="0" tIns="0" rIns="0" bIns="0" rtlCol="0" anchor="ctr"/>
-          <a:lstStyle/>
-          <a:p>
-            <a:pPr algn="r" indent="0" marL="0">
-              <a:buNone/>
-            </a:pPr>
-            <a:r>
-              <a:rPr lang="en-US" sz="1400" b="1" dirty="0">
-                <a:solidFill>
-                  <a:srgbClr val="2563EB"/>
-                </a:solidFill>
-              </a:rPr>
-              <a:t>everything else</a:t>
-            </a:r>
-            <a:endParaRPr lang="en-US" sz="1400" dirty="0"/>
-          </a:p>
-        </p:txBody>
-      </p:sp>
-      <p:sp>
-        <p:nvSpPr>
-          <p:cNvPr id="25" name="Shape 23"/>
-          <p:cNvSpPr/>
-          <p:nvPr/>
-        </p:nvSpPr>
-        <p:spPr>
-          <a:xfrm>
-            <a:off x="6400800" y="2377440"/>
-            <a:ext cx="3108960" cy="457200"/>
-          </a:xfrm>
-          <a:prstGeom prst="roundRect">
-            <a:avLst>
-              <a:gd name="adj" fmla="val 12000"/>
-            </a:avLst>
-          </a:prstGeom>
-          <a:solidFill>
-            <a:srgbClr val="E5E7EB"/>
-          </a:solidFill>
-          <a:ln w="12700">
-            <a:solidFill>
-              <a:srgbClr val="E5E7EB"/>
-            </a:solidFill>
-            <a:prstDash val="solid"/>
-          </a:ln>
-        </p:spPr>
-      </p:sp>
-      <p:sp>
-        <p:nvSpPr>
-          <p:cNvPr id="26" name="Shape 24"/>
-          <p:cNvSpPr/>
-          <p:nvPr/>
-        </p:nvSpPr>
-        <p:spPr>
-          <a:xfrm>
-            <a:off x="6400800" y="2944368"/>
-            <a:ext cx="3108960" cy="457200"/>
-          </a:xfrm>
-          <a:prstGeom prst="roundRect">
-            <a:avLst>
-              <a:gd name="adj" fmla="val 12000"/>
-            </a:avLst>
-          </a:prstGeom>
-          <a:solidFill>
-            <a:srgbClr val="E5E7EB"/>
-          </a:solidFill>
-          <a:ln w="12700">
-            <a:solidFill>
-              <a:srgbClr val="E5E7EB"/>
-            </a:solidFill>
-            <a:prstDash val="solid"/>
-          </a:ln>
-        </p:spPr>
-      </p:sp>
-      <p:sp>
-        <p:nvSpPr>
-          <p:cNvPr id="27" name="Shape 25"/>
-          <p:cNvSpPr/>
-          <p:nvPr/>
-        </p:nvSpPr>
-        <p:spPr>
-          <a:xfrm>
-            <a:off x="6400800" y="3511296"/>
-            <a:ext cx="3108960" cy="457200"/>
-          </a:xfrm>
-          <a:prstGeom prst="roundRect">
-            <a:avLst>
-              <a:gd name="adj" fmla="val 12000"/>
-            </a:avLst>
-          </a:prstGeom>
-          <a:solidFill>
-            <a:srgbClr val="C2410C"/>
-          </a:solidFill>
-          <a:ln w="12700">
-            <a:solidFill>
-              <a:srgbClr val="C2410C"/>
-            </a:solidFill>
-            <a:prstDash val="solid"/>
-          </a:ln>
-        </p:spPr>
-      </p:sp>
-      <p:sp>
-        <p:nvSpPr>
-          <p:cNvPr id="28" name="Text 26"/>
-          <p:cNvSpPr txBox="1"/>
-          <p:nvPr/>
-        </p:nvSpPr>
-        <p:spPr>
-          <a:xfrm>
-            <a:off x="6400800" y="3511296"/>
-            <a:ext cx="3108960" cy="457200"/>
-          </a:xfrm>
-          <a:prstGeom prst="rect">
-            <a:avLst/>
-          </a:prstGeom>
-          <a:noFill/>
-          <a:ln/>
-        </p:spPr>
-        <p:txBody>
-          <a:bodyPr wrap="square" lIns="0" tIns="0" rIns="0" bIns="0" rtlCol="0" anchor="ctr"/>
-          <a:lstStyle/>
-          <a:p>
             <a:pPr algn="ctr" indent="0" marL="0">
               <a:buNone/>
             </a:pPr>
             <a:r>
-              <a:rPr lang="en-US" sz="1600" b="1" dirty="0">
-                <a:solidFill>
-                  <a:srgbClr val="FFFFFF"/>
-                </a:solidFill>
-              </a:rPr>
-              <a:t>MLP, layer 8</a:t>
+              <a:rPr lang="en-US" sz="1600" dirty="0">
+                <a:solidFill>
+                  <a:srgbClr val="6B7280"/>
+                </a:solidFill>
+              </a:rPr>
+              <a:t>and has to learn, in some language</a:t>
             </a:r>
             <a:endParaRPr lang="en-US" sz="1600" dirty="0"/>
           </a:p>
@@ -7037,97 +7727,7 @@
       </p:sp>
       <p:sp>
         <p:nvSpPr>
-          <p:cNvPr id="29" name="Text 27"/>
-          <p:cNvSpPr txBox="1"/>
-          <p:nvPr/>
-        </p:nvSpPr>
-        <p:spPr>
-          <a:xfrm>
-            <a:off x="9738360" y="3465576"/>
-            <a:ext cx="1097280" cy="548640"/>
-          </a:xfrm>
-          <a:prstGeom prst="rect">
-            <a:avLst/>
-          </a:prstGeom>
-          <a:noFill/>
-          <a:ln/>
-        </p:spPr>
-        <p:txBody>
-          <a:bodyPr wrap="square" lIns="0" tIns="0" rIns="0" bIns="0" rtlCol="0" anchor="ctr"/>
-          <a:lstStyle/>
-          <a:p>
-            <a:pPr indent="0" marL="0">
-              <a:buNone/>
-            </a:pPr>
-            <a:r>
-              <a:rPr lang="en-US" sz="2800" b="1" dirty="0">
-                <a:solidFill>
-                  <a:srgbClr val="C2410C"/>
-                </a:solidFill>
-              </a:rPr>
-              <a:t>+ v</a:t>
-            </a:r>
-            <a:endParaRPr lang="en-US" sz="2800" dirty="0"/>
-          </a:p>
-        </p:txBody>
-      </p:sp>
-      <p:sp>
-        <p:nvSpPr>
-          <p:cNvPr id="30" name="Shape 28"/>
-          <p:cNvSpPr/>
-          <p:nvPr/>
-        </p:nvSpPr>
-        <p:spPr>
-          <a:xfrm>
-            <a:off x="6400800" y="4078224"/>
-            <a:ext cx="3108960" cy="457200"/>
-          </a:xfrm>
-          <a:prstGeom prst="roundRect">
-            <a:avLst>
-              <a:gd name="adj" fmla="val 12000"/>
-            </a:avLst>
-          </a:prstGeom>
-          <a:solidFill>
-            <a:srgbClr val="E5E7EB"/>
-          </a:solidFill>
-          <a:ln w="12700">
-            <a:solidFill>
-              <a:srgbClr val="E5E7EB"/>
-            </a:solidFill>
-            <a:prstDash val="solid"/>
-          </a:ln>
-        </p:spPr>
-      </p:sp>
-      <p:sp>
-        <p:nvSpPr>
-          <p:cNvPr id="31" name="Shape 29"/>
-          <p:cNvSpPr/>
-          <p:nvPr/>
-        </p:nvSpPr>
-        <p:spPr>
-          <a:xfrm>
-            <a:off x="6400800" y="4645152"/>
-            <a:ext cx="3108960" cy="457200"/>
-          </a:xfrm>
-          <a:prstGeom prst="roundRect">
-            <a:avLst>
-              <a:gd name="adj" fmla="val 12000"/>
-            </a:avLst>
-          </a:prstGeom>
-          <a:solidFill>
-            <a:srgbClr val="E5E7EB"/>
-          </a:solidFill>
-          <a:ln w="12700">
-            <a:solidFill>
-              <a:srgbClr val="E5E7EB"/>
-            </a:solidFill>
-            <a:prstDash val="solid"/>
-          </a:ln>
-        </p:spPr>
-      </p:sp>
-      <p:sp>
-        <p:nvSpPr>
-          <p:cNvPr id="32" name="Text 0"/>
+          <p:cNvPr id="14" name="Text 0"/>
           <p:cNvSpPr/>
           <p:nvPr>
             <p:ph idx="102" type="body" hasCustomPrompt="1"/>
@@ -7157,7 +7757,7 @@
                   <a:schemeClr val="tx1"/>
                 </a:solidFill>
               </a:rPr>
-              <a:t>Yes: one vector addition. </a:t>
+              <a:t>Way 1 needs no training at all. </a:t>
             </a:r>
             <a:pPr indent="0" marL="0">
               <a:buNone/>
@@ -7168,7 +7768,7 @@
                   <a:srgbClr val="6B7280"/>
                 </a:solidFill>
               </a:rPr>
-              <a:t>Compute the “medical” direction once, add it at inference.</a:t>
+              <a:t>Way 2 is where the language question comes in.</a:t>
             </a:r>
             <a:endParaRPr lang="en-US" sz="1800" dirty="0"/>
           </a:p>
@@ -7276,7 +7876,7 @@
                   <a:schemeClr val="accent1"/>
                 </a:solidFill>
               </a:rPr>
-              <a:t>WAY 1 · QUESTION 3</a:t>
+              <a:t>WAY 1 · THE HUNCH</a:t>
             </a:r>
             <a:endParaRPr lang="en-US" sz="1200" dirty="0"/>
           </a:p>
@@ -7314,7 +7914,18 @@
                   <a:schemeClr val="tx1"/>
                 </a:solidFill>
               </a:rPr>
-              <a:t>Where should we nudge?</a:t>
+              <a:t>Ever had a word on the tip of your tongue? </a:t>
+            </a:r>
+            <a:pPr algn="l" indent="0" marL="0">
+              <a:buNone/>
+            </a:pPr>
+            <a:r>
+              <a:rPr lang="en-US" sz="3200" b="1" i="1" dirty="0">
+                <a:solidFill>
+                  <a:srgbClr val="6B7280"/>
+                </a:solidFill>
+              </a:rPr>
+              <a:t>So does the model.</a:t>
             </a:r>
             <a:endParaRPr lang="en-US" sz="3200" dirty="0"/>
           </a:p>
@@ -7328,18 +7939,18 @@
         </p:nvSpPr>
         <p:spPr>
           <a:xfrm>
-            <a:off x="914400" y="4023360"/>
-            <a:ext cx="1280160" cy="1188720"/>
+            <a:off x="822960" y="4937760"/>
+            <a:ext cx="822960" cy="182880"/>
           </a:xfrm>
           <a:prstGeom prst="rect">
             <a:avLst/>
           </a:prstGeom>
           <a:solidFill>
-            <a:srgbClr val="9CA3AF"/>
+            <a:srgbClr val="FDBA74"/>
           </a:solidFill>
           <a:ln w="12700">
             <a:solidFill>
-              <a:srgbClr val="9CA3AF"/>
+              <a:srgbClr val="FDBA74"/>
             </a:solidFill>
             <a:prstDash val="solid"/>
           </a:ln>
@@ -7353,8 +7964,8 @@
         </p:nvSpPr>
         <p:spPr>
           <a:xfrm>
-            <a:off x="731520" y="3639312"/>
-            <a:ext cx="1645920" cy="365760"/>
+            <a:off x="640080" y="4553712"/>
+            <a:ext cx="1188720" cy="365760"/>
           </a:xfrm>
           <a:prstGeom prst="rect">
             <a:avLst/>
@@ -7375,7 +7986,7 @@
                   <a:srgbClr val="6B7280"/>
                 </a:solidFill>
               </a:rPr>
-              <a:t>+21%</a:t>
+              <a:t>+1</a:t>
             </a:r>
             <a:endParaRPr lang="en-US" sz="1600" dirty="0"/>
           </a:p>
@@ -7383,24 +7994,60 @@
       </p:sp>
       <p:sp>
         <p:nvSpPr>
-          <p:cNvPr id="6" name="Shape 4"/>
-          <p:cNvSpPr/>
-          <p:nvPr/>
-        </p:nvSpPr>
-        <p:spPr>
-          <a:xfrm>
-            <a:off x="2651760" y="3566160"/>
-            <a:ext cx="1280160" cy="1645920"/>
+          <p:cNvPr id="6" name="Text 4"/>
+          <p:cNvSpPr txBox="1"/>
+          <p:nvPr/>
+        </p:nvSpPr>
+        <p:spPr>
+          <a:xfrm>
+            <a:off x="731520" y="5193792"/>
+            <a:ext cx="1005840" cy="274320"/>
+          </a:xfrm>
+          <a:prstGeom prst="rect">
+            <a:avLst/>
+          </a:prstGeom>
+          <a:noFill/>
+          <a:ln/>
+        </p:spPr>
+        <p:txBody>
+          <a:bodyPr wrap="square" lIns="0" tIns="0" rIns="0" bIns="0" rtlCol="0" anchor="ctr"/>
+          <a:lstStyle/>
+          <a:p>
+            <a:pPr algn="ctr" indent="0" marL="0">
+              <a:buNone/>
+            </a:pPr>
+            <a:r>
+              <a:rPr lang="en-US" sz="1300" dirty="0">
+                <a:solidFill>
+                  <a:srgbClr val="6B7280"/>
+                </a:solidFill>
+              </a:rPr>
+              <a:t>once</a:t>
+            </a:r>
+            <a:endParaRPr lang="en-US" sz="1300" dirty="0"/>
+          </a:p>
+        </p:txBody>
+      </p:sp>
+      <p:sp>
+        <p:nvSpPr>
+          <p:cNvPr id="7" name="Shape 5"/>
+          <p:cNvSpPr/>
+          <p:nvPr/>
+        </p:nvSpPr>
+        <p:spPr>
+          <a:xfrm>
+            <a:off x="1920240" y="4709160"/>
+            <a:ext cx="822960" cy="411480"/>
           </a:xfrm>
           <a:prstGeom prst="rect">
             <a:avLst/>
           </a:prstGeom>
           <a:solidFill>
-            <a:srgbClr val="9CA3AF"/>
+            <a:srgbClr val="FB923C"/>
           </a:solidFill>
           <a:ln w="12700">
             <a:solidFill>
-              <a:srgbClr val="9CA3AF"/>
+              <a:srgbClr val="FB923C"/>
             </a:solidFill>
             <a:prstDash val="solid"/>
           </a:ln>
@@ -7408,14 +8055,14 @@
       </p:sp>
       <p:sp>
         <p:nvSpPr>
-          <p:cNvPr id="7" name="Text 5"/>
+          <p:cNvPr id="8" name="Text 6"/>
           <p:cNvSpPr txBox="1"/>
           <p:nvPr/>
         </p:nvSpPr>
         <p:spPr>
           <a:xfrm>
-            <a:off x="2468880" y="3182112"/>
-            <a:ext cx="1645920" cy="365760"/>
+            <a:off x="1737360" y="4325112"/>
+            <a:ext cx="1188720" cy="365760"/>
           </a:xfrm>
           <a:prstGeom prst="rect">
             <a:avLst/>
@@ -7436,7 +8083,7 @@
                   <a:srgbClr val="6B7280"/>
                 </a:solidFill>
               </a:rPr>
-              <a:t>+29%</a:t>
+              <a:t>+2</a:t>
             </a:r>
             <a:endParaRPr lang="en-US" sz="1600" dirty="0"/>
           </a:p>
@@ -7444,14 +8091,244 @@
       </p:sp>
       <p:sp>
         <p:nvSpPr>
-          <p:cNvPr id="8" name="Shape 6"/>
-          <p:cNvSpPr/>
-          <p:nvPr/>
-        </p:nvSpPr>
-        <p:spPr>
-          <a:xfrm>
-            <a:off x="4389120" y="2651760"/>
-            <a:ext cx="1280160" cy="2560320"/>
+          <p:cNvPr id="9" name="Text 7"/>
+          <p:cNvSpPr txBox="1"/>
+          <p:nvPr/>
+        </p:nvSpPr>
+        <p:spPr>
+          <a:xfrm>
+            <a:off x="1828800" y="5193792"/>
+            <a:ext cx="1005840" cy="274320"/>
+          </a:xfrm>
+          <a:prstGeom prst="rect">
+            <a:avLst/>
+          </a:prstGeom>
+          <a:noFill/>
+          <a:ln/>
+        </p:spPr>
+        <p:txBody>
+          <a:bodyPr wrap="square" lIns="0" tIns="0" rIns="0" bIns="0" rtlCol="0" anchor="ctr"/>
+          <a:lstStyle/>
+          <a:p>
+            <a:pPr algn="ctr" indent="0" marL="0">
+              <a:buNone/>
+            </a:pPr>
+            <a:r>
+              <a:rPr lang="en-US" sz="1300" dirty="0">
+                <a:solidFill>
+                  <a:srgbClr val="6B7280"/>
+                </a:solidFill>
+              </a:rPr>
+              <a:t>a few</a:t>
+            </a:r>
+            <a:endParaRPr lang="en-US" sz="1300" dirty="0"/>
+          </a:p>
+        </p:txBody>
+      </p:sp>
+      <p:sp>
+        <p:nvSpPr>
+          <p:cNvPr id="10" name="Shape 8"/>
+          <p:cNvSpPr/>
+          <p:nvPr/>
+        </p:nvSpPr>
+        <p:spPr>
+          <a:xfrm>
+            <a:off x="3017520" y="4114800"/>
+            <a:ext cx="822960" cy="1005840"/>
+          </a:xfrm>
+          <a:prstGeom prst="rect">
+            <a:avLst/>
+          </a:prstGeom>
+          <a:solidFill>
+            <a:srgbClr val="F97316"/>
+          </a:solidFill>
+          <a:ln w="12700">
+            <a:solidFill>
+              <a:srgbClr val="F97316"/>
+            </a:solidFill>
+            <a:prstDash val="solid"/>
+          </a:ln>
+        </p:spPr>
+      </p:sp>
+      <p:sp>
+        <p:nvSpPr>
+          <p:cNvPr id="11" name="Text 9"/>
+          <p:cNvSpPr txBox="1"/>
+          <p:nvPr/>
+        </p:nvSpPr>
+        <p:spPr>
+          <a:xfrm>
+            <a:off x="2834640" y="3730752"/>
+            <a:ext cx="1188720" cy="365760"/>
+          </a:xfrm>
+          <a:prstGeom prst="rect">
+            <a:avLst/>
+          </a:prstGeom>
+          <a:noFill/>
+          <a:ln/>
+        </p:spPr>
+        <p:txBody>
+          <a:bodyPr wrap="square" lIns="0" tIns="0" rIns="0" bIns="0" rtlCol="0" anchor="ctr"/>
+          <a:lstStyle/>
+          <a:p>
+            <a:pPr algn="ctr" indent="0" marL="0">
+              <a:buNone/>
+            </a:pPr>
+            <a:r>
+              <a:rPr lang="en-US" sz="1600" b="1" dirty="0">
+                <a:solidFill>
+                  <a:srgbClr val="C2410C"/>
+                </a:solidFill>
+              </a:rPr>
+              <a:t>+5</a:t>
+            </a:r>
+            <a:endParaRPr lang="en-US" sz="1600" dirty="0"/>
+          </a:p>
+        </p:txBody>
+      </p:sp>
+      <p:sp>
+        <p:nvSpPr>
+          <p:cNvPr id="12" name="Text 10"/>
+          <p:cNvSpPr txBox="1"/>
+          <p:nvPr/>
+        </p:nvSpPr>
+        <p:spPr>
+          <a:xfrm>
+            <a:off x="2926080" y="5193792"/>
+            <a:ext cx="1005840" cy="274320"/>
+          </a:xfrm>
+          <a:prstGeom prst="rect">
+            <a:avLst/>
+          </a:prstGeom>
+          <a:noFill/>
+          <a:ln/>
+        </p:spPr>
+        <p:txBody>
+          <a:bodyPr wrap="square" lIns="0" tIns="0" rIns="0" bIns="0" rtlCol="0" anchor="ctr"/>
+          <a:lstStyle/>
+          <a:p>
+            <a:pPr algn="ctr" indent="0" marL="0">
+              <a:buNone/>
+            </a:pPr>
+            <a:r>
+              <a:rPr lang="en-US" sz="1300" dirty="0">
+                <a:solidFill>
+                  <a:srgbClr val="6B7280"/>
+                </a:solidFill>
+              </a:rPr>
+              <a:t>dozens</a:t>
+            </a:r>
+            <a:endParaRPr lang="en-US" sz="1300" dirty="0"/>
+          </a:p>
+        </p:txBody>
+      </p:sp>
+      <p:sp>
+        <p:nvSpPr>
+          <p:cNvPr id="13" name="Shape 11"/>
+          <p:cNvSpPr/>
+          <p:nvPr/>
+        </p:nvSpPr>
+        <p:spPr>
+          <a:xfrm>
+            <a:off x="4114800" y="3474720"/>
+            <a:ext cx="822960" cy="1645920"/>
+          </a:xfrm>
+          <a:prstGeom prst="rect">
+            <a:avLst/>
+          </a:prstGeom>
+          <a:solidFill>
+            <a:srgbClr val="EA580C"/>
+          </a:solidFill>
+          <a:ln w="12700">
+            <a:solidFill>
+              <a:srgbClr val="EA580C"/>
+            </a:solidFill>
+            <a:prstDash val="solid"/>
+          </a:ln>
+        </p:spPr>
+      </p:sp>
+      <p:sp>
+        <p:nvSpPr>
+          <p:cNvPr id="14" name="Text 12"/>
+          <p:cNvSpPr txBox="1"/>
+          <p:nvPr/>
+        </p:nvSpPr>
+        <p:spPr>
+          <a:xfrm>
+            <a:off x="3931920" y="3090672"/>
+            <a:ext cx="1188720" cy="365760"/>
+          </a:xfrm>
+          <a:prstGeom prst="rect">
+            <a:avLst/>
+          </a:prstGeom>
+          <a:noFill/>
+          <a:ln/>
+        </p:spPr>
+        <p:txBody>
+          <a:bodyPr wrap="square" lIns="0" tIns="0" rIns="0" bIns="0" rtlCol="0" anchor="ctr"/>
+          <a:lstStyle/>
+          <a:p>
+            <a:pPr algn="ctr" indent="0" marL="0">
+              <a:buNone/>
+            </a:pPr>
+            <a:r>
+              <a:rPr lang="en-US" sz="1600" b="1" dirty="0">
+                <a:solidFill>
+                  <a:srgbClr val="C2410C"/>
+                </a:solidFill>
+              </a:rPr>
+              <a:t>+8</a:t>
+            </a:r>
+            <a:endParaRPr lang="en-US" sz="1600" dirty="0"/>
+          </a:p>
+        </p:txBody>
+      </p:sp>
+      <p:sp>
+        <p:nvSpPr>
+          <p:cNvPr id="15" name="Text 13"/>
+          <p:cNvSpPr txBox="1"/>
+          <p:nvPr/>
+        </p:nvSpPr>
+        <p:spPr>
+          <a:xfrm>
+            <a:off x="4023360" y="5193792"/>
+            <a:ext cx="1005840" cy="274320"/>
+          </a:xfrm>
+          <a:prstGeom prst="rect">
+            <a:avLst/>
+          </a:prstGeom>
+          <a:noFill/>
+          <a:ln/>
+        </p:spPr>
+        <p:txBody>
+          <a:bodyPr wrap="square" lIns="0" tIns="0" rIns="0" bIns="0" rtlCol="0" anchor="ctr"/>
+          <a:lstStyle/>
+          <a:p>
+            <a:pPr algn="ctr" indent="0" marL="0">
+              <a:buNone/>
+            </a:pPr>
+            <a:r>
+              <a:rPr lang="en-US" sz="1300" dirty="0">
+                <a:solidFill>
+                  <a:srgbClr val="6B7280"/>
+                </a:solidFill>
+              </a:rPr>
+              <a:t>~100</a:t>
+            </a:r>
+            <a:endParaRPr lang="en-US" sz="1300" dirty="0"/>
+          </a:p>
+        </p:txBody>
+      </p:sp>
+      <p:sp>
+        <p:nvSpPr>
+          <p:cNvPr id="16" name="Shape 14"/>
+          <p:cNvSpPr/>
+          <p:nvPr/>
+        </p:nvSpPr>
+        <p:spPr>
+          <a:xfrm>
+            <a:off x="5212080" y="2651760"/>
+            <a:ext cx="822960" cy="2468880"/>
           </a:xfrm>
           <a:prstGeom prst="rect">
             <a:avLst/>
@@ -7469,14 +8346,14 @@
       </p:sp>
       <p:sp>
         <p:nvSpPr>
-          <p:cNvPr id="9" name="Text 7"/>
+          <p:cNvPr id="17" name="Text 15"/>
           <p:cNvSpPr txBox="1"/>
           <p:nvPr/>
         </p:nvSpPr>
         <p:spPr>
           <a:xfrm>
-            <a:off x="4206240" y="2267712"/>
-            <a:ext cx="1645920" cy="365760"/>
+            <a:off x="5029200" y="2267712"/>
+            <a:ext cx="1188720" cy="365760"/>
           </a:xfrm>
           <a:prstGeom prst="rect">
             <a:avLst/>
@@ -7497,7 +8374,7 @@
                   <a:srgbClr val="C2410C"/>
                 </a:solidFill>
               </a:rPr>
-              <a:t>+45%</a:t>
+              <a:t>+12</a:t>
             </a:r>
             <a:endParaRPr lang="en-US" sz="1600" dirty="0"/>
           </a:p>
@@ -7505,14 +8382,50 @@
       </p:sp>
       <p:sp>
         <p:nvSpPr>
-          <p:cNvPr id="10" name="Shape 8"/>
-          <p:cNvSpPr/>
-          <p:nvPr/>
-        </p:nvSpPr>
-        <p:spPr>
-          <a:xfrm>
-            <a:off x="777240" y="5212080"/>
-            <a:ext cx="5212080" cy="0"/>
+          <p:cNvPr id="18" name="Text 16"/>
+          <p:cNvSpPr txBox="1"/>
+          <p:nvPr/>
+        </p:nvSpPr>
+        <p:spPr>
+          <a:xfrm>
+            <a:off x="5120640" y="5193792"/>
+            <a:ext cx="1005840" cy="274320"/>
+          </a:xfrm>
+          <a:prstGeom prst="rect">
+            <a:avLst/>
+          </a:prstGeom>
+          <a:noFill/>
+          <a:ln/>
+        </p:spPr>
+        <p:txBody>
+          <a:bodyPr wrap="square" lIns="0" tIns="0" rIns="0" bIns="0" rtlCol="0" anchor="ctr"/>
+          <a:lstStyle/>
+          <a:p>
+            <a:pPr algn="ctr" indent="0" marL="0">
+              <a:buNone/>
+            </a:pPr>
+            <a:r>
+              <a:rPr lang="en-US" sz="1300" dirty="0">
+                <a:solidFill>
+                  <a:srgbClr val="6B7280"/>
+                </a:solidFill>
+              </a:rPr>
+              <a:t>200+</a:t>
+            </a:r>
+            <a:endParaRPr lang="en-US" sz="1300" dirty="0"/>
+          </a:p>
+        </p:txBody>
+      </p:sp>
+      <p:sp>
+        <p:nvSpPr>
+          <p:cNvPr id="19" name="Shape 17"/>
+          <p:cNvSpPr/>
+          <p:nvPr/>
+        </p:nvSpPr>
+        <p:spPr>
+          <a:xfrm>
+            <a:off x="731520" y="5120640"/>
+            <a:ext cx="5486400" cy="0"/>
           </a:xfrm>
           <a:prstGeom prst="line">
             <a:avLst/>
@@ -7528,138 +8441,43 @@
       </p:sp>
       <p:sp>
         <p:nvSpPr>
-          <p:cNvPr id="11" name="Text 9"/>
+          <p:cNvPr id="20" name="Text 18"/>
           <p:cNvSpPr txBox="1"/>
           <p:nvPr/>
         </p:nvSpPr>
         <p:spPr>
           <a:xfrm>
-            <a:off x="731520" y="5285232"/>
-            <a:ext cx="1645920" cy="640080"/>
-          </a:xfrm>
-          <a:prstGeom prst="rect">
-            <a:avLst/>
-          </a:prstGeom>
-          <a:noFill/>
-          <a:ln/>
-        </p:spPr>
-        <p:txBody>
-          <a:bodyPr wrap="square" lIns="0" tIns="0" rIns="0" bIns="0" rtlCol="0" anchor="t"/>
-          <a:lstStyle/>
-          <a:p>
-            <a:pPr algn="ctr" indent="0" marL="0">
-              <a:buNone/>
-            </a:pPr>
-            <a:r>
-              <a:rPr lang="en-US" sz="1400" b="1" dirty="0">
-                <a:solidFill>
-                  <a:srgbClr val="374151"/>
-                </a:solidFill>
-              </a:rPr>
-              <a:t>residual stream</a:t>
-            </a:r>
-            <a:pPr algn="ctr" indent="0" marL="0">
-              <a:buNone/>
-            </a:pPr>
-            <a:endParaRPr lang="en-US" sz="1400" dirty="0"/>
-          </a:p>
-          <a:p>
-            <a:pPr algn="ctr" indent="0" marL="0">
-              <a:buNone/>
-            </a:pPr>
-            <a:r>
-              <a:rPr lang="en-US" sz="1400" dirty="0">
+            <a:off x="731520" y="5504688"/>
+            <a:ext cx="5486400" cy="274320"/>
+          </a:xfrm>
+          <a:prstGeom prst="rect">
+            <a:avLst/>
+          </a:prstGeom>
+          <a:noFill/>
+          <a:ln/>
+        </p:spPr>
+        <p:txBody>
+          <a:bodyPr wrap="square" lIns="0" tIns="0" rIns="0" bIns="0" rtlCol="0" anchor="ctr"/>
+          <a:lstStyle/>
+          <a:p>
+            <a:pPr indent="0" marL="0">
+              <a:buNone/>
+            </a:pPr>
+            <a:r>
+              <a:rPr lang="en-US" sz="1200" dirty="0">
                 <a:solidFill>
                   <a:srgbClr val="6B7280"/>
                 </a:solidFill>
               </a:rPr>
-              <a:t>the usual spot</a:t>
-            </a:r>
-            <a:endParaRPr lang="en-US" sz="1400" dirty="0"/>
-          </a:p>
-        </p:txBody>
-      </p:sp>
-      <p:sp>
-        <p:nvSpPr>
-          <p:cNvPr id="12" name="Text 10"/>
-          <p:cNvSpPr txBox="1"/>
-          <p:nvPr/>
-        </p:nvSpPr>
-        <p:spPr>
-          <a:xfrm>
-            <a:off x="2468880" y="5285232"/>
-            <a:ext cx="1645920" cy="640080"/>
-          </a:xfrm>
-          <a:prstGeom prst="rect">
-            <a:avLst/>
-          </a:prstGeom>
-          <a:noFill/>
-          <a:ln/>
-        </p:spPr>
-        <p:txBody>
-          <a:bodyPr wrap="square" lIns="0" tIns="0" rIns="0" bIns="0" rtlCol="0" anchor="t"/>
-          <a:lstStyle/>
-          <a:p>
-            <a:pPr algn="ctr" indent="0" marL="0">
-              <a:buNone/>
-            </a:pPr>
-            <a:r>
-              <a:rPr lang="en-US" sz="1400" b="1" dirty="0">
-                <a:solidFill>
-                  <a:srgbClr val="374151"/>
-                </a:solidFill>
-              </a:rPr>
-              <a:t>attention</a:t>
-            </a:r>
-            <a:pPr algn="ctr" indent="0" marL="0">
-              <a:buNone/>
-            </a:pPr>
-            <a:endParaRPr lang="en-US" sz="1400" dirty="0"/>
-          </a:p>
-        </p:txBody>
-      </p:sp>
-      <p:sp>
-        <p:nvSpPr>
-          <p:cNvPr id="13" name="Text 11"/>
-          <p:cNvSpPr txBox="1"/>
-          <p:nvPr/>
-        </p:nvSpPr>
-        <p:spPr>
-          <a:xfrm>
-            <a:off x="4206240" y="5285232"/>
-            <a:ext cx="1645920" cy="640080"/>
-          </a:xfrm>
-          <a:prstGeom prst="rect">
-            <a:avLst/>
-          </a:prstGeom>
-          <a:noFill/>
-          <a:ln/>
-        </p:spPr>
-        <p:txBody>
-          <a:bodyPr wrap="square" lIns="0" tIns="0" rIns="0" bIns="0" rtlCol="0" anchor="t"/>
-          <a:lstStyle/>
-          <a:p>
-            <a:pPr algn="ctr" indent="0" marL="0">
-              <a:buNone/>
-            </a:pPr>
-            <a:r>
-              <a:rPr lang="en-US" sz="1400" b="1" dirty="0">
-                <a:solidFill>
-                  <a:srgbClr val="C2410C"/>
-                </a:solidFill>
-              </a:rPr>
-              <a:t>MLP</a:t>
-            </a:r>
-            <a:pPr algn="ctr" indent="0" marL="0">
-              <a:buNone/>
-            </a:pPr>
-            <a:endParaRPr lang="en-US" sz="1400" dirty="0"/>
-          </a:p>
-        </p:txBody>
-      </p:sp>
-      <p:sp>
-        <p:nvSpPr>
-          <p:cNvPr id="14" name="Text 0"/>
+              <a:t>how often the model has seen a fact → how well it answers</a:t>
+            </a:r>
+            <a:endParaRPr lang="en-US" sz="1200" dirty="0"/>
+          </a:p>
+        </p:txBody>
+      </p:sp>
+      <p:sp>
+        <p:nvSpPr>
+          <p:cNvPr id="21" name="Text 0"/>
           <p:cNvSpPr/>
           <p:nvPr>
             <p:ph idx="102" type="body" hasCustomPrompt="1"/>
@@ -7689,7 +8507,7 @@
                   <a:schemeClr val="tx1"/>
                 </a:solidFill>
               </a:rPr>
-              <a:t>The MLP layers, where facts live. </a:t>
+              <a:t>Even a fact read once leaves a trace. </a:t>
             </a:r>
             <a:pPr indent="0" marL="0">
               <a:buNone/>
@@ -7700,7 +8518,7 @@
                   <a:srgbClr val="6B7280"/>
                 </a:solidFill>
               </a:rPr>
-              <a:t>But steering can only surface what the model has already read.</a:t>
+              <a:t>It just gets drowned out on the way to the answer.</a:t>
             </a:r>
             <a:endParaRPr lang="en-US" sz="1800" dirty="0"/>
           </a:p>
@@ -7808,7 +8626,7 @@
                   <a:schemeClr val="accent1"/>
                 </a:solidFill>
               </a:rPr>
-              <a:t>WAY 2 · QUESTION 4</a:t>
+              <a:t>WAY 1 · OPEN THE BOX</a:t>
             </a:r>
             <a:endParaRPr lang="en-US" sz="1200" dirty="0"/>
           </a:p>
@@ -7846,7 +8664,18 @@
                   <a:schemeClr val="tx1"/>
                 </a:solidFill>
               </a:rPr>
-              <a:t>How do we teach it something it never read?</a:t>
+              <a:t>So we looked inside. </a:t>
+            </a:r>
+            <a:pPr algn="l" indent="0" marL="0">
+              <a:buNone/>
+            </a:pPr>
+            <a:r>
+              <a:rPr lang="en-US" sz="3200" b="1" i="1" dirty="0">
+                <a:solidFill>
+                  <a:srgbClr val="6B7280"/>
+                </a:solidFill>
+              </a:rPr>
+              <a:t>Knowledge has an address.</a:t>
             </a:r>
             <a:endParaRPr lang="en-US" sz="3200" dirty="0"/>
           </a:p>
@@ -7861,11 +8690,135 @@
         <p:spPr>
           <a:xfrm>
             <a:off x="640080" y="2286000"/>
-            <a:ext cx="4206240" cy="1417320"/>
+            <a:ext cx="3291840" cy="2834640"/>
           </a:xfrm>
           <a:prstGeom prst="roundRect">
             <a:avLst>
-              <a:gd name="adj" fmla="val 7742"/>
+              <a:gd name="adj" fmla="val 6452"/>
+            </a:avLst>
+          </a:prstGeom>
+          <a:solidFill>
+            <a:srgbClr val="111827"/>
+          </a:solidFill>
+          <a:ln w="12700">
+            <a:solidFill>
+              <a:srgbClr val="111827"/>
+            </a:solidFill>
+            <a:prstDash val="solid"/>
+          </a:ln>
+        </p:spPr>
+      </p:sp>
+      <p:sp>
+        <p:nvSpPr>
+          <p:cNvPr id="5" name="Text 3"/>
+          <p:cNvSpPr txBox="1"/>
+          <p:nvPr/>
+        </p:nvSpPr>
+        <p:spPr>
+          <a:xfrm>
+            <a:off x="640080" y="2286000"/>
+            <a:ext cx="3291840" cy="2834640"/>
+          </a:xfrm>
+          <a:prstGeom prst="rect">
+            <a:avLst/>
+          </a:prstGeom>
+          <a:noFill/>
+          <a:ln/>
+        </p:spPr>
+        <p:txBody>
+          <a:bodyPr wrap="square" lIns="0" tIns="0" rIns="0" bIns="0" rtlCol="0" anchor="ctr"/>
+          <a:lstStyle/>
+          <a:p>
+            <a:pPr algn="ctr" indent="0" marL="0">
+              <a:buNone/>
+            </a:pPr>
+            <a:r>
+              <a:rPr lang="en-US" sz="8000" b="1" dirty="0">
+                <a:solidFill>
+                  <a:srgbClr val="4B5563"/>
+                </a:solidFill>
+              </a:rPr>
+              <a:t>?</a:t>
+            </a:r>
+            <a:endParaRPr lang="en-US" sz="8000" dirty="0"/>
+          </a:p>
+        </p:txBody>
+      </p:sp>
+      <p:sp>
+        <p:nvSpPr>
+          <p:cNvPr id="6" name="Text 4"/>
+          <p:cNvSpPr txBox="1"/>
+          <p:nvPr/>
+        </p:nvSpPr>
+        <p:spPr>
+          <a:xfrm>
+            <a:off x="640080" y="5212080"/>
+            <a:ext cx="3291840" cy="365760"/>
+          </a:xfrm>
+          <a:prstGeom prst="rect">
+            <a:avLst/>
+          </a:prstGeom>
+          <a:noFill/>
+          <a:ln/>
+        </p:spPr>
+        <p:txBody>
+          <a:bodyPr wrap="square" lIns="0" tIns="0" rIns="0" bIns="0" rtlCol="0" anchor="ctr"/>
+          <a:lstStyle/>
+          <a:p>
+            <a:pPr algn="ctr" indent="0" marL="0">
+              <a:buNone/>
+            </a:pPr>
+            <a:r>
+              <a:rPr lang="en-US" sz="1500" b="1" dirty="0">
+                <a:solidFill>
+                  <a:srgbClr val="6B7280"/>
+                </a:solidFill>
+              </a:rPr>
+              <a:t>the black box</a:t>
+            </a:r>
+            <a:endParaRPr lang="en-US" sz="1500" dirty="0"/>
+          </a:p>
+        </p:txBody>
+      </p:sp>
+      <p:sp>
+        <p:nvSpPr>
+          <p:cNvPr id="7" name="Shape 5"/>
+          <p:cNvSpPr/>
+          <p:nvPr/>
+        </p:nvSpPr>
+        <p:spPr>
+          <a:xfrm>
+            <a:off x="4206240" y="3474720"/>
+            <a:ext cx="914400" cy="457200"/>
+          </a:xfrm>
+          <a:prstGeom prst="rightArrow">
+            <a:avLst/>
+          </a:prstGeom>
+          <a:solidFill>
+            <a:srgbClr val="C2410C"/>
+          </a:solidFill>
+          <a:ln w="12700">
+            <a:solidFill>
+              <a:srgbClr val="C2410C"/>
+            </a:solidFill>
+            <a:prstDash val="solid"/>
+          </a:ln>
+        </p:spPr>
+      </p:sp>
+      <p:sp>
+        <p:nvSpPr>
+          <p:cNvPr id="8" name="Shape 6"/>
+          <p:cNvSpPr/>
+          <p:nvPr/>
+        </p:nvSpPr>
+        <p:spPr>
+          <a:xfrm>
+            <a:off x="5486400" y="2286000"/>
+            <a:ext cx="6035040" cy="2834640"/>
+          </a:xfrm>
+          <a:prstGeom prst="roundRect">
+            <a:avLst>
+              <a:gd name="adj" fmla="val 3871"/>
             </a:avLst>
           </a:prstGeom>
           <a:solidFill>
@@ -7881,137 +8834,24 @@
       </p:sp>
       <p:sp>
         <p:nvSpPr>
-          <p:cNvPr id="5" name="Text 3"/>
-          <p:cNvSpPr txBox="1"/>
-          <p:nvPr/>
-        </p:nvSpPr>
-        <p:spPr>
-          <a:xfrm>
-            <a:off x="868680" y="2377440"/>
-            <a:ext cx="3840480" cy="274320"/>
-          </a:xfrm>
-          <a:prstGeom prst="rect">
-            <a:avLst/>
-          </a:prstGeom>
-          <a:noFill/>
-          <a:ln/>
-        </p:spPr>
-        <p:txBody>
-          <a:bodyPr wrap="square" lIns="0" tIns="0" rIns="0" bIns="0" rtlCol="0" anchor="ctr"/>
-          <a:lstStyle/>
-          <a:p>
-            <a:pPr indent="0" marL="0">
-              <a:buNone/>
-            </a:pPr>
-            <a:r>
-              <a:rPr lang="en-US" sz="1100" b="1" spc="200" kern="0" dirty="0">
-                <a:solidFill>
-                  <a:srgbClr val="6B7280"/>
-                </a:solidFill>
-              </a:rPr>
-              <a:t>RETRAIN FROM SCRATCH</a:t>
-            </a:r>
-            <a:endParaRPr lang="en-US" sz="1100" dirty="0"/>
-          </a:p>
-        </p:txBody>
-      </p:sp>
-      <p:sp>
-        <p:nvSpPr>
-          <p:cNvPr id="6" name="Text 4"/>
-          <p:cNvSpPr txBox="1"/>
-          <p:nvPr/>
-        </p:nvSpPr>
-        <p:spPr>
-          <a:xfrm>
-            <a:off x="868680" y="2651760"/>
-            <a:ext cx="3840480" cy="609600"/>
-          </a:xfrm>
-          <a:prstGeom prst="rect">
-            <a:avLst/>
-          </a:prstGeom>
-          <a:noFill/>
-          <a:ln/>
-        </p:spPr>
-        <p:txBody>
-          <a:bodyPr wrap="square" lIns="0" tIns="0" rIns="0" bIns="0" rtlCol="0" anchor="ctr"/>
-          <a:lstStyle/>
-          <a:p>
-            <a:pPr indent="0" marL="0">
-              <a:buNone/>
-            </a:pPr>
-            <a:r>
-              <a:rPr lang="en-US" sz="4000" b="1" dirty="0">
-                <a:solidFill>
-                  <a:srgbClr val="111827"/>
-                </a:solidFill>
-                <a:latin typeface="Cambria" pitchFamily="34" charset="0"/>
-                <a:ea typeface="Cambria" pitchFamily="34" charset="-122"/>
-                <a:cs typeface="Cambria" pitchFamily="34" charset="-120"/>
-              </a:rPr>
-              <a:t>trillions</a:t>
-            </a:r>
-            <a:endParaRPr lang="en-US" sz="4000" dirty="0"/>
-          </a:p>
-        </p:txBody>
-      </p:sp>
-      <p:sp>
-        <p:nvSpPr>
-          <p:cNvPr id="7" name="Text 5"/>
-          <p:cNvSpPr txBox="1"/>
-          <p:nvPr/>
-        </p:nvSpPr>
-        <p:spPr>
-          <a:xfrm>
-            <a:off x="868680" y="3291840"/>
-            <a:ext cx="3840480" cy="365760"/>
-          </a:xfrm>
-          <a:prstGeom prst="rect">
-            <a:avLst/>
-          </a:prstGeom>
-          <a:noFill/>
-          <a:ln/>
-        </p:spPr>
-        <p:txBody>
-          <a:bodyPr wrap="square" lIns="0" tIns="0" rIns="0" bIns="0" rtlCol="0" anchor="ctr"/>
-          <a:lstStyle/>
-          <a:p>
-            <a:pPr indent="0" marL="0">
-              <a:buNone/>
-            </a:pPr>
-            <a:r>
-              <a:rPr lang="en-US" sz="1300" dirty="0">
-                <a:solidFill>
-                  <a:srgbClr val="374151"/>
-                </a:solidFill>
-              </a:rPr>
-              <a:t>of tokens, millions of dollars, every few months</a:t>
-            </a:r>
-            <a:endParaRPr lang="en-US" sz="1300" dirty="0"/>
-          </a:p>
-        </p:txBody>
-      </p:sp>
-      <p:sp>
-        <p:nvSpPr>
-          <p:cNvPr id="8" name="Shape 6"/>
-          <p:cNvSpPr/>
-          <p:nvPr/>
-        </p:nvSpPr>
-        <p:spPr>
-          <a:xfrm>
-            <a:off x="640080" y="3931920"/>
-            <a:ext cx="4206240" cy="1417320"/>
-          </a:xfrm>
-          <a:prstGeom prst="roundRect">
-            <a:avLst>
-              <a:gd name="adj" fmla="val 7742"/>
-            </a:avLst>
+          <p:cNvPr id="9" name="Shape 7"/>
+          <p:cNvSpPr/>
+          <p:nvPr/>
+        </p:nvSpPr>
+        <p:spPr>
+          <a:xfrm>
+            <a:off x="6126480" y="3017520"/>
+            <a:ext cx="219456" cy="219456"/>
+          </a:xfrm>
+          <a:prstGeom prst="ellipse">
+            <a:avLst/>
           </a:prstGeom>
           <a:solidFill>
-            <a:srgbClr val="FFF7ED"/>
+            <a:srgbClr val="C2410C"/>
           </a:solidFill>
           <a:ln w="12700">
             <a:solidFill>
-              <a:srgbClr val="FDBA74"/>
+              <a:srgbClr val="C2410C"/>
             </a:solidFill>
             <a:prstDash val="solid"/>
           </a:ln>
@@ -8019,14 +8859,463 @@
       </p:sp>
       <p:sp>
         <p:nvSpPr>
-          <p:cNvPr id="9" name="Text 7"/>
+          <p:cNvPr id="10" name="Shape 8"/>
+          <p:cNvSpPr/>
+          <p:nvPr/>
+        </p:nvSpPr>
+        <p:spPr>
+          <a:xfrm>
+            <a:off x="6583680" y="2743200"/>
+            <a:ext cx="219456" cy="219456"/>
+          </a:xfrm>
+          <a:prstGeom prst="ellipse">
+            <a:avLst/>
+          </a:prstGeom>
+          <a:solidFill>
+            <a:srgbClr val="C2410C"/>
+          </a:solidFill>
+          <a:ln w="12700">
+            <a:solidFill>
+              <a:srgbClr val="C2410C"/>
+            </a:solidFill>
+            <a:prstDash val="solid"/>
+          </a:ln>
+        </p:spPr>
+      </p:sp>
+      <p:sp>
+        <p:nvSpPr>
+          <p:cNvPr id="11" name="Shape 9"/>
+          <p:cNvSpPr/>
+          <p:nvPr/>
+        </p:nvSpPr>
+        <p:spPr>
+          <a:xfrm>
+            <a:off x="6355080" y="3474720"/>
+            <a:ext cx="219456" cy="219456"/>
+          </a:xfrm>
+          <a:prstGeom prst="ellipse">
+            <a:avLst/>
+          </a:prstGeom>
+          <a:solidFill>
+            <a:srgbClr val="C2410C"/>
+          </a:solidFill>
+          <a:ln w="12700">
+            <a:solidFill>
+              <a:srgbClr val="C2410C"/>
+            </a:solidFill>
+            <a:prstDash val="solid"/>
+          </a:ln>
+        </p:spPr>
+      </p:sp>
+      <p:sp>
+        <p:nvSpPr>
+          <p:cNvPr id="12" name="Shape 10"/>
+          <p:cNvSpPr/>
+          <p:nvPr/>
+        </p:nvSpPr>
+        <p:spPr>
+          <a:xfrm>
+            <a:off x="6949440" y="3246120"/>
+            <a:ext cx="219456" cy="219456"/>
+          </a:xfrm>
+          <a:prstGeom prst="ellipse">
+            <a:avLst/>
+          </a:prstGeom>
+          <a:solidFill>
+            <a:srgbClr val="C2410C"/>
+          </a:solidFill>
+          <a:ln w="12700">
+            <a:solidFill>
+              <a:srgbClr val="C2410C"/>
+            </a:solidFill>
+            <a:prstDash val="solid"/>
+          </a:ln>
+        </p:spPr>
+      </p:sp>
+      <p:sp>
+        <p:nvSpPr>
+          <p:cNvPr id="13" name="Shape 11"/>
+          <p:cNvSpPr/>
+          <p:nvPr/>
+        </p:nvSpPr>
+        <p:spPr>
+          <a:xfrm>
+            <a:off x="6035040" y="3977640"/>
+            <a:ext cx="219456" cy="219456"/>
+          </a:xfrm>
+          <a:prstGeom prst="ellipse">
+            <a:avLst/>
+          </a:prstGeom>
+          <a:solidFill>
+            <a:srgbClr val="C2410C"/>
+          </a:solidFill>
+          <a:ln w="12700">
+            <a:solidFill>
+              <a:srgbClr val="C2410C"/>
+            </a:solidFill>
+            <a:prstDash val="solid"/>
+          </a:ln>
+        </p:spPr>
+      </p:sp>
+      <p:sp>
+        <p:nvSpPr>
+          <p:cNvPr id="14" name="Shape 12"/>
+          <p:cNvSpPr/>
+          <p:nvPr/>
+        </p:nvSpPr>
+        <p:spPr>
+          <a:xfrm>
+            <a:off x="6675120" y="3886200"/>
+            <a:ext cx="219456" cy="219456"/>
+          </a:xfrm>
+          <a:prstGeom prst="ellipse">
+            <a:avLst/>
+          </a:prstGeom>
+          <a:solidFill>
+            <a:srgbClr val="C2410C"/>
+          </a:solidFill>
+          <a:ln w="12700">
+            <a:solidFill>
+              <a:srgbClr val="C2410C"/>
+            </a:solidFill>
+            <a:prstDash val="solid"/>
+          </a:ln>
+        </p:spPr>
+      </p:sp>
+      <p:sp>
+        <p:nvSpPr>
+          <p:cNvPr id="15" name="Shape 13"/>
+          <p:cNvSpPr/>
+          <p:nvPr/>
+        </p:nvSpPr>
+        <p:spPr>
+          <a:xfrm>
+            <a:off x="7132320" y="3657600"/>
+            <a:ext cx="219456" cy="219456"/>
+          </a:xfrm>
+          <a:prstGeom prst="ellipse">
+            <a:avLst/>
+          </a:prstGeom>
+          <a:solidFill>
+            <a:srgbClr val="C2410C"/>
+          </a:solidFill>
+          <a:ln w="12700">
+            <a:solidFill>
+              <a:srgbClr val="C2410C"/>
+            </a:solidFill>
+            <a:prstDash val="solid"/>
+          </a:ln>
+        </p:spPr>
+      </p:sp>
+      <p:sp>
+        <p:nvSpPr>
+          <p:cNvPr id="16" name="Shape 14"/>
+          <p:cNvSpPr/>
+          <p:nvPr/>
+        </p:nvSpPr>
+        <p:spPr>
+          <a:xfrm>
+            <a:off x="6400800" y="4389120"/>
+            <a:ext cx="219456" cy="219456"/>
+          </a:xfrm>
+          <a:prstGeom prst="ellipse">
+            <a:avLst/>
+          </a:prstGeom>
+          <a:solidFill>
+            <a:srgbClr val="C2410C"/>
+          </a:solidFill>
+          <a:ln w="12700">
+            <a:solidFill>
+              <a:srgbClr val="C2410C"/>
+            </a:solidFill>
+            <a:prstDash val="solid"/>
+          </a:ln>
+        </p:spPr>
+      </p:sp>
+      <p:sp>
+        <p:nvSpPr>
+          <p:cNvPr id="17" name="Shape 15"/>
+          <p:cNvSpPr/>
+          <p:nvPr/>
+        </p:nvSpPr>
+        <p:spPr>
+          <a:xfrm>
+            <a:off x="6858000" y="4297680"/>
+            <a:ext cx="219456" cy="219456"/>
+          </a:xfrm>
+          <a:prstGeom prst="ellipse">
+            <a:avLst/>
+          </a:prstGeom>
+          <a:solidFill>
+            <a:srgbClr val="C2410C"/>
+          </a:solidFill>
+          <a:ln w="12700">
+            <a:solidFill>
+              <a:srgbClr val="C2410C"/>
+            </a:solidFill>
+            <a:prstDash val="solid"/>
+          </a:ln>
+        </p:spPr>
+      </p:sp>
+      <p:sp>
+        <p:nvSpPr>
+          <p:cNvPr id="18" name="Shape 16"/>
+          <p:cNvSpPr/>
+          <p:nvPr/>
+        </p:nvSpPr>
+        <p:spPr>
+          <a:xfrm>
+            <a:off x="9601200" y="3246120"/>
+            <a:ext cx="219456" cy="219456"/>
+          </a:xfrm>
+          <a:prstGeom prst="ellipse">
+            <a:avLst/>
+          </a:prstGeom>
+          <a:solidFill>
+            <a:srgbClr val="2563EB"/>
+          </a:solidFill>
+          <a:ln w="12700">
+            <a:solidFill>
+              <a:srgbClr val="2563EB"/>
+            </a:solidFill>
+            <a:prstDash val="solid"/>
+          </a:ln>
+        </p:spPr>
+      </p:sp>
+      <p:sp>
+        <p:nvSpPr>
+          <p:cNvPr id="19" name="Shape 17"/>
+          <p:cNvSpPr/>
+          <p:nvPr/>
+        </p:nvSpPr>
+        <p:spPr>
+          <a:xfrm>
+            <a:off x="10058400" y="2926080"/>
+            <a:ext cx="219456" cy="219456"/>
+          </a:xfrm>
+          <a:prstGeom prst="ellipse">
+            <a:avLst/>
+          </a:prstGeom>
+          <a:solidFill>
+            <a:srgbClr val="2563EB"/>
+          </a:solidFill>
+          <a:ln w="12700">
+            <a:solidFill>
+              <a:srgbClr val="2563EB"/>
+            </a:solidFill>
+            <a:prstDash val="solid"/>
+          </a:ln>
+        </p:spPr>
+      </p:sp>
+      <p:sp>
+        <p:nvSpPr>
+          <p:cNvPr id="20" name="Shape 18"/>
+          <p:cNvSpPr/>
+          <p:nvPr/>
+        </p:nvSpPr>
+        <p:spPr>
+          <a:xfrm>
+            <a:off x="10424160" y="3474720"/>
+            <a:ext cx="219456" cy="219456"/>
+          </a:xfrm>
+          <a:prstGeom prst="ellipse">
+            <a:avLst/>
+          </a:prstGeom>
+          <a:solidFill>
+            <a:srgbClr val="2563EB"/>
+          </a:solidFill>
+          <a:ln w="12700">
+            <a:solidFill>
+              <a:srgbClr val="2563EB"/>
+            </a:solidFill>
+            <a:prstDash val="solid"/>
+          </a:ln>
+        </p:spPr>
+      </p:sp>
+      <p:sp>
+        <p:nvSpPr>
+          <p:cNvPr id="21" name="Shape 19"/>
+          <p:cNvSpPr/>
+          <p:nvPr/>
+        </p:nvSpPr>
+        <p:spPr>
+          <a:xfrm>
+            <a:off x="9784080" y="3794760"/>
+            <a:ext cx="219456" cy="219456"/>
+          </a:xfrm>
+          <a:prstGeom prst="ellipse">
+            <a:avLst/>
+          </a:prstGeom>
+          <a:solidFill>
+            <a:srgbClr val="2563EB"/>
+          </a:solidFill>
+          <a:ln w="12700">
+            <a:solidFill>
+              <a:srgbClr val="2563EB"/>
+            </a:solidFill>
+            <a:prstDash val="solid"/>
+          </a:ln>
+        </p:spPr>
+      </p:sp>
+      <p:sp>
+        <p:nvSpPr>
+          <p:cNvPr id="22" name="Shape 20"/>
+          <p:cNvSpPr/>
+          <p:nvPr/>
+        </p:nvSpPr>
+        <p:spPr>
+          <a:xfrm>
+            <a:off x="10241280" y="4114800"/>
+            <a:ext cx="219456" cy="219456"/>
+          </a:xfrm>
+          <a:prstGeom prst="ellipse">
+            <a:avLst/>
+          </a:prstGeom>
+          <a:solidFill>
+            <a:srgbClr val="2563EB"/>
+          </a:solidFill>
+          <a:ln w="12700">
+            <a:solidFill>
+              <a:srgbClr val="2563EB"/>
+            </a:solidFill>
+            <a:prstDash val="solid"/>
+          </a:ln>
+        </p:spPr>
+      </p:sp>
+      <p:sp>
+        <p:nvSpPr>
+          <p:cNvPr id="23" name="Shape 21"/>
+          <p:cNvSpPr/>
+          <p:nvPr/>
+        </p:nvSpPr>
+        <p:spPr>
+          <a:xfrm>
+            <a:off x="10607040" y="4526280"/>
+            <a:ext cx="219456" cy="219456"/>
+          </a:xfrm>
+          <a:prstGeom prst="ellipse">
+            <a:avLst/>
+          </a:prstGeom>
+          <a:solidFill>
+            <a:srgbClr val="2563EB"/>
+          </a:solidFill>
+          <a:ln w="12700">
+            <a:solidFill>
+              <a:srgbClr val="2563EB"/>
+            </a:solidFill>
+            <a:prstDash val="solid"/>
+          </a:ln>
+        </p:spPr>
+      </p:sp>
+      <p:sp>
+        <p:nvSpPr>
+          <p:cNvPr id="24" name="Shape 22"/>
+          <p:cNvSpPr/>
+          <p:nvPr/>
+        </p:nvSpPr>
+        <p:spPr>
+          <a:xfrm>
+            <a:off x="9418320" y="4434840"/>
+            <a:ext cx="219456" cy="219456"/>
+          </a:xfrm>
+          <a:prstGeom prst="ellipse">
+            <a:avLst/>
+          </a:prstGeom>
+          <a:solidFill>
+            <a:srgbClr val="2563EB"/>
+          </a:solidFill>
+          <a:ln w="12700">
+            <a:solidFill>
+              <a:srgbClr val="2563EB"/>
+            </a:solidFill>
+            <a:prstDash val="solid"/>
+          </a:ln>
+        </p:spPr>
+      </p:sp>
+      <p:sp>
+        <p:nvSpPr>
+          <p:cNvPr id="25" name="Shape 23"/>
+          <p:cNvSpPr/>
+          <p:nvPr/>
+        </p:nvSpPr>
+        <p:spPr>
+          <a:xfrm>
+            <a:off x="9966960" y="4846320"/>
+            <a:ext cx="219456" cy="219456"/>
+          </a:xfrm>
+          <a:prstGeom prst="ellipse">
+            <a:avLst/>
+          </a:prstGeom>
+          <a:solidFill>
+            <a:srgbClr val="2563EB"/>
+          </a:solidFill>
+          <a:ln w="12700">
+            <a:solidFill>
+              <a:srgbClr val="2563EB"/>
+            </a:solidFill>
+            <a:prstDash val="solid"/>
+          </a:ln>
+        </p:spPr>
+      </p:sp>
+      <p:sp>
+        <p:nvSpPr>
+          <p:cNvPr id="26" name="Shape 24"/>
+          <p:cNvSpPr/>
+          <p:nvPr/>
+        </p:nvSpPr>
+        <p:spPr>
+          <a:xfrm>
+            <a:off x="10515600" y="3886200"/>
+            <a:ext cx="219456" cy="219456"/>
+          </a:xfrm>
+          <a:prstGeom prst="ellipse">
+            <a:avLst/>
+          </a:prstGeom>
+          <a:solidFill>
+            <a:srgbClr val="2563EB"/>
+          </a:solidFill>
+          <a:ln w="12700">
+            <a:solidFill>
+              <a:srgbClr val="2563EB"/>
+            </a:solidFill>
+            <a:prstDash val="solid"/>
+          </a:ln>
+        </p:spPr>
+      </p:sp>
+      <p:sp>
+        <p:nvSpPr>
+          <p:cNvPr id="27" name="Shape 25"/>
+          <p:cNvSpPr/>
+          <p:nvPr/>
+        </p:nvSpPr>
+        <p:spPr>
+          <a:xfrm flipH="1">
+            <a:off x="7132320" y="3657600"/>
+            <a:ext cx="2926080" cy="182880"/>
+          </a:xfrm>
+          <a:prstGeom prst="line">
+            <a:avLst/>
+          </a:prstGeom>
+          <a:noFill/>
+          <a:ln w="38100">
+            <a:solidFill>
+              <a:srgbClr val="111827"/>
+            </a:solidFill>
+            <a:prstDash val="solid"/>
+            <a:tailEnd type="triangle"/>
+          </a:ln>
+        </p:spPr>
+      </p:sp>
+      <p:sp>
+        <p:nvSpPr>
+          <p:cNvPr id="28" name="Text 26"/>
           <p:cNvSpPr txBox="1"/>
           <p:nvPr/>
         </p:nvSpPr>
         <p:spPr>
           <a:xfrm>
-            <a:off x="868680" y="4023360"/>
-            <a:ext cx="3840480" cy="274320"/>
+            <a:off x="8321040" y="3154680"/>
+            <a:ext cx="457200" cy="457200"/>
           </a:xfrm>
           <a:prstGeom prst="rect">
             <a:avLst/>
@@ -8042,27 +9331,63 @@
               <a:buNone/>
             </a:pPr>
             <a:r>
-              <a:rPr lang="en-US" sz="1100" b="1" spc="200" kern="0" dirty="0">
+              <a:rPr lang="en-US" sz="2400" b="1" dirty="0">
+                <a:solidFill>
+                  <a:srgbClr val="111827"/>
+                </a:solidFill>
+              </a:rPr>
+              <a:t>v</a:t>
+            </a:r>
+            <a:endParaRPr lang="en-US" sz="2400" dirty="0"/>
+          </a:p>
+        </p:txBody>
+      </p:sp>
+      <p:sp>
+        <p:nvSpPr>
+          <p:cNvPr id="29" name="Text 27"/>
+          <p:cNvSpPr txBox="1"/>
+          <p:nvPr/>
+        </p:nvSpPr>
+        <p:spPr>
+          <a:xfrm>
+            <a:off x="5760720" y="4709160"/>
+            <a:ext cx="1828800" cy="320040"/>
+          </a:xfrm>
+          <a:prstGeom prst="rect">
+            <a:avLst/>
+          </a:prstGeom>
+          <a:noFill/>
+          <a:ln/>
+        </p:spPr>
+        <p:txBody>
+          <a:bodyPr wrap="square" lIns="0" tIns="0" rIns="0" bIns="0" rtlCol="0" anchor="ctr"/>
+          <a:lstStyle/>
+          <a:p>
+            <a:pPr indent="0" marL="0">
+              <a:buNone/>
+            </a:pPr>
+            <a:r>
+              <a:rPr lang="en-US" sz="1500" b="1" dirty="0">
                 <a:solidFill>
                   <a:srgbClr val="C2410C"/>
                 </a:solidFill>
               </a:rPr>
-              <a:t>CONTINUED PRETRAINING</a:t>
-            </a:r>
-            <a:endParaRPr lang="en-US" sz="1100" dirty="0"/>
-          </a:p>
-        </p:txBody>
-      </p:sp>
-      <p:sp>
-        <p:nvSpPr>
-          <p:cNvPr id="10" name="Text 8"/>
+              <a:t>medical</a:t>
+            </a:r>
+            <a:endParaRPr lang="en-US" sz="1500" dirty="0"/>
+          </a:p>
+        </p:txBody>
+      </p:sp>
+      <p:sp>
+        <p:nvSpPr>
+          <p:cNvPr id="30" name="Text 28"/>
           <p:cNvSpPr txBox="1"/>
           <p:nvPr/>
         </p:nvSpPr>
         <p:spPr>
           <a:xfrm>
-            <a:off x="868680" y="4297680"/>
-            <a:ext cx="3840480" cy="609600"/>
+            <a:off x="9144000" y="2468880"/>
+            <a:ext cx="2194560" cy="320040"/>
           </a:xfrm>
           <a:prstGeom prst="rect">
             <a:avLst/>
@@ -8074,34 +9399,31 @@
           <a:bodyPr wrap="square" lIns="0" tIns="0" rIns="0" bIns="0" rtlCol="0" anchor="ctr"/>
           <a:lstStyle/>
           <a:p>
-            <a:pPr indent="0" marL="0">
-              <a:buNone/>
-            </a:pPr>
-            <a:r>
-              <a:rPr lang="en-US" sz="4000" b="1" dirty="0">
-                <a:solidFill>
-                  <a:srgbClr val="C2410C"/>
-                </a:solidFill>
-                <a:latin typeface="Cambria" pitchFamily="34" charset="0"/>
-                <a:ea typeface="Cambria" pitchFamily="34" charset="-122"/>
-                <a:cs typeface="Cambria" pitchFamily="34" charset="-120"/>
-              </a:rPr>
-              <a:t>~6 billion</a:t>
-            </a:r>
-            <a:endParaRPr lang="en-US" sz="4000" dirty="0"/>
-          </a:p>
-        </p:txBody>
-      </p:sp>
-      <p:sp>
-        <p:nvSpPr>
-          <p:cNvPr id="11" name="Text 9"/>
+            <a:pPr algn="r" indent="0" marL="0">
+              <a:buNone/>
+            </a:pPr>
+            <a:r>
+              <a:rPr lang="en-US" sz="1500" b="1" dirty="0">
+                <a:solidFill>
+                  <a:srgbClr val="2563EB"/>
+                </a:solidFill>
+              </a:rPr>
+              <a:t>everything else</a:t>
+            </a:r>
+            <a:endParaRPr lang="en-US" sz="1500" dirty="0"/>
+          </a:p>
+        </p:txBody>
+      </p:sp>
+      <p:sp>
+        <p:nvSpPr>
+          <p:cNvPr id="31" name="Text 29"/>
           <p:cNvSpPr txBox="1"/>
           <p:nvPr/>
         </p:nvSpPr>
         <p:spPr>
           <a:xfrm>
-            <a:off x="868680" y="4937760"/>
-            <a:ext cx="3840480" cy="365760"/>
+            <a:off x="5486400" y="5212080"/>
+            <a:ext cx="6035040" cy="365760"/>
           </a:xfrm>
           <a:prstGeom prst="rect">
             <a:avLst/>
@@ -8113,24 +9435,24 @@
           <a:bodyPr wrap="square" lIns="0" tIns="0" rIns="0" bIns="0" rtlCol="0" anchor="ctr"/>
           <a:lstStyle/>
           <a:p>
-            <a:pPr indent="0" marL="0">
-              <a:buNone/>
-            </a:pPr>
-            <a:r>
-              <a:rPr lang="en-US" sz="1300" dirty="0">
-                <a:solidFill>
-                  <a:srgbClr val="374151"/>
-                </a:solidFill>
-              </a:rPr>
-              <a:t>tokens of fresh news, same recipe, a few days</a:t>
-            </a:r>
-            <a:endParaRPr lang="en-US" sz="1300" dirty="0"/>
-          </a:p>
-        </p:txBody>
-      </p:sp>
-      <p:sp>
-        <p:nvSpPr>
-          <p:cNvPr id="12" name="Text 0"/>
+            <a:pPr algn="ctr" indent="0" marL="0">
+              <a:buNone/>
+            </a:pPr>
+            <a:r>
+              <a:rPr lang="en-US" sz="1500" b="1" dirty="0">
+                <a:solidFill>
+                  <a:srgbClr val="6B7280"/>
+                </a:solidFill>
+              </a:rPr>
+              <a:t>one layer, each dot a sentence</a:t>
+            </a:r>
+            <a:endParaRPr lang="en-US" sz="1500" dirty="0"/>
+          </a:p>
+        </p:txBody>
+      </p:sp>
+      <p:sp>
+        <p:nvSpPr>
+          <p:cNvPr id="32" name="Text 0"/>
           <p:cNvSpPr/>
           <p:nvPr>
             <p:ph idx="102" type="body" hasCustomPrompt="1"/>
@@ -8160,7 +9482,7 @@
                   <a:schemeClr val="tx1"/>
                 </a:solidFill>
               </a:rPr>
-              <a:t>Let it read the news. </a:t>
+              <a:t>Medical sits in its own corner. </a:t>
             </a:r>
             <a:pPr indent="0" marL="0">
               <a:buNone/>
@@ -8171,7 +9493,7 @@
                   <a:srgbClr val="6B7280"/>
                 </a:solidFill>
               </a:rPr>
-              <a:t>A few billion tokens instead of a new model.</a:t>
+              <a:t>So we can point at it: one arrow, v.</a:t>
             </a:r>
             <a:endParaRPr lang="en-US" sz="1800" dirty="0"/>
           </a:p>
@@ -8279,7 +9601,7 @@
                   <a:schemeClr val="accent1"/>
                 </a:solidFill>
               </a:rPr>
-              <a:t>WAY 2 · QUESTION 5</a:t>
+              <a:t>WAY 1 · THE NUDGE</a:t>
             </a:r>
             <a:endParaRPr lang="en-US" sz="1200" dirty="0"/>
           </a:p>
@@ -8317,7 +9639,18 @@
                   <a:schemeClr val="tx1"/>
                 </a:solidFill>
               </a:rPr>
-              <a:t>Taught in English, does it know it in German?</a:t>
+              <a:t>Add the arrow while it thinks. </a:t>
+            </a:r>
+            <a:pPr algn="l" indent="0" marL="0">
+              <a:buNone/>
+            </a:pPr>
+            <a:r>
+              <a:rPr lang="en-US" sz="3200" b="1" i="1" dirty="0">
+                <a:solidFill>
+                  <a:srgbClr val="6B7280"/>
+                </a:solidFill>
+              </a:rPr>
+              <a:t>Where you add it matters.</a:t>
             </a:r>
             <a:endParaRPr lang="en-US" sz="3200" dirty="0"/>
           </a:p>
@@ -8325,62 +9658,26 @@
       </p:sp>
       <p:sp>
         <p:nvSpPr>
-          <p:cNvPr id="4" name="Text 2"/>
-          <p:cNvSpPr txBox="1"/>
-          <p:nvPr/>
-        </p:nvSpPr>
-        <p:spPr>
-          <a:xfrm>
-            <a:off x="914400" y="2240280"/>
-            <a:ext cx="2011680" cy="320040"/>
-          </a:xfrm>
-          <a:prstGeom prst="rect">
-            <a:avLst/>
-          </a:prstGeom>
-          <a:noFill/>
-          <a:ln/>
-        </p:spPr>
-        <p:txBody>
-          <a:bodyPr wrap="square" lIns="0" tIns="0" rIns="0" bIns="0" rtlCol="0" anchor="ctr"/>
-          <a:lstStyle/>
-          <a:p>
-            <a:pPr algn="ctr" indent="0" marL="0">
-              <a:buNone/>
-            </a:pPr>
-            <a:r>
-              <a:rPr lang="en-US" sz="1400" b="1" dirty="0">
-                <a:solidFill>
-                  <a:srgbClr val="6B7280"/>
-                </a:solidFill>
-              </a:rPr>
-              <a:t>reads news in</a:t>
-            </a:r>
-            <a:endParaRPr lang="en-US" sz="1400" dirty="0"/>
-          </a:p>
-        </p:txBody>
-      </p:sp>
-      <p:sp>
-        <p:nvSpPr>
-          <p:cNvPr id="5" name="Shape 3"/>
-          <p:cNvSpPr/>
-          <p:nvPr/>
-        </p:nvSpPr>
-        <p:spPr>
-          <a:xfrm>
-            <a:off x="914400" y="2651760"/>
-            <a:ext cx="2011680" cy="548640"/>
+          <p:cNvPr id="4" name="Shape 2"/>
+          <p:cNvSpPr/>
+          <p:nvPr/>
+        </p:nvSpPr>
+        <p:spPr>
+          <a:xfrm>
+            <a:off x="914400" y="2468880"/>
+            <a:ext cx="2926080" cy="438912"/>
           </a:xfrm>
           <a:prstGeom prst="roundRect">
             <a:avLst>
-              <a:gd name="adj" fmla="val 16667"/>
+              <a:gd name="adj" fmla="val 12500"/>
             </a:avLst>
           </a:prstGeom>
           <a:solidFill>
-            <a:srgbClr val="2563EB"/>
+            <a:srgbClr val="E5E7EB"/>
           </a:solidFill>
           <a:ln w="12700">
             <a:solidFill>
-              <a:srgbClr val="2563EB"/>
+              <a:srgbClr val="E5E7EB"/>
             </a:solidFill>
             <a:prstDash val="solid"/>
           </a:ln>
@@ -8388,62 +9685,26 @@
       </p:sp>
       <p:sp>
         <p:nvSpPr>
-          <p:cNvPr id="6" name="Text 4"/>
-          <p:cNvSpPr txBox="1"/>
-          <p:nvPr/>
-        </p:nvSpPr>
-        <p:spPr>
-          <a:xfrm>
-            <a:off x="914400" y="2651760"/>
-            <a:ext cx="2011680" cy="548640"/>
-          </a:xfrm>
-          <a:prstGeom prst="rect">
-            <a:avLst/>
-          </a:prstGeom>
-          <a:noFill/>
-          <a:ln/>
-        </p:spPr>
-        <p:txBody>
-          <a:bodyPr wrap="square" lIns="0" tIns="0" rIns="0" bIns="0" rtlCol="0" anchor="ctr"/>
-          <a:lstStyle/>
-          <a:p>
-            <a:pPr algn="ctr" indent="0" marL="0">
-              <a:buNone/>
-            </a:pPr>
-            <a:r>
-              <a:rPr lang="en-US" sz="2000" b="1" dirty="0">
-                <a:solidFill>
-                  <a:srgbClr val="FFFFFF"/>
-                </a:solidFill>
-              </a:rPr>
-              <a:t>EN</a:t>
-            </a:r>
-            <a:endParaRPr lang="en-US" sz="2000" dirty="0"/>
-          </a:p>
-        </p:txBody>
-      </p:sp>
-      <p:sp>
-        <p:nvSpPr>
-          <p:cNvPr id="7" name="Shape 5"/>
-          <p:cNvSpPr/>
-          <p:nvPr/>
-        </p:nvSpPr>
-        <p:spPr>
-          <a:xfrm>
-            <a:off x="914400" y="3383280"/>
-            <a:ext cx="2011680" cy="548640"/>
+          <p:cNvPr id="5" name="Shape 3"/>
+          <p:cNvSpPr/>
+          <p:nvPr/>
+        </p:nvSpPr>
+        <p:spPr>
+          <a:xfrm>
+            <a:off x="914400" y="3017520"/>
+            <a:ext cx="2926080" cy="438912"/>
           </a:xfrm>
           <a:prstGeom prst="roundRect">
             <a:avLst>
-              <a:gd name="adj" fmla="val 16667"/>
+              <a:gd name="adj" fmla="val 12500"/>
             </a:avLst>
           </a:prstGeom>
           <a:solidFill>
-            <a:srgbClr val="D97706"/>
+            <a:srgbClr val="E5E7EB"/>
           </a:solidFill>
           <a:ln w="12700">
             <a:solidFill>
-              <a:srgbClr val="D97706"/>
+              <a:srgbClr val="E5E7EB"/>
             </a:solidFill>
             <a:prstDash val="solid"/>
           </a:ln>
@@ -8451,62 +9712,26 @@
       </p:sp>
       <p:sp>
         <p:nvSpPr>
-          <p:cNvPr id="8" name="Text 6"/>
-          <p:cNvSpPr txBox="1"/>
-          <p:nvPr/>
-        </p:nvSpPr>
-        <p:spPr>
-          <a:xfrm>
-            <a:off x="914400" y="3383280"/>
-            <a:ext cx="2011680" cy="548640"/>
-          </a:xfrm>
-          <a:prstGeom prst="rect">
-            <a:avLst/>
-          </a:prstGeom>
-          <a:noFill/>
-          <a:ln/>
-        </p:spPr>
-        <p:txBody>
-          <a:bodyPr wrap="square" lIns="0" tIns="0" rIns="0" bIns="0" rtlCol="0" anchor="ctr"/>
-          <a:lstStyle/>
-          <a:p>
-            <a:pPr algn="ctr" indent="0" marL="0">
-              <a:buNone/>
-            </a:pPr>
-            <a:r>
-              <a:rPr lang="en-US" sz="2000" b="1" dirty="0">
-                <a:solidFill>
-                  <a:srgbClr val="FFFFFF"/>
-                </a:solidFill>
-              </a:rPr>
-              <a:t>DE</a:t>
-            </a:r>
-            <a:endParaRPr lang="en-US" sz="2000" dirty="0"/>
-          </a:p>
-        </p:txBody>
-      </p:sp>
-      <p:sp>
-        <p:nvSpPr>
-          <p:cNvPr id="9" name="Shape 7"/>
-          <p:cNvSpPr/>
-          <p:nvPr/>
-        </p:nvSpPr>
-        <p:spPr>
-          <a:xfrm>
-            <a:off x="914400" y="4114800"/>
-            <a:ext cx="2011680" cy="548640"/>
+          <p:cNvPr id="6" name="Shape 4"/>
+          <p:cNvSpPr/>
+          <p:nvPr/>
+        </p:nvSpPr>
+        <p:spPr>
+          <a:xfrm>
+            <a:off x="914400" y="3566160"/>
+            <a:ext cx="2926080" cy="438912"/>
           </a:xfrm>
           <a:prstGeom prst="roundRect">
             <a:avLst>
-              <a:gd name="adj" fmla="val 16667"/>
+              <a:gd name="adj" fmla="val 12500"/>
             </a:avLst>
           </a:prstGeom>
           <a:solidFill>
-            <a:srgbClr val="7C3AED"/>
+            <a:srgbClr val="C2410C"/>
           </a:solidFill>
           <a:ln w="12700">
             <a:solidFill>
-              <a:srgbClr val="7C3AED"/>
+              <a:srgbClr val="C2410C"/>
             </a:solidFill>
             <a:prstDash val="solid"/>
           </a:ln>
@@ -8514,14 +9739,140 @@
       </p:sp>
       <p:sp>
         <p:nvSpPr>
-          <p:cNvPr id="10" name="Text 8"/>
+          <p:cNvPr id="7" name="Text 5"/>
           <p:cNvSpPr txBox="1"/>
           <p:nvPr/>
         </p:nvSpPr>
         <p:spPr>
           <a:xfrm>
+            <a:off x="914400" y="3566160"/>
+            <a:ext cx="2926080" cy="438912"/>
+          </a:xfrm>
+          <a:prstGeom prst="rect">
+            <a:avLst/>
+          </a:prstGeom>
+          <a:noFill/>
+          <a:ln/>
+        </p:spPr>
+        <p:txBody>
+          <a:bodyPr wrap="square" lIns="0" tIns="0" rIns="0" bIns="0" rtlCol="0" anchor="ctr"/>
+          <a:lstStyle/>
+          <a:p>
+            <a:pPr algn="ctr" indent="0" marL="0">
+              <a:buNone/>
+            </a:pPr>
+            <a:r>
+              <a:rPr lang="en-US" sz="1600" b="1" dirty="0">
+                <a:solidFill>
+                  <a:srgbClr val="FFFFFF"/>
+                </a:solidFill>
+              </a:rPr>
+              <a:t>MLP layer</a:t>
+            </a:r>
+            <a:endParaRPr lang="en-US" sz="1600" dirty="0"/>
+          </a:p>
+        </p:txBody>
+      </p:sp>
+      <p:sp>
+        <p:nvSpPr>
+          <p:cNvPr id="8" name="Text 6"/>
+          <p:cNvSpPr txBox="1"/>
+          <p:nvPr/>
+        </p:nvSpPr>
+        <p:spPr>
+          <a:xfrm>
+            <a:off x="4023360" y="3493008"/>
+            <a:ext cx="1097280" cy="548640"/>
+          </a:xfrm>
+          <a:prstGeom prst="rect">
+            <a:avLst/>
+          </a:prstGeom>
+          <a:noFill/>
+          <a:ln/>
+        </p:spPr>
+        <p:txBody>
+          <a:bodyPr wrap="square" lIns="0" tIns="0" rIns="0" bIns="0" rtlCol="0" anchor="ctr"/>
+          <a:lstStyle/>
+          <a:p>
+            <a:pPr indent="0" marL="0">
+              <a:buNone/>
+            </a:pPr>
+            <a:r>
+              <a:rPr lang="en-US" sz="2800" b="1" dirty="0">
+                <a:solidFill>
+                  <a:srgbClr val="C2410C"/>
+                </a:solidFill>
+              </a:rPr>
+              <a:t>+ v</a:t>
+            </a:r>
+            <a:endParaRPr lang="en-US" sz="2800" dirty="0"/>
+          </a:p>
+        </p:txBody>
+      </p:sp>
+      <p:sp>
+        <p:nvSpPr>
+          <p:cNvPr id="9" name="Shape 7"/>
+          <p:cNvSpPr/>
+          <p:nvPr/>
+        </p:nvSpPr>
+        <p:spPr>
+          <a:xfrm>
             <a:off x="914400" y="4114800"/>
-            <a:ext cx="2011680" cy="548640"/>
+            <a:ext cx="2926080" cy="438912"/>
+          </a:xfrm>
+          <a:prstGeom prst="roundRect">
+            <a:avLst>
+              <a:gd name="adj" fmla="val 12500"/>
+            </a:avLst>
+          </a:prstGeom>
+          <a:solidFill>
+            <a:srgbClr val="E5E7EB"/>
+          </a:solidFill>
+          <a:ln w="12700">
+            <a:solidFill>
+              <a:srgbClr val="E5E7EB"/>
+            </a:solidFill>
+            <a:prstDash val="solid"/>
+          </a:ln>
+        </p:spPr>
+      </p:sp>
+      <p:sp>
+        <p:nvSpPr>
+          <p:cNvPr id="10" name="Shape 8"/>
+          <p:cNvSpPr/>
+          <p:nvPr/>
+        </p:nvSpPr>
+        <p:spPr>
+          <a:xfrm>
+            <a:off x="914400" y="4663440"/>
+            <a:ext cx="2926080" cy="438912"/>
+          </a:xfrm>
+          <a:prstGeom prst="roundRect">
+            <a:avLst>
+              <a:gd name="adj" fmla="val 12500"/>
+            </a:avLst>
+          </a:prstGeom>
+          <a:solidFill>
+            <a:srgbClr val="E5E7EB"/>
+          </a:solidFill>
+          <a:ln w="12700">
+            <a:solidFill>
+              <a:srgbClr val="E5E7EB"/>
+            </a:solidFill>
+            <a:prstDash val="solid"/>
+          </a:ln>
+        </p:spPr>
+      </p:sp>
+      <p:sp>
+        <p:nvSpPr>
+          <p:cNvPr id="11" name="Text 9"/>
+          <p:cNvSpPr txBox="1"/>
+          <p:nvPr/>
+        </p:nvSpPr>
+        <p:spPr>
+          <a:xfrm>
+            <a:off x="914400" y="5257800"/>
+            <a:ext cx="2926080" cy="365760"/>
           </a:xfrm>
           <a:prstGeom prst="rect">
             <a:avLst/>
@@ -8537,29 +9888,29 @@
               <a:buNone/>
             </a:pPr>
             <a:r>
-              <a:rPr lang="en-US" sz="2000" b="1" dirty="0">
-                <a:solidFill>
-                  <a:srgbClr val="FFFFFF"/>
-                </a:solidFill>
-              </a:rPr>
-              <a:t>FR</a:t>
-            </a:r>
-            <a:endParaRPr lang="en-US" sz="2000" dirty="0"/>
-          </a:p>
-        </p:txBody>
-      </p:sp>
-      <p:sp>
-        <p:nvSpPr>
-          <p:cNvPr id="11" name="Shape 9"/>
-          <p:cNvSpPr/>
-          <p:nvPr/>
-        </p:nvSpPr>
-        <p:spPr>
-          <a:xfrm>
-            <a:off x="3291840" y="3429000"/>
-            <a:ext cx="1188720" cy="502920"/>
-          </a:xfrm>
-          <a:prstGeom prst="rightArrow">
+              <a:rPr lang="en-US" sz="1400" dirty="0">
+                <a:solidFill>
+                  <a:srgbClr val="6B7280"/>
+                </a:solidFill>
+              </a:rPr>
+              <a:t>the model, layer by layer</a:t>
+            </a:r>
+            <a:endParaRPr lang="en-US" sz="1400" dirty="0"/>
+          </a:p>
+        </p:txBody>
+      </p:sp>
+      <p:sp>
+        <p:nvSpPr>
+          <p:cNvPr id="12" name="Shape 10"/>
+          <p:cNvSpPr/>
+          <p:nvPr/>
+        </p:nvSpPr>
+        <p:spPr>
+          <a:xfrm>
+            <a:off x="6583680" y="3840480"/>
+            <a:ext cx="1188720" cy="1143000"/>
+          </a:xfrm>
+          <a:prstGeom prst="rect">
             <a:avLst/>
           </a:prstGeom>
           <a:solidFill>
@@ -8575,50 +9926,14 @@
       </p:sp>
       <p:sp>
         <p:nvSpPr>
-          <p:cNvPr id="12" name="Text 10"/>
-          <p:cNvSpPr txBox="1"/>
-          <p:nvPr/>
-        </p:nvSpPr>
-        <p:spPr>
-          <a:xfrm>
-            <a:off x="4754880" y="3154680"/>
-            <a:ext cx="2651760" cy="457200"/>
-          </a:xfrm>
-          <a:prstGeom prst="rect">
-            <a:avLst/>
-          </a:prstGeom>
-          <a:noFill/>
-          <a:ln/>
-        </p:spPr>
-        <p:txBody>
-          <a:bodyPr wrap="square" lIns="0" tIns="0" rIns="0" bIns="0" rtlCol="0" anchor="ctr"/>
-          <a:lstStyle/>
-          <a:p>
-            <a:pPr algn="ctr" indent="0" marL="0">
-              <a:buNone/>
-            </a:pPr>
-            <a:r>
-              <a:rPr lang="en-US" sz="2400" b="1" dirty="0">
-                <a:solidFill>
-                  <a:srgbClr val="111827"/>
-                </a:solidFill>
-              </a:rPr>
-              <a:t>plain LLM</a:t>
-            </a:r>
-            <a:endParaRPr lang="en-US" sz="2400" dirty="0"/>
-          </a:p>
-        </p:txBody>
-      </p:sp>
-      <p:sp>
-        <p:nvSpPr>
           <p:cNvPr id="13" name="Text 11"/>
           <p:cNvSpPr txBox="1"/>
           <p:nvPr/>
         </p:nvSpPr>
         <p:spPr>
           <a:xfrm>
-            <a:off x="4754880" y="3611880"/>
-            <a:ext cx="2651760" cy="365760"/>
+            <a:off x="6400800" y="3456432"/>
+            <a:ext cx="1554480" cy="365760"/>
           </a:xfrm>
           <a:prstGeom prst="rect">
             <a:avLst/>
@@ -8634,14 +9949,14 @@
               <a:buNone/>
             </a:pPr>
             <a:r>
-              <a:rPr lang="en-US" sz="1400" dirty="0">
+              <a:rPr lang="en-US" sz="1600" b="1" dirty="0">
                 <a:solidFill>
                   <a:srgbClr val="6B7280"/>
                 </a:solidFill>
               </a:rPr>
-              <a:t>no reasoning</a:t>
-            </a:r>
-            <a:endParaRPr lang="en-US" sz="1400" dirty="0"/>
+              <a:t>+21%</a:t>
+            </a:r>
+            <a:endParaRPr lang="en-US" sz="1600" dirty="0"/>
           </a:p>
         </p:txBody>
       </p:sp>
@@ -8653,10 +9968,10 @@
         </p:nvSpPr>
         <p:spPr>
           <a:xfrm>
-            <a:off x="7680960" y="3429000"/>
-            <a:ext cx="1188720" cy="502920"/>
-          </a:xfrm>
-          <a:prstGeom prst="rightArrow">
+            <a:off x="8138160" y="3429000"/>
+            <a:ext cx="1188720" cy="1554480"/>
+          </a:xfrm>
+          <a:prstGeom prst="rect">
             <a:avLst/>
           </a:prstGeom>
           <a:solidFill>
@@ -8678,8 +9993,8 @@
         </p:nvSpPr>
         <p:spPr>
           <a:xfrm>
-            <a:off x="9144000" y="2240280"/>
-            <a:ext cx="2103120" cy="320040"/>
+            <a:off x="7955280" y="3044952"/>
+            <a:ext cx="1554480" cy="365760"/>
           </a:xfrm>
           <a:prstGeom prst="rect">
             <a:avLst/>
@@ -8695,14 +10010,14 @@
               <a:buNone/>
             </a:pPr>
             <a:r>
-              <a:rPr lang="en-US" sz="1400" b="1" dirty="0">
+              <a:rPr lang="en-US" sz="1600" b="1" dirty="0">
                 <a:solidFill>
                   <a:srgbClr val="6B7280"/>
                 </a:solidFill>
               </a:rPr>
-              <a:t>same fact asked in</a:t>
-            </a:r>
-            <a:endParaRPr lang="en-US" sz="1400" dirty="0"/>
+              <a:t>+29%</a:t>
+            </a:r>
+            <a:endParaRPr lang="en-US" sz="1600" dirty="0"/>
           </a:p>
         </p:txBody>
       </p:sp>
@@ -8714,20 +10029,18 @@
         </p:nvSpPr>
         <p:spPr>
           <a:xfrm>
-            <a:off x="9144000" y="2651760"/>
-            <a:ext cx="2103120" cy="548640"/>
-          </a:xfrm>
-          <a:prstGeom prst="roundRect">
-            <a:avLst>
-              <a:gd name="adj" fmla="val 16667"/>
-            </a:avLst>
+            <a:off x="9692640" y="2560320"/>
+            <a:ext cx="1188720" cy="2423160"/>
+          </a:xfrm>
+          <a:prstGeom prst="rect">
+            <a:avLst/>
           </a:prstGeom>
           <a:solidFill>
-            <a:srgbClr val="FFFFFF"/>
+            <a:srgbClr val="C2410C"/>
           </a:solidFill>
-          <a:ln w="31750">
+          <a:ln w="12700">
             <a:solidFill>
-              <a:srgbClr val="2563EB"/>
+              <a:srgbClr val="C2410C"/>
             </a:solidFill>
             <a:prstDash val="solid"/>
           </a:ln>
@@ -8741,8 +10054,8 @@
         </p:nvSpPr>
         <p:spPr>
           <a:xfrm>
-            <a:off x="9144000" y="2651760"/>
-            <a:ext cx="2103120" cy="548640"/>
+            <a:off x="9509760" y="2176272"/>
+            <a:ext cx="1554480" cy="365760"/>
           </a:xfrm>
           <a:prstGeom prst="rect">
             <a:avLst/>
@@ -8758,14 +10071,14 @@
               <a:buNone/>
             </a:pPr>
             <a:r>
-              <a:rPr lang="en-US" sz="2000" b="1" dirty="0">
-                <a:solidFill>
-                  <a:srgbClr val="111827"/>
-                </a:solidFill>
-              </a:rPr>
-              <a:t>EN</a:t>
-            </a:r>
-            <a:endParaRPr lang="en-US" sz="2000" dirty="0"/>
+              <a:rPr lang="en-US" sz="1600" b="1" dirty="0">
+                <a:solidFill>
+                  <a:srgbClr val="C2410C"/>
+                </a:solidFill>
+              </a:rPr>
+              <a:t>+45%</a:t>
+            </a:r>
+            <a:endParaRPr lang="en-US" sz="1600" dirty="0"/>
           </a:p>
         </p:txBody>
       </p:sp>
@@ -8777,20 +10090,16 @@
         </p:nvSpPr>
         <p:spPr>
           <a:xfrm>
-            <a:off x="9144000" y="3383280"/>
-            <a:ext cx="2103120" cy="548640"/>
-          </a:xfrm>
-          <a:prstGeom prst="roundRect">
-            <a:avLst>
-              <a:gd name="adj" fmla="val 16667"/>
-            </a:avLst>
-          </a:prstGeom>
-          <a:solidFill>
-            <a:srgbClr val="FFFFFF"/>
-          </a:solidFill>
-          <a:ln w="31750">
+            <a:off x="6446520" y="4983480"/>
+            <a:ext cx="4663440" cy="0"/>
+          </a:xfrm>
+          <a:prstGeom prst="line">
+            <a:avLst/>
+          </a:prstGeom>
+          <a:noFill/>
+          <a:ln w="25400">
             <a:solidFill>
-              <a:srgbClr val="D97706"/>
+              <a:srgbClr val="111827"/>
             </a:solidFill>
             <a:prstDash val="solid"/>
           </a:ln>
@@ -8804,8 +10113,8 @@
         </p:nvSpPr>
         <p:spPr>
           <a:xfrm>
-            <a:off x="9144000" y="3383280"/>
-            <a:ext cx="2103120" cy="548640"/>
+            <a:off x="6400800" y="5056632"/>
+            <a:ext cx="1554480" cy="320040"/>
           </a:xfrm>
           <a:prstGeom prst="rect">
             <a:avLst/>
@@ -8821,43 +10130,52 @@
               <a:buNone/>
             </a:pPr>
             <a:r>
-              <a:rPr lang="en-US" sz="2000" b="1" dirty="0">
-                <a:solidFill>
-                  <a:srgbClr val="111827"/>
-                </a:solidFill>
-              </a:rPr>
-              <a:t>DE</a:t>
-            </a:r>
-            <a:endParaRPr lang="en-US" sz="2000" dirty="0"/>
-          </a:p>
-        </p:txBody>
-      </p:sp>
-      <p:sp>
-        <p:nvSpPr>
-          <p:cNvPr id="20" name="Shape 18"/>
-          <p:cNvSpPr/>
-          <p:nvPr/>
-        </p:nvSpPr>
-        <p:spPr>
-          <a:xfrm>
-            <a:off x="9144000" y="4114800"/>
-            <a:ext cx="2103120" cy="548640"/>
-          </a:xfrm>
-          <a:prstGeom prst="roundRect">
-            <a:avLst>
-              <a:gd name="adj" fmla="val 16667"/>
-            </a:avLst>
-          </a:prstGeom>
-          <a:solidFill>
-            <a:srgbClr val="FFFFFF"/>
-          </a:solidFill>
-          <a:ln w="31750">
-            <a:solidFill>
-              <a:srgbClr val="7C3AED"/>
-            </a:solidFill>
-            <a:prstDash val="solid"/>
-          </a:ln>
-        </p:spPr>
+              <a:rPr lang="en-US" sz="1400" b="1" dirty="0">
+                <a:solidFill>
+                  <a:srgbClr val="374151"/>
+                </a:solidFill>
+              </a:rPr>
+              <a:t>the usual spot</a:t>
+            </a:r>
+            <a:endParaRPr lang="en-US" sz="1400" dirty="0"/>
+          </a:p>
+        </p:txBody>
+      </p:sp>
+      <p:sp>
+        <p:nvSpPr>
+          <p:cNvPr id="20" name="Text 18"/>
+          <p:cNvSpPr txBox="1"/>
+          <p:nvPr/>
+        </p:nvSpPr>
+        <p:spPr>
+          <a:xfrm>
+            <a:off x="7955280" y="5056632"/>
+            <a:ext cx="1554480" cy="320040"/>
+          </a:xfrm>
+          <a:prstGeom prst="rect">
+            <a:avLst/>
+          </a:prstGeom>
+          <a:noFill/>
+          <a:ln/>
+        </p:spPr>
+        <p:txBody>
+          <a:bodyPr wrap="square" lIns="0" tIns="0" rIns="0" bIns="0" rtlCol="0" anchor="ctr"/>
+          <a:lstStyle/>
+          <a:p>
+            <a:pPr algn="ctr" indent="0" marL="0">
+              <a:buNone/>
+            </a:pPr>
+            <a:r>
+              <a:rPr lang="en-US" sz="1400" b="1" dirty="0">
+                <a:solidFill>
+                  <a:srgbClr val="374151"/>
+                </a:solidFill>
+              </a:rPr>
+              <a:t>attention</a:t>
+            </a:r>
+            <a:endParaRPr lang="en-US" sz="1400" dirty="0"/>
+          </a:p>
+        </p:txBody>
       </p:sp>
       <p:sp>
         <p:nvSpPr>
@@ -8867,8 +10185,8 @@
         </p:nvSpPr>
         <p:spPr>
           <a:xfrm>
-            <a:off x="9144000" y="4114800"/>
-            <a:ext cx="2103120" cy="548640"/>
+            <a:off x="9509760" y="5056632"/>
+            <a:ext cx="1554480" cy="320040"/>
           </a:xfrm>
           <a:prstGeom prst="rect">
             <a:avLst/>
@@ -8884,20 +10202,56 @@
               <a:buNone/>
             </a:pPr>
             <a:r>
-              <a:rPr lang="en-US" sz="2000" b="1" dirty="0">
-                <a:solidFill>
-                  <a:srgbClr val="111827"/>
-                </a:solidFill>
-              </a:rPr>
-              <a:t>FR</a:t>
-            </a:r>
-            <a:endParaRPr lang="en-US" sz="2000" dirty="0"/>
-          </a:p>
-        </p:txBody>
-      </p:sp>
-      <p:sp>
-        <p:nvSpPr>
-          <p:cNvPr id="22" name="Text 0"/>
+              <a:rPr lang="en-US" sz="1400" b="1" dirty="0">
+                <a:solidFill>
+                  <a:srgbClr val="C2410C"/>
+                </a:solidFill>
+              </a:rPr>
+              <a:t>MLP</a:t>
+            </a:r>
+            <a:endParaRPr lang="en-US" sz="1400" dirty="0"/>
+          </a:p>
+        </p:txBody>
+      </p:sp>
+      <p:sp>
+        <p:nvSpPr>
+          <p:cNvPr id="22" name="Text 20"/>
+          <p:cNvSpPr txBox="1"/>
+          <p:nvPr/>
+        </p:nvSpPr>
+        <p:spPr>
+          <a:xfrm>
+            <a:off x="6446520" y="5394960"/>
+            <a:ext cx="4663440" cy="320040"/>
+          </a:xfrm>
+          <a:prstGeom prst="rect">
+            <a:avLst/>
+          </a:prstGeom>
+          <a:noFill/>
+          <a:ln/>
+        </p:spPr>
+        <p:txBody>
+          <a:bodyPr wrap="square" lIns="0" tIns="0" rIns="0" bIns="0" rtlCol="0" anchor="ctr"/>
+          <a:lstStyle/>
+          <a:p>
+            <a:pPr algn="ctr" indent="0" marL="0">
+              <a:buNone/>
+            </a:pPr>
+            <a:r>
+              <a:rPr lang="en-US" sz="1300" dirty="0">
+                <a:solidFill>
+                  <a:srgbClr val="6B7280"/>
+                </a:solidFill>
+              </a:rPr>
+              <a:t>better at medical and law facts</a:t>
+            </a:r>
+            <a:endParaRPr lang="en-US" sz="1300" dirty="0"/>
+          </a:p>
+        </p:txBody>
+      </p:sp>
+      <p:sp>
+        <p:nvSpPr>
+          <p:cNvPr id="23" name="Text 0"/>
           <p:cNvSpPr/>
           <p:nvPr>
             <p:ph idx="102" type="body" hasCustomPrompt="1"/>
@@ -8927,7 +10281,7 @@
                   <a:schemeClr val="tx1"/>
                 </a:solidFill>
               </a:rPr>
-              <a:t>Plain model, no reasoning, same facts in three languages. </a:t>
+              <a:t>No training, nothing forgotten. </a:t>
             </a:r>
             <a:pPr indent="0" marL="0">
               <a:buNone/>
@@ -8938,7 +10292,7 @@
                   <a:srgbClr val="6B7280"/>
                 </a:solidFill>
               </a:rPr>
-              <a:t>What's your guess?</a:t>
+              <a:t>But it can only surface what the model has already read.</a:t>
             </a:r>
             <a:endParaRPr lang="en-US" sz="1800" dirty="0"/>
           </a:p>
@@ -9046,7 +10400,7 @@
                   <a:schemeClr val="accent1"/>
                 </a:solidFill>
               </a:rPr>
-              <a:t>WAY 2 · QUESTION 5 · THE ANSWER</a:t>
+              <a:t>WAY 2 · IT NEVER READ IT</a:t>
             </a:r>
             <a:endParaRPr lang="en-US" sz="1200" dirty="0"/>
           </a:p>
@@ -9084,7 +10438,7 @@
                   <a:schemeClr val="tx1"/>
                 </a:solidFill>
               </a:rPr>
-              <a:t>Knowledge mostly doesn't speak a language. </a:t>
+              <a:t>Yesterday's news isn't in there. </a:t>
             </a:r>
             <a:pPr algn="l" indent="0" marL="0">
               <a:buNone/>
@@ -9095,7 +10449,7 @@
                   <a:srgbClr val="6B7280"/>
                 </a:solidFill>
               </a:rPr>
-              <a:t>~70% carries over.</a:t>
+              <a:t>So hand it the newspaper.</a:t>
             </a:r>
             <a:endParaRPr lang="en-US" sz="3200" dirty="0"/>
           </a:p>
@@ -9103,61 +10457,22 @@
       </p:sp>
       <p:sp>
         <p:nvSpPr>
-          <p:cNvPr id="4" name="Text 2"/>
-          <p:cNvSpPr txBox="1"/>
-          <p:nvPr/>
-        </p:nvSpPr>
-        <p:spPr>
-          <a:xfrm>
-            <a:off x="640080" y="2103120"/>
-            <a:ext cx="10908792" cy="1828800"/>
-          </a:xfrm>
-          <a:prstGeom prst="rect">
-            <a:avLst/>
-          </a:prstGeom>
-          <a:noFill/>
-          <a:ln/>
-        </p:spPr>
-        <p:txBody>
-          <a:bodyPr wrap="square" lIns="0" tIns="0" rIns="0" bIns="0" rtlCol="0" anchor="ctr"/>
-          <a:lstStyle/>
-          <a:p>
-            <a:pPr algn="ctr" indent="0" marL="0">
-              <a:buNone/>
-            </a:pPr>
-            <a:r>
-              <a:rPr lang="en-US" sz="12000" b="1" dirty="0">
-                <a:solidFill>
-                  <a:srgbClr val="C2410C"/>
-                </a:solidFill>
-                <a:latin typeface="Cambria" pitchFamily="34" charset="0"/>
-                <a:ea typeface="Cambria" pitchFamily="34" charset="-122"/>
-                <a:cs typeface="Cambria" pitchFamily="34" charset="-120"/>
-              </a:rPr>
-              <a:t>~70%</a:t>
-            </a:r>
-            <a:endParaRPr lang="en-US" sz="12000" dirty="0"/>
-          </a:p>
-        </p:txBody>
-      </p:sp>
-      <p:sp>
-        <p:nvSpPr>
-          <p:cNvPr id="5" name="Shape 3"/>
-          <p:cNvSpPr/>
-          <p:nvPr/>
-        </p:nvSpPr>
-        <p:spPr>
-          <a:xfrm>
-            <a:off x="1554480" y="4206240"/>
-            <a:ext cx="9052560" cy="502920"/>
+          <p:cNvPr id="4" name="Shape 2"/>
+          <p:cNvSpPr/>
+          <p:nvPr/>
+        </p:nvSpPr>
+        <p:spPr>
+          <a:xfrm>
+            <a:off x="640080" y="2286000"/>
+            <a:ext cx="4206240" cy="1417320"/>
           </a:xfrm>
           <a:prstGeom prst="roundRect">
             <a:avLst>
-              <a:gd name="adj" fmla="val 18182"/>
+              <a:gd name="adj" fmla="val 7742"/>
             </a:avLst>
           </a:prstGeom>
           <a:solidFill>
-            <a:srgbClr val="F3F4F6"/>
+            <a:srgbClr val="F9FAFB"/>
           </a:solidFill>
           <a:ln w="12700">
             <a:solidFill>
@@ -9169,26 +10484,137 @@
       </p:sp>
       <p:sp>
         <p:nvSpPr>
-          <p:cNvPr id="6" name="Shape 4"/>
-          <p:cNvSpPr/>
-          <p:nvPr/>
-        </p:nvSpPr>
-        <p:spPr>
-          <a:xfrm>
-            <a:off x="1554480" y="4206240"/>
-            <a:ext cx="6336792" cy="502920"/>
+          <p:cNvPr id="5" name="Text 3"/>
+          <p:cNvSpPr txBox="1"/>
+          <p:nvPr/>
+        </p:nvSpPr>
+        <p:spPr>
+          <a:xfrm>
+            <a:off x="868680" y="2377440"/>
+            <a:ext cx="3840480" cy="274320"/>
+          </a:xfrm>
+          <a:prstGeom prst="rect">
+            <a:avLst/>
+          </a:prstGeom>
+          <a:noFill/>
+          <a:ln/>
+        </p:spPr>
+        <p:txBody>
+          <a:bodyPr wrap="square" lIns="0" tIns="0" rIns="0" bIns="0" rtlCol="0" anchor="ctr"/>
+          <a:lstStyle/>
+          <a:p>
+            <a:pPr indent="0" marL="0">
+              <a:buNone/>
+            </a:pPr>
+            <a:r>
+              <a:rPr lang="en-US" sz="1100" b="1" spc="200" kern="0" dirty="0">
+                <a:solidFill>
+                  <a:srgbClr val="6B7280"/>
+                </a:solidFill>
+              </a:rPr>
+              <a:t>BACK TO SCHOOL</a:t>
+            </a:r>
+            <a:endParaRPr lang="en-US" sz="1100" dirty="0"/>
+          </a:p>
+        </p:txBody>
+      </p:sp>
+      <p:sp>
+        <p:nvSpPr>
+          <p:cNvPr id="6" name="Text 4"/>
+          <p:cNvSpPr txBox="1"/>
+          <p:nvPr/>
+        </p:nvSpPr>
+        <p:spPr>
+          <a:xfrm>
+            <a:off x="868680" y="2651760"/>
+            <a:ext cx="3840480" cy="609600"/>
+          </a:xfrm>
+          <a:prstGeom prst="rect">
+            <a:avLst/>
+          </a:prstGeom>
+          <a:noFill/>
+          <a:ln/>
+        </p:spPr>
+        <p:txBody>
+          <a:bodyPr wrap="square" lIns="0" tIns="0" rIns="0" bIns="0" rtlCol="0" anchor="ctr"/>
+          <a:lstStyle/>
+          <a:p>
+            <a:pPr indent="0" marL="0">
+              <a:buNone/>
+            </a:pPr>
+            <a:r>
+              <a:rPr lang="en-US" sz="4000" b="1" dirty="0">
+                <a:solidFill>
+                  <a:srgbClr val="111827"/>
+                </a:solidFill>
+                <a:latin typeface="Cambria" pitchFamily="34" charset="0"/>
+                <a:ea typeface="Cambria" pitchFamily="34" charset="-122"/>
+                <a:cs typeface="Cambria" pitchFamily="34" charset="-120"/>
+              </a:rPr>
+              <a:t>trillions</a:t>
+            </a:r>
+            <a:endParaRPr lang="en-US" sz="4000" dirty="0"/>
+          </a:p>
+        </p:txBody>
+      </p:sp>
+      <p:sp>
+        <p:nvSpPr>
+          <p:cNvPr id="7" name="Text 5"/>
+          <p:cNvSpPr txBox="1"/>
+          <p:nvPr/>
+        </p:nvSpPr>
+        <p:spPr>
+          <a:xfrm>
+            <a:off x="868680" y="3291840"/>
+            <a:ext cx="3840480" cy="365760"/>
+          </a:xfrm>
+          <a:prstGeom prst="rect">
+            <a:avLst/>
+          </a:prstGeom>
+          <a:noFill/>
+          <a:ln/>
+        </p:spPr>
+        <p:txBody>
+          <a:bodyPr wrap="square" lIns="0" tIns="0" rIns="0" bIns="0" rtlCol="0" anchor="ctr"/>
+          <a:lstStyle/>
+          <a:p>
+            <a:pPr indent="0" marL="0">
+              <a:buNone/>
+            </a:pPr>
+            <a:r>
+              <a:rPr lang="en-US" sz="1300" dirty="0">
+                <a:solidFill>
+                  <a:srgbClr val="374151"/>
+                </a:solidFill>
+              </a:rPr>
+              <a:t>of words, from scratch</a:t>
+            </a:r>
+            <a:endParaRPr lang="en-US" sz="1300" dirty="0"/>
+          </a:p>
+        </p:txBody>
+      </p:sp>
+      <p:sp>
+        <p:nvSpPr>
+          <p:cNvPr id="8" name="Shape 6"/>
+          <p:cNvSpPr/>
+          <p:nvPr/>
+        </p:nvSpPr>
+        <p:spPr>
+          <a:xfrm>
+            <a:off x="640080" y="3931920"/>
+            <a:ext cx="4206240" cy="1417320"/>
           </a:xfrm>
           <a:prstGeom prst="roundRect">
             <a:avLst>
-              <a:gd name="adj" fmla="val 18182"/>
+              <a:gd name="adj" fmla="val 7742"/>
             </a:avLst>
           </a:prstGeom>
           <a:solidFill>
-            <a:srgbClr val="C2410C"/>
+            <a:srgbClr val="FFF7ED"/>
           </a:solidFill>
           <a:ln w="12700">
             <a:solidFill>
-              <a:srgbClr val="C2410C"/>
+              <a:srgbClr val="FDBA74"/>
             </a:solidFill>
             <a:prstDash val="solid"/>
           </a:ln>
@@ -9196,14 +10622,14 @@
       </p:sp>
       <p:sp>
         <p:nvSpPr>
-          <p:cNvPr id="7" name="Text 5"/>
+          <p:cNvPr id="9" name="Text 7"/>
           <p:cNvSpPr txBox="1"/>
           <p:nvPr/>
         </p:nvSpPr>
         <p:spPr>
           <a:xfrm>
-            <a:off x="1554480" y="4800600"/>
-            <a:ext cx="3657600" cy="320040"/>
+            <a:off x="868680" y="4023360"/>
+            <a:ext cx="3840480" cy="274320"/>
           </a:xfrm>
           <a:prstGeom prst="rect">
             <a:avLst/>
@@ -9219,27 +10645,27 @@
               <a:buNone/>
             </a:pPr>
             <a:r>
-              <a:rPr lang="en-US" sz="1400" b="1" dirty="0">
-                <a:solidFill>
-                  <a:srgbClr val="6B7280"/>
-                </a:solidFill>
-              </a:rPr>
-              <a:t>learned in English</a:t>
-            </a:r>
-            <a:endParaRPr lang="en-US" sz="1400" dirty="0"/>
-          </a:p>
-        </p:txBody>
-      </p:sp>
-      <p:sp>
-        <p:nvSpPr>
-          <p:cNvPr id="8" name="Text 6"/>
+              <a:rPr lang="en-US" sz="1100" b="1" spc="200" kern="0" dirty="0">
+                <a:solidFill>
+                  <a:srgbClr val="C2410C"/>
+                </a:solidFill>
+              </a:rPr>
+              <a:t>THE NEWSPAPER</a:t>
+            </a:r>
+            <a:endParaRPr lang="en-US" sz="1100" dirty="0"/>
+          </a:p>
+        </p:txBody>
+      </p:sp>
+      <p:sp>
+        <p:nvSpPr>
+          <p:cNvPr id="10" name="Text 8"/>
           <p:cNvSpPr txBox="1"/>
           <p:nvPr/>
         </p:nvSpPr>
         <p:spPr>
           <a:xfrm>
-            <a:off x="6949440" y="4800600"/>
-            <a:ext cx="3657600" cy="320040"/>
+            <a:off x="868680" y="4297680"/>
+            <a:ext cx="3840480" cy="609600"/>
           </a:xfrm>
           <a:prstGeom prst="rect">
             <a:avLst/>
@@ -9251,24 +10677,63 @@
           <a:bodyPr wrap="square" lIns="0" tIns="0" rIns="0" bIns="0" rtlCol="0" anchor="ctr"/>
           <a:lstStyle/>
           <a:p>
-            <a:pPr algn="r" indent="0" marL="0">
-              <a:buNone/>
-            </a:pPr>
-            <a:r>
-              <a:rPr lang="en-US" sz="1400" b="1" dirty="0">
-                <a:solidFill>
-                  <a:srgbClr val="6B7280"/>
-                </a:solidFill>
-              </a:rPr>
-              <a:t>100% = as good as asking in English</a:t>
-            </a:r>
-            <a:endParaRPr lang="en-US" sz="1400" dirty="0"/>
-          </a:p>
-        </p:txBody>
-      </p:sp>
-      <p:sp>
-        <p:nvSpPr>
-          <p:cNvPr id="9" name="Text 0"/>
+            <a:pPr indent="0" marL="0">
+              <a:buNone/>
+            </a:pPr>
+            <a:r>
+              <a:rPr lang="en-US" sz="4000" b="1" dirty="0">
+                <a:solidFill>
+                  <a:srgbClr val="C2410C"/>
+                </a:solidFill>
+                <a:latin typeface="Cambria" pitchFamily="34" charset="0"/>
+                <a:ea typeface="Cambria" pitchFamily="34" charset="-122"/>
+                <a:cs typeface="Cambria" pitchFamily="34" charset="-120"/>
+              </a:rPr>
+              <a:t>~6 billion</a:t>
+            </a:r>
+            <a:endParaRPr lang="en-US" sz="4000" dirty="0"/>
+          </a:p>
+        </p:txBody>
+      </p:sp>
+      <p:sp>
+        <p:nvSpPr>
+          <p:cNvPr id="11" name="Text 9"/>
+          <p:cNvSpPr txBox="1"/>
+          <p:nvPr/>
+        </p:nvSpPr>
+        <p:spPr>
+          <a:xfrm>
+            <a:off x="868680" y="4937760"/>
+            <a:ext cx="3840480" cy="365760"/>
+          </a:xfrm>
+          <a:prstGeom prst="rect">
+            <a:avLst/>
+          </a:prstGeom>
+          <a:noFill/>
+          <a:ln/>
+        </p:spPr>
+        <p:txBody>
+          <a:bodyPr wrap="square" lIns="0" tIns="0" rIns="0" bIns="0" rtlCol="0" anchor="ctr"/>
+          <a:lstStyle/>
+          <a:p>
+            <a:pPr indent="0" marL="0">
+              <a:buNone/>
+            </a:pPr>
+            <a:r>
+              <a:rPr lang="en-US" sz="1300" dirty="0">
+                <a:solidFill>
+                  <a:srgbClr val="374151"/>
+                </a:solidFill>
+              </a:rPr>
+              <a:t>words of fresh news, a few days</a:t>
+            </a:r>
+            <a:endParaRPr lang="en-US" sz="1300" dirty="0"/>
+          </a:p>
+        </p:txBody>
+      </p:sp>
+      <p:sp>
+        <p:nvSpPr>
+          <p:cNvPr id="12" name="Text 0"/>
           <p:cNvSpPr/>
           <p:nvPr>
             <p:ph idx="102" type="body" hasCustomPrompt="1"/>
@@ -9298,7 +10763,7 @@
                   <a:schemeClr val="tx1"/>
                 </a:solidFill>
               </a:rPr>
-              <a:t>Learn it once, use it in the other two. </a:t>
+              <a:t>Same model, same learning recipe, just new text. </a:t>
             </a:r>
             <a:pPr indent="0" marL="0">
               <a:buNone/>
@@ -9309,7 +10774,7 @@
                   <a:srgbClr val="6B7280"/>
                 </a:solidFill>
               </a:rPr>
-              <a:t>Asking in the language it read is still a bit better.</a:t>
+              <a:t>And it works: it learns the news.</a:t>
             </a:r>
             <a:endParaRPr lang="en-US" sz="1800" dirty="0"/>
           </a:p>
@@ -9417,7 +10882,7 @@
                   <a:schemeClr val="accent1"/>
                 </a:solidFill>
               </a:rPr>
-              <a:t>WAY 2 · QUESTION 6</a:t>
+              <a:t>WAY 2 · THE QUESTION</a:t>
             </a:r>
             <a:endParaRPr lang="en-US" sz="1200" dirty="0"/>
           </a:p>
@@ -9455,7 +10920,18 @@
                   <a:schemeClr val="tx1"/>
                 </a:solidFill>
               </a:rPr>
-              <a:t>What does it cost?</a:t>
+              <a:t>It read the news in English. Ask it in German. </a:t>
+            </a:r>
+            <a:pPr algn="l" indent="0" marL="0">
+              <a:buNone/>
+            </a:pPr>
+            <a:r>
+              <a:rPr lang="en-US" sz="3200" b="1" i="1" dirty="0">
+                <a:solidFill>
+                  <a:srgbClr val="6B7280"/>
+                </a:solidFill>
+              </a:rPr>
+              <a:t>Does it know?</a:t>
             </a:r>
             <a:endParaRPr lang="en-US" sz="3200" dirty="0"/>
           </a:p>
@@ -9463,26 +10939,62 @@
       </p:sp>
       <p:sp>
         <p:nvSpPr>
-          <p:cNvPr id="4" name="Shape 2"/>
-          <p:cNvSpPr/>
-          <p:nvPr/>
-        </p:nvSpPr>
-        <p:spPr>
-          <a:xfrm>
-            <a:off x="640080" y="2286000"/>
-            <a:ext cx="5212080" cy="3108960"/>
+          <p:cNvPr id="4" name="Text 2"/>
+          <p:cNvSpPr txBox="1"/>
+          <p:nvPr/>
+        </p:nvSpPr>
+        <p:spPr>
+          <a:xfrm>
+            <a:off x="914400" y="2240280"/>
+            <a:ext cx="2011680" cy="320040"/>
+          </a:xfrm>
+          <a:prstGeom prst="rect">
+            <a:avLst/>
+          </a:prstGeom>
+          <a:noFill/>
+          <a:ln/>
+        </p:spPr>
+        <p:txBody>
+          <a:bodyPr wrap="square" lIns="0" tIns="0" rIns="0" bIns="0" rtlCol="0" anchor="ctr"/>
+          <a:lstStyle/>
+          <a:p>
+            <a:pPr algn="ctr" indent="0" marL="0">
+              <a:buNone/>
+            </a:pPr>
+            <a:r>
+              <a:rPr lang="en-US" sz="1400" b="1" dirty="0">
+                <a:solidFill>
+                  <a:srgbClr val="6B7280"/>
+                </a:solidFill>
+              </a:rPr>
+              <a:t>reads news in</a:t>
+            </a:r>
+            <a:endParaRPr lang="en-US" sz="1400" dirty="0"/>
+          </a:p>
+        </p:txBody>
+      </p:sp>
+      <p:sp>
+        <p:nvSpPr>
+          <p:cNvPr id="5" name="Shape 3"/>
+          <p:cNvSpPr/>
+          <p:nvPr/>
+        </p:nvSpPr>
+        <p:spPr>
+          <a:xfrm>
+            <a:off x="914400" y="2651760"/>
+            <a:ext cx="2011680" cy="548640"/>
           </a:xfrm>
           <a:prstGeom prst="roundRect">
             <a:avLst>
-              <a:gd name="adj" fmla="val 3529"/>
+              <a:gd name="adj" fmla="val 16667"/>
             </a:avLst>
           </a:prstGeom>
           <a:solidFill>
-            <a:srgbClr val="F9FAFB"/>
+            <a:srgbClr val="2563EB"/>
           </a:solidFill>
           <a:ln w="12700">
             <a:solidFill>
-              <a:srgbClr val="E5E7EB"/>
+              <a:srgbClr val="2563EB"/>
             </a:solidFill>
             <a:prstDash val="solid"/>
           </a:ln>
@@ -9490,50 +11002,14 @@
       </p:sp>
       <p:sp>
         <p:nvSpPr>
-          <p:cNvPr id="5" name="Text 3"/>
-          <p:cNvSpPr txBox="1"/>
-          <p:nvPr/>
-        </p:nvSpPr>
-        <p:spPr>
-          <a:xfrm>
-            <a:off x="640080" y="2514600"/>
-            <a:ext cx="5212080" cy="320040"/>
-          </a:xfrm>
-          <a:prstGeom prst="rect">
-            <a:avLst/>
-          </a:prstGeom>
-          <a:noFill/>
-          <a:ln/>
-        </p:spPr>
-        <p:txBody>
-          <a:bodyPr wrap="square" lIns="0" tIns="0" rIns="0" bIns="0" rtlCol="0" anchor="ctr"/>
-          <a:lstStyle/>
-          <a:p>
-            <a:pPr algn="ctr" indent="0" marL="0">
-              <a:buNone/>
-            </a:pPr>
-            <a:r>
-              <a:rPr lang="en-US" sz="1200" b="1" spc="200" kern="0" dirty="0">
-                <a:solidFill>
-                  <a:srgbClr val="6B7280"/>
-                </a:solidFill>
-              </a:rPr>
-              <a:t>FACTS FROM BEFORE 2023</a:t>
-            </a:r>
-            <a:endParaRPr lang="en-US" sz="1200" dirty="0"/>
-          </a:p>
-        </p:txBody>
-      </p:sp>
-      <p:sp>
-        <p:nvSpPr>
           <p:cNvPr id="6" name="Text 4"/>
           <p:cNvSpPr txBox="1"/>
           <p:nvPr/>
         </p:nvSpPr>
         <p:spPr>
           <a:xfrm>
-            <a:off x="640080" y="2926080"/>
-            <a:ext cx="5212080" cy="1463040"/>
+            <a:off x="914400" y="2651760"/>
+            <a:ext cx="2011680" cy="548640"/>
           </a:xfrm>
           <a:prstGeom prst="rect">
             <a:avLst/>
@@ -9549,78 +11025,39 @@
               <a:buNone/>
             </a:pPr>
             <a:r>
-              <a:rPr lang="en-US" sz="8400" b="1" dirty="0">
-                <a:solidFill>
-                  <a:srgbClr val="111827"/>
-                </a:solidFill>
-                <a:latin typeface="Cambria" pitchFamily="34" charset="0"/>
-                <a:ea typeface="Cambria" pitchFamily="34" charset="-122"/>
-                <a:cs typeface="Cambria" pitchFamily="34" charset="-120"/>
-              </a:rPr>
-              <a:t>+0.3</a:t>
-            </a:r>
-            <a:endParaRPr lang="en-US" sz="8400" dirty="0"/>
-          </a:p>
-        </p:txBody>
-      </p:sp>
-      <p:sp>
-        <p:nvSpPr>
-          <p:cNvPr id="7" name="Text 5"/>
-          <p:cNvSpPr txBox="1"/>
-          <p:nvPr/>
-        </p:nvSpPr>
-        <p:spPr>
-          <a:xfrm>
-            <a:off x="640080" y="4572000"/>
-            <a:ext cx="5212080" cy="365760"/>
-          </a:xfrm>
-          <a:prstGeom prst="rect">
-            <a:avLst/>
-          </a:prstGeom>
-          <a:noFill/>
-          <a:ln/>
-        </p:spPr>
-        <p:txBody>
-          <a:bodyPr wrap="square" lIns="0" tIns="0" rIns="0" bIns="0" rtlCol="0" anchor="ctr"/>
-          <a:lstStyle/>
-          <a:p>
-            <a:pPr algn="ctr" indent="0" marL="0">
-              <a:buNone/>
-            </a:pPr>
-            <a:r>
-              <a:rPr lang="en-US" sz="1600" dirty="0">
-                <a:solidFill>
-                  <a:srgbClr val="374151"/>
-                </a:solidFill>
-              </a:rPr>
-              <a:t>nothing forgotten</a:t>
-            </a:r>
-            <a:endParaRPr lang="en-US" sz="1600" dirty="0"/>
-          </a:p>
-        </p:txBody>
-      </p:sp>
-      <p:sp>
-        <p:nvSpPr>
-          <p:cNvPr id="8" name="Shape 6"/>
-          <p:cNvSpPr/>
-          <p:nvPr/>
-        </p:nvSpPr>
-        <p:spPr>
-          <a:xfrm>
-            <a:off x="6355080" y="2286000"/>
-            <a:ext cx="5212080" cy="3108960"/>
+              <a:rPr lang="en-US" sz="2000" b="1" dirty="0">
+                <a:solidFill>
+                  <a:srgbClr val="FFFFFF"/>
+                </a:solidFill>
+              </a:rPr>
+              <a:t>EN</a:t>
+            </a:r>
+            <a:endParaRPr lang="en-US" sz="2000" dirty="0"/>
+          </a:p>
+        </p:txBody>
+      </p:sp>
+      <p:sp>
+        <p:nvSpPr>
+          <p:cNvPr id="7" name="Shape 5"/>
+          <p:cNvSpPr/>
+          <p:nvPr/>
+        </p:nvSpPr>
+        <p:spPr>
+          <a:xfrm>
+            <a:off x="914400" y="3383280"/>
+            <a:ext cx="2011680" cy="548640"/>
           </a:xfrm>
           <a:prstGeom prst="roundRect">
             <a:avLst>
-              <a:gd name="adj" fmla="val 3529"/>
+              <a:gd name="adj" fmla="val 16667"/>
             </a:avLst>
           </a:prstGeom>
           <a:solidFill>
-            <a:srgbClr val="FFF7ED"/>
+            <a:srgbClr val="D97706"/>
           </a:solidFill>
           <a:ln w="12700">
             <a:solidFill>
-              <a:srgbClr val="FDBA74"/>
+              <a:srgbClr val="D97706"/>
             </a:solidFill>
             <a:prstDash val="solid"/>
           </a:ln>
@@ -9628,14 +11065,14 @@
       </p:sp>
       <p:sp>
         <p:nvSpPr>
-          <p:cNvPr id="9" name="Text 7"/>
+          <p:cNvPr id="8" name="Text 6"/>
           <p:cNvSpPr txBox="1"/>
           <p:nvPr/>
         </p:nvSpPr>
         <p:spPr>
           <a:xfrm>
-            <a:off x="6355080" y="2514600"/>
-            <a:ext cx="5212080" cy="320040"/>
+            <a:off x="914400" y="3383280"/>
+            <a:ext cx="2011680" cy="548640"/>
           </a:xfrm>
           <a:prstGeom prst="rect">
             <a:avLst/>
@@ -9651,16 +11088,43 @@
               <a:buNone/>
             </a:pPr>
             <a:r>
-              <a:rPr lang="en-US" sz="1200" b="1" spc="200" kern="0" dirty="0">
-                <a:solidFill>
-                  <a:srgbClr val="C2410C"/>
-                </a:solidFill>
-              </a:rPr>
-              <a:t>GENERAL SKILLS · 20 TESTS</a:t>
-            </a:r>
-            <a:endParaRPr lang="en-US" sz="1200" dirty="0"/>
-          </a:p>
-        </p:txBody>
+              <a:rPr lang="en-US" sz="2000" b="1" dirty="0">
+                <a:solidFill>
+                  <a:srgbClr val="FFFFFF"/>
+                </a:solidFill>
+              </a:rPr>
+              <a:t>DE</a:t>
+            </a:r>
+            <a:endParaRPr lang="en-US" sz="2000" dirty="0"/>
+          </a:p>
+        </p:txBody>
+      </p:sp>
+      <p:sp>
+        <p:nvSpPr>
+          <p:cNvPr id="9" name="Shape 7"/>
+          <p:cNvSpPr/>
+          <p:nvPr/>
+        </p:nvSpPr>
+        <p:spPr>
+          <a:xfrm>
+            <a:off x="914400" y="4114800"/>
+            <a:ext cx="2011680" cy="548640"/>
+          </a:xfrm>
+          <a:prstGeom prst="roundRect">
+            <a:avLst>
+              <a:gd name="adj" fmla="val 16667"/>
+            </a:avLst>
+          </a:prstGeom>
+          <a:solidFill>
+            <a:srgbClr val="7C3AED"/>
+          </a:solidFill>
+          <a:ln w="12700">
+            <a:solidFill>
+              <a:srgbClr val="7C3AED"/>
+            </a:solidFill>
+            <a:prstDash val="solid"/>
+          </a:ln>
+        </p:spPr>
       </p:sp>
       <p:sp>
         <p:nvSpPr>
@@ -9670,8 +11134,8 @@
         </p:nvSpPr>
         <p:spPr>
           <a:xfrm>
-            <a:off x="6355080" y="2926080"/>
-            <a:ext cx="5212080" cy="1463040"/>
+            <a:off x="914400" y="4114800"/>
+            <a:ext cx="2011680" cy="548640"/>
           </a:xfrm>
           <a:prstGeom prst="rect">
             <a:avLst/>
@@ -9687,30 +11151,52 @@
               <a:buNone/>
             </a:pPr>
             <a:r>
-              <a:rPr lang="en-US" sz="8400" b="1" dirty="0">
-                <a:solidFill>
-                  <a:srgbClr val="C2410C"/>
-                </a:solidFill>
-                <a:latin typeface="Cambria" pitchFamily="34" charset="0"/>
-                <a:ea typeface="Cambria" pitchFamily="34" charset="-122"/>
-                <a:cs typeface="Cambria" pitchFamily="34" charset="-120"/>
-              </a:rPr>
-              <a:t>−1.2</a:t>
-            </a:r>
-            <a:endParaRPr lang="en-US" sz="8400" dirty="0"/>
-          </a:p>
-        </p:txBody>
-      </p:sp>
-      <p:sp>
-        <p:nvSpPr>
-          <p:cNvPr id="11" name="Text 9"/>
+              <a:rPr lang="en-US" sz="2000" b="1" dirty="0">
+                <a:solidFill>
+                  <a:srgbClr val="FFFFFF"/>
+                </a:solidFill>
+              </a:rPr>
+              <a:t>FR</a:t>
+            </a:r>
+            <a:endParaRPr lang="en-US" sz="2000" dirty="0"/>
+          </a:p>
+        </p:txBody>
+      </p:sp>
+      <p:sp>
+        <p:nvSpPr>
+          <p:cNvPr id="11" name="Shape 9"/>
+          <p:cNvSpPr/>
+          <p:nvPr/>
+        </p:nvSpPr>
+        <p:spPr>
+          <a:xfrm>
+            <a:off x="3291840" y="3429000"/>
+            <a:ext cx="1188720" cy="502920"/>
+          </a:xfrm>
+          <a:prstGeom prst="rightArrow">
+            <a:avLst/>
+          </a:prstGeom>
+          <a:solidFill>
+            <a:srgbClr val="9CA3AF"/>
+          </a:solidFill>
+          <a:ln w="12700">
+            <a:solidFill>
+              <a:srgbClr val="9CA3AF"/>
+            </a:solidFill>
+            <a:prstDash val="solid"/>
+          </a:ln>
+        </p:spPr>
+      </p:sp>
+      <p:sp>
+        <p:nvSpPr>
+          <p:cNvPr id="12" name="Text 10"/>
           <p:cNvSpPr txBox="1"/>
           <p:nvPr/>
         </p:nvSpPr>
         <p:spPr>
           <a:xfrm>
-            <a:off x="6355080" y="4572000"/>
-            <a:ext cx="5212080" cy="365760"/>
+            <a:off x="4754880" y="3154680"/>
+            <a:ext cx="2651760" cy="457200"/>
           </a:xfrm>
           <a:prstGeom prst="rect">
             <a:avLst/>
@@ -9726,20 +11212,306 @@
               <a:buNone/>
             </a:pPr>
             <a:r>
-              <a:rPr lang="en-US" sz="1600" dirty="0">
-                <a:solidFill>
-                  <a:srgbClr val="374151"/>
-                </a:solidFill>
-              </a:rPr>
-              <a:t>looks fine in the training language, drops in the others</a:t>
-            </a:r>
-            <a:endParaRPr lang="en-US" sz="1600" dirty="0"/>
-          </a:p>
-        </p:txBody>
-      </p:sp>
-      <p:sp>
-        <p:nvSpPr>
-          <p:cNvPr id="12" name="Text 0"/>
+              <a:rPr lang="en-US" sz="2400" b="1" dirty="0">
+                <a:solidFill>
+                  <a:srgbClr val="111827"/>
+                </a:solidFill>
+              </a:rPr>
+              <a:t>plain LLM</a:t>
+            </a:r>
+            <a:endParaRPr lang="en-US" sz="2400" dirty="0"/>
+          </a:p>
+        </p:txBody>
+      </p:sp>
+      <p:sp>
+        <p:nvSpPr>
+          <p:cNvPr id="13" name="Text 11"/>
+          <p:cNvSpPr txBox="1"/>
+          <p:nvPr/>
+        </p:nvSpPr>
+        <p:spPr>
+          <a:xfrm>
+            <a:off x="4754880" y="3611880"/>
+            <a:ext cx="2651760" cy="365760"/>
+          </a:xfrm>
+          <a:prstGeom prst="rect">
+            <a:avLst/>
+          </a:prstGeom>
+          <a:noFill/>
+          <a:ln/>
+        </p:spPr>
+        <p:txBody>
+          <a:bodyPr wrap="square" lIns="0" tIns="0" rIns="0" bIns="0" rtlCol="0" anchor="ctr"/>
+          <a:lstStyle/>
+          <a:p>
+            <a:pPr algn="ctr" indent="0" marL="0">
+              <a:buNone/>
+            </a:pPr>
+            <a:r>
+              <a:rPr lang="en-US" sz="1400" dirty="0">
+                <a:solidFill>
+                  <a:srgbClr val="6B7280"/>
+                </a:solidFill>
+              </a:rPr>
+              <a:t>no reasoning</a:t>
+            </a:r>
+            <a:endParaRPr lang="en-US" sz="1400" dirty="0"/>
+          </a:p>
+        </p:txBody>
+      </p:sp>
+      <p:sp>
+        <p:nvSpPr>
+          <p:cNvPr id="14" name="Shape 12"/>
+          <p:cNvSpPr/>
+          <p:nvPr/>
+        </p:nvSpPr>
+        <p:spPr>
+          <a:xfrm>
+            <a:off x="7680960" y="3429000"/>
+            <a:ext cx="1188720" cy="502920"/>
+          </a:xfrm>
+          <a:prstGeom prst="rightArrow">
+            <a:avLst/>
+          </a:prstGeom>
+          <a:solidFill>
+            <a:srgbClr val="9CA3AF"/>
+          </a:solidFill>
+          <a:ln w="12700">
+            <a:solidFill>
+              <a:srgbClr val="9CA3AF"/>
+            </a:solidFill>
+            <a:prstDash val="solid"/>
+          </a:ln>
+        </p:spPr>
+      </p:sp>
+      <p:sp>
+        <p:nvSpPr>
+          <p:cNvPr id="15" name="Text 13"/>
+          <p:cNvSpPr txBox="1"/>
+          <p:nvPr/>
+        </p:nvSpPr>
+        <p:spPr>
+          <a:xfrm>
+            <a:off x="9144000" y="2240280"/>
+            <a:ext cx="2103120" cy="320040"/>
+          </a:xfrm>
+          <a:prstGeom prst="rect">
+            <a:avLst/>
+          </a:prstGeom>
+          <a:noFill/>
+          <a:ln/>
+        </p:spPr>
+        <p:txBody>
+          <a:bodyPr wrap="square" lIns="0" tIns="0" rIns="0" bIns="0" rtlCol="0" anchor="ctr"/>
+          <a:lstStyle/>
+          <a:p>
+            <a:pPr algn="ctr" indent="0" marL="0">
+              <a:buNone/>
+            </a:pPr>
+            <a:r>
+              <a:rPr lang="en-US" sz="1400" b="1" dirty="0">
+                <a:solidFill>
+                  <a:srgbClr val="6B7280"/>
+                </a:solidFill>
+              </a:rPr>
+              <a:t>same fact asked in</a:t>
+            </a:r>
+            <a:endParaRPr lang="en-US" sz="1400" dirty="0"/>
+          </a:p>
+        </p:txBody>
+      </p:sp>
+      <p:sp>
+        <p:nvSpPr>
+          <p:cNvPr id="16" name="Shape 14"/>
+          <p:cNvSpPr/>
+          <p:nvPr/>
+        </p:nvSpPr>
+        <p:spPr>
+          <a:xfrm>
+            <a:off x="9144000" y="2651760"/>
+            <a:ext cx="2103120" cy="548640"/>
+          </a:xfrm>
+          <a:prstGeom prst="roundRect">
+            <a:avLst>
+              <a:gd name="adj" fmla="val 16667"/>
+            </a:avLst>
+          </a:prstGeom>
+          <a:solidFill>
+            <a:srgbClr val="FFFFFF"/>
+          </a:solidFill>
+          <a:ln w="31750">
+            <a:solidFill>
+              <a:srgbClr val="2563EB"/>
+            </a:solidFill>
+            <a:prstDash val="solid"/>
+          </a:ln>
+        </p:spPr>
+      </p:sp>
+      <p:sp>
+        <p:nvSpPr>
+          <p:cNvPr id="17" name="Text 15"/>
+          <p:cNvSpPr txBox="1"/>
+          <p:nvPr/>
+        </p:nvSpPr>
+        <p:spPr>
+          <a:xfrm>
+            <a:off x="9144000" y="2651760"/>
+            <a:ext cx="2103120" cy="548640"/>
+          </a:xfrm>
+          <a:prstGeom prst="rect">
+            <a:avLst/>
+          </a:prstGeom>
+          <a:noFill/>
+          <a:ln/>
+        </p:spPr>
+        <p:txBody>
+          <a:bodyPr wrap="square" lIns="0" tIns="0" rIns="0" bIns="0" rtlCol="0" anchor="ctr"/>
+          <a:lstStyle/>
+          <a:p>
+            <a:pPr algn="ctr" indent="0" marL="0">
+              <a:buNone/>
+            </a:pPr>
+            <a:r>
+              <a:rPr lang="en-US" sz="2000" b="1" dirty="0">
+                <a:solidFill>
+                  <a:srgbClr val="111827"/>
+                </a:solidFill>
+              </a:rPr>
+              <a:t>EN</a:t>
+            </a:r>
+            <a:endParaRPr lang="en-US" sz="2000" dirty="0"/>
+          </a:p>
+        </p:txBody>
+      </p:sp>
+      <p:sp>
+        <p:nvSpPr>
+          <p:cNvPr id="18" name="Shape 16"/>
+          <p:cNvSpPr/>
+          <p:nvPr/>
+        </p:nvSpPr>
+        <p:spPr>
+          <a:xfrm>
+            <a:off x="9144000" y="3383280"/>
+            <a:ext cx="2103120" cy="548640"/>
+          </a:xfrm>
+          <a:prstGeom prst="roundRect">
+            <a:avLst>
+              <a:gd name="adj" fmla="val 16667"/>
+            </a:avLst>
+          </a:prstGeom>
+          <a:solidFill>
+            <a:srgbClr val="FFFFFF"/>
+          </a:solidFill>
+          <a:ln w="31750">
+            <a:solidFill>
+              <a:srgbClr val="D97706"/>
+            </a:solidFill>
+            <a:prstDash val="solid"/>
+          </a:ln>
+        </p:spPr>
+      </p:sp>
+      <p:sp>
+        <p:nvSpPr>
+          <p:cNvPr id="19" name="Text 17"/>
+          <p:cNvSpPr txBox="1"/>
+          <p:nvPr/>
+        </p:nvSpPr>
+        <p:spPr>
+          <a:xfrm>
+            <a:off x="9144000" y="3383280"/>
+            <a:ext cx="2103120" cy="548640"/>
+          </a:xfrm>
+          <a:prstGeom prst="rect">
+            <a:avLst/>
+          </a:prstGeom>
+          <a:noFill/>
+          <a:ln/>
+        </p:spPr>
+        <p:txBody>
+          <a:bodyPr wrap="square" lIns="0" tIns="0" rIns="0" bIns="0" rtlCol="0" anchor="ctr"/>
+          <a:lstStyle/>
+          <a:p>
+            <a:pPr algn="ctr" indent="0" marL="0">
+              <a:buNone/>
+            </a:pPr>
+            <a:r>
+              <a:rPr lang="en-US" sz="2000" b="1" dirty="0">
+                <a:solidFill>
+                  <a:srgbClr val="111827"/>
+                </a:solidFill>
+              </a:rPr>
+              <a:t>DE</a:t>
+            </a:r>
+            <a:endParaRPr lang="en-US" sz="2000" dirty="0"/>
+          </a:p>
+        </p:txBody>
+      </p:sp>
+      <p:sp>
+        <p:nvSpPr>
+          <p:cNvPr id="20" name="Shape 18"/>
+          <p:cNvSpPr/>
+          <p:nvPr/>
+        </p:nvSpPr>
+        <p:spPr>
+          <a:xfrm>
+            <a:off x="9144000" y="4114800"/>
+            <a:ext cx="2103120" cy="548640"/>
+          </a:xfrm>
+          <a:prstGeom prst="roundRect">
+            <a:avLst>
+              <a:gd name="adj" fmla="val 16667"/>
+            </a:avLst>
+          </a:prstGeom>
+          <a:solidFill>
+            <a:srgbClr val="FFFFFF"/>
+          </a:solidFill>
+          <a:ln w="31750">
+            <a:solidFill>
+              <a:srgbClr val="7C3AED"/>
+            </a:solidFill>
+            <a:prstDash val="solid"/>
+          </a:ln>
+        </p:spPr>
+      </p:sp>
+      <p:sp>
+        <p:nvSpPr>
+          <p:cNvPr id="21" name="Text 19"/>
+          <p:cNvSpPr txBox="1"/>
+          <p:nvPr/>
+        </p:nvSpPr>
+        <p:spPr>
+          <a:xfrm>
+            <a:off x="9144000" y="4114800"/>
+            <a:ext cx="2103120" cy="548640"/>
+          </a:xfrm>
+          <a:prstGeom prst="rect">
+            <a:avLst/>
+          </a:prstGeom>
+          <a:noFill/>
+          <a:ln/>
+        </p:spPr>
+        <p:txBody>
+          <a:bodyPr wrap="square" lIns="0" tIns="0" rIns="0" bIns="0" rtlCol="0" anchor="ctr"/>
+          <a:lstStyle/>
+          <a:p>
+            <a:pPr algn="ctr" indent="0" marL="0">
+              <a:buNone/>
+            </a:pPr>
+            <a:r>
+              <a:rPr lang="en-US" sz="2000" b="1" dirty="0">
+                <a:solidFill>
+                  <a:srgbClr val="111827"/>
+                </a:solidFill>
+              </a:rPr>
+              <a:t>FR</a:t>
+            </a:r>
+            <a:endParaRPr lang="en-US" sz="2000" dirty="0"/>
+          </a:p>
+        </p:txBody>
+      </p:sp>
+      <p:sp>
+        <p:nvSpPr>
+          <p:cNvPr id="22" name="Text 0"/>
           <p:cNvSpPr/>
           <p:nvPr>
             <p:ph idx="102" type="body" hasCustomPrompt="1"/>
@@ -9769,7 +11541,7 @@
                   <a:schemeClr val="tx1"/>
                 </a:solidFill>
               </a:rPr>
-              <a:t>Old facts stay, general skills slip. </a:t>
+              <a:t>A plain model, no reasoning, same facts in three languages. </a:t>
             </a:r>
             <a:pPr indent="0" marL="0">
               <a:buNone/>
@@ -9780,7 +11552,7 @@
                   <a:srgbClr val="6B7280"/>
                 </a:solidFill>
               </a:rPr>
-              <a:t>And you only see it if you test beyond the training language.</a:t>
+              <a:t>What's your guess?</a:t>
             </a:r>
             <a:endParaRPr lang="en-US" sz="1800" dirty="0"/>
           </a:p>
